--- a/akr3222-SelfLearningTuotorial.pptx
+++ b/akr3222-SelfLearningTuotorial.pptx
@@ -1432,7 +1432,7 @@
   <dgm:whole/>
   <dgm:extLst>
     <a:ext uri="http://schemas.microsoft.com/office/drawing/2008/diagram">
-      <dsp:dataModelExt xmlns:dsp="http://schemas.microsoft.com/office/drawing/2008/diagram" relId="rId7" minVer="http://schemas.openxmlformats.org/drawingml/2006/diagram"/>
+      <dsp:dataModelExt xmlns:dsp="http://schemas.microsoft.com/office/drawing/2008/diagram" relId="rId8" minVer="http://schemas.openxmlformats.org/drawingml/2006/diagram"/>
     </a:ext>
   </dgm:extLst>
 </dgm:dataModel>
@@ -3794,6 +3794,1068 @@
           <a:bodyPr/>
           <a:lstStyle/>
           <a:p>
+            <a:pPr>
+              <a:spcBef>
+                <a:spcPct val="0"/>
+              </a:spcBef>
+              <a:spcAft>
+                <a:spcPts val="600"/>
+              </a:spcAft>
+              <a:buFont typeface="Wingdings" pitchFamily="2" charset="2"/>
+              <a:buChar char="v"/>
+            </a:pPr>
+            <a:r>
+              <a:rPr lang="en-US" sz="1200" dirty="0"/>
+              <a:t>Speaker notes:</a:t>
+            </a:r>
+          </a:p>
+          <a:p>
+            <a:pPr>
+              <a:spcBef>
+                <a:spcPct val="0"/>
+              </a:spcBef>
+              <a:spcAft>
+                <a:spcPts val="600"/>
+              </a:spcAft>
+              <a:buFont typeface="Wingdings" pitchFamily="2" charset="2"/>
+              <a:buChar char="v"/>
+            </a:pPr>
+            <a:endParaRPr lang="en-US" sz="1200" dirty="0"/>
+          </a:p>
+          <a:p>
+            <a:pPr>
+              <a:spcBef>
+                <a:spcPct val="0"/>
+              </a:spcBef>
+              <a:spcAft>
+                <a:spcPts val="600"/>
+              </a:spcAft>
+              <a:buFont typeface="Wingdings" pitchFamily="2" charset="2"/>
+              <a:buChar char="v"/>
+            </a:pPr>
+            <a:r>
+              <a:rPr lang="en-US" dirty="0"/>
+              <a:t>Diabetes is a major contributor to hospitalization and critical care needs in many healthcare settings.</a:t>
+            </a:r>
+            <a:br>
+              <a:rPr lang="en-US" dirty="0"/>
+            </a:br>
+            <a:r>
+              <a:rPr lang="en-US" dirty="0"/>
+              <a:t>Patients with diabetes in the ICU often require more complex management because of complications and comorbidities.</a:t>
+            </a:r>
+            <a:br>
+              <a:rPr lang="en-US" dirty="0"/>
+            </a:br>
+            <a:r>
+              <a:rPr lang="en-US" dirty="0"/>
+              <a:t>This added complexity can influence treatment decisions, monitoring needs, and overall recovery time.</a:t>
+            </a:r>
+            <a:br>
+              <a:rPr lang="en-US" dirty="0"/>
+            </a:br>
+            <a:r>
+              <a:rPr lang="en-US" dirty="0"/>
+              <a:t>Predicting length of stay is important because it can help hospitals improve staffing and bed planning.</a:t>
+            </a:r>
+            <a:br>
+              <a:rPr lang="en-US" dirty="0"/>
+            </a:br>
+            <a:r>
+              <a:rPr lang="en-US" dirty="0"/>
+              <a:t>It can also support better resource allocation and care planning for diabetic ICU patients.</a:t>
+            </a:r>
+          </a:p>
+        </p:txBody>
+      </p:sp>
+      <p:sp>
+        <p:nvSpPr>
+          <p:cNvPr id="4" name="Slide Number Placeholder 3"/>
+          <p:cNvSpPr>
+            <a:spLocks noGrp="1"/>
+          </p:cNvSpPr>
+          <p:nvPr>
+            <p:ph type="sldNum" sz="quarter" idx="5"/>
+          </p:nvPr>
+        </p:nvSpPr>
+        <p:spPr/>
+        <p:txBody>
+          <a:bodyPr/>
+          <a:lstStyle/>
+          <a:p>
+            <a:fld id="{BCD9374F-9954-F24E-8880-8CA162CE8CFB}" type="slidenum">
+              <a:rPr lang="en-US" smtClean="0"/>
+              <a:t>3</a:t>
+            </a:fld>
+            <a:endParaRPr lang="en-US"/>
+          </a:p>
+        </p:txBody>
+      </p:sp>
+    </p:spTree>
+    <p:extLst>
+      <p:ext uri="{BB962C8B-B14F-4D97-AF65-F5344CB8AC3E}">
+        <p14:creationId xmlns:p14="http://schemas.microsoft.com/office/powerpoint/2010/main" val="3564164512"/>
+      </p:ext>
+    </p:extLst>
+  </p:cSld>
+  <p:clrMapOvr>
+    <a:masterClrMapping/>
+  </p:clrMapOvr>
+</p:notes>
+</file>
+
+<file path=ppt/notesSlides/notesSlide10.xml><?xml version="1.0" encoding="utf-8"?>
+<p:notes xmlns:a="http://schemas.openxmlformats.org/drawingml/2006/main" xmlns:r="http://schemas.openxmlformats.org/officeDocument/2006/relationships" xmlns:p="http://schemas.openxmlformats.org/presentationml/2006/main">
+  <p:cSld>
+    <p:spTree>
+      <p:nvGrpSpPr>
+        <p:cNvPr id="1" name=""/>
+        <p:cNvGrpSpPr/>
+        <p:nvPr/>
+      </p:nvGrpSpPr>
+      <p:grpSpPr>
+        <a:xfrm>
+          <a:off x="0" y="0"/>
+          <a:ext cx="0" cy="0"/>
+          <a:chOff x="0" y="0"/>
+          <a:chExt cx="0" cy="0"/>
+        </a:xfrm>
+      </p:grpSpPr>
+      <p:sp>
+        <p:nvSpPr>
+          <p:cNvPr id="2" name="Slide Image Placeholder 1"/>
+          <p:cNvSpPr>
+            <a:spLocks noGrp="1" noRot="1" noChangeAspect="1"/>
+          </p:cNvSpPr>
+          <p:nvPr>
+            <p:ph type="sldImg"/>
+          </p:nvPr>
+        </p:nvSpPr>
+        <p:spPr/>
+      </p:sp>
+      <p:sp>
+        <p:nvSpPr>
+          <p:cNvPr id="3" name="Notes Placeholder 2"/>
+          <p:cNvSpPr>
+            <a:spLocks noGrp="1"/>
+          </p:cNvSpPr>
+          <p:nvPr>
+            <p:ph type="body" idx="1"/>
+          </p:nvPr>
+        </p:nvSpPr>
+        <p:spPr/>
+        <p:txBody>
+          <a:bodyPr/>
+          <a:lstStyle/>
+          <a:p>
+            <a:r>
+              <a:rPr lang="en-US" sz="1200" kern="1200" dirty="0">
+                <a:solidFill>
+                  <a:schemeClr val="tx1"/>
+                </a:solidFill>
+                <a:effectLst/>
+                <a:latin typeface="+mn-lt"/>
+                <a:ea typeface="+mn-ea"/>
+                <a:cs typeface="+mn-cs"/>
+              </a:rPr>
+              <a:t>This slide explains why the confusion matrix is an important evaluation tool in this project.</a:t>
+            </a:r>
+          </a:p>
+          <a:p>
+            <a:r>
+              <a:rPr lang="en-US" sz="1200" kern="1200" dirty="0">
+                <a:solidFill>
+                  <a:schemeClr val="tx1"/>
+                </a:solidFill>
+                <a:effectLst/>
+                <a:latin typeface="+mn-lt"/>
+                <a:ea typeface="+mn-ea"/>
+                <a:cs typeface="+mn-cs"/>
+              </a:rPr>
+              <a:t>It shows which ICU length-of-stay categories are predicted correctly by the model.</a:t>
+            </a:r>
+          </a:p>
+          <a:p>
+            <a:r>
+              <a:rPr lang="en-US" sz="1200" kern="1200" dirty="0">
+                <a:solidFill>
+                  <a:schemeClr val="tx1"/>
+                </a:solidFill>
+                <a:effectLst/>
+                <a:latin typeface="+mn-lt"/>
+                <a:ea typeface="+mn-ea"/>
+                <a:cs typeface="+mn-cs"/>
+              </a:rPr>
+              <a:t>It also highlights which classes are commonly confused with one another during prediction.</a:t>
+            </a:r>
+          </a:p>
+          <a:p>
+            <a:r>
+              <a:rPr lang="en-US" sz="1200" kern="1200" dirty="0">
+                <a:solidFill>
+                  <a:schemeClr val="tx1"/>
+                </a:solidFill>
+                <a:effectLst/>
+                <a:latin typeface="+mn-lt"/>
+                <a:ea typeface="+mn-ea"/>
+                <a:cs typeface="+mn-cs"/>
+              </a:rPr>
+              <a:t>In this task, the model may struggle more when distinguishing medium stays from long stays.</a:t>
+            </a:r>
+          </a:p>
+          <a:p>
+            <a:r>
+              <a:rPr lang="en-US" sz="1200" kern="1200" dirty="0">
+                <a:solidFill>
+                  <a:schemeClr val="tx1"/>
+                </a:solidFill>
+                <a:effectLst/>
+                <a:latin typeface="+mn-lt"/>
+                <a:ea typeface="+mn-ea"/>
+                <a:cs typeface="+mn-cs"/>
+              </a:rPr>
+              <a:t>This makes the confusion matrix useful for understanding model strengths and weaknesses beyond overall accuracy.</a:t>
+            </a:r>
+          </a:p>
+          <a:p>
+            <a:endParaRPr lang="en-US" dirty="0"/>
+          </a:p>
+        </p:txBody>
+      </p:sp>
+      <p:sp>
+        <p:nvSpPr>
+          <p:cNvPr id="4" name="Slide Number Placeholder 3"/>
+          <p:cNvSpPr>
+            <a:spLocks noGrp="1"/>
+          </p:cNvSpPr>
+          <p:nvPr>
+            <p:ph type="sldNum" sz="quarter" idx="5"/>
+          </p:nvPr>
+        </p:nvSpPr>
+        <p:spPr/>
+        <p:txBody>
+          <a:bodyPr/>
+          <a:lstStyle/>
+          <a:p>
+            <a:fld id="{BCD9374F-9954-F24E-8880-8CA162CE8CFB}" type="slidenum">
+              <a:rPr lang="en-US" smtClean="0"/>
+              <a:t>12</a:t>
+            </a:fld>
+            <a:endParaRPr lang="en-US"/>
+          </a:p>
+        </p:txBody>
+      </p:sp>
+    </p:spTree>
+    <p:extLst>
+      <p:ext uri="{BB962C8B-B14F-4D97-AF65-F5344CB8AC3E}">
+        <p14:creationId xmlns:p14="http://schemas.microsoft.com/office/powerpoint/2010/main" val="689158731"/>
+      </p:ext>
+    </p:extLst>
+  </p:cSld>
+  <p:clrMapOvr>
+    <a:masterClrMapping/>
+  </p:clrMapOvr>
+</p:notes>
+</file>
+
+<file path=ppt/notesSlides/notesSlide11.xml><?xml version="1.0" encoding="utf-8"?>
+<p:notes xmlns:a="http://schemas.openxmlformats.org/drawingml/2006/main" xmlns:r="http://schemas.openxmlformats.org/officeDocument/2006/relationships" xmlns:p="http://schemas.openxmlformats.org/presentationml/2006/main">
+  <p:cSld>
+    <p:spTree>
+      <p:nvGrpSpPr>
+        <p:cNvPr id="1" name=""/>
+        <p:cNvGrpSpPr/>
+        <p:nvPr/>
+      </p:nvGrpSpPr>
+      <p:grpSpPr>
+        <a:xfrm>
+          <a:off x="0" y="0"/>
+          <a:ext cx="0" cy="0"/>
+          <a:chOff x="0" y="0"/>
+          <a:chExt cx="0" cy="0"/>
+        </a:xfrm>
+      </p:grpSpPr>
+      <p:sp>
+        <p:nvSpPr>
+          <p:cNvPr id="2" name="Slide Image Placeholder 1"/>
+          <p:cNvSpPr>
+            <a:spLocks noGrp="1" noRot="1" noChangeAspect="1"/>
+          </p:cNvSpPr>
+          <p:nvPr>
+            <p:ph type="sldImg"/>
+          </p:nvPr>
+        </p:nvSpPr>
+        <p:spPr/>
+      </p:sp>
+      <p:sp>
+        <p:nvSpPr>
+          <p:cNvPr id="3" name="Notes Placeholder 2"/>
+          <p:cNvSpPr>
+            <a:spLocks noGrp="1"/>
+          </p:cNvSpPr>
+          <p:nvPr>
+            <p:ph type="body" idx="1"/>
+          </p:nvPr>
+        </p:nvSpPr>
+        <p:spPr/>
+        <p:txBody>
+          <a:bodyPr/>
+          <a:lstStyle/>
+          <a:p>
+            <a:pPr marL="457200" lvl="1" indent="0">
+              <a:lnSpc>
+                <a:spcPct val="90000"/>
+              </a:lnSpc>
+              <a:buNone/>
+            </a:pPr>
+            <a:endParaRPr lang="en-US" sz="1400" dirty="0"/>
+          </a:p>
+          <a:p>
+            <a:pPr lvl="1">
+              <a:lnSpc>
+                <a:spcPct val="90000"/>
+              </a:lnSpc>
+              <a:buFont typeface="Wingdings" pitchFamily="2" charset="2"/>
+              <a:buChar char="v"/>
+            </a:pPr>
+            <a:r>
+              <a:rPr lang="en-US" sz="1400" dirty="0"/>
+              <a:t>Speaker notes:</a:t>
+            </a:r>
+          </a:p>
+          <a:p>
+            <a:pPr lvl="1">
+              <a:lnSpc>
+                <a:spcPct val="90000"/>
+              </a:lnSpc>
+              <a:buFont typeface="Wingdings" pitchFamily="2" charset="2"/>
+              <a:buChar char="v"/>
+            </a:pPr>
+            <a:endParaRPr lang="en-US" sz="1400" dirty="0"/>
+          </a:p>
+          <a:p>
+            <a:r>
+              <a:rPr lang="en-US" sz="1200" kern="1200" dirty="0">
+                <a:solidFill>
+                  <a:schemeClr val="tx1"/>
+                </a:solidFill>
+                <a:effectLst/>
+                <a:latin typeface="+mn-lt"/>
+                <a:ea typeface="+mn-ea"/>
+                <a:cs typeface="+mn-cs"/>
+              </a:rPr>
+              <a:t>This slide summarizes the main findings from the modeling process. The results from Logistic Regression and Random Forest are compared to identify the best-performing model.</a:t>
+            </a:r>
+          </a:p>
+          <a:p>
+            <a:r>
+              <a:rPr lang="en-US" sz="1200" kern="1200" dirty="0">
+                <a:solidFill>
+                  <a:schemeClr val="tx1"/>
+                </a:solidFill>
+                <a:effectLst/>
+                <a:latin typeface="+mn-lt"/>
+                <a:ea typeface="+mn-ea"/>
+                <a:cs typeface="+mn-cs"/>
+              </a:rPr>
+              <a:t>It also highlights which structured features appear to be the most useful predictors of ICU length of stay. These findings help interpret how patient and admission characteristics relate to short, medium, or long stays. Overall, the results show that structured EHR data can be used to support healthcare prediction tasks.</a:t>
+            </a:r>
+          </a:p>
+          <a:p>
+            <a:pPr lvl="1">
+              <a:lnSpc>
+                <a:spcPct val="90000"/>
+              </a:lnSpc>
+              <a:buFont typeface="Wingdings" pitchFamily="2" charset="2"/>
+              <a:buChar char="v"/>
+            </a:pPr>
+            <a:endParaRPr lang="en-US" dirty="0"/>
+          </a:p>
+        </p:txBody>
+      </p:sp>
+      <p:sp>
+        <p:nvSpPr>
+          <p:cNvPr id="4" name="Slide Number Placeholder 3"/>
+          <p:cNvSpPr>
+            <a:spLocks noGrp="1"/>
+          </p:cNvSpPr>
+          <p:nvPr>
+            <p:ph type="sldNum" sz="quarter" idx="5"/>
+          </p:nvPr>
+        </p:nvSpPr>
+        <p:spPr/>
+        <p:txBody>
+          <a:bodyPr/>
+          <a:lstStyle/>
+          <a:p>
+            <a:fld id="{BCD9374F-9954-F24E-8880-8CA162CE8CFB}" type="slidenum">
+              <a:rPr lang="en-US" smtClean="0"/>
+              <a:t>13</a:t>
+            </a:fld>
+            <a:endParaRPr lang="en-US"/>
+          </a:p>
+        </p:txBody>
+      </p:sp>
+    </p:spTree>
+    <p:extLst>
+      <p:ext uri="{BB962C8B-B14F-4D97-AF65-F5344CB8AC3E}">
+        <p14:creationId xmlns:p14="http://schemas.microsoft.com/office/powerpoint/2010/main" val="888484719"/>
+      </p:ext>
+    </p:extLst>
+  </p:cSld>
+  <p:clrMapOvr>
+    <a:masterClrMapping/>
+  </p:clrMapOvr>
+</p:notes>
+</file>
+
+<file path=ppt/notesSlides/notesSlide12.xml><?xml version="1.0" encoding="utf-8"?>
+<p:notes xmlns:a="http://schemas.openxmlformats.org/drawingml/2006/main" xmlns:r="http://schemas.openxmlformats.org/officeDocument/2006/relationships" xmlns:p="http://schemas.openxmlformats.org/presentationml/2006/main">
+  <p:cSld>
+    <p:spTree>
+      <p:nvGrpSpPr>
+        <p:cNvPr id="1" name=""/>
+        <p:cNvGrpSpPr/>
+        <p:nvPr/>
+      </p:nvGrpSpPr>
+      <p:grpSpPr>
+        <a:xfrm>
+          <a:off x="0" y="0"/>
+          <a:ext cx="0" cy="0"/>
+          <a:chOff x="0" y="0"/>
+          <a:chExt cx="0" cy="0"/>
+        </a:xfrm>
+      </p:grpSpPr>
+      <p:sp>
+        <p:nvSpPr>
+          <p:cNvPr id="2" name="Slide Image Placeholder 1"/>
+          <p:cNvSpPr>
+            <a:spLocks noGrp="1" noRot="1" noChangeAspect="1"/>
+          </p:cNvSpPr>
+          <p:nvPr>
+            <p:ph type="sldImg"/>
+          </p:nvPr>
+        </p:nvSpPr>
+        <p:spPr/>
+      </p:sp>
+      <p:sp>
+        <p:nvSpPr>
+          <p:cNvPr id="3" name="Notes Placeholder 2"/>
+          <p:cNvSpPr>
+            <a:spLocks noGrp="1"/>
+          </p:cNvSpPr>
+          <p:nvPr>
+            <p:ph type="body" idx="1"/>
+          </p:nvPr>
+        </p:nvSpPr>
+        <p:spPr/>
+        <p:txBody>
+          <a:bodyPr/>
+          <a:lstStyle/>
+          <a:p>
+            <a:r>
+              <a:rPr lang="en-US" sz="1200" kern="1200" dirty="0">
+                <a:solidFill>
+                  <a:schemeClr val="tx1"/>
+                </a:solidFill>
+                <a:effectLst/>
+                <a:latin typeface="+mn-lt"/>
+                <a:ea typeface="+mn-ea"/>
+                <a:cs typeface="+mn-cs"/>
+              </a:rPr>
+              <a:t> </a:t>
+            </a:r>
+          </a:p>
+          <a:p>
+            <a:r>
+              <a:rPr lang="en-US" sz="1200" kern="1200" dirty="0">
+                <a:solidFill>
+                  <a:schemeClr val="tx1"/>
+                </a:solidFill>
+                <a:effectLst/>
+                <a:latin typeface="+mn-lt"/>
+                <a:ea typeface="+mn-ea"/>
+                <a:cs typeface="+mn-cs"/>
+              </a:rPr>
+              <a:t>This slide explains both the limitations of the project and how another learner can reproduce it.</a:t>
+            </a:r>
+          </a:p>
+          <a:p>
+            <a:r>
+              <a:rPr lang="en-US" sz="1200" kern="1200" dirty="0">
+                <a:solidFill>
+                  <a:schemeClr val="tx1"/>
+                </a:solidFill>
+                <a:effectLst/>
+                <a:latin typeface="+mn-lt"/>
+                <a:ea typeface="+mn-ea"/>
+                <a:cs typeface="+mn-cs"/>
+              </a:rPr>
+              <a:t>The main limitations are that the analysis uses a single dataset, defines diabetes using diagnosis codes, and relies on a simple structured feature set. Because of these design choices, the project is intended for educational use and not for real clinical deployment. To replicate the work, a learner should first load the cohort file and then run the notebook cells in order. Following the notebook step by step should reproduce the same preprocessing, charts, metrics, and overall results.</a:t>
+            </a:r>
+          </a:p>
+          <a:p>
+            <a:endParaRPr lang="en-US" dirty="0"/>
+          </a:p>
+        </p:txBody>
+      </p:sp>
+      <p:sp>
+        <p:nvSpPr>
+          <p:cNvPr id="4" name="Slide Number Placeholder 3"/>
+          <p:cNvSpPr>
+            <a:spLocks noGrp="1"/>
+          </p:cNvSpPr>
+          <p:nvPr>
+            <p:ph type="sldNum" sz="quarter" idx="5"/>
+          </p:nvPr>
+        </p:nvSpPr>
+        <p:spPr/>
+        <p:txBody>
+          <a:bodyPr/>
+          <a:lstStyle/>
+          <a:p>
+            <a:fld id="{BCD9374F-9954-F24E-8880-8CA162CE8CFB}" type="slidenum">
+              <a:rPr lang="en-US" smtClean="0"/>
+              <a:t>14</a:t>
+            </a:fld>
+            <a:endParaRPr lang="en-US"/>
+          </a:p>
+        </p:txBody>
+      </p:sp>
+    </p:spTree>
+    <p:extLst>
+      <p:ext uri="{BB962C8B-B14F-4D97-AF65-F5344CB8AC3E}">
+        <p14:creationId xmlns:p14="http://schemas.microsoft.com/office/powerpoint/2010/main" val="3517858268"/>
+      </p:ext>
+    </p:extLst>
+  </p:cSld>
+  <p:clrMapOvr>
+    <a:masterClrMapping/>
+  </p:clrMapOvr>
+</p:notes>
+</file>
+
+<file path=ppt/notesSlides/notesSlide2.xml><?xml version="1.0" encoding="utf-8"?>
+<p:notes xmlns:a="http://schemas.openxmlformats.org/drawingml/2006/main" xmlns:r="http://schemas.openxmlformats.org/officeDocument/2006/relationships" xmlns:p="http://schemas.openxmlformats.org/presentationml/2006/main">
+  <p:cSld>
+    <p:spTree>
+      <p:nvGrpSpPr>
+        <p:cNvPr id="1" name=""/>
+        <p:cNvGrpSpPr/>
+        <p:nvPr/>
+      </p:nvGrpSpPr>
+      <p:grpSpPr>
+        <a:xfrm>
+          <a:off x="0" y="0"/>
+          <a:ext cx="0" cy="0"/>
+          <a:chOff x="0" y="0"/>
+          <a:chExt cx="0" cy="0"/>
+        </a:xfrm>
+      </p:grpSpPr>
+      <p:sp>
+        <p:nvSpPr>
+          <p:cNvPr id="2" name="Slide Image Placeholder 1"/>
+          <p:cNvSpPr>
+            <a:spLocks noGrp="1" noRot="1" noChangeAspect="1"/>
+          </p:cNvSpPr>
+          <p:nvPr>
+            <p:ph type="sldImg"/>
+          </p:nvPr>
+        </p:nvSpPr>
+        <p:spPr/>
+      </p:sp>
+      <p:sp>
+        <p:nvSpPr>
+          <p:cNvPr id="3" name="Notes Placeholder 2"/>
+          <p:cNvSpPr>
+            <a:spLocks noGrp="1"/>
+          </p:cNvSpPr>
+          <p:nvPr>
+            <p:ph type="body" idx="1"/>
+          </p:nvPr>
+        </p:nvSpPr>
+        <p:spPr/>
+        <p:txBody>
+          <a:bodyPr/>
+          <a:lstStyle/>
+          <a:p>
+            <a:pPr lvl="1">
+              <a:lnSpc>
+                <a:spcPct val="90000"/>
+              </a:lnSpc>
+              <a:buFont typeface="Wingdings" pitchFamily="2" charset="2"/>
+              <a:buChar char="v"/>
+            </a:pPr>
+            <a:r>
+              <a:rPr lang="en-US" sz="1800" dirty="0"/>
+              <a:t>Speaker notes: This project begins by identifying diabetic patients who were admitted to the ICU using MIMIC-III data.</a:t>
+            </a:r>
+            <a:br>
+              <a:rPr lang="en-US" sz="1800" dirty="0"/>
+            </a:br>
+            <a:r>
+              <a:rPr lang="en-US" sz="1800" dirty="0"/>
+              <a:t>After selecting the cohort, the next step is to build structured features from demographic and admission-related variables. These features may include age, gender, admission type, insurance, ethnicity, and diagnosis counts. The goal is to use these structured inputs to train a machine learning model.</a:t>
+            </a:r>
+            <a:br>
+              <a:rPr lang="en-US" sz="1800" dirty="0"/>
+            </a:br>
+            <a:r>
+              <a:rPr lang="en-US" sz="1800" dirty="0"/>
+              <a:t>The final objective is to predict the ICU length-of-stay category for diabetic patients.</a:t>
+            </a:r>
+          </a:p>
+          <a:p>
+            <a:pPr lvl="1">
+              <a:lnSpc>
+                <a:spcPct val="90000"/>
+              </a:lnSpc>
+              <a:buFont typeface="Wingdings" pitchFamily="2" charset="2"/>
+              <a:buChar char="v"/>
+            </a:pPr>
+            <a:endParaRPr lang="en-US" dirty="0"/>
+          </a:p>
+        </p:txBody>
+      </p:sp>
+      <p:sp>
+        <p:nvSpPr>
+          <p:cNvPr id="4" name="Slide Number Placeholder 3"/>
+          <p:cNvSpPr>
+            <a:spLocks noGrp="1"/>
+          </p:cNvSpPr>
+          <p:nvPr>
+            <p:ph type="sldNum" sz="quarter" idx="5"/>
+          </p:nvPr>
+        </p:nvSpPr>
+        <p:spPr/>
+        <p:txBody>
+          <a:bodyPr/>
+          <a:lstStyle/>
+          <a:p>
+            <a:fld id="{BCD9374F-9954-F24E-8880-8CA162CE8CFB}" type="slidenum">
+              <a:rPr lang="en-US" smtClean="0"/>
+              <a:t>4</a:t>
+            </a:fld>
+            <a:endParaRPr lang="en-US"/>
+          </a:p>
+        </p:txBody>
+      </p:sp>
+    </p:spTree>
+    <p:extLst>
+      <p:ext uri="{BB962C8B-B14F-4D97-AF65-F5344CB8AC3E}">
+        <p14:creationId xmlns:p14="http://schemas.microsoft.com/office/powerpoint/2010/main" val="31195674"/>
+      </p:ext>
+    </p:extLst>
+  </p:cSld>
+  <p:clrMapOvr>
+    <a:masterClrMapping/>
+  </p:clrMapOvr>
+</p:notes>
+</file>
+
+<file path=ppt/notesSlides/notesSlide3.xml><?xml version="1.0" encoding="utf-8"?>
+<p:notes xmlns:a="http://schemas.openxmlformats.org/drawingml/2006/main" xmlns:r="http://schemas.openxmlformats.org/officeDocument/2006/relationships" xmlns:p="http://schemas.openxmlformats.org/presentationml/2006/main">
+  <p:cSld>
+    <p:spTree>
+      <p:nvGrpSpPr>
+        <p:cNvPr id="1" name=""/>
+        <p:cNvGrpSpPr/>
+        <p:nvPr/>
+      </p:nvGrpSpPr>
+      <p:grpSpPr>
+        <a:xfrm>
+          <a:off x="0" y="0"/>
+          <a:ext cx="0" cy="0"/>
+          <a:chOff x="0" y="0"/>
+          <a:chExt cx="0" cy="0"/>
+        </a:xfrm>
+      </p:grpSpPr>
+      <p:sp>
+        <p:nvSpPr>
+          <p:cNvPr id="2" name="Slide Image Placeholder 1"/>
+          <p:cNvSpPr>
+            <a:spLocks noGrp="1" noRot="1" noChangeAspect="1"/>
+          </p:cNvSpPr>
+          <p:nvPr>
+            <p:ph type="sldImg"/>
+          </p:nvPr>
+        </p:nvSpPr>
+        <p:spPr/>
+      </p:sp>
+      <p:sp>
+        <p:nvSpPr>
+          <p:cNvPr id="3" name="Notes Placeholder 2"/>
+          <p:cNvSpPr>
+            <a:spLocks noGrp="1"/>
+          </p:cNvSpPr>
+          <p:nvPr>
+            <p:ph type="body" idx="1"/>
+          </p:nvPr>
+        </p:nvSpPr>
+        <p:spPr/>
+        <p:txBody>
+          <a:bodyPr/>
+          <a:lstStyle/>
+          <a:p>
+            <a:pPr lvl="1">
+              <a:buFont typeface="Wingdings" pitchFamily="2" charset="2"/>
+              <a:buChar char="v"/>
+            </a:pPr>
+            <a:r>
+              <a:rPr lang="en-US" sz="1700" dirty="0"/>
+              <a:t>Speaker notes:</a:t>
+            </a:r>
+          </a:p>
+          <a:p>
+            <a:r>
+              <a:rPr lang="en-US" sz="1200" kern="1200" dirty="0">
+                <a:solidFill>
+                  <a:schemeClr val="tx1"/>
+                </a:solidFill>
+                <a:effectLst/>
+                <a:latin typeface="+mn-lt"/>
+                <a:ea typeface="+mn-ea"/>
+                <a:cs typeface="+mn-cs"/>
+              </a:rPr>
+              <a:t>This slide presents the main research question for the project. The goal is to determine whether structured MIMIC-III data can predict ICU length-of-stay category for diabetic patients.</a:t>
+            </a:r>
+          </a:p>
+          <a:p>
+            <a:r>
+              <a:rPr lang="en-US" sz="1200" kern="1200" dirty="0">
+                <a:solidFill>
+                  <a:schemeClr val="tx1"/>
+                </a:solidFill>
+                <a:effectLst/>
+                <a:latin typeface="+mn-lt"/>
+                <a:ea typeface="+mn-ea"/>
+                <a:cs typeface="+mn-cs"/>
+              </a:rPr>
+              <a:t>Instead of predicting an exact number of days, the outcome is grouped into short, medium, and long stay categories. This makes the problem a multiclass classification task that is easier to model and explain. It also helps demonstrate how structured hospital data can be used for practical healthcare prediction.</a:t>
+            </a:r>
+          </a:p>
+          <a:p>
+            <a:pPr lvl="1">
+              <a:buFont typeface="Wingdings" pitchFamily="2" charset="2"/>
+              <a:buChar char="v"/>
+            </a:pPr>
+            <a:endParaRPr lang="en-US" sz="1700" dirty="0"/>
+          </a:p>
+          <a:p>
+            <a:pPr lvl="1">
+              <a:buFont typeface="Wingdings" pitchFamily="2" charset="2"/>
+              <a:buChar char="v"/>
+            </a:pPr>
+            <a:endParaRPr lang="en-US" dirty="0"/>
+          </a:p>
+        </p:txBody>
+      </p:sp>
+      <p:sp>
+        <p:nvSpPr>
+          <p:cNvPr id="4" name="Slide Number Placeholder 3"/>
+          <p:cNvSpPr>
+            <a:spLocks noGrp="1"/>
+          </p:cNvSpPr>
+          <p:nvPr>
+            <p:ph type="sldNum" sz="quarter" idx="5"/>
+          </p:nvPr>
+        </p:nvSpPr>
+        <p:spPr/>
+        <p:txBody>
+          <a:bodyPr/>
+          <a:lstStyle/>
+          <a:p>
+            <a:fld id="{BCD9374F-9954-F24E-8880-8CA162CE8CFB}" type="slidenum">
+              <a:rPr lang="en-US" smtClean="0"/>
+              <a:t>5</a:t>
+            </a:fld>
+            <a:endParaRPr lang="en-US"/>
+          </a:p>
+        </p:txBody>
+      </p:sp>
+    </p:spTree>
+    <p:extLst>
+      <p:ext uri="{BB962C8B-B14F-4D97-AF65-F5344CB8AC3E}">
+        <p14:creationId xmlns:p14="http://schemas.microsoft.com/office/powerpoint/2010/main" val="4083069444"/>
+      </p:ext>
+    </p:extLst>
+  </p:cSld>
+  <p:clrMapOvr>
+    <a:masterClrMapping/>
+  </p:clrMapOvr>
+</p:notes>
+</file>
+
+<file path=ppt/notesSlides/notesSlide4.xml><?xml version="1.0" encoding="utf-8"?>
+<p:notes xmlns:a="http://schemas.openxmlformats.org/drawingml/2006/main" xmlns:r="http://schemas.openxmlformats.org/officeDocument/2006/relationships" xmlns:p="http://schemas.openxmlformats.org/presentationml/2006/main">
+  <p:cSld>
+    <p:spTree>
+      <p:nvGrpSpPr>
+        <p:cNvPr id="1" name=""/>
+        <p:cNvGrpSpPr/>
+        <p:nvPr/>
+      </p:nvGrpSpPr>
+      <p:grpSpPr>
+        <a:xfrm>
+          <a:off x="0" y="0"/>
+          <a:ext cx="0" cy="0"/>
+          <a:chOff x="0" y="0"/>
+          <a:chExt cx="0" cy="0"/>
+        </a:xfrm>
+      </p:grpSpPr>
+      <p:sp>
+        <p:nvSpPr>
+          <p:cNvPr id="2" name="Slide Image Placeholder 1"/>
+          <p:cNvSpPr>
+            <a:spLocks noGrp="1" noRot="1" noChangeAspect="1"/>
+          </p:cNvSpPr>
+          <p:nvPr>
+            <p:ph type="sldImg"/>
+          </p:nvPr>
+        </p:nvSpPr>
+        <p:spPr/>
+      </p:sp>
+      <p:sp>
+        <p:nvSpPr>
+          <p:cNvPr id="3" name="Notes Placeholder 2"/>
+          <p:cNvSpPr>
+            <a:spLocks noGrp="1"/>
+          </p:cNvSpPr>
+          <p:nvPr>
+            <p:ph type="body" idx="1"/>
+          </p:nvPr>
+        </p:nvSpPr>
+        <p:spPr/>
+        <p:txBody>
+          <a:bodyPr/>
+          <a:lstStyle/>
+          <a:p>
+            <a:pPr marL="457200" lvl="1" indent="0">
+              <a:lnSpc>
+                <a:spcPct val="90000"/>
+              </a:lnSpc>
+              <a:buNone/>
+            </a:pPr>
+            <a:r>
+              <a:rPr lang="en-US" sz="1500" dirty="0"/>
+              <a:t>Speaker notes:</a:t>
+            </a:r>
+          </a:p>
+          <a:p>
+            <a:r>
+              <a:rPr lang="en-US" sz="1200" kern="1200" dirty="0">
+                <a:solidFill>
+                  <a:schemeClr val="tx1"/>
+                </a:solidFill>
+                <a:effectLst/>
+                <a:latin typeface="+mn-lt"/>
+                <a:ea typeface="+mn-ea"/>
+                <a:cs typeface="+mn-cs"/>
+              </a:rPr>
+              <a:t>This project focuses only on patients who were admitted to the ICU. Diabetic patients are identified using ICD-9 diagnosis codes that begin with 250. After selecting the cohort, the relevant MIMIC-III tables are merged using </a:t>
+            </a:r>
+            <a:r>
+              <a:rPr lang="en-US" sz="1200" kern="1200" dirty="0" err="1">
+                <a:solidFill>
+                  <a:schemeClr val="tx1"/>
+                </a:solidFill>
+                <a:effectLst/>
+                <a:latin typeface="+mn-lt"/>
+                <a:ea typeface="+mn-ea"/>
+                <a:cs typeface="+mn-cs"/>
+              </a:rPr>
+              <a:t>subject_id</a:t>
+            </a:r>
+            <a:r>
+              <a:rPr lang="en-US" sz="1200" kern="1200" dirty="0">
+                <a:solidFill>
+                  <a:schemeClr val="tx1"/>
+                </a:solidFill>
+                <a:effectLst/>
+                <a:latin typeface="+mn-lt"/>
+                <a:ea typeface="+mn-ea"/>
+                <a:cs typeface="+mn-cs"/>
+              </a:rPr>
+              <a:t> and </a:t>
+            </a:r>
+            <a:r>
+              <a:rPr lang="en-US" sz="1200" kern="1200" dirty="0" err="1">
+                <a:solidFill>
+                  <a:schemeClr val="tx1"/>
+                </a:solidFill>
+                <a:effectLst/>
+                <a:latin typeface="+mn-lt"/>
+                <a:ea typeface="+mn-ea"/>
+                <a:cs typeface="+mn-cs"/>
+              </a:rPr>
+              <a:t>hadm_id</a:t>
+            </a:r>
+            <a:r>
+              <a:rPr lang="en-US" sz="1200" kern="1200" dirty="0">
+                <a:solidFill>
+                  <a:schemeClr val="tx1"/>
+                </a:solidFill>
+                <a:effectLst/>
+                <a:latin typeface="+mn-lt"/>
+                <a:ea typeface="+mn-ea"/>
+                <a:cs typeface="+mn-cs"/>
+              </a:rPr>
+              <a:t>.</a:t>
+            </a:r>
+          </a:p>
+          <a:p>
+            <a:r>
+              <a:rPr lang="en-US" sz="1200" kern="1200" dirty="0">
+                <a:solidFill>
+                  <a:schemeClr val="tx1"/>
+                </a:solidFill>
+                <a:effectLst/>
+                <a:latin typeface="+mn-lt"/>
+                <a:ea typeface="+mn-ea"/>
+                <a:cs typeface="+mn-cs"/>
+              </a:rPr>
+              <a:t>These joins allow demographic, admission, and ICU stay information to be combined into one dataset. The final step is to clean missing values and remove unrealistic records before modeling.</a:t>
+            </a:r>
+          </a:p>
+          <a:p>
+            <a:pPr marL="457200" lvl="1" indent="0">
+              <a:lnSpc>
+                <a:spcPct val="90000"/>
+              </a:lnSpc>
+              <a:buNone/>
+            </a:pPr>
+            <a:endParaRPr lang="en-US" dirty="0"/>
+          </a:p>
+        </p:txBody>
+      </p:sp>
+      <p:sp>
+        <p:nvSpPr>
+          <p:cNvPr id="4" name="Slide Number Placeholder 3"/>
+          <p:cNvSpPr>
+            <a:spLocks noGrp="1"/>
+          </p:cNvSpPr>
+          <p:nvPr>
+            <p:ph type="sldNum" sz="quarter" idx="5"/>
+          </p:nvPr>
+        </p:nvSpPr>
+        <p:spPr/>
+        <p:txBody>
+          <a:bodyPr/>
+          <a:lstStyle/>
+          <a:p>
+            <a:fld id="{BCD9374F-9954-F24E-8880-8CA162CE8CFB}" type="slidenum">
+              <a:rPr lang="en-US" smtClean="0"/>
+              <a:t>6</a:t>
+            </a:fld>
+            <a:endParaRPr lang="en-US"/>
+          </a:p>
+        </p:txBody>
+      </p:sp>
+    </p:spTree>
+    <p:extLst>
+      <p:ext uri="{BB962C8B-B14F-4D97-AF65-F5344CB8AC3E}">
+        <p14:creationId xmlns:p14="http://schemas.microsoft.com/office/powerpoint/2010/main" val="1950388806"/>
+      </p:ext>
+    </p:extLst>
+  </p:cSld>
+  <p:clrMapOvr>
+    <a:masterClrMapping/>
+  </p:clrMapOvr>
+</p:notes>
+</file>
+
+<file path=ppt/notesSlides/notesSlide5.xml><?xml version="1.0" encoding="utf-8"?>
+<p:notes xmlns:a="http://schemas.openxmlformats.org/drawingml/2006/main" xmlns:r="http://schemas.openxmlformats.org/officeDocument/2006/relationships" xmlns:p="http://schemas.openxmlformats.org/presentationml/2006/main">
+  <p:cSld>
+    <p:spTree>
+      <p:nvGrpSpPr>
+        <p:cNvPr id="1" name=""/>
+        <p:cNvGrpSpPr/>
+        <p:nvPr/>
+      </p:nvGrpSpPr>
+      <p:grpSpPr>
+        <a:xfrm>
+          <a:off x="0" y="0"/>
+          <a:ext cx="0" cy="0"/>
+          <a:chOff x="0" y="0"/>
+          <a:chExt cx="0" cy="0"/>
+        </a:xfrm>
+      </p:grpSpPr>
+      <p:sp>
+        <p:nvSpPr>
+          <p:cNvPr id="2" name="Slide Image Placeholder 1"/>
+          <p:cNvSpPr>
+            <a:spLocks noGrp="1" noRot="1" noChangeAspect="1"/>
+          </p:cNvSpPr>
+          <p:nvPr>
+            <p:ph type="sldImg"/>
+          </p:nvPr>
+        </p:nvSpPr>
+        <p:spPr/>
+      </p:sp>
+      <p:sp>
+        <p:nvSpPr>
+          <p:cNvPr id="3" name="Notes Placeholder 2"/>
+          <p:cNvSpPr>
+            <a:spLocks noGrp="1"/>
+          </p:cNvSpPr>
+          <p:nvPr>
+            <p:ph type="body" idx="1"/>
+          </p:nvPr>
+        </p:nvSpPr>
+        <p:spPr/>
+        <p:txBody>
+          <a:bodyPr/>
+          <a:lstStyle/>
+          <a:p>
+            <a:pPr lvl="1">
+              <a:lnSpc>
+                <a:spcPct val="90000"/>
+              </a:lnSpc>
+              <a:buFont typeface="Wingdings" pitchFamily="2" charset="2"/>
+              <a:buChar char="v"/>
+            </a:pPr>
+            <a:r>
+              <a:rPr lang="en-US" sz="1300" dirty="0"/>
+              <a:t>Speaker notes:</a:t>
+            </a:r>
+          </a:p>
+          <a:p>
+            <a:r>
+              <a:rPr lang="en-US" sz="1200" kern="1200" dirty="0">
+                <a:solidFill>
+                  <a:schemeClr val="tx1"/>
+                </a:solidFill>
+                <a:effectLst/>
+                <a:latin typeface="+mn-lt"/>
+                <a:ea typeface="+mn-ea"/>
+                <a:cs typeface="+mn-cs"/>
+              </a:rPr>
+              <a:t> </a:t>
+            </a:r>
+          </a:p>
+          <a:p>
+            <a:r>
+              <a:rPr lang="en-US" sz="1200" kern="1200" dirty="0">
+                <a:solidFill>
+                  <a:schemeClr val="tx1"/>
+                </a:solidFill>
+                <a:effectLst/>
+                <a:latin typeface="+mn-lt"/>
+                <a:ea typeface="+mn-ea"/>
+                <a:cs typeface="+mn-cs"/>
+              </a:rPr>
+              <a:t>These are the main structured features used in the model. Age at ICU admission captures the patient’s age at the time of critical care. Gender, admission type, insurance, and ethnicity provide demographic and hospital-related context. The number of diagnoses is included as a simple measure of overall illness complexity. Together, these features help the model predict ICU length-of-stay category for diabetic patients.</a:t>
+            </a:r>
+          </a:p>
+          <a:p>
+            <a:pPr lvl="1">
+              <a:lnSpc>
+                <a:spcPct val="90000"/>
+              </a:lnSpc>
+              <a:buFont typeface="Wingdings" pitchFamily="2" charset="2"/>
+              <a:buChar char="v"/>
+            </a:pPr>
             <a:endParaRPr lang="en-US" dirty="0"/>
           </a:p>
         </p:txBody>
@@ -3825,6 +4887,561 @@
     <p:extLst>
       <p:ext uri="{BB962C8B-B14F-4D97-AF65-F5344CB8AC3E}">
         <p14:creationId xmlns:p14="http://schemas.microsoft.com/office/powerpoint/2010/main" val="3082463949"/>
+      </p:ext>
+    </p:extLst>
+  </p:cSld>
+  <p:clrMapOvr>
+    <a:masterClrMapping/>
+  </p:clrMapOvr>
+</p:notes>
+</file>
+
+<file path=ppt/notesSlides/notesSlide6.xml><?xml version="1.0" encoding="utf-8"?>
+<p:notes xmlns:a="http://schemas.openxmlformats.org/drawingml/2006/main" xmlns:r="http://schemas.openxmlformats.org/officeDocument/2006/relationships" xmlns:p="http://schemas.openxmlformats.org/presentationml/2006/main">
+  <p:cSld>
+    <p:spTree>
+      <p:nvGrpSpPr>
+        <p:cNvPr id="1" name=""/>
+        <p:cNvGrpSpPr/>
+        <p:nvPr/>
+      </p:nvGrpSpPr>
+      <p:grpSpPr>
+        <a:xfrm>
+          <a:off x="0" y="0"/>
+          <a:ext cx="0" cy="0"/>
+          <a:chOff x="0" y="0"/>
+          <a:chExt cx="0" cy="0"/>
+        </a:xfrm>
+      </p:grpSpPr>
+      <p:sp>
+        <p:nvSpPr>
+          <p:cNvPr id="2" name="Slide Image Placeholder 1"/>
+          <p:cNvSpPr>
+            <a:spLocks noGrp="1" noRot="1" noChangeAspect="1"/>
+          </p:cNvSpPr>
+          <p:nvPr>
+            <p:ph type="sldImg"/>
+          </p:nvPr>
+        </p:nvSpPr>
+        <p:spPr/>
+      </p:sp>
+      <p:sp>
+        <p:nvSpPr>
+          <p:cNvPr id="3" name="Notes Placeholder 2"/>
+          <p:cNvSpPr>
+            <a:spLocks noGrp="1"/>
+          </p:cNvSpPr>
+          <p:nvPr>
+            <p:ph type="body" idx="1"/>
+          </p:nvPr>
+        </p:nvSpPr>
+        <p:spPr/>
+        <p:txBody>
+          <a:bodyPr/>
+          <a:lstStyle/>
+          <a:p>
+            <a:pPr marL="457200" marR="0" lvl="1" indent="0" algn="l" defTabSz="914400" rtl="0" eaLnBrk="1" fontAlgn="auto" latinLnBrk="0" hangingPunct="1">
+              <a:lnSpc>
+                <a:spcPct val="90000"/>
+              </a:lnSpc>
+              <a:spcBef>
+                <a:spcPts val="0"/>
+              </a:spcBef>
+              <a:spcAft>
+                <a:spcPts val="0"/>
+              </a:spcAft>
+              <a:buClrTx/>
+              <a:buSzTx/>
+              <a:buFont typeface="Wingdings" pitchFamily="2" charset="2"/>
+              <a:buChar char="v"/>
+              <a:tabLst/>
+              <a:defRPr/>
+            </a:pPr>
+            <a:r>
+              <a:rPr lang="en-US" sz="1700" dirty="0"/>
+              <a:t>Speaker </a:t>
+            </a:r>
+            <a:r>
+              <a:rPr lang="en-US" sz="1700" dirty="0" err="1"/>
+              <a:t>notes:</a:t>
+            </a:r>
+            <a:r>
+              <a:rPr lang="en-US" sz="1200" kern="1200" dirty="0" err="1">
+                <a:solidFill>
+                  <a:schemeClr val="tx1"/>
+                </a:solidFill>
+                <a:effectLst/>
+                <a:latin typeface="+mn-lt"/>
+                <a:ea typeface="+mn-ea"/>
+                <a:cs typeface="+mn-cs"/>
+              </a:rPr>
+              <a:t>The</a:t>
+            </a:r>
+            <a:r>
+              <a:rPr lang="en-US" sz="1200" kern="1200" dirty="0">
+                <a:solidFill>
+                  <a:schemeClr val="tx1"/>
+                </a:solidFill>
+                <a:effectLst/>
+                <a:latin typeface="+mn-lt"/>
+                <a:ea typeface="+mn-ea"/>
+                <a:cs typeface="+mn-cs"/>
+              </a:rPr>
+              <a:t> target variable in this project is ICU length of stay. To make the prediction task easier to model, length of stay is divided into three categories. A short stay is defined as less than 2 days, a medium stay is 2 to 7 days, and a long stay is more than 7 days. This converts the problem from predicting an exact number of days into a multiclass classification task. These categories make the results easier to interpret and explain in a tutorial setting.</a:t>
+            </a:r>
+          </a:p>
+          <a:p>
+            <a:pPr lvl="1">
+              <a:lnSpc>
+                <a:spcPct val="90000"/>
+              </a:lnSpc>
+              <a:buFont typeface="Wingdings" pitchFamily="2" charset="2"/>
+              <a:buChar char="v"/>
+            </a:pPr>
+            <a:endParaRPr lang="en-US" dirty="0"/>
+          </a:p>
+        </p:txBody>
+      </p:sp>
+      <p:sp>
+        <p:nvSpPr>
+          <p:cNvPr id="4" name="Slide Number Placeholder 3"/>
+          <p:cNvSpPr>
+            <a:spLocks noGrp="1"/>
+          </p:cNvSpPr>
+          <p:nvPr>
+            <p:ph type="sldNum" sz="quarter" idx="5"/>
+          </p:nvPr>
+        </p:nvSpPr>
+        <p:spPr/>
+        <p:txBody>
+          <a:bodyPr/>
+          <a:lstStyle/>
+          <a:p>
+            <a:fld id="{BCD9374F-9954-F24E-8880-8CA162CE8CFB}" type="slidenum">
+              <a:rPr lang="en-US" smtClean="0"/>
+              <a:t>8</a:t>
+            </a:fld>
+            <a:endParaRPr lang="en-US"/>
+          </a:p>
+        </p:txBody>
+      </p:sp>
+    </p:spTree>
+    <p:extLst>
+      <p:ext uri="{BB962C8B-B14F-4D97-AF65-F5344CB8AC3E}">
+        <p14:creationId xmlns:p14="http://schemas.microsoft.com/office/powerpoint/2010/main" val="334947105"/>
+      </p:ext>
+    </p:extLst>
+  </p:cSld>
+  <p:clrMapOvr>
+    <a:masterClrMapping/>
+  </p:clrMapOvr>
+</p:notes>
+</file>
+
+<file path=ppt/notesSlides/notesSlide7.xml><?xml version="1.0" encoding="utf-8"?>
+<p:notes xmlns:a="http://schemas.openxmlformats.org/drawingml/2006/main" xmlns:r="http://schemas.openxmlformats.org/officeDocument/2006/relationships" xmlns:p="http://schemas.openxmlformats.org/presentationml/2006/main">
+  <p:cSld>
+    <p:spTree>
+      <p:nvGrpSpPr>
+        <p:cNvPr id="1" name=""/>
+        <p:cNvGrpSpPr/>
+        <p:nvPr/>
+      </p:nvGrpSpPr>
+      <p:grpSpPr>
+        <a:xfrm>
+          <a:off x="0" y="0"/>
+          <a:ext cx="0" cy="0"/>
+          <a:chOff x="0" y="0"/>
+          <a:chExt cx="0" cy="0"/>
+        </a:xfrm>
+      </p:grpSpPr>
+      <p:sp>
+        <p:nvSpPr>
+          <p:cNvPr id="2" name="Slide Image Placeholder 1"/>
+          <p:cNvSpPr>
+            <a:spLocks noGrp="1" noRot="1" noChangeAspect="1"/>
+          </p:cNvSpPr>
+          <p:nvPr>
+            <p:ph type="sldImg"/>
+          </p:nvPr>
+        </p:nvSpPr>
+        <p:spPr/>
+      </p:sp>
+      <p:sp>
+        <p:nvSpPr>
+          <p:cNvPr id="3" name="Notes Placeholder 2"/>
+          <p:cNvSpPr>
+            <a:spLocks noGrp="1"/>
+          </p:cNvSpPr>
+          <p:nvPr>
+            <p:ph type="body" idx="1"/>
+          </p:nvPr>
+        </p:nvSpPr>
+        <p:spPr/>
+        <p:txBody>
+          <a:bodyPr/>
+          <a:lstStyle/>
+          <a:p>
+            <a:pPr lvl="1">
+              <a:buFont typeface="Wingdings" pitchFamily="2" charset="2"/>
+              <a:buChar char="v"/>
+            </a:pPr>
+            <a:r>
+              <a:rPr lang="en-US" sz="1700" dirty="0"/>
+              <a:t>Speaker notes:</a:t>
+            </a:r>
+          </a:p>
+          <a:p>
+            <a:pPr lvl="1">
+              <a:buFont typeface="Wingdings" pitchFamily="2" charset="2"/>
+              <a:buChar char="v"/>
+            </a:pPr>
+            <a:endParaRPr lang="en-US" sz="1700" dirty="0"/>
+          </a:p>
+          <a:p>
+            <a:pPr marL="457200" marR="0" lvl="1" indent="0" algn="l" defTabSz="914400" rtl="0" eaLnBrk="1" fontAlgn="auto" latinLnBrk="0" hangingPunct="1">
+              <a:lnSpc>
+                <a:spcPct val="100000"/>
+              </a:lnSpc>
+              <a:spcBef>
+                <a:spcPts val="0"/>
+              </a:spcBef>
+              <a:spcAft>
+                <a:spcPts val="0"/>
+              </a:spcAft>
+              <a:buClrTx/>
+              <a:buSzTx/>
+              <a:buFont typeface="Wingdings" pitchFamily="2" charset="2"/>
+              <a:buChar char="v"/>
+              <a:tabLst/>
+              <a:defRPr/>
+            </a:pPr>
+            <a:r>
+              <a:rPr lang="en-US" sz="1200" kern="1200" dirty="0">
+                <a:solidFill>
+                  <a:schemeClr val="tx1"/>
+                </a:solidFill>
+                <a:effectLst/>
+                <a:latin typeface="+mn-lt"/>
+                <a:ea typeface="+mn-ea"/>
+                <a:cs typeface="+mn-cs"/>
+              </a:rPr>
+              <a:t>This slide summarizes the main steps in the machine learning pipeline. The dataset is first divided into training and test sets so model performance can be evaluated fairly. Missing values are handled with imputation, categorical variables are transformed using one-hot encoding, and numeric features are scaled when needed. After preprocessing, Logistic Regression is used as a baseline model and Random Forest is used as a more flexible model. Comparing these models helps show how different machine learning methods perform on the same healthcare prediction task.</a:t>
+            </a:r>
+          </a:p>
+          <a:p>
+            <a:pPr lvl="1">
+              <a:buFont typeface="Wingdings" pitchFamily="2" charset="2"/>
+              <a:buChar char="v"/>
+            </a:pPr>
+            <a:endParaRPr lang="en-US" dirty="0"/>
+          </a:p>
+        </p:txBody>
+      </p:sp>
+      <p:sp>
+        <p:nvSpPr>
+          <p:cNvPr id="4" name="Slide Number Placeholder 3"/>
+          <p:cNvSpPr>
+            <a:spLocks noGrp="1"/>
+          </p:cNvSpPr>
+          <p:nvPr>
+            <p:ph type="sldNum" sz="quarter" idx="5"/>
+          </p:nvPr>
+        </p:nvSpPr>
+        <p:spPr/>
+        <p:txBody>
+          <a:bodyPr/>
+          <a:lstStyle/>
+          <a:p>
+            <a:fld id="{BCD9374F-9954-F24E-8880-8CA162CE8CFB}" type="slidenum">
+              <a:rPr lang="en-US" smtClean="0"/>
+              <a:t>9</a:t>
+            </a:fld>
+            <a:endParaRPr lang="en-US"/>
+          </a:p>
+        </p:txBody>
+      </p:sp>
+    </p:spTree>
+    <p:extLst>
+      <p:ext uri="{BB962C8B-B14F-4D97-AF65-F5344CB8AC3E}">
+        <p14:creationId xmlns:p14="http://schemas.microsoft.com/office/powerpoint/2010/main" val="514517786"/>
+      </p:ext>
+    </p:extLst>
+  </p:cSld>
+  <p:clrMapOvr>
+    <a:masterClrMapping/>
+  </p:clrMapOvr>
+</p:notes>
+</file>
+
+<file path=ppt/notesSlides/notesSlide8.xml><?xml version="1.0" encoding="utf-8"?>
+<p:notes xmlns:a="http://schemas.openxmlformats.org/drawingml/2006/main" xmlns:r="http://schemas.openxmlformats.org/officeDocument/2006/relationships" xmlns:p="http://schemas.openxmlformats.org/presentationml/2006/main">
+  <p:cSld>
+    <p:spTree>
+      <p:nvGrpSpPr>
+        <p:cNvPr id="1" name=""/>
+        <p:cNvGrpSpPr/>
+        <p:nvPr/>
+      </p:nvGrpSpPr>
+      <p:grpSpPr>
+        <a:xfrm>
+          <a:off x="0" y="0"/>
+          <a:ext cx="0" cy="0"/>
+          <a:chOff x="0" y="0"/>
+          <a:chExt cx="0" cy="0"/>
+        </a:xfrm>
+      </p:grpSpPr>
+      <p:sp>
+        <p:nvSpPr>
+          <p:cNvPr id="2" name="Slide Image Placeholder 1"/>
+          <p:cNvSpPr>
+            <a:spLocks noGrp="1" noRot="1" noChangeAspect="1"/>
+          </p:cNvSpPr>
+          <p:nvPr>
+            <p:ph type="sldImg"/>
+          </p:nvPr>
+        </p:nvSpPr>
+        <p:spPr/>
+      </p:sp>
+      <p:sp>
+        <p:nvSpPr>
+          <p:cNvPr id="3" name="Notes Placeholder 2"/>
+          <p:cNvSpPr>
+            <a:spLocks noGrp="1"/>
+          </p:cNvSpPr>
+          <p:nvPr>
+            <p:ph type="body" idx="1"/>
+          </p:nvPr>
+        </p:nvSpPr>
+        <p:spPr/>
+        <p:txBody>
+          <a:bodyPr/>
+          <a:lstStyle/>
+          <a:p>
+            <a:pPr lvl="1">
+              <a:buFont typeface="Wingdings" pitchFamily="2" charset="2"/>
+              <a:buChar char="v"/>
+            </a:pPr>
+            <a:r>
+              <a:rPr lang="en-US" sz="1600" dirty="0"/>
+              <a:t>Speaker notes:</a:t>
+            </a:r>
+          </a:p>
+          <a:p>
+            <a:pPr lvl="1">
+              <a:buFont typeface="Wingdings" pitchFamily="2" charset="2"/>
+              <a:buChar char="v"/>
+            </a:pPr>
+            <a:endParaRPr lang="en-US" sz="1600" dirty="0"/>
+          </a:p>
+          <a:p>
+            <a:r>
+              <a:rPr lang="en-US" sz="1200" kern="1200" dirty="0">
+                <a:solidFill>
+                  <a:schemeClr val="tx1"/>
+                </a:solidFill>
+                <a:effectLst/>
+                <a:latin typeface="+mn-lt"/>
+                <a:ea typeface="+mn-ea"/>
+                <a:cs typeface="+mn-cs"/>
+              </a:rPr>
+              <a:t>This slide presents the performance of the baseline Logistic Regression model. Accuracy shows the overall proportion of correct predictions made by the model. Precision, recall, and F1-score help evaluate how well the model performs across the short, medium, and long stay classes.</a:t>
+            </a:r>
+          </a:p>
+          <a:p>
+            <a:r>
+              <a:rPr lang="en-US" sz="1200" kern="1200" dirty="0">
+                <a:solidFill>
+                  <a:schemeClr val="tx1"/>
+                </a:solidFill>
+                <a:effectLst/>
+                <a:latin typeface="+mn-lt"/>
+                <a:ea typeface="+mn-ea"/>
+                <a:cs typeface="+mn-cs"/>
+              </a:rPr>
+              <a:t>The confusion matrix gives a visual summary of correct classifications and misclassifications.</a:t>
+            </a:r>
+          </a:p>
+          <a:p>
+            <a:r>
+              <a:rPr lang="en-US" sz="1200" kern="1200" dirty="0">
+                <a:solidFill>
+                  <a:schemeClr val="tx1"/>
+                </a:solidFill>
+                <a:effectLst/>
+                <a:latin typeface="+mn-lt"/>
+                <a:ea typeface="+mn-ea"/>
+                <a:cs typeface="+mn-cs"/>
+              </a:rPr>
+              <a:t>These results provide a baseline for comparing Logistic Regression with the Random Forest model.</a:t>
+            </a:r>
+          </a:p>
+          <a:p>
+            <a:pPr lvl="1">
+              <a:buFont typeface="Wingdings" pitchFamily="2" charset="2"/>
+              <a:buChar char="v"/>
+            </a:pPr>
+            <a:endParaRPr lang="en-US" dirty="0"/>
+          </a:p>
+        </p:txBody>
+      </p:sp>
+      <p:sp>
+        <p:nvSpPr>
+          <p:cNvPr id="4" name="Slide Number Placeholder 3"/>
+          <p:cNvSpPr>
+            <a:spLocks noGrp="1"/>
+          </p:cNvSpPr>
+          <p:nvPr>
+            <p:ph type="sldNum" sz="quarter" idx="5"/>
+          </p:nvPr>
+        </p:nvSpPr>
+        <p:spPr/>
+        <p:txBody>
+          <a:bodyPr/>
+          <a:lstStyle/>
+          <a:p>
+            <a:fld id="{BCD9374F-9954-F24E-8880-8CA162CE8CFB}" type="slidenum">
+              <a:rPr lang="en-US" smtClean="0"/>
+              <a:t>10</a:t>
+            </a:fld>
+            <a:endParaRPr lang="en-US"/>
+          </a:p>
+        </p:txBody>
+      </p:sp>
+    </p:spTree>
+    <p:extLst>
+      <p:ext uri="{BB962C8B-B14F-4D97-AF65-F5344CB8AC3E}">
+        <p14:creationId xmlns:p14="http://schemas.microsoft.com/office/powerpoint/2010/main" val="4282270121"/>
+      </p:ext>
+    </p:extLst>
+  </p:cSld>
+  <p:clrMapOvr>
+    <a:masterClrMapping/>
+  </p:clrMapOvr>
+</p:notes>
+</file>
+
+<file path=ppt/notesSlides/notesSlide9.xml><?xml version="1.0" encoding="utf-8"?>
+<p:notes xmlns:a="http://schemas.openxmlformats.org/drawingml/2006/main" xmlns:r="http://schemas.openxmlformats.org/officeDocument/2006/relationships" xmlns:p="http://schemas.openxmlformats.org/presentationml/2006/main">
+  <p:cSld>
+    <p:spTree>
+      <p:nvGrpSpPr>
+        <p:cNvPr id="1" name=""/>
+        <p:cNvGrpSpPr/>
+        <p:nvPr/>
+      </p:nvGrpSpPr>
+      <p:grpSpPr>
+        <a:xfrm>
+          <a:off x="0" y="0"/>
+          <a:ext cx="0" cy="0"/>
+          <a:chOff x="0" y="0"/>
+          <a:chExt cx="0" cy="0"/>
+        </a:xfrm>
+      </p:grpSpPr>
+      <p:sp>
+        <p:nvSpPr>
+          <p:cNvPr id="2" name="Slide Image Placeholder 1"/>
+          <p:cNvSpPr>
+            <a:spLocks noGrp="1" noRot="1" noChangeAspect="1"/>
+          </p:cNvSpPr>
+          <p:nvPr>
+            <p:ph type="sldImg"/>
+          </p:nvPr>
+        </p:nvSpPr>
+        <p:spPr/>
+      </p:sp>
+      <p:sp>
+        <p:nvSpPr>
+          <p:cNvPr id="3" name="Notes Placeholder 2"/>
+          <p:cNvSpPr>
+            <a:spLocks noGrp="1"/>
+          </p:cNvSpPr>
+          <p:nvPr>
+            <p:ph type="body" idx="1"/>
+          </p:nvPr>
+        </p:nvSpPr>
+        <p:spPr/>
+        <p:txBody>
+          <a:bodyPr/>
+          <a:lstStyle/>
+          <a:p>
+            <a:pPr marL="457200" lvl="1" indent="0">
+              <a:buNone/>
+            </a:pPr>
+            <a:r>
+              <a:rPr lang="en-US" sz="1600" dirty="0"/>
+              <a:t>Speaker notes:</a:t>
+            </a:r>
+          </a:p>
+          <a:p>
+            <a:pPr marL="457200" lvl="1" indent="0">
+              <a:buNone/>
+            </a:pPr>
+            <a:endParaRPr lang="en-US" sz="1600" dirty="0"/>
+          </a:p>
+          <a:p>
+            <a:r>
+              <a:rPr lang="en-US" sz="1200" kern="1200" dirty="0">
+                <a:solidFill>
+                  <a:schemeClr val="tx1"/>
+                </a:solidFill>
+                <a:effectLst/>
+                <a:latin typeface="+mn-lt"/>
+                <a:ea typeface="+mn-ea"/>
+                <a:cs typeface="+mn-cs"/>
+              </a:rPr>
+              <a:t>This slide shows the evaluation results for the Random Forest model, which is the tree-based approach used in this project. Accuracy measures the overall percentage of correct predictions across the ICU length-of-stay categories. Precision, recall, and F1-score provide a more complete view of how well the model performs for each class. The confusion matrix helps visualize where the Random Forest model predicts correctly and where misclassifications occur.</a:t>
+            </a:r>
+          </a:p>
+          <a:p>
+            <a:r>
+              <a:rPr lang="en-US" sz="1200" kern="1200" dirty="0">
+                <a:solidFill>
+                  <a:schemeClr val="tx1"/>
+                </a:solidFill>
+                <a:effectLst/>
+                <a:latin typeface="+mn-lt"/>
+                <a:ea typeface="+mn-ea"/>
+                <a:cs typeface="+mn-cs"/>
+              </a:rPr>
+              <a:t>Comparing these results with Logistic Regression helps determine whether the tree-based model performs better on this task.</a:t>
+            </a:r>
+          </a:p>
+          <a:p>
+            <a:pPr marL="457200" lvl="1" indent="0">
+              <a:buNone/>
+            </a:pPr>
+            <a:endParaRPr lang="en-US" dirty="0"/>
+          </a:p>
+        </p:txBody>
+      </p:sp>
+      <p:sp>
+        <p:nvSpPr>
+          <p:cNvPr id="4" name="Slide Number Placeholder 3"/>
+          <p:cNvSpPr>
+            <a:spLocks noGrp="1"/>
+          </p:cNvSpPr>
+          <p:nvPr>
+            <p:ph type="sldNum" sz="quarter" idx="5"/>
+          </p:nvPr>
+        </p:nvSpPr>
+        <p:spPr/>
+        <p:txBody>
+          <a:bodyPr/>
+          <a:lstStyle/>
+          <a:p>
+            <a:fld id="{BCD9374F-9954-F24E-8880-8CA162CE8CFB}" type="slidenum">
+              <a:rPr lang="en-US" smtClean="0"/>
+              <a:t>11</a:t>
+            </a:fld>
+            <a:endParaRPr lang="en-US"/>
+          </a:p>
+        </p:txBody>
+      </p:sp>
+    </p:spTree>
+    <p:extLst>
+      <p:ext uri="{BB962C8B-B14F-4D97-AF65-F5344CB8AC3E}">
+        <p14:creationId xmlns:p14="http://schemas.microsoft.com/office/powerpoint/2010/main" val="2303810035"/>
       </p:ext>
     </p:extLst>
   </p:cSld>
@@ -4013,7 +5630,7 @@
           <a:p>
             <a:fld id="{5BCAD085-E8A6-8845-BD4E-CB4CCA059FC4}" type="datetimeFigureOut">
               <a:rPr lang="en-US" smtClean="0"/>
-              <a:t>3/12/26</a:t>
+              <a:t>3/13/26</a:t>
             </a:fld>
             <a:endParaRPr lang="en-US"/>
           </a:p>
@@ -4181,7 +5798,7 @@
           <a:p>
             <a:fld id="{5BCAD085-E8A6-8845-BD4E-CB4CCA059FC4}" type="datetimeFigureOut">
               <a:rPr lang="en-US" smtClean="0"/>
-              <a:t>3/12/26</a:t>
+              <a:t>3/13/26</a:t>
             </a:fld>
             <a:endParaRPr lang="en-US"/>
           </a:p>
@@ -4359,7 +5976,7 @@
           <a:p>
             <a:fld id="{5BCAD085-E8A6-8845-BD4E-CB4CCA059FC4}" type="datetimeFigureOut">
               <a:rPr lang="en-US" smtClean="0"/>
-              <a:t>3/12/26</a:t>
+              <a:t>3/13/26</a:t>
             </a:fld>
             <a:endParaRPr lang="en-US"/>
           </a:p>
@@ -4527,7 +6144,7 @@
           <a:p>
             <a:fld id="{5BCAD085-E8A6-8845-BD4E-CB4CCA059FC4}" type="datetimeFigureOut">
               <a:rPr lang="en-US" smtClean="0"/>
-              <a:t>3/12/26</a:t>
+              <a:t>3/13/26</a:t>
             </a:fld>
             <a:endParaRPr lang="en-US"/>
           </a:p>
@@ -4772,7 +6389,7 @@
           <a:p>
             <a:fld id="{5BCAD085-E8A6-8845-BD4E-CB4CCA059FC4}" type="datetimeFigureOut">
               <a:rPr lang="en-US" smtClean="0"/>
-              <a:t>3/12/26</a:t>
+              <a:t>3/13/26</a:t>
             </a:fld>
             <a:endParaRPr lang="en-US"/>
           </a:p>
@@ -5057,7 +6674,7 @@
           <a:p>
             <a:fld id="{5BCAD085-E8A6-8845-BD4E-CB4CCA059FC4}" type="datetimeFigureOut">
               <a:rPr lang="en-US" smtClean="0"/>
-              <a:t>3/12/26</a:t>
+              <a:t>3/13/26</a:t>
             </a:fld>
             <a:endParaRPr lang="en-US"/>
           </a:p>
@@ -5476,7 +7093,7 @@
           <a:p>
             <a:fld id="{5BCAD085-E8A6-8845-BD4E-CB4CCA059FC4}" type="datetimeFigureOut">
               <a:rPr lang="en-US" smtClean="0"/>
-              <a:t>3/12/26</a:t>
+              <a:t>3/13/26</a:t>
             </a:fld>
             <a:endParaRPr lang="en-US"/>
           </a:p>
@@ -5593,7 +7210,7 @@
           <a:p>
             <a:fld id="{5BCAD085-E8A6-8845-BD4E-CB4CCA059FC4}" type="datetimeFigureOut">
               <a:rPr lang="en-US" smtClean="0"/>
-              <a:t>3/12/26</a:t>
+              <a:t>3/13/26</a:t>
             </a:fld>
             <a:endParaRPr lang="en-US"/>
           </a:p>
@@ -5688,7 +7305,7 @@
           <a:p>
             <a:fld id="{5BCAD085-E8A6-8845-BD4E-CB4CCA059FC4}" type="datetimeFigureOut">
               <a:rPr lang="en-US" smtClean="0"/>
-              <a:t>3/12/26</a:t>
+              <a:t>3/13/26</a:t>
             </a:fld>
             <a:endParaRPr lang="en-US"/>
           </a:p>
@@ -5963,7 +7580,7 @@
           <a:p>
             <a:fld id="{5BCAD085-E8A6-8845-BD4E-CB4CCA059FC4}" type="datetimeFigureOut">
               <a:rPr lang="en-US" smtClean="0"/>
-              <a:t>3/12/26</a:t>
+              <a:t>3/13/26</a:t>
             </a:fld>
             <a:endParaRPr lang="en-US"/>
           </a:p>
@@ -6215,7 +7832,7 @@
           <a:p>
             <a:fld id="{5BCAD085-E8A6-8845-BD4E-CB4CCA059FC4}" type="datetimeFigureOut">
               <a:rPr lang="en-US" smtClean="0"/>
-              <a:t>3/12/26</a:t>
+              <a:t>3/13/26</a:t>
             </a:fld>
             <a:endParaRPr lang="en-US"/>
           </a:p>
@@ -6426,7 +8043,7 @@
           <a:p>
             <a:fld id="{5BCAD085-E8A6-8845-BD4E-CB4CCA059FC4}" type="datetimeFigureOut">
               <a:rPr lang="en-US" smtClean="0"/>
-              <a:t>3/12/26</a:t>
+              <a:t>3/13/26</a:t>
             </a:fld>
             <a:endParaRPr lang="en-US"/>
           </a:p>
@@ -7643,13 +9260,13 @@
               </a:lnSpc>
             </a:pPr>
             <a:r>
-              <a:rPr lang="en-US" sz="2400"/>
+              <a:rPr lang="en-US" sz="2400" dirty="0"/>
               <a:t>Evaluation-Baseline model: Logistic Regression</a:t>
             </a:r>
             <a:br>
-              <a:rPr lang="en-US" sz="2400"/>
+              <a:rPr lang="en-US" sz="2400" dirty="0"/>
             </a:br>
-            <a:endParaRPr lang="en-US" sz="2400" b="1" i="1">
+            <a:endParaRPr lang="en-US" sz="2400" b="1" i="1" dirty="0">
               <a:latin typeface="Calibri" pitchFamily="34" charset="0"/>
               <a:cs typeface="Calibri" pitchFamily="34" charset="-120"/>
             </a:endParaRPr>
@@ -7689,7 +9306,7 @@
               <a:buChar char="Ø"/>
             </a:pPr>
             <a:r>
-              <a:rPr lang="en-US" sz="1600"/>
+              <a:rPr lang="en-US" sz="1600" dirty="0"/>
               <a:t>Accuracy</a:t>
             </a:r>
           </a:p>
@@ -7699,7 +9316,7 @@
               <a:buChar char="Ø"/>
             </a:pPr>
             <a:r>
-              <a:rPr lang="en-US" sz="1600"/>
+              <a:rPr lang="en-US" sz="1600" dirty="0"/>
               <a:t>Precision</a:t>
             </a:r>
           </a:p>
@@ -7709,7 +9326,7 @@
               <a:buChar char="Ø"/>
             </a:pPr>
             <a:r>
-              <a:rPr lang="en-US" sz="1600"/>
+              <a:rPr lang="en-US" sz="1600" dirty="0"/>
               <a:t>Recall</a:t>
             </a:r>
           </a:p>
@@ -7719,7 +9336,7 @@
               <a:buChar char="Ø"/>
             </a:pPr>
             <a:r>
-              <a:rPr lang="en-US" sz="1600"/>
+              <a:rPr lang="en-US" sz="1600" dirty="0"/>
               <a:t>F1-score</a:t>
             </a:r>
           </a:p>
@@ -7729,7 +9346,7 @@
               <a:buChar char="Ø"/>
             </a:pPr>
             <a:r>
-              <a:rPr lang="en-US" sz="1600"/>
+              <a:rPr lang="en-US" sz="1600" dirty="0"/>
               <a:t>Confusion matrix</a:t>
             </a:r>
           </a:p>
@@ -7737,38 +9354,19 @@
             <a:pPr marL="457200" lvl="1" indent="0">
               <a:buNone/>
             </a:pPr>
-            <a:endParaRPr lang="en-US" sz="1600"/>
-          </a:p>
-          <a:p>
-            <a:pPr lvl="1">
-              <a:buFont typeface="Wingdings" pitchFamily="2" charset="2"/>
-              <a:buChar char="v"/>
-            </a:pPr>
-            <a:r>
-              <a:rPr lang="en-US" sz="1600"/>
-              <a:t>Speaker notes:</a:t>
-            </a:r>
+            <a:endParaRPr lang="en-US" sz="1600" dirty="0"/>
           </a:p>
           <a:p>
             <a:pPr marL="457200" lvl="1" indent="0">
               <a:buNone/>
             </a:pPr>
-            <a:r>
-              <a:rPr lang="en-US" sz="1600"/>
-              <a:t>Using multiple metrics is important, especially when one LOS class may be more common than another.</a:t>
-            </a:r>
+            <a:endParaRPr lang="en-US" sz="1600" dirty="0"/>
           </a:p>
           <a:p>
             <a:pPr marL="457200" lvl="1" indent="0">
               <a:buNone/>
             </a:pPr>
-            <a:endParaRPr lang="en-US" sz="1600"/>
-          </a:p>
-          <a:p>
-            <a:pPr marL="457200" lvl="1" indent="0">
-              <a:buNone/>
-            </a:pPr>
-            <a:endParaRPr lang="en-US" sz="1600" b="1" i="1">
+            <a:endParaRPr lang="en-US" sz="1600" b="1" i="1" dirty="0">
               <a:latin typeface="Calibri" pitchFamily="34" charset="0"/>
               <a:ea typeface="+mj-ea"/>
               <a:cs typeface="Calibri" pitchFamily="34" charset="-120"/>
@@ -7791,7 +9389,7 @@
           <p:nvPr/>
         </p:nvPicPr>
         <p:blipFill>
-          <a:blip r:embed="rId2"/>
+          <a:blip r:embed="rId3"/>
           <a:srcRect r="23850" b="1"/>
           <a:stretch>
             <a:fillRect/>
@@ -8062,13 +9660,13 @@
               </a:lnSpc>
             </a:pPr>
             <a:r>
-              <a:rPr lang="en-US" sz="2600"/>
+              <a:rPr lang="en-US" sz="2600" dirty="0"/>
               <a:t>Evaluation Tree-based model: Random Forest</a:t>
             </a:r>
             <a:br>
-              <a:rPr lang="en-US" sz="2600"/>
+              <a:rPr lang="en-US" sz="2600" dirty="0"/>
             </a:br>
-            <a:endParaRPr lang="en-US" sz="2600" b="1" i="1">
+            <a:endParaRPr lang="en-US" sz="2600" b="1" i="1" dirty="0">
               <a:latin typeface="Calibri" pitchFamily="34" charset="0"/>
               <a:cs typeface="Calibri" pitchFamily="34" charset="-120"/>
             </a:endParaRPr>
@@ -8107,7 +9705,7 @@
               <a:buNone/>
             </a:pPr>
             <a:r>
-              <a:rPr lang="en-US" sz="1600"/>
+              <a:rPr lang="en-US" sz="1600" dirty="0"/>
               <a:t>Accuracy</a:t>
             </a:r>
           </a:p>
@@ -8116,7 +9714,7 @@
               <a:buNone/>
             </a:pPr>
             <a:r>
-              <a:rPr lang="en-US" sz="1600"/>
+              <a:rPr lang="en-US" sz="1600" dirty="0"/>
               <a:t>Precision</a:t>
             </a:r>
           </a:p>
@@ -8125,7 +9723,7 @@
               <a:buNone/>
             </a:pPr>
             <a:r>
-              <a:rPr lang="en-US" sz="1600"/>
+              <a:rPr lang="en-US" sz="1600" dirty="0"/>
               <a:t>Recall</a:t>
             </a:r>
           </a:p>
@@ -8134,7 +9732,7 @@
               <a:buNone/>
             </a:pPr>
             <a:r>
-              <a:rPr lang="en-US" sz="1600"/>
+              <a:rPr lang="en-US" sz="1600" dirty="0"/>
               <a:t>F1-score</a:t>
             </a:r>
           </a:p>
@@ -8143,7 +9741,7 @@
               <a:buNone/>
             </a:pPr>
             <a:r>
-              <a:rPr lang="en-US" sz="1600"/>
+              <a:rPr lang="en-US" sz="1600" dirty="0"/>
               <a:t>Confusion matrix</a:t>
             </a:r>
           </a:p>
@@ -8151,37 +9749,19 @@
             <a:pPr marL="457200" lvl="1" indent="0">
               <a:buNone/>
             </a:pPr>
-            <a:endParaRPr lang="en-US" sz="1600"/>
+            <a:endParaRPr lang="en-US" sz="1600" dirty="0"/>
           </a:p>
           <a:p>
             <a:pPr marL="457200" lvl="1" indent="0">
               <a:buNone/>
             </a:pPr>
-            <a:r>
-              <a:rPr lang="en-US" sz="1600"/>
-              <a:t>Speaker notes:</a:t>
-            </a:r>
+            <a:endParaRPr lang="en-US" sz="1600" dirty="0"/>
           </a:p>
           <a:p>
             <a:pPr marL="457200" lvl="1" indent="0">
               <a:buNone/>
             </a:pPr>
-            <a:r>
-              <a:rPr lang="en-US" sz="1600"/>
-              <a:t>Using multiple metrics is important, especially when one LOS class may be more common than another.</a:t>
-            </a:r>
-          </a:p>
-          <a:p>
-            <a:pPr marL="457200" lvl="1" indent="0">
-              <a:buNone/>
-            </a:pPr>
-            <a:endParaRPr lang="en-US" sz="1600"/>
-          </a:p>
-          <a:p>
-            <a:pPr marL="457200" lvl="1" indent="0">
-              <a:buNone/>
-            </a:pPr>
-            <a:endParaRPr lang="en-US" sz="1600" b="1" i="1">
+            <a:endParaRPr lang="en-US" sz="1600" b="1" i="1" dirty="0">
               <a:latin typeface="Calibri" pitchFamily="34" charset="0"/>
               <a:ea typeface="+mj-ea"/>
               <a:cs typeface="Calibri" pitchFamily="34" charset="-120"/>
@@ -8204,7 +9784,7 @@
           <p:nvPr/>
         </p:nvPicPr>
         <p:blipFill>
-          <a:blip r:embed="rId2"/>
+          <a:blip r:embed="rId3"/>
           <a:srcRect r="26570" b="1"/>
           <a:stretch>
             <a:fillRect/>
@@ -8470,16 +10050,16 @@
           <a:lstStyle/>
           <a:p>
             <a:r>
-              <a:rPr lang="en-US" sz="2600"/>
+              <a:rPr lang="en-US" sz="2600" dirty="0"/>
               <a:t>Confusion matrix</a:t>
             </a:r>
             <a:br>
-              <a:rPr lang="en-US" sz="2600"/>
+              <a:rPr lang="en-US" sz="2600" dirty="0"/>
             </a:br>
             <a:br>
               <a:rPr lang="en-US" sz="2600" dirty="0"/>
             </a:br>
-            <a:endParaRPr lang="en-US" sz="2600" b="1" i="1">
+            <a:endParaRPr lang="en-US" sz="2600" b="1" i="1" dirty="0">
               <a:latin typeface="Calibri" pitchFamily="34" charset="0"/>
               <a:cs typeface="Calibri" pitchFamily="34" charset="-120"/>
             </a:endParaRPr>
@@ -8519,7 +10099,7 @@
               <a:buChar char="Ø"/>
             </a:pPr>
             <a:r>
-              <a:rPr lang="en-US" sz="1700"/>
+              <a:rPr lang="en-US" sz="1700" dirty="0"/>
               <a:t>A confusion matrix helps show:</a:t>
             </a:r>
           </a:p>
@@ -8529,7 +10109,7 @@
               <a:buChar char="Ø"/>
             </a:pPr>
             <a:r>
-              <a:rPr lang="en-US" sz="1700"/>
+              <a:rPr lang="en-US" sz="1700" dirty="0"/>
               <a:t>which classes are predicted correctly,</a:t>
             </a:r>
           </a:p>
@@ -8539,7 +10119,7 @@
               <a:buChar char="Ø"/>
             </a:pPr>
             <a:r>
-              <a:rPr lang="en-US" sz="1700"/>
+              <a:rPr lang="en-US" sz="1700" dirty="0"/>
               <a:t>which categories are mixed up,</a:t>
             </a:r>
           </a:p>
@@ -8549,7 +10129,7 @@
               <a:buChar char="Ø"/>
             </a:pPr>
             <a:r>
-              <a:rPr lang="en-US" sz="1700"/>
+              <a:rPr lang="en-US" sz="1700" dirty="0"/>
               <a:t>whether the model struggles more with medium vs long stays.</a:t>
             </a:r>
           </a:p>
@@ -8557,13 +10137,13 @@
             <a:pPr marL="457200" lvl="1" indent="0">
               <a:buNone/>
             </a:pPr>
-            <a:endParaRPr lang="en-US" sz="1700"/>
+            <a:endParaRPr lang="en-US" sz="1700" dirty="0"/>
           </a:p>
           <a:p>
             <a:pPr marL="457200" lvl="1" indent="0">
               <a:buNone/>
             </a:pPr>
-            <a:endParaRPr lang="en-US" sz="1700" b="1" i="1">
+            <a:endParaRPr lang="en-US" sz="1700" b="1" i="1" dirty="0">
               <a:latin typeface="Calibri" pitchFamily="34" charset="0"/>
               <a:ea typeface="+mj-ea"/>
               <a:cs typeface="Calibri" pitchFamily="34" charset="-120"/>
@@ -8586,7 +10166,7 @@
           <p:nvPr/>
         </p:nvPicPr>
         <p:blipFill>
-          <a:blip r:embed="rId2"/>
+          <a:blip r:embed="rId3"/>
           <a:srcRect r="31036" b="-1"/>
           <a:stretch>
             <a:fillRect/>
@@ -8912,7 +10492,7 @@
           <a:lstStyle/>
           <a:p>
             <a:r>
-              <a:rPr lang="en-US" sz="3500"/>
+              <a:rPr lang="en-US" sz="3500" dirty="0"/>
               <a:t>Results and Interpretation</a:t>
             </a:r>
             <a:endParaRPr lang="en-US" sz="3500" b="1" i="1" dirty="0">
@@ -8937,7 +10517,7 @@
           <p:nvPr/>
         </p:nvPicPr>
         <p:blipFill>
-          <a:blip r:embed="rId2"/>
+          <a:blip r:embed="rId3"/>
           <a:srcRect r="8532" b="3"/>
           <a:stretch>
             <a:fillRect/>
@@ -9042,40 +10622,6 @@
             <a:endParaRPr lang="en-US" sz="1400" dirty="0"/>
           </a:p>
           <a:p>
-            <a:pPr lvl="1">
-              <a:lnSpc>
-                <a:spcPct val="90000"/>
-              </a:lnSpc>
-              <a:buFont typeface="Wingdings" pitchFamily="2" charset="2"/>
-              <a:buChar char="v"/>
-            </a:pPr>
-            <a:r>
-              <a:rPr lang="en-US" sz="1400" dirty="0"/>
-              <a:t>Speaker notes:</a:t>
-            </a:r>
-          </a:p>
-          <a:p>
-            <a:pPr marL="457200" lvl="1" indent="0">
-              <a:lnSpc>
-                <a:spcPct val="90000"/>
-              </a:lnSpc>
-              <a:buNone/>
-            </a:pPr>
-            <a:r>
-              <a:rPr lang="en-US" sz="1400" dirty="0"/>
-              <a:t>Interpret the stronger model and explain that richer clinical features could improve future performance.</a:t>
-            </a:r>
-          </a:p>
-          <a:p>
-            <a:pPr marL="457200" lvl="1" indent="0">
-              <a:lnSpc>
-                <a:spcPct val="90000"/>
-              </a:lnSpc>
-              <a:buNone/>
-            </a:pPr>
-            <a:endParaRPr lang="en-US" sz="1400" dirty="0"/>
-          </a:p>
-          <a:p>
             <a:pPr marL="457200" lvl="1" indent="0">
               <a:lnSpc>
                 <a:spcPct val="90000"/>
@@ -9105,7 +10651,7 @@
           <p:nvPr/>
         </p:nvPicPr>
         <p:blipFill>
-          <a:blip r:embed="rId3"/>
+          <a:blip r:embed="rId4"/>
           <a:srcRect r="13585" b="-3"/>
           <a:stretch>
             <a:fillRect/>
@@ -9172,7 +10718,7 @@
           <p:nvPr/>
         </p:nvPicPr>
         <p:blipFill>
-          <a:blip r:embed="rId2"/>
+          <a:blip r:embed="rId3"/>
           <a:srcRect l="46657" r="13849" b="-2"/>
           <a:stretch>
             <a:fillRect/>
@@ -9257,7 +10803,7 @@
         </p:xfrm>
         <a:graphic>
           <a:graphicData uri="http://schemas.openxmlformats.org/drawingml/2006/diagram">
-            <dgm:relIds xmlns:dgm="http://schemas.openxmlformats.org/drawingml/2006/diagram" xmlns:r="http://schemas.openxmlformats.org/officeDocument/2006/relationships" r:dm="rId3" r:lo="rId4" r:qs="rId5" r:cs="rId6"/>
+            <dgm:relIds xmlns:dgm="http://schemas.openxmlformats.org/drawingml/2006/diagram" xmlns:r="http://schemas.openxmlformats.org/officeDocument/2006/relationships" r:dm="rId4" r:lo="rId5" r:qs="rId6" r:cs="rId7"/>
           </a:graphicData>
         </a:graphic>
       </p:graphicFrame>
@@ -10017,7 +11563,7 @@
             </a:pPr>
             <a:r>
               <a:rPr lang="en-US" sz="1700" b="1" dirty="0"/>
-              <a:t>Tutorial: Selg Learning:-</a:t>
+              <a:t>Tutorial: Self Learning:-</a:t>
             </a:r>
           </a:p>
           <a:p>
@@ -10803,8 +12349,8 @@
         </p:nvSpPr>
         <p:spPr>
           <a:xfrm>
-            <a:off x="350041" y="586855"/>
-            <a:ext cx="2401025" cy="3387497"/>
+            <a:off x="1" y="586855"/>
+            <a:ext cx="2751066" cy="3387497"/>
           </a:xfrm>
         </p:spPr>
         <p:txBody>
@@ -10813,7 +12359,6 @@
           </a:bodyPr>
           <a:lstStyle/>
           <a:p>
-            <a:pPr algn="r"/>
             <a:r>
               <a:rPr lang="en-US" sz="3500" b="1" i="1" dirty="0">
                 <a:solidFill>
@@ -10884,6 +12429,69 @@
             </a:r>
           </a:p>
           <a:p>
+            <a:pPr fontAlgn="ctr">
+              <a:buFont typeface="Wingdings" pitchFamily="2" charset="2"/>
+              <a:buChar char="Ø"/>
+            </a:pPr>
+            <a:r>
+              <a:rPr lang="en-US" sz="1700" dirty="0"/>
+              <a:t>Diabetes is a major contributor to hospitalization and critical care needs</a:t>
+            </a:r>
+          </a:p>
+          <a:p>
+            <a:pPr fontAlgn="ctr">
+              <a:buFont typeface="Wingdings" pitchFamily="2" charset="2"/>
+              <a:buChar char="Ø"/>
+            </a:pPr>
+            <a:r>
+              <a:rPr lang="en-US" sz="1700" dirty="0"/>
+              <a:t>ICU management for diabetic patients is often more complex due to complications and comorbidities</a:t>
+            </a:r>
+          </a:p>
+          <a:p>
+            <a:pPr fontAlgn="ctr">
+              <a:buFont typeface="Wingdings" pitchFamily="2" charset="2"/>
+              <a:buChar char="Ø"/>
+            </a:pPr>
+            <a:r>
+              <a:rPr lang="en-US" sz="1700" dirty="0"/>
+              <a:t>Predicting length of stay can help improve staffing, bed planning, and resource use</a:t>
+            </a:r>
+            <a:endParaRPr lang="en-US" dirty="0"/>
+          </a:p>
+          <a:p>
+            <a:pPr>
+              <a:spcBef>
+                <a:spcPct val="0"/>
+              </a:spcBef>
+              <a:spcAft>
+                <a:spcPts val="600"/>
+              </a:spcAft>
+              <a:buFont typeface="Wingdings" pitchFamily="2" charset="2"/>
+              <a:buChar char="Ø"/>
+            </a:pPr>
+            <a:r>
+              <a:rPr lang="en-US" sz="1700" dirty="0"/>
+              <a:t>Diabetic ICU care is often more complex</a:t>
+            </a:r>
+          </a:p>
+          <a:p>
+            <a:pPr>
+              <a:spcBef>
+                <a:spcPct val="0"/>
+              </a:spcBef>
+              <a:spcAft>
+                <a:spcPts val="600"/>
+              </a:spcAft>
+              <a:buFont typeface="Wingdings" pitchFamily="2" charset="2"/>
+              <a:buChar char="Ø"/>
+            </a:pPr>
+            <a:r>
+              <a:rPr lang="en-US" sz="1700" dirty="0"/>
+              <a:t>Predicting LOS can help with planning and resource allocation</a:t>
+            </a:r>
+          </a:p>
+          <a:p>
             <a:pPr marL="0" indent="0">
               <a:spcBef>
                 <a:spcPct val="0"/>
@@ -10894,93 +12502,6 @@
               <a:buNone/>
             </a:pPr>
             <a:endParaRPr lang="en-US" sz="1700" dirty="0"/>
-          </a:p>
-          <a:p>
-            <a:pPr>
-              <a:spcBef>
-                <a:spcPct val="0"/>
-              </a:spcBef>
-              <a:spcAft>
-                <a:spcPts val="600"/>
-              </a:spcAft>
-              <a:buFont typeface="Wingdings" pitchFamily="2" charset="2"/>
-              <a:buChar char="Ø"/>
-            </a:pPr>
-            <a:r>
-              <a:rPr lang="en-US" sz="1700" dirty="0"/>
-              <a:t>Diabetic ICU care is often more complex</a:t>
-            </a:r>
-          </a:p>
-          <a:p>
-            <a:pPr>
-              <a:spcBef>
-                <a:spcPct val="0"/>
-              </a:spcBef>
-              <a:spcAft>
-                <a:spcPts val="600"/>
-              </a:spcAft>
-              <a:buFont typeface="Wingdings" pitchFamily="2" charset="2"/>
-              <a:buChar char="Ø"/>
-            </a:pPr>
-            <a:r>
-              <a:rPr lang="en-US" sz="1700" dirty="0"/>
-              <a:t>Predicting LOS can help with planning and resource allocation</a:t>
-            </a:r>
-          </a:p>
-          <a:p>
-            <a:pPr marL="0" indent="0">
-              <a:spcBef>
-                <a:spcPct val="0"/>
-              </a:spcBef>
-              <a:spcAft>
-                <a:spcPts val="600"/>
-              </a:spcAft>
-              <a:buNone/>
-            </a:pPr>
-            <a:endParaRPr lang="en-US" sz="1700" dirty="0"/>
-          </a:p>
-          <a:p>
-            <a:pPr>
-              <a:spcBef>
-                <a:spcPct val="0"/>
-              </a:spcBef>
-              <a:spcAft>
-                <a:spcPts val="600"/>
-              </a:spcAft>
-              <a:buFont typeface="Wingdings" pitchFamily="2" charset="2"/>
-              <a:buChar char="v"/>
-            </a:pPr>
-            <a:r>
-              <a:rPr lang="en-US" sz="1700" dirty="0"/>
-              <a:t>Speaker notes:</a:t>
-            </a:r>
-          </a:p>
-          <a:p>
-            <a:pPr marL="0" indent="0">
-              <a:spcBef>
-                <a:spcPct val="0"/>
-              </a:spcBef>
-              <a:spcAft>
-                <a:spcPts val="600"/>
-              </a:spcAft>
-              <a:buNone/>
-            </a:pPr>
-            <a:endParaRPr lang="en-US" sz="1700" dirty="0"/>
-          </a:p>
-          <a:p>
-            <a:pPr marL="0" indent="0">
-              <a:spcBef>
-                <a:spcPct val="0"/>
-              </a:spcBef>
-              <a:spcAft>
-                <a:spcPts val="600"/>
-              </a:spcAft>
-              <a:buNone/>
-            </a:pPr>
-            <a:r>
-              <a:rPr lang="en-US" sz="1700" dirty="0"/>
-              <a:t>Diabetes can complicate ICU treatment and recovery. Predicting ICU stay length can support hospital planning and demonstrates a practical healthcare ML use case.</a:t>
-            </a:r>
           </a:p>
         </p:txBody>
       </p:sp>
@@ -11673,7 +13194,6 @@
           </a:bodyPr>
           <a:lstStyle/>
           <a:p>
-            <a:pPr algn="r"/>
             <a:r>
               <a:rPr lang="en-US" sz="3500" b="1" i="1" dirty="0">
                 <a:solidFill>
@@ -11801,31 +13321,6 @@
               <a:buNone/>
             </a:pPr>
             <a:endParaRPr lang="en-US" sz="1800" dirty="0"/>
-          </a:p>
-          <a:p>
-            <a:pPr lvl="1">
-              <a:lnSpc>
-                <a:spcPct val="90000"/>
-              </a:lnSpc>
-              <a:buFont typeface="Wingdings" pitchFamily="2" charset="2"/>
-              <a:buChar char="v"/>
-            </a:pPr>
-            <a:r>
-              <a:rPr lang="en-US" sz="1800" dirty="0"/>
-              <a:t>Speaker notes:</a:t>
-            </a:r>
-          </a:p>
-          <a:p>
-            <a:pPr marL="457200" lvl="1" indent="0">
-              <a:lnSpc>
-                <a:spcPct val="90000"/>
-              </a:lnSpc>
-              <a:buNone/>
-            </a:pPr>
-            <a:r>
-              <a:rPr lang="en-US" sz="1800" dirty="0"/>
-              <a:t>The goal is to teach a complete workflow: cohort selection, preprocessing, feature engineering, modeling, and evaluation.</a:t>
-            </a:r>
           </a:p>
         </p:txBody>
       </p:sp>
@@ -12617,25 +14112,6 @@
             <a:endParaRPr lang="en-US" sz="1700" dirty="0"/>
           </a:p>
           <a:p>
-            <a:pPr lvl="1">
-              <a:buFont typeface="Wingdings" pitchFamily="2" charset="2"/>
-              <a:buChar char="v"/>
-            </a:pPr>
-            <a:r>
-              <a:rPr lang="en-US" sz="1700" dirty="0"/>
-              <a:t>Speaker notes:</a:t>
-            </a:r>
-          </a:p>
-          <a:p>
-            <a:pPr marL="457200" lvl="1" indent="0">
-              <a:buNone/>
-            </a:pPr>
-            <a:r>
-              <a:rPr lang="en-US" sz="1700" dirty="0"/>
-              <a:t>This turns a continuous hospital outcome into an easier multiclass classification problem.</a:t>
-            </a:r>
-          </a:p>
-          <a:p>
             <a:pPr marL="457200" lvl="1" indent="0">
               <a:buNone/>
             </a:pPr>
@@ -13225,30 +14701,6 @@
               </a:lnSpc>
               <a:buNone/>
             </a:pPr>
-            <a:r>
-              <a:rPr lang="en-US" sz="1500" dirty="0"/>
-              <a:t>Speaker notes:</a:t>
-            </a:r>
-          </a:p>
-          <a:p>
-            <a:pPr marL="457200" lvl="1" indent="0">
-              <a:lnSpc>
-                <a:spcPct val="90000"/>
-              </a:lnSpc>
-              <a:buNone/>
-            </a:pPr>
-            <a:r>
-              <a:rPr lang="en-US" sz="1500" dirty="0"/>
-              <a:t>The diabetes cohort is created using diagnosis codes from MIMIC-III, then merged with ICU and admission information.</a:t>
-            </a:r>
-          </a:p>
-          <a:p>
-            <a:pPr marL="457200" lvl="1" indent="0">
-              <a:lnSpc>
-                <a:spcPct val="90000"/>
-              </a:lnSpc>
-              <a:buNone/>
-            </a:pPr>
             <a:endParaRPr lang="en-US" sz="1500" dirty="0"/>
           </a:p>
           <a:p>
@@ -13281,7 +14733,7 @@
           <p:nvPr/>
         </p:nvPicPr>
         <p:blipFill>
-          <a:blip r:embed="rId2"/>
+          <a:blip r:embed="rId3"/>
           <a:srcRect l="51693" r="18786" b="-2"/>
           <a:stretch>
             <a:fillRect/>
@@ -13312,7 +14764,7 @@
           <p:nvPr/>
         </p:nvPicPr>
         <p:blipFill>
-          <a:blip r:embed="rId3"/>
+          <a:blip r:embed="rId4"/>
           <a:srcRect l="5025" r="33337" b="3"/>
           <a:stretch>
             <a:fillRect/>
@@ -13950,40 +15402,6 @@
             <a:endParaRPr lang="en-US" sz="1300" dirty="0"/>
           </a:p>
           <a:p>
-            <a:pPr lvl="1">
-              <a:lnSpc>
-                <a:spcPct val="90000"/>
-              </a:lnSpc>
-              <a:buFont typeface="Wingdings" pitchFamily="2" charset="2"/>
-              <a:buChar char="v"/>
-            </a:pPr>
-            <a:r>
-              <a:rPr lang="en-US" sz="1300" dirty="0"/>
-              <a:t>Speaker notes:</a:t>
-            </a:r>
-          </a:p>
-          <a:p>
-            <a:pPr marL="457200" lvl="1" indent="0">
-              <a:lnSpc>
-                <a:spcPct val="90000"/>
-              </a:lnSpc>
-              <a:buNone/>
-            </a:pPr>
-            <a:r>
-              <a:rPr lang="en-US" sz="1300" dirty="0"/>
-              <a:t>These features are simple, interpretable, and easy to teach in a tutorial.</a:t>
-            </a:r>
-          </a:p>
-          <a:p>
-            <a:pPr marL="457200" lvl="1" indent="0">
-              <a:lnSpc>
-                <a:spcPct val="90000"/>
-              </a:lnSpc>
-              <a:buNone/>
-            </a:pPr>
-            <a:endParaRPr lang="en-US" sz="1300" dirty="0"/>
-          </a:p>
-          <a:p>
             <a:pPr marL="457200" lvl="1" indent="0">
               <a:lnSpc>
                 <a:spcPct val="90000"/>
@@ -14174,7 +15592,7 @@
         </p:spPr>
         <p:txBody>
           <a:bodyPr anchor="t">
-            <a:normAutofit lnSpcReduction="10000"/>
+            <a:normAutofit/>
           </a:bodyPr>
           <a:lstStyle/>
           <a:p>
@@ -14224,31 +15642,6 @@
               <a:buNone/>
             </a:pPr>
             <a:endParaRPr lang="en-US" sz="1700" dirty="0"/>
-          </a:p>
-          <a:p>
-            <a:pPr lvl="1">
-              <a:lnSpc>
-                <a:spcPct val="90000"/>
-              </a:lnSpc>
-              <a:buFont typeface="Wingdings" pitchFamily="2" charset="2"/>
-              <a:buChar char="v"/>
-            </a:pPr>
-            <a:r>
-              <a:rPr lang="en-US" sz="1700" dirty="0"/>
-              <a:t>Speaker notes:</a:t>
-            </a:r>
-          </a:p>
-          <a:p>
-            <a:pPr marL="457200" lvl="1" indent="0">
-              <a:lnSpc>
-                <a:spcPct val="90000"/>
-              </a:lnSpc>
-              <a:buNone/>
-            </a:pPr>
-            <a:r>
-              <a:rPr lang="en-US" sz="1700" dirty="0"/>
-              <a:t>This creates the final multiclass label for model training.</a:t>
-            </a:r>
           </a:p>
           <a:p>
             <a:pPr marL="457200" lvl="1" indent="0">
@@ -14289,7 +15682,7 @@
           <p:nvPr/>
         </p:nvPicPr>
         <p:blipFill>
-          <a:blip r:embed="rId2"/>
+          <a:blip r:embed="rId3"/>
           <a:srcRect l="48272" r="15370" b="2"/>
           <a:stretch>
             <a:fillRect/>
@@ -14320,7 +15713,7 @@
           <p:nvPr/>
         </p:nvPicPr>
         <p:blipFill>
-          <a:blip r:embed="rId3"/>
+          <a:blip r:embed="rId4"/>
           <a:srcRect l="8353" r="22859" b="-3"/>
           <a:stretch>
             <a:fillRect/>
@@ -14641,7 +16034,7 @@
           <p:nvPr/>
         </p:nvPicPr>
         <p:blipFill>
-          <a:blip r:embed="rId2"/>
+          <a:blip r:embed="rId3"/>
           <a:srcRect r="19554" b="-4"/>
           <a:stretch>
             <a:fillRect/>
@@ -14871,25 +16264,6 @@
             <a:endParaRPr lang="en-US" sz="1700" dirty="0"/>
           </a:p>
           <a:p>
-            <a:pPr lvl="1">
-              <a:buFont typeface="Wingdings" pitchFamily="2" charset="2"/>
-              <a:buChar char="v"/>
-            </a:pPr>
-            <a:r>
-              <a:rPr lang="en-US" sz="1700" dirty="0"/>
-              <a:t>Speaker notes:</a:t>
-            </a:r>
-          </a:p>
-          <a:p>
-            <a:pPr marL="457200" lvl="1" indent="0">
-              <a:buNone/>
-            </a:pPr>
-            <a:r>
-              <a:rPr lang="en-US" sz="1700" dirty="0"/>
-              <a:t>Logistic Regression acts as the baseline. Random Forest captures more complex patterns.</a:t>
-            </a:r>
-          </a:p>
-          <a:p>
             <a:pPr marL="457200" lvl="1" indent="0">
               <a:buNone/>
             </a:pPr>
@@ -14922,7 +16296,7 @@
           <p:nvPr/>
         </p:nvPicPr>
         <p:blipFill>
-          <a:blip r:embed="rId3"/>
+          <a:blip r:embed="rId4"/>
           <a:srcRect l="54101" r="21195" b="-2"/>
           <a:stretch>
             <a:fillRect/>

--- a/akr3222-SelfLearningTuotorial.pptx
+++ b/akr3222-SelfLearningTuotorial.pptx
@@ -5,23 +5,25 @@
     <p:sldMasterId id="2147483648" r:id="rId1"/>
   </p:sldMasterIdLst>
   <p:notesMasterIdLst>
-    <p:notesMasterId r:id="rId16"/>
+    <p:notesMasterId r:id="rId18"/>
   </p:notesMasterIdLst>
   <p:sldIdLst>
     <p:sldId id="256" r:id="rId2"/>
     <p:sldId id="277" r:id="rId3"/>
-    <p:sldId id="257" r:id="rId4"/>
-    <p:sldId id="278" r:id="rId5"/>
-    <p:sldId id="279" r:id="rId6"/>
-    <p:sldId id="281" r:id="rId7"/>
-    <p:sldId id="282" r:id="rId8"/>
-    <p:sldId id="283" r:id="rId9"/>
-    <p:sldId id="284" r:id="rId10"/>
-    <p:sldId id="285" r:id="rId11"/>
-    <p:sldId id="288" r:id="rId12"/>
-    <p:sldId id="289" r:id="rId13"/>
-    <p:sldId id="286" r:id="rId14"/>
-    <p:sldId id="287" r:id="rId15"/>
+    <p:sldId id="290" r:id="rId4"/>
+    <p:sldId id="257" r:id="rId5"/>
+    <p:sldId id="278" r:id="rId6"/>
+    <p:sldId id="279" r:id="rId7"/>
+    <p:sldId id="281" r:id="rId8"/>
+    <p:sldId id="282" r:id="rId9"/>
+    <p:sldId id="283" r:id="rId10"/>
+    <p:sldId id="284" r:id="rId11"/>
+    <p:sldId id="285" r:id="rId12"/>
+    <p:sldId id="288" r:id="rId13"/>
+    <p:sldId id="289" r:id="rId14"/>
+    <p:sldId id="286" r:id="rId15"/>
+    <p:sldId id="291" r:id="rId16"/>
+    <p:sldId id="287" r:id="rId17"/>
   </p:sldIdLst>
   <p:sldSz cx="9144000" cy="6858000" type="screen4x3"/>
   <p:notesSz cx="6858000" cy="9144000"/>
@@ -886,11 +888,1076 @@
 </dgm:colorsDef>
 </file>
 
+<file path=ppt/diagrams/colors2.xml><?xml version="1.0" encoding="utf-8"?>
+<dgm:colorsDef xmlns:dgm="http://schemas.openxmlformats.org/drawingml/2006/diagram" xmlns:a="http://schemas.openxmlformats.org/drawingml/2006/main" uniqueId="urn:microsoft.com/office/officeart/2005/8/colors/accent1_2">
+  <dgm:title val=""/>
+  <dgm:desc val=""/>
+  <dgm:catLst>
+    <dgm:cat type="accent1" pri="11200"/>
+  </dgm:catLst>
+  <dgm:styleLbl name="node0">
+    <dgm:fillClrLst meth="repeat">
+      <a:schemeClr val="accent1"/>
+    </dgm:fillClrLst>
+    <dgm:linClrLst meth="repeat">
+      <a:schemeClr val="lt1"/>
+    </dgm:linClrLst>
+    <dgm:effectClrLst/>
+    <dgm:txLinClrLst/>
+    <dgm:txFillClrLst/>
+    <dgm:txEffectClrLst/>
+  </dgm:styleLbl>
+  <dgm:styleLbl name="alignNode1">
+    <dgm:fillClrLst meth="repeat">
+      <a:schemeClr val="accent1"/>
+    </dgm:fillClrLst>
+    <dgm:linClrLst meth="repeat">
+      <a:schemeClr val="accent1"/>
+    </dgm:linClrLst>
+    <dgm:effectClrLst/>
+    <dgm:txLinClrLst/>
+    <dgm:txFillClrLst/>
+    <dgm:txEffectClrLst/>
+  </dgm:styleLbl>
+  <dgm:styleLbl name="node1">
+    <dgm:fillClrLst meth="repeat">
+      <a:schemeClr val="accent1"/>
+    </dgm:fillClrLst>
+    <dgm:linClrLst meth="repeat">
+      <a:schemeClr val="lt1"/>
+    </dgm:linClrLst>
+    <dgm:effectClrLst/>
+    <dgm:txLinClrLst/>
+    <dgm:txFillClrLst/>
+    <dgm:txEffectClrLst/>
+  </dgm:styleLbl>
+  <dgm:styleLbl name="lnNode1">
+    <dgm:fillClrLst meth="repeat">
+      <a:schemeClr val="accent1"/>
+    </dgm:fillClrLst>
+    <dgm:linClrLst meth="repeat">
+      <a:schemeClr val="lt1"/>
+    </dgm:linClrLst>
+    <dgm:effectClrLst/>
+    <dgm:txLinClrLst/>
+    <dgm:txFillClrLst/>
+    <dgm:txEffectClrLst/>
+  </dgm:styleLbl>
+  <dgm:styleLbl name="vennNode1">
+    <dgm:fillClrLst meth="repeat">
+      <a:schemeClr val="accent1">
+        <a:alpha val="50000"/>
+      </a:schemeClr>
+    </dgm:fillClrLst>
+    <dgm:linClrLst meth="repeat">
+      <a:schemeClr val="lt1"/>
+    </dgm:linClrLst>
+    <dgm:effectClrLst/>
+    <dgm:txLinClrLst/>
+    <dgm:txFillClrLst/>
+    <dgm:txEffectClrLst/>
+  </dgm:styleLbl>
+  <dgm:styleLbl name="node2">
+    <dgm:fillClrLst meth="repeat">
+      <a:schemeClr val="accent1"/>
+    </dgm:fillClrLst>
+    <dgm:linClrLst meth="repeat">
+      <a:schemeClr val="lt1"/>
+    </dgm:linClrLst>
+    <dgm:effectClrLst/>
+    <dgm:txLinClrLst/>
+    <dgm:txFillClrLst/>
+    <dgm:txEffectClrLst/>
+  </dgm:styleLbl>
+  <dgm:styleLbl name="node3">
+    <dgm:fillClrLst meth="repeat">
+      <a:schemeClr val="accent1"/>
+    </dgm:fillClrLst>
+    <dgm:linClrLst meth="repeat">
+      <a:schemeClr val="lt1"/>
+    </dgm:linClrLst>
+    <dgm:effectClrLst/>
+    <dgm:txLinClrLst/>
+    <dgm:txFillClrLst/>
+    <dgm:txEffectClrLst/>
+  </dgm:styleLbl>
+  <dgm:styleLbl name="node4">
+    <dgm:fillClrLst meth="repeat">
+      <a:schemeClr val="accent1"/>
+    </dgm:fillClrLst>
+    <dgm:linClrLst meth="repeat">
+      <a:schemeClr val="lt1"/>
+    </dgm:linClrLst>
+    <dgm:effectClrLst/>
+    <dgm:txLinClrLst/>
+    <dgm:txFillClrLst/>
+    <dgm:txEffectClrLst/>
+  </dgm:styleLbl>
+  <dgm:styleLbl name="fgImgPlace1">
+    <dgm:fillClrLst meth="repeat">
+      <a:schemeClr val="accent1">
+        <a:tint val="50000"/>
+      </a:schemeClr>
+    </dgm:fillClrLst>
+    <dgm:linClrLst meth="repeat">
+      <a:schemeClr val="lt1"/>
+    </dgm:linClrLst>
+    <dgm:effectClrLst/>
+    <dgm:txLinClrLst/>
+    <dgm:txFillClrLst meth="repeat">
+      <a:schemeClr val="lt1"/>
+    </dgm:txFillClrLst>
+    <dgm:txEffectClrLst/>
+  </dgm:styleLbl>
+  <dgm:styleLbl name="alignImgPlace1">
+    <dgm:fillClrLst meth="repeat">
+      <a:schemeClr val="accent1">
+        <a:tint val="50000"/>
+      </a:schemeClr>
+    </dgm:fillClrLst>
+    <dgm:linClrLst meth="repeat">
+      <a:schemeClr val="lt1"/>
+    </dgm:linClrLst>
+    <dgm:effectClrLst/>
+    <dgm:txLinClrLst/>
+    <dgm:txFillClrLst meth="repeat">
+      <a:schemeClr val="lt1"/>
+    </dgm:txFillClrLst>
+    <dgm:txEffectClrLst/>
+  </dgm:styleLbl>
+  <dgm:styleLbl name="bgImgPlace1">
+    <dgm:fillClrLst meth="repeat">
+      <a:schemeClr val="accent1">
+        <a:tint val="50000"/>
+      </a:schemeClr>
+    </dgm:fillClrLst>
+    <dgm:linClrLst meth="repeat">
+      <a:schemeClr val="lt1"/>
+    </dgm:linClrLst>
+    <dgm:effectClrLst/>
+    <dgm:txLinClrLst/>
+    <dgm:txFillClrLst meth="repeat">
+      <a:schemeClr val="lt1"/>
+    </dgm:txFillClrLst>
+    <dgm:txEffectClrLst/>
+  </dgm:styleLbl>
+  <dgm:styleLbl name="sibTrans2D1">
+    <dgm:fillClrLst meth="repeat">
+      <a:schemeClr val="accent1">
+        <a:tint val="60000"/>
+      </a:schemeClr>
+    </dgm:fillClrLst>
+    <dgm:linClrLst meth="repeat">
+      <a:schemeClr val="accent1">
+        <a:tint val="60000"/>
+      </a:schemeClr>
+    </dgm:linClrLst>
+    <dgm:effectClrLst/>
+    <dgm:txLinClrLst/>
+    <dgm:txFillClrLst/>
+    <dgm:txEffectClrLst/>
+  </dgm:styleLbl>
+  <dgm:styleLbl name="fgSibTrans2D1">
+    <dgm:fillClrLst meth="repeat">
+      <a:schemeClr val="accent1">
+        <a:tint val="60000"/>
+      </a:schemeClr>
+    </dgm:fillClrLst>
+    <dgm:linClrLst meth="repeat">
+      <a:schemeClr val="accent1">
+        <a:tint val="60000"/>
+      </a:schemeClr>
+    </dgm:linClrLst>
+    <dgm:effectClrLst/>
+    <dgm:txLinClrLst/>
+    <dgm:txFillClrLst/>
+    <dgm:txEffectClrLst/>
+  </dgm:styleLbl>
+  <dgm:styleLbl name="bgSibTrans2D1">
+    <dgm:fillClrLst meth="repeat">
+      <a:schemeClr val="accent1">
+        <a:tint val="60000"/>
+      </a:schemeClr>
+    </dgm:fillClrLst>
+    <dgm:linClrLst meth="repeat">
+      <a:schemeClr val="accent1">
+        <a:tint val="60000"/>
+      </a:schemeClr>
+    </dgm:linClrLst>
+    <dgm:effectClrLst/>
+    <dgm:txLinClrLst/>
+    <dgm:txFillClrLst/>
+    <dgm:txEffectClrLst/>
+  </dgm:styleLbl>
+  <dgm:styleLbl name="sibTrans1D1">
+    <dgm:fillClrLst meth="repeat">
+      <a:schemeClr val="accent1"/>
+    </dgm:fillClrLst>
+    <dgm:linClrLst meth="repeat">
+      <a:schemeClr val="accent1"/>
+    </dgm:linClrLst>
+    <dgm:effectClrLst/>
+    <dgm:txLinClrLst/>
+    <dgm:txFillClrLst meth="repeat">
+      <a:schemeClr val="tx1"/>
+    </dgm:txFillClrLst>
+    <dgm:txEffectClrLst/>
+  </dgm:styleLbl>
+  <dgm:styleLbl name="callout">
+    <dgm:fillClrLst meth="repeat">
+      <a:schemeClr val="accent1"/>
+    </dgm:fillClrLst>
+    <dgm:linClrLst meth="repeat">
+      <a:schemeClr val="accent1">
+        <a:tint val="50000"/>
+      </a:schemeClr>
+    </dgm:linClrLst>
+    <dgm:effectClrLst/>
+    <dgm:txLinClrLst/>
+    <dgm:txFillClrLst meth="repeat">
+      <a:schemeClr val="tx1"/>
+    </dgm:txFillClrLst>
+    <dgm:txEffectClrLst/>
+  </dgm:styleLbl>
+  <dgm:styleLbl name="asst0">
+    <dgm:fillClrLst meth="repeat">
+      <a:schemeClr val="accent1"/>
+    </dgm:fillClrLst>
+    <dgm:linClrLst meth="repeat">
+      <a:schemeClr val="lt1"/>
+    </dgm:linClrLst>
+    <dgm:effectClrLst/>
+    <dgm:txLinClrLst/>
+    <dgm:txFillClrLst/>
+    <dgm:txEffectClrLst/>
+  </dgm:styleLbl>
+  <dgm:styleLbl name="asst1">
+    <dgm:fillClrLst meth="repeat">
+      <a:schemeClr val="accent1"/>
+    </dgm:fillClrLst>
+    <dgm:linClrLst meth="repeat">
+      <a:schemeClr val="lt1"/>
+    </dgm:linClrLst>
+    <dgm:effectClrLst/>
+    <dgm:txLinClrLst/>
+    <dgm:txFillClrLst/>
+    <dgm:txEffectClrLst/>
+  </dgm:styleLbl>
+  <dgm:styleLbl name="asst2">
+    <dgm:fillClrLst meth="repeat">
+      <a:schemeClr val="accent1"/>
+    </dgm:fillClrLst>
+    <dgm:linClrLst meth="repeat">
+      <a:schemeClr val="lt1"/>
+    </dgm:linClrLst>
+    <dgm:effectClrLst/>
+    <dgm:txLinClrLst/>
+    <dgm:txFillClrLst/>
+    <dgm:txEffectClrLst/>
+  </dgm:styleLbl>
+  <dgm:styleLbl name="asst3">
+    <dgm:fillClrLst meth="repeat">
+      <a:schemeClr val="accent1"/>
+    </dgm:fillClrLst>
+    <dgm:linClrLst meth="repeat">
+      <a:schemeClr val="lt1"/>
+    </dgm:linClrLst>
+    <dgm:effectClrLst/>
+    <dgm:txLinClrLst/>
+    <dgm:txFillClrLst/>
+    <dgm:txEffectClrLst/>
+  </dgm:styleLbl>
+  <dgm:styleLbl name="asst4">
+    <dgm:fillClrLst meth="repeat">
+      <a:schemeClr val="accent1"/>
+    </dgm:fillClrLst>
+    <dgm:linClrLst meth="repeat">
+      <a:schemeClr val="lt1"/>
+    </dgm:linClrLst>
+    <dgm:effectClrLst/>
+    <dgm:txLinClrLst/>
+    <dgm:txFillClrLst/>
+    <dgm:txEffectClrLst/>
+  </dgm:styleLbl>
+  <dgm:styleLbl name="parChTrans2D1">
+    <dgm:fillClrLst meth="repeat">
+      <a:schemeClr val="accent1">
+        <a:tint val="60000"/>
+      </a:schemeClr>
+    </dgm:fillClrLst>
+    <dgm:linClrLst meth="repeat">
+      <a:schemeClr val="accent1">
+        <a:tint val="60000"/>
+      </a:schemeClr>
+    </dgm:linClrLst>
+    <dgm:effectClrLst/>
+    <dgm:txLinClrLst/>
+    <dgm:txFillClrLst meth="repeat">
+      <a:schemeClr val="lt1"/>
+    </dgm:txFillClrLst>
+    <dgm:txEffectClrLst/>
+  </dgm:styleLbl>
+  <dgm:styleLbl name="parChTrans2D2">
+    <dgm:fillClrLst meth="repeat">
+      <a:schemeClr val="accent1"/>
+    </dgm:fillClrLst>
+    <dgm:linClrLst meth="repeat">
+      <a:schemeClr val="accent1"/>
+    </dgm:linClrLst>
+    <dgm:effectClrLst/>
+    <dgm:txLinClrLst/>
+    <dgm:txFillClrLst meth="repeat">
+      <a:schemeClr val="lt1"/>
+    </dgm:txFillClrLst>
+    <dgm:txEffectClrLst/>
+  </dgm:styleLbl>
+  <dgm:styleLbl name="parChTrans2D3">
+    <dgm:fillClrLst meth="repeat">
+      <a:schemeClr val="accent1"/>
+    </dgm:fillClrLst>
+    <dgm:linClrLst meth="repeat">
+      <a:schemeClr val="accent1"/>
+    </dgm:linClrLst>
+    <dgm:effectClrLst/>
+    <dgm:txLinClrLst/>
+    <dgm:txFillClrLst meth="repeat">
+      <a:schemeClr val="lt1"/>
+    </dgm:txFillClrLst>
+    <dgm:txEffectClrLst/>
+  </dgm:styleLbl>
+  <dgm:styleLbl name="parChTrans2D4">
+    <dgm:fillClrLst meth="repeat">
+      <a:schemeClr val="accent1"/>
+    </dgm:fillClrLst>
+    <dgm:linClrLst meth="repeat">
+      <a:schemeClr val="accent1"/>
+    </dgm:linClrLst>
+    <dgm:effectClrLst/>
+    <dgm:txLinClrLst/>
+    <dgm:txFillClrLst meth="repeat">
+      <a:schemeClr val="lt1"/>
+    </dgm:txFillClrLst>
+    <dgm:txEffectClrLst/>
+  </dgm:styleLbl>
+  <dgm:styleLbl name="parChTrans1D1">
+    <dgm:fillClrLst meth="repeat">
+      <a:schemeClr val="accent1"/>
+    </dgm:fillClrLst>
+    <dgm:linClrLst meth="repeat">
+      <a:schemeClr val="accent1">
+        <a:shade val="60000"/>
+      </a:schemeClr>
+    </dgm:linClrLst>
+    <dgm:effectClrLst/>
+    <dgm:txLinClrLst/>
+    <dgm:txFillClrLst meth="repeat">
+      <a:schemeClr val="tx1"/>
+    </dgm:txFillClrLst>
+    <dgm:txEffectClrLst/>
+  </dgm:styleLbl>
+  <dgm:styleLbl name="parChTrans1D2">
+    <dgm:fillClrLst meth="repeat">
+      <a:schemeClr val="accent1"/>
+    </dgm:fillClrLst>
+    <dgm:linClrLst meth="repeat">
+      <a:schemeClr val="accent1">
+        <a:shade val="60000"/>
+      </a:schemeClr>
+    </dgm:linClrLst>
+    <dgm:effectClrLst/>
+    <dgm:txLinClrLst/>
+    <dgm:txFillClrLst meth="repeat">
+      <a:schemeClr val="tx1"/>
+    </dgm:txFillClrLst>
+    <dgm:txEffectClrLst/>
+  </dgm:styleLbl>
+  <dgm:styleLbl name="parChTrans1D3">
+    <dgm:fillClrLst meth="repeat">
+      <a:schemeClr val="accent1"/>
+    </dgm:fillClrLst>
+    <dgm:linClrLst meth="repeat">
+      <a:schemeClr val="accent1">
+        <a:shade val="80000"/>
+      </a:schemeClr>
+    </dgm:linClrLst>
+    <dgm:effectClrLst/>
+    <dgm:txLinClrLst/>
+    <dgm:txFillClrLst meth="repeat">
+      <a:schemeClr val="tx1"/>
+    </dgm:txFillClrLst>
+    <dgm:txEffectClrLst/>
+  </dgm:styleLbl>
+  <dgm:styleLbl name="parChTrans1D4">
+    <dgm:fillClrLst meth="repeat">
+      <a:schemeClr val="accent1"/>
+    </dgm:fillClrLst>
+    <dgm:linClrLst meth="repeat">
+      <a:schemeClr val="accent1">
+        <a:shade val="80000"/>
+      </a:schemeClr>
+    </dgm:linClrLst>
+    <dgm:effectClrLst/>
+    <dgm:txLinClrLst/>
+    <dgm:txFillClrLst meth="repeat">
+      <a:schemeClr val="tx1"/>
+    </dgm:txFillClrLst>
+    <dgm:txEffectClrLst/>
+  </dgm:styleLbl>
+  <dgm:styleLbl name="fgAcc1">
+    <dgm:fillClrLst meth="repeat">
+      <a:schemeClr val="lt1">
+        <a:alpha val="90000"/>
+      </a:schemeClr>
+    </dgm:fillClrLst>
+    <dgm:linClrLst meth="repeat">
+      <a:schemeClr val="accent1"/>
+    </dgm:linClrLst>
+    <dgm:effectClrLst/>
+    <dgm:txLinClrLst/>
+    <dgm:txFillClrLst meth="repeat">
+      <a:schemeClr val="dk1"/>
+    </dgm:txFillClrLst>
+    <dgm:txEffectClrLst/>
+  </dgm:styleLbl>
+  <dgm:styleLbl name="conFgAcc1">
+    <dgm:fillClrLst meth="repeat">
+      <a:schemeClr val="lt1">
+        <a:alpha val="90000"/>
+      </a:schemeClr>
+    </dgm:fillClrLst>
+    <dgm:linClrLst meth="repeat">
+      <a:schemeClr val="accent1"/>
+    </dgm:linClrLst>
+    <dgm:effectClrLst/>
+    <dgm:txLinClrLst/>
+    <dgm:txFillClrLst meth="repeat">
+      <a:schemeClr val="dk1"/>
+    </dgm:txFillClrLst>
+    <dgm:txEffectClrLst/>
+  </dgm:styleLbl>
+  <dgm:styleLbl name="alignAcc1">
+    <dgm:fillClrLst meth="repeat">
+      <a:schemeClr val="lt1">
+        <a:alpha val="90000"/>
+      </a:schemeClr>
+    </dgm:fillClrLst>
+    <dgm:linClrLst meth="repeat">
+      <a:schemeClr val="accent1"/>
+    </dgm:linClrLst>
+    <dgm:effectClrLst/>
+    <dgm:txLinClrLst/>
+    <dgm:txFillClrLst meth="repeat">
+      <a:schemeClr val="dk1"/>
+    </dgm:txFillClrLst>
+    <dgm:txEffectClrLst/>
+  </dgm:styleLbl>
+  <dgm:styleLbl name="trAlignAcc1">
+    <dgm:fillClrLst meth="repeat">
+      <a:schemeClr val="lt1">
+        <a:alpha val="40000"/>
+      </a:schemeClr>
+    </dgm:fillClrLst>
+    <dgm:linClrLst meth="repeat">
+      <a:schemeClr val="accent1"/>
+    </dgm:linClrLst>
+    <dgm:effectClrLst/>
+    <dgm:txLinClrLst/>
+    <dgm:txFillClrLst meth="repeat">
+      <a:schemeClr val="dk1"/>
+    </dgm:txFillClrLst>
+    <dgm:txEffectClrLst/>
+  </dgm:styleLbl>
+  <dgm:styleLbl name="bgAcc1">
+    <dgm:fillClrLst meth="repeat">
+      <a:schemeClr val="lt1">
+        <a:alpha val="90000"/>
+      </a:schemeClr>
+    </dgm:fillClrLst>
+    <dgm:linClrLst meth="repeat">
+      <a:schemeClr val="accent1"/>
+    </dgm:linClrLst>
+    <dgm:effectClrLst/>
+    <dgm:txLinClrLst/>
+    <dgm:txFillClrLst meth="repeat">
+      <a:schemeClr val="dk1"/>
+    </dgm:txFillClrLst>
+    <dgm:txEffectClrLst/>
+  </dgm:styleLbl>
+  <dgm:styleLbl name="solidFgAcc1">
+    <dgm:fillClrLst meth="repeat">
+      <a:schemeClr val="lt1"/>
+    </dgm:fillClrLst>
+    <dgm:linClrLst meth="repeat">
+      <a:schemeClr val="accent1"/>
+    </dgm:linClrLst>
+    <dgm:effectClrLst/>
+    <dgm:txLinClrLst/>
+    <dgm:txFillClrLst meth="repeat">
+      <a:schemeClr val="dk1"/>
+    </dgm:txFillClrLst>
+    <dgm:txEffectClrLst/>
+  </dgm:styleLbl>
+  <dgm:styleLbl name="solidAlignAcc1">
+    <dgm:fillClrLst meth="repeat">
+      <a:schemeClr val="lt1"/>
+    </dgm:fillClrLst>
+    <dgm:linClrLst meth="repeat">
+      <a:schemeClr val="accent1"/>
+    </dgm:linClrLst>
+    <dgm:effectClrLst/>
+    <dgm:txLinClrLst/>
+    <dgm:txFillClrLst meth="repeat">
+      <a:schemeClr val="dk1"/>
+    </dgm:txFillClrLst>
+    <dgm:txEffectClrLst/>
+  </dgm:styleLbl>
+  <dgm:styleLbl name="solidBgAcc1">
+    <dgm:fillClrLst meth="repeat">
+      <a:schemeClr val="lt1"/>
+    </dgm:fillClrLst>
+    <dgm:linClrLst meth="repeat">
+      <a:schemeClr val="accent1"/>
+    </dgm:linClrLst>
+    <dgm:effectClrLst/>
+    <dgm:txLinClrLst/>
+    <dgm:txFillClrLst meth="repeat">
+      <a:schemeClr val="dk1"/>
+    </dgm:txFillClrLst>
+    <dgm:txEffectClrLst/>
+  </dgm:styleLbl>
+  <dgm:styleLbl name="fgAccFollowNode1">
+    <dgm:fillClrLst meth="repeat">
+      <a:schemeClr val="accent1">
+        <a:alpha val="90000"/>
+        <a:tint val="40000"/>
+      </a:schemeClr>
+    </dgm:fillClrLst>
+    <dgm:linClrLst meth="repeat">
+      <a:schemeClr val="accent1">
+        <a:alpha val="90000"/>
+        <a:tint val="40000"/>
+      </a:schemeClr>
+    </dgm:linClrLst>
+    <dgm:effectClrLst/>
+    <dgm:txLinClrLst/>
+    <dgm:txFillClrLst meth="repeat">
+      <a:schemeClr val="dk1"/>
+    </dgm:txFillClrLst>
+    <dgm:txEffectClrLst/>
+  </dgm:styleLbl>
+  <dgm:styleLbl name="alignAccFollowNode1">
+    <dgm:fillClrLst meth="repeat">
+      <a:schemeClr val="accent1">
+        <a:alpha val="90000"/>
+        <a:tint val="40000"/>
+      </a:schemeClr>
+    </dgm:fillClrLst>
+    <dgm:linClrLst meth="repeat">
+      <a:schemeClr val="accent1">
+        <a:alpha val="90000"/>
+        <a:tint val="40000"/>
+      </a:schemeClr>
+    </dgm:linClrLst>
+    <dgm:effectClrLst/>
+    <dgm:txLinClrLst/>
+    <dgm:txFillClrLst meth="repeat">
+      <a:schemeClr val="dk1"/>
+    </dgm:txFillClrLst>
+    <dgm:txEffectClrLst/>
+  </dgm:styleLbl>
+  <dgm:styleLbl name="bgAccFollowNode1">
+    <dgm:fillClrLst meth="repeat">
+      <a:schemeClr val="accent1">
+        <a:alpha val="90000"/>
+        <a:tint val="40000"/>
+      </a:schemeClr>
+    </dgm:fillClrLst>
+    <dgm:linClrLst meth="repeat">
+      <a:schemeClr val="accent1">
+        <a:alpha val="90000"/>
+        <a:tint val="40000"/>
+      </a:schemeClr>
+    </dgm:linClrLst>
+    <dgm:effectClrLst/>
+    <dgm:txLinClrLst/>
+    <dgm:txFillClrLst meth="repeat">
+      <a:schemeClr val="dk1"/>
+    </dgm:txFillClrLst>
+    <dgm:txEffectClrLst/>
+  </dgm:styleLbl>
+  <dgm:styleLbl name="fgAcc0">
+    <dgm:fillClrLst meth="repeat">
+      <a:schemeClr val="lt1">
+        <a:alpha val="90000"/>
+      </a:schemeClr>
+    </dgm:fillClrLst>
+    <dgm:linClrLst meth="repeat">
+      <a:schemeClr val="accent1"/>
+    </dgm:linClrLst>
+    <dgm:effectClrLst/>
+    <dgm:txLinClrLst/>
+    <dgm:txFillClrLst meth="repeat">
+      <a:schemeClr val="dk1"/>
+    </dgm:txFillClrLst>
+    <dgm:txEffectClrLst/>
+  </dgm:styleLbl>
+  <dgm:styleLbl name="fgAcc2">
+    <dgm:fillClrLst meth="repeat">
+      <a:schemeClr val="lt1">
+        <a:alpha val="90000"/>
+      </a:schemeClr>
+    </dgm:fillClrLst>
+    <dgm:linClrLst meth="repeat">
+      <a:schemeClr val="accent1"/>
+    </dgm:linClrLst>
+    <dgm:effectClrLst/>
+    <dgm:txLinClrLst/>
+    <dgm:txFillClrLst meth="repeat">
+      <a:schemeClr val="dk1"/>
+    </dgm:txFillClrLst>
+    <dgm:txEffectClrLst/>
+  </dgm:styleLbl>
+  <dgm:styleLbl name="fgAcc3">
+    <dgm:fillClrLst meth="repeat">
+      <a:schemeClr val="lt1">
+        <a:alpha val="90000"/>
+      </a:schemeClr>
+    </dgm:fillClrLst>
+    <dgm:linClrLst meth="repeat">
+      <a:schemeClr val="accent1"/>
+    </dgm:linClrLst>
+    <dgm:effectClrLst/>
+    <dgm:txLinClrLst/>
+    <dgm:txFillClrLst meth="repeat">
+      <a:schemeClr val="dk1"/>
+    </dgm:txFillClrLst>
+    <dgm:txEffectClrLst/>
+  </dgm:styleLbl>
+  <dgm:styleLbl name="fgAcc4">
+    <dgm:fillClrLst meth="repeat">
+      <a:schemeClr val="lt1">
+        <a:alpha val="90000"/>
+      </a:schemeClr>
+    </dgm:fillClrLst>
+    <dgm:linClrLst meth="repeat">
+      <a:schemeClr val="accent1"/>
+    </dgm:linClrLst>
+    <dgm:effectClrLst/>
+    <dgm:txLinClrLst/>
+    <dgm:txFillClrLst meth="repeat">
+      <a:schemeClr val="dk1"/>
+    </dgm:txFillClrLst>
+    <dgm:txEffectClrLst/>
+  </dgm:styleLbl>
+  <dgm:styleLbl name="bgShp">
+    <dgm:fillClrLst meth="repeat">
+      <a:schemeClr val="accent1">
+        <a:tint val="40000"/>
+      </a:schemeClr>
+    </dgm:fillClrLst>
+    <dgm:linClrLst meth="repeat">
+      <a:schemeClr val="accent1"/>
+    </dgm:linClrLst>
+    <dgm:effectClrLst/>
+    <dgm:txLinClrLst/>
+    <dgm:txFillClrLst meth="repeat">
+      <a:schemeClr val="dk1"/>
+    </dgm:txFillClrLst>
+    <dgm:txEffectClrLst/>
+  </dgm:styleLbl>
+  <dgm:styleLbl name="dkBgShp">
+    <dgm:fillClrLst meth="repeat">
+      <a:schemeClr val="accent1">
+        <a:shade val="80000"/>
+      </a:schemeClr>
+    </dgm:fillClrLst>
+    <dgm:linClrLst meth="repeat">
+      <a:schemeClr val="accent1"/>
+    </dgm:linClrLst>
+    <dgm:effectClrLst/>
+    <dgm:txLinClrLst/>
+    <dgm:txFillClrLst meth="repeat">
+      <a:schemeClr val="lt1"/>
+    </dgm:txFillClrLst>
+    <dgm:txEffectClrLst/>
+  </dgm:styleLbl>
+  <dgm:styleLbl name="trBgShp">
+    <dgm:fillClrLst meth="repeat">
+      <a:schemeClr val="accent1">
+        <a:tint val="50000"/>
+        <a:alpha val="40000"/>
+      </a:schemeClr>
+    </dgm:fillClrLst>
+    <dgm:linClrLst meth="repeat">
+      <a:schemeClr val="accent1"/>
+    </dgm:linClrLst>
+    <dgm:effectClrLst/>
+    <dgm:txLinClrLst/>
+    <dgm:txFillClrLst meth="repeat">
+      <a:schemeClr val="lt1"/>
+    </dgm:txFillClrLst>
+    <dgm:txEffectClrLst/>
+  </dgm:styleLbl>
+  <dgm:styleLbl name="fgShp">
+    <dgm:fillClrLst meth="repeat">
+      <a:schemeClr val="accent1">
+        <a:tint val="60000"/>
+      </a:schemeClr>
+    </dgm:fillClrLst>
+    <dgm:linClrLst meth="repeat">
+      <a:schemeClr val="lt1"/>
+    </dgm:linClrLst>
+    <dgm:effectClrLst/>
+    <dgm:txLinClrLst/>
+    <dgm:txFillClrLst meth="repeat">
+      <a:schemeClr val="dk1"/>
+    </dgm:txFillClrLst>
+    <dgm:txEffectClrLst/>
+  </dgm:styleLbl>
+  <dgm:styleLbl name="revTx">
+    <dgm:fillClrLst meth="repeat">
+      <a:schemeClr val="lt1">
+        <a:alpha val="0"/>
+      </a:schemeClr>
+    </dgm:fillClrLst>
+    <dgm:linClrLst meth="repeat">
+      <a:schemeClr val="dk1">
+        <a:alpha val="0"/>
+      </a:schemeClr>
+    </dgm:linClrLst>
+    <dgm:effectClrLst/>
+    <dgm:txLinClrLst/>
+    <dgm:txFillClrLst meth="repeat">
+      <a:schemeClr val="tx1"/>
+    </dgm:txFillClrLst>
+    <dgm:txEffectClrLst/>
+  </dgm:styleLbl>
+</dgm:colorsDef>
+</file>
+
 <file path=ppt/diagrams/data1.xml><?xml version="1.0" encoding="utf-8"?>
 <dgm:dataModel xmlns:dgm="http://schemas.openxmlformats.org/drawingml/2006/diagram" xmlns:a="http://schemas.openxmlformats.org/drawingml/2006/main">
   <dgm:ptLst>
+    <dgm:pt modelId="{945C97DF-EB37-4D97-83B8-5CA5B564D3DB}" type="doc">
+      <dgm:prSet loTypeId="urn:microsoft.com/office/officeart/2005/8/layout/vList2" loCatId="list" qsTypeId="urn:microsoft.com/office/officeart/2005/8/quickstyle/simple1" qsCatId="simple" csTypeId="urn:microsoft.com/office/officeart/2005/8/colors/accent1_2" csCatId="accent1"/>
+      <dgm:spPr/>
+      <dgm:t>
+        <a:bodyPr/>
+        <a:lstStyle/>
+        <a:p>
+          <a:endParaRPr lang="en-US"/>
+        </a:p>
+      </dgm:t>
+    </dgm:pt>
+    <dgm:pt modelId="{2963DBCC-9B64-465D-B5D0-E13A76F13CF4}">
+      <dgm:prSet/>
+      <dgm:spPr/>
+      <dgm:t>
+        <a:bodyPr/>
+        <a:lstStyle/>
+        <a:p>
+          <a:r>
+            <a:rPr lang="en-US" b="0" i="0" baseline="0"/>
+            <a:t>Cleaned cohort size: </a:t>
+          </a:r>
+          <a:r>
+            <a:rPr lang="en-US" b="1" i="0" baseline="0"/>
+            <a:t>51 ICU stays</a:t>
+          </a:r>
+          <a:endParaRPr lang="en-US"/>
+        </a:p>
+      </dgm:t>
+    </dgm:pt>
+    <dgm:pt modelId="{CD2369A1-0096-4100-AAA1-BE74F06F67FB}" type="parTrans" cxnId="{BA2441BC-3296-4385-8B8C-FD43C424E848}">
+      <dgm:prSet/>
+      <dgm:spPr/>
+      <dgm:t>
+        <a:bodyPr/>
+        <a:lstStyle/>
+        <a:p>
+          <a:endParaRPr lang="en-US"/>
+        </a:p>
+      </dgm:t>
+    </dgm:pt>
+    <dgm:pt modelId="{C59C9317-DCE7-4C78-AAF4-989E8AA000F1}" type="sibTrans" cxnId="{BA2441BC-3296-4385-8B8C-FD43C424E848}">
+      <dgm:prSet/>
+      <dgm:spPr/>
+      <dgm:t>
+        <a:bodyPr/>
+        <a:lstStyle/>
+        <a:p>
+          <a:endParaRPr lang="en-US"/>
+        </a:p>
+      </dgm:t>
+    </dgm:pt>
+    <dgm:pt modelId="{F3421F72-9D4F-42A3-81CC-1C0DC8DF2ACE}">
+      <dgm:prSet/>
+      <dgm:spPr/>
+      <dgm:t>
+        <a:bodyPr/>
+        <a:lstStyle/>
+        <a:p>
+          <a:r>
+            <a:rPr lang="en-US" b="0" i="0" baseline="0"/>
+            <a:t>Short stay: </a:t>
+          </a:r>
+          <a:r>
+            <a:rPr lang="en-US" b="1" i="0" baseline="0"/>
+            <a:t>24</a:t>
+          </a:r>
+          <a:endParaRPr lang="en-US"/>
+        </a:p>
+      </dgm:t>
+    </dgm:pt>
+    <dgm:pt modelId="{510D12FC-B210-4974-BF95-BE593AAA8CA1}" type="parTrans" cxnId="{D0CC42F6-665C-42DA-8A70-29292C231EE8}">
+      <dgm:prSet/>
+      <dgm:spPr/>
+      <dgm:t>
+        <a:bodyPr/>
+        <a:lstStyle/>
+        <a:p>
+          <a:endParaRPr lang="en-US"/>
+        </a:p>
+      </dgm:t>
+    </dgm:pt>
+    <dgm:pt modelId="{A4487E88-9CC8-404E-BE00-9A64D7108D34}" type="sibTrans" cxnId="{D0CC42F6-665C-42DA-8A70-29292C231EE8}">
+      <dgm:prSet/>
+      <dgm:spPr/>
+      <dgm:t>
+        <a:bodyPr/>
+        <a:lstStyle/>
+        <a:p>
+          <a:endParaRPr lang="en-US"/>
+        </a:p>
+      </dgm:t>
+    </dgm:pt>
+    <dgm:pt modelId="{E224BC33-E8C5-4F99-A115-1E32A01FC375}">
+      <dgm:prSet/>
+      <dgm:spPr/>
+      <dgm:t>
+        <a:bodyPr/>
+        <a:lstStyle/>
+        <a:p>
+          <a:r>
+            <a:rPr lang="en-US" b="0" i="0" baseline="0"/>
+            <a:t>Medium stay: </a:t>
+          </a:r>
+          <a:r>
+            <a:rPr lang="en-US" b="1" i="0" baseline="0"/>
+            <a:t>16</a:t>
+          </a:r>
+          <a:endParaRPr lang="en-US"/>
+        </a:p>
+      </dgm:t>
+    </dgm:pt>
+    <dgm:pt modelId="{031E8989-8F16-4894-BC3F-0BDF5C6709CD}" type="parTrans" cxnId="{42BE90DB-8A6D-4B2B-9250-F542A991B1DE}">
+      <dgm:prSet/>
+      <dgm:spPr/>
+      <dgm:t>
+        <a:bodyPr/>
+        <a:lstStyle/>
+        <a:p>
+          <a:endParaRPr lang="en-US"/>
+        </a:p>
+      </dgm:t>
+    </dgm:pt>
+    <dgm:pt modelId="{EBED06C4-3482-4882-88BC-58B0E92A5E24}" type="sibTrans" cxnId="{42BE90DB-8A6D-4B2B-9250-F542A991B1DE}">
+      <dgm:prSet/>
+      <dgm:spPr/>
+      <dgm:t>
+        <a:bodyPr/>
+        <a:lstStyle/>
+        <a:p>
+          <a:endParaRPr lang="en-US"/>
+        </a:p>
+      </dgm:t>
+    </dgm:pt>
+    <dgm:pt modelId="{1DDF18C7-2C5B-4CA8-AA82-740F44688563}">
+      <dgm:prSet/>
+      <dgm:spPr/>
+      <dgm:t>
+        <a:bodyPr/>
+        <a:lstStyle/>
+        <a:p>
+          <a:r>
+            <a:rPr lang="en-US" b="0" i="0" baseline="0"/>
+            <a:t>Long stay: </a:t>
+          </a:r>
+          <a:r>
+            <a:rPr lang="en-US" b="1" i="0" baseline="0"/>
+            <a:t>11</a:t>
+          </a:r>
+          <a:endParaRPr lang="en-US"/>
+        </a:p>
+      </dgm:t>
+    </dgm:pt>
+    <dgm:pt modelId="{73907B75-3F06-4B96-919F-F0214C69DD19}" type="parTrans" cxnId="{0022E3BB-BA5F-4959-B3F7-4CCEDDCFF5B3}">
+      <dgm:prSet/>
+      <dgm:spPr/>
+      <dgm:t>
+        <a:bodyPr/>
+        <a:lstStyle/>
+        <a:p>
+          <a:endParaRPr lang="en-US"/>
+        </a:p>
+      </dgm:t>
+    </dgm:pt>
+    <dgm:pt modelId="{91215B3A-E912-4D43-9A45-DAB58DD750E0}" type="sibTrans" cxnId="{0022E3BB-BA5F-4959-B3F7-4CCEDDCFF5B3}">
+      <dgm:prSet/>
+      <dgm:spPr/>
+      <dgm:t>
+        <a:bodyPr/>
+        <a:lstStyle/>
+        <a:p>
+          <a:endParaRPr lang="en-US"/>
+        </a:p>
+      </dgm:t>
+    </dgm:pt>
+    <dgm:pt modelId="{26D2CE72-6F62-488F-9BF5-8B64FC2D354F}">
+      <dgm:prSet/>
+      <dgm:spPr/>
+      <dgm:t>
+        <a:bodyPr/>
+        <a:lstStyle/>
+        <a:p>
+          <a:r>
+            <a:rPr lang="en-US" b="0" i="0" baseline="0"/>
+            <a:t>Random Forest performed best on the held-out test set</a:t>
+          </a:r>
+          <a:endParaRPr lang="en-US"/>
+        </a:p>
+      </dgm:t>
+    </dgm:pt>
+    <dgm:pt modelId="{3B7AE6CD-D7E9-4C75-A0B5-E66FD4454A5A}" type="parTrans" cxnId="{D9DF9A71-ABD5-42D8-9E25-65B5206719A1}">
+      <dgm:prSet/>
+      <dgm:spPr/>
+      <dgm:t>
+        <a:bodyPr/>
+        <a:lstStyle/>
+        <a:p>
+          <a:endParaRPr lang="en-US"/>
+        </a:p>
+      </dgm:t>
+    </dgm:pt>
+    <dgm:pt modelId="{EDBC3577-ACF8-4C59-A5FD-C03E56B2E897}" type="sibTrans" cxnId="{D9DF9A71-ABD5-42D8-9E25-65B5206719A1}">
+      <dgm:prSet/>
+      <dgm:spPr/>
+      <dgm:t>
+        <a:bodyPr/>
+        <a:lstStyle/>
+        <a:p>
+          <a:endParaRPr lang="en-US"/>
+        </a:p>
+      </dgm:t>
+    </dgm:pt>
+    <dgm:pt modelId="{8A9C75FF-977A-454E-A943-92B9FF8E435A}" type="pres">
+      <dgm:prSet presAssocID="{945C97DF-EB37-4D97-83B8-5CA5B564D3DB}" presName="linear" presStyleCnt="0">
+        <dgm:presLayoutVars>
+          <dgm:animLvl val="lvl"/>
+          <dgm:resizeHandles val="exact"/>
+        </dgm:presLayoutVars>
+      </dgm:prSet>
+      <dgm:spPr/>
+    </dgm:pt>
+    <dgm:pt modelId="{28FF7F30-9715-9540-A1B6-8A72D52136B1}" type="pres">
+      <dgm:prSet presAssocID="{2963DBCC-9B64-465D-B5D0-E13A76F13CF4}" presName="parentText" presStyleLbl="node1" presStyleIdx="0" presStyleCnt="5">
+        <dgm:presLayoutVars>
+          <dgm:chMax val="0"/>
+          <dgm:bulletEnabled val="1"/>
+        </dgm:presLayoutVars>
+      </dgm:prSet>
+      <dgm:spPr/>
+    </dgm:pt>
+    <dgm:pt modelId="{5BDB540C-2540-4E47-ABE6-954F0133E1EF}" type="pres">
+      <dgm:prSet presAssocID="{C59C9317-DCE7-4C78-AAF4-989E8AA000F1}" presName="spacer" presStyleCnt="0"/>
+      <dgm:spPr/>
+    </dgm:pt>
+    <dgm:pt modelId="{82181342-ACC1-1148-886F-8EC5D3B61634}" type="pres">
+      <dgm:prSet presAssocID="{F3421F72-9D4F-42A3-81CC-1C0DC8DF2ACE}" presName="parentText" presStyleLbl="node1" presStyleIdx="1" presStyleCnt="5">
+        <dgm:presLayoutVars>
+          <dgm:chMax val="0"/>
+          <dgm:bulletEnabled val="1"/>
+        </dgm:presLayoutVars>
+      </dgm:prSet>
+      <dgm:spPr/>
+    </dgm:pt>
+    <dgm:pt modelId="{99142977-50AD-BC42-A1A5-B16FAEB359F4}" type="pres">
+      <dgm:prSet presAssocID="{A4487E88-9CC8-404E-BE00-9A64D7108D34}" presName="spacer" presStyleCnt="0"/>
+      <dgm:spPr/>
+    </dgm:pt>
+    <dgm:pt modelId="{28E454F2-8EE1-0044-AC05-055F575BD45A}" type="pres">
+      <dgm:prSet presAssocID="{E224BC33-E8C5-4F99-A115-1E32A01FC375}" presName="parentText" presStyleLbl="node1" presStyleIdx="2" presStyleCnt="5">
+        <dgm:presLayoutVars>
+          <dgm:chMax val="0"/>
+          <dgm:bulletEnabled val="1"/>
+        </dgm:presLayoutVars>
+      </dgm:prSet>
+      <dgm:spPr/>
+    </dgm:pt>
+    <dgm:pt modelId="{A35CD135-84C7-6346-B0DD-AF140FC02692}" type="pres">
+      <dgm:prSet presAssocID="{EBED06C4-3482-4882-88BC-58B0E92A5E24}" presName="spacer" presStyleCnt="0"/>
+      <dgm:spPr/>
+    </dgm:pt>
+    <dgm:pt modelId="{945B97B2-AEC3-144A-A652-FB3F79AEE832}" type="pres">
+      <dgm:prSet presAssocID="{1DDF18C7-2C5B-4CA8-AA82-740F44688563}" presName="parentText" presStyleLbl="node1" presStyleIdx="3" presStyleCnt="5">
+        <dgm:presLayoutVars>
+          <dgm:chMax val="0"/>
+          <dgm:bulletEnabled val="1"/>
+        </dgm:presLayoutVars>
+      </dgm:prSet>
+      <dgm:spPr/>
+    </dgm:pt>
+    <dgm:pt modelId="{E5ED4D69-DC23-4845-B8FA-7A866909848C}" type="pres">
+      <dgm:prSet presAssocID="{91215B3A-E912-4D43-9A45-DAB58DD750E0}" presName="spacer" presStyleCnt="0"/>
+      <dgm:spPr/>
+    </dgm:pt>
+    <dgm:pt modelId="{52F077D6-C56D-E44E-9468-D88D11484A59}" type="pres">
+      <dgm:prSet presAssocID="{26D2CE72-6F62-488F-9BF5-8B64FC2D354F}" presName="parentText" presStyleLbl="node1" presStyleIdx="4" presStyleCnt="5">
+        <dgm:presLayoutVars>
+          <dgm:chMax val="0"/>
+          <dgm:bulletEnabled val="1"/>
+        </dgm:presLayoutVars>
+      </dgm:prSet>
+      <dgm:spPr/>
+    </dgm:pt>
+  </dgm:ptLst>
+  <dgm:cxnLst>
+    <dgm:cxn modelId="{346B7D18-9E10-664E-8B64-EDD0EED72790}" type="presOf" srcId="{2963DBCC-9B64-465D-B5D0-E13A76F13CF4}" destId="{28FF7F30-9715-9540-A1B6-8A72D52136B1}" srcOrd="0" destOrd="0" presId="urn:microsoft.com/office/officeart/2005/8/layout/vList2"/>
+    <dgm:cxn modelId="{70AB6922-732C-C44B-9669-7A297EE19014}" type="presOf" srcId="{E224BC33-E8C5-4F99-A115-1E32A01FC375}" destId="{28E454F2-8EE1-0044-AC05-055F575BD45A}" srcOrd="0" destOrd="0" presId="urn:microsoft.com/office/officeart/2005/8/layout/vList2"/>
+    <dgm:cxn modelId="{EB259E4B-9C7B-A54A-8A00-ACDE7A79DAF7}" type="presOf" srcId="{26D2CE72-6F62-488F-9BF5-8B64FC2D354F}" destId="{52F077D6-C56D-E44E-9468-D88D11484A59}" srcOrd="0" destOrd="0" presId="urn:microsoft.com/office/officeart/2005/8/layout/vList2"/>
+    <dgm:cxn modelId="{119C6550-CB07-124D-8178-BB5F25FE3D1C}" type="presOf" srcId="{945C97DF-EB37-4D97-83B8-5CA5B564D3DB}" destId="{8A9C75FF-977A-454E-A943-92B9FF8E435A}" srcOrd="0" destOrd="0" presId="urn:microsoft.com/office/officeart/2005/8/layout/vList2"/>
+    <dgm:cxn modelId="{FCEE745F-4D40-9C43-84B1-EA07B5E69E1C}" type="presOf" srcId="{F3421F72-9D4F-42A3-81CC-1C0DC8DF2ACE}" destId="{82181342-ACC1-1148-886F-8EC5D3B61634}" srcOrd="0" destOrd="0" presId="urn:microsoft.com/office/officeart/2005/8/layout/vList2"/>
+    <dgm:cxn modelId="{D9DF9A71-ABD5-42D8-9E25-65B5206719A1}" srcId="{945C97DF-EB37-4D97-83B8-5CA5B564D3DB}" destId="{26D2CE72-6F62-488F-9BF5-8B64FC2D354F}" srcOrd="4" destOrd="0" parTransId="{3B7AE6CD-D7E9-4C75-A0B5-E66FD4454A5A}" sibTransId="{EDBC3577-ACF8-4C59-A5FD-C03E56B2E897}"/>
+    <dgm:cxn modelId="{EFE440A0-0AC8-2E4B-AAB2-232E46EFB7DB}" type="presOf" srcId="{1DDF18C7-2C5B-4CA8-AA82-740F44688563}" destId="{945B97B2-AEC3-144A-A652-FB3F79AEE832}" srcOrd="0" destOrd="0" presId="urn:microsoft.com/office/officeart/2005/8/layout/vList2"/>
+    <dgm:cxn modelId="{0022E3BB-BA5F-4959-B3F7-4CCEDDCFF5B3}" srcId="{945C97DF-EB37-4D97-83B8-5CA5B564D3DB}" destId="{1DDF18C7-2C5B-4CA8-AA82-740F44688563}" srcOrd="3" destOrd="0" parTransId="{73907B75-3F06-4B96-919F-F0214C69DD19}" sibTransId="{91215B3A-E912-4D43-9A45-DAB58DD750E0}"/>
+    <dgm:cxn modelId="{BA2441BC-3296-4385-8B8C-FD43C424E848}" srcId="{945C97DF-EB37-4D97-83B8-5CA5B564D3DB}" destId="{2963DBCC-9B64-465D-B5D0-E13A76F13CF4}" srcOrd="0" destOrd="0" parTransId="{CD2369A1-0096-4100-AAA1-BE74F06F67FB}" sibTransId="{C59C9317-DCE7-4C78-AAF4-989E8AA000F1}"/>
+    <dgm:cxn modelId="{42BE90DB-8A6D-4B2B-9250-F542A991B1DE}" srcId="{945C97DF-EB37-4D97-83B8-5CA5B564D3DB}" destId="{E224BC33-E8C5-4F99-A115-1E32A01FC375}" srcOrd="2" destOrd="0" parTransId="{031E8989-8F16-4894-BC3F-0BDF5C6709CD}" sibTransId="{EBED06C4-3482-4882-88BC-58B0E92A5E24}"/>
+    <dgm:cxn modelId="{D0CC42F6-665C-42DA-8A70-29292C231EE8}" srcId="{945C97DF-EB37-4D97-83B8-5CA5B564D3DB}" destId="{F3421F72-9D4F-42A3-81CC-1C0DC8DF2ACE}" srcOrd="1" destOrd="0" parTransId="{510D12FC-B210-4974-BF95-BE593AAA8CA1}" sibTransId="{A4487E88-9CC8-404E-BE00-9A64D7108D34}"/>
+    <dgm:cxn modelId="{67E0C217-EE14-B649-8E9F-CFE08A54F16F}" type="presParOf" srcId="{8A9C75FF-977A-454E-A943-92B9FF8E435A}" destId="{28FF7F30-9715-9540-A1B6-8A72D52136B1}" srcOrd="0" destOrd="0" presId="urn:microsoft.com/office/officeart/2005/8/layout/vList2"/>
+    <dgm:cxn modelId="{EE7AC2D3-3E61-F846-BCDC-0E340A337625}" type="presParOf" srcId="{8A9C75FF-977A-454E-A943-92B9FF8E435A}" destId="{5BDB540C-2540-4E47-ABE6-954F0133E1EF}" srcOrd="1" destOrd="0" presId="urn:microsoft.com/office/officeart/2005/8/layout/vList2"/>
+    <dgm:cxn modelId="{FCFFD13A-2329-4346-9C4D-CBC0DA1DEF23}" type="presParOf" srcId="{8A9C75FF-977A-454E-A943-92B9FF8E435A}" destId="{82181342-ACC1-1148-886F-8EC5D3B61634}" srcOrd="2" destOrd="0" presId="urn:microsoft.com/office/officeart/2005/8/layout/vList2"/>
+    <dgm:cxn modelId="{A940C81F-E785-4249-8F0C-8292CC8C13D8}" type="presParOf" srcId="{8A9C75FF-977A-454E-A943-92B9FF8E435A}" destId="{99142977-50AD-BC42-A1A5-B16FAEB359F4}" srcOrd="3" destOrd="0" presId="urn:microsoft.com/office/officeart/2005/8/layout/vList2"/>
+    <dgm:cxn modelId="{5E15D4AB-F1FB-EC46-B8B3-2647280F77FA}" type="presParOf" srcId="{8A9C75FF-977A-454E-A943-92B9FF8E435A}" destId="{28E454F2-8EE1-0044-AC05-055F575BD45A}" srcOrd="4" destOrd="0" presId="urn:microsoft.com/office/officeart/2005/8/layout/vList2"/>
+    <dgm:cxn modelId="{5782DE01-B0D3-224A-BDDE-269C74205133}" type="presParOf" srcId="{8A9C75FF-977A-454E-A943-92B9FF8E435A}" destId="{A35CD135-84C7-6346-B0DD-AF140FC02692}" srcOrd="5" destOrd="0" presId="urn:microsoft.com/office/officeart/2005/8/layout/vList2"/>
+    <dgm:cxn modelId="{A1462639-B416-B544-99CC-D465349AE284}" type="presParOf" srcId="{8A9C75FF-977A-454E-A943-92B9FF8E435A}" destId="{945B97B2-AEC3-144A-A652-FB3F79AEE832}" srcOrd="6" destOrd="0" presId="urn:microsoft.com/office/officeart/2005/8/layout/vList2"/>
+    <dgm:cxn modelId="{859E8DDD-8C19-A443-807B-5D478AC7866D}" type="presParOf" srcId="{8A9C75FF-977A-454E-A943-92B9FF8E435A}" destId="{E5ED4D69-DC23-4845-B8FA-7A866909848C}" srcOrd="7" destOrd="0" presId="urn:microsoft.com/office/officeart/2005/8/layout/vList2"/>
+    <dgm:cxn modelId="{DC910AE6-5ED7-464C-8130-90793CE5C7E1}" type="presParOf" srcId="{8A9C75FF-977A-454E-A943-92B9FF8E435A}" destId="{52F077D6-C56D-E44E-9468-D88D11484A59}" srcOrd="8" destOrd="0" presId="urn:microsoft.com/office/officeart/2005/8/layout/vList2"/>
+  </dgm:cxnLst>
+  <dgm:bg/>
+  <dgm:whole/>
+  <dgm:extLst>
+    <a:ext uri="http://schemas.microsoft.com/office/drawing/2008/diagram">
+      <dsp:dataModelExt xmlns:dsp="http://schemas.microsoft.com/office/drawing/2008/diagram" relId="rId7" minVer="http://schemas.openxmlformats.org/drawingml/2006/diagram"/>
+    </a:ext>
+  </dgm:extLst>
+</dgm:dataModel>
+</file>
+
+<file path=ppt/diagrams/data2.xml><?xml version="1.0" encoding="utf-8"?>
+<dgm:dataModel xmlns:dgm="http://schemas.openxmlformats.org/drawingml/2006/diagram" xmlns:a="http://schemas.openxmlformats.org/drawingml/2006/main">
+  <dgm:ptLst>
     <dgm:pt modelId="{FAAD0627-AEC8-452E-ACD4-4AC25F698FFD}" type="doc">
-      <dgm:prSet loTypeId="urn:microsoft.com/office/officeart/2005/8/layout/default" loCatId="list" qsTypeId="urn:microsoft.com/office/officeart/2005/8/quickstyle/simple1" qsCatId="simple" csTypeId="urn:microsoft.com/office/officeart/2005/8/colors/accent1_2" csCatId="accent1" phldr="1"/>
+      <dgm:prSet loTypeId="urn:microsoft.com/office/officeart/2008/layout/LinedList" loCatId="list" qsTypeId="urn:microsoft.com/office/officeart/2005/8/quickstyle/simple1" qsCatId="simple" csTypeId="urn:microsoft.com/office/officeart/2005/8/colors/accent1_2" csCatId="accent1" phldr="1"/>
       <dgm:spPr/>
       <dgm:t>
         <a:bodyPr/>
@@ -1089,7 +2156,7 @@
         <a:p>
           <a:r>
             <a:rPr lang="en-US" dirty="0"/>
-            <a:t> Load cohort file</a:t>
+            <a:t> Place CSV files or prebuilt cohort in data folder</a:t>
           </a:r>
         </a:p>
       </dgm:t>
@@ -1116,42 +2183,6 @@
         </a:p>
       </dgm:t>
     </dgm:pt>
-    <dgm:pt modelId="{76FFEC7F-CF62-4CCB-883E-6F6FCA6A64B0}">
-      <dgm:prSet/>
-      <dgm:spPr/>
-      <dgm:t>
-        <a:bodyPr/>
-        <a:lstStyle/>
-        <a:p>
-          <a:r>
-            <a:rPr lang="en-US" dirty="0"/>
-            <a:t> Run notebook in order</a:t>
-          </a:r>
-        </a:p>
-      </dgm:t>
-    </dgm:pt>
-    <dgm:pt modelId="{1593485A-A6E2-4B44-A863-A186F7F857F5}" type="parTrans" cxnId="{DCC0A38F-73DD-4E37-A6CE-85DBD6400E82}">
-      <dgm:prSet/>
-      <dgm:spPr/>
-      <dgm:t>
-        <a:bodyPr/>
-        <a:lstStyle/>
-        <a:p>
-          <a:endParaRPr lang="en-US"/>
-        </a:p>
-      </dgm:t>
-    </dgm:pt>
-    <dgm:pt modelId="{AB258805-BF24-49E0-9EF5-72E1BA5874DD}" type="sibTrans" cxnId="{DCC0A38F-73DD-4E37-A6CE-85DBD6400E82}">
-      <dgm:prSet/>
-      <dgm:spPr/>
-      <dgm:t>
-        <a:bodyPr/>
-        <a:lstStyle/>
-        <a:p>
-          <a:endParaRPr lang="en-US"/>
-        </a:p>
-      </dgm:t>
-    </dgm:pt>
     <dgm:pt modelId="{16678B6D-CE21-42FF-A256-DBD5C39088E6}">
       <dgm:prSet/>
       <dgm:spPr/>
@@ -1161,7 +2192,7 @@
         <a:p>
           <a:r>
             <a:rPr lang="en-US" dirty="0"/>
-            <a:t> Reproduce charts and metrics</a:t>
+            <a:t> Run notebook cells in order</a:t>
           </a:r>
         </a:p>
       </dgm:t>
@@ -1260,173 +2291,275 @@
         </a:p>
       </dgm:t>
     </dgm:pt>
-    <dgm:pt modelId="{18D961E9-B7DA-6549-A9BF-8DB93AF59990}" type="pres">
-      <dgm:prSet presAssocID="{FAAD0627-AEC8-452E-ACD4-4AC25F698FFD}" presName="diagram" presStyleCnt="0">
+    <dgm:pt modelId="{66CFE45E-98AA-4044-9F6A-735FC61FD1B6}">
+      <dgm:prSet/>
+      <dgm:spPr/>
+      <dgm:t>
+        <a:bodyPr/>
+        <a:lstStyle/>
+        <a:p>
+          <a:r>
+            <a:rPr lang="en-US" dirty="0"/>
+            <a:t> Run cohort-building cell if needed</a:t>
+          </a:r>
+        </a:p>
+      </dgm:t>
+    </dgm:pt>
+    <dgm:pt modelId="{3C00983E-81B5-254C-AF8C-7660F7A5D933}" type="parTrans" cxnId="{D0C33CD3-3568-334C-A4E6-F0A136131359}">
+      <dgm:prSet/>
+      <dgm:spPr/>
+      <dgm:t>
+        <a:bodyPr/>
+        <a:lstStyle/>
+        <a:p>
+          <a:endParaRPr lang="en-US"/>
+        </a:p>
+      </dgm:t>
+    </dgm:pt>
+    <dgm:pt modelId="{36FE1252-C24C-4644-9382-B48ACEAA1034}" type="sibTrans" cxnId="{D0C33CD3-3568-334C-A4E6-F0A136131359}">
+      <dgm:prSet/>
+      <dgm:spPr/>
+      <dgm:t>
+        <a:bodyPr/>
+        <a:lstStyle/>
+        <a:p>
+          <a:endParaRPr lang="en-US"/>
+        </a:p>
+      </dgm:t>
+    </dgm:pt>
+    <dgm:pt modelId="{4225D961-A3D8-5440-A8C0-B340BEB63C6A}" type="pres">
+      <dgm:prSet presAssocID="{FAAD0627-AEC8-452E-ACD4-4AC25F698FFD}" presName="vert0" presStyleCnt="0">
         <dgm:presLayoutVars>
           <dgm:dir/>
-          <dgm:resizeHandles val="exact"/>
+          <dgm:animOne val="branch"/>
+          <dgm:animLvl val="lvl"/>
         </dgm:presLayoutVars>
       </dgm:prSet>
       <dgm:spPr/>
     </dgm:pt>
-    <dgm:pt modelId="{8A8530EE-01F8-0A44-9B91-EEB99F7BC27B}" type="pres">
-      <dgm:prSet presAssocID="{1F2EA9CB-399A-44EB-8E6F-1868ACA15891}" presName="node" presStyleLbl="node1" presStyleIdx="0" presStyleCnt="10">
-        <dgm:presLayoutVars>
-          <dgm:bulletEnabled val="1"/>
-        </dgm:presLayoutVars>
-      </dgm:prSet>
+    <dgm:pt modelId="{F213A161-6AE6-664A-AB45-83A99E0A5259}" type="pres">
+      <dgm:prSet presAssocID="{1F2EA9CB-399A-44EB-8E6F-1868ACA15891}" presName="thickLine" presStyleLbl="alignNode1" presStyleIdx="0" presStyleCnt="10"/>
       <dgm:spPr/>
     </dgm:pt>
-    <dgm:pt modelId="{ED35C57C-EDDF-1D4A-AE08-BAB3B6DA274A}" type="pres">
-      <dgm:prSet presAssocID="{4A794126-4771-4111-ACBD-A78684FFF437}" presName="sibTrans" presStyleCnt="0"/>
+    <dgm:pt modelId="{D8E10D12-9AEA-1241-956C-E748615EF2A8}" type="pres">
+      <dgm:prSet presAssocID="{1F2EA9CB-399A-44EB-8E6F-1868ACA15891}" presName="horz1" presStyleCnt="0"/>
       <dgm:spPr/>
     </dgm:pt>
-    <dgm:pt modelId="{5A129108-391A-5548-81B4-75D4BD6CB294}" type="pres">
-      <dgm:prSet presAssocID="{B13E3C94-95C6-41A9-8BD4-B9400395086E}" presName="node" presStyleLbl="node1" presStyleIdx="1" presStyleCnt="10">
-        <dgm:presLayoutVars>
-          <dgm:bulletEnabled val="1"/>
-        </dgm:presLayoutVars>
-      </dgm:prSet>
+    <dgm:pt modelId="{6F406DF4-E28B-6A42-90BF-89AD9BDDD394}" type="pres">
+      <dgm:prSet presAssocID="{1F2EA9CB-399A-44EB-8E6F-1868ACA15891}" presName="tx1" presStyleLbl="revTx" presStyleIdx="0" presStyleCnt="10"/>
       <dgm:spPr/>
     </dgm:pt>
-    <dgm:pt modelId="{DEDBD725-F3F6-624A-8EB4-BBE9B48B9370}" type="pres">
-      <dgm:prSet presAssocID="{4D402860-9C98-431D-87AC-F3EC7756EFF4}" presName="sibTrans" presStyleCnt="0"/>
+    <dgm:pt modelId="{8B71A61B-3BE6-F44C-B15F-24AC90DA7A18}" type="pres">
+      <dgm:prSet presAssocID="{1F2EA9CB-399A-44EB-8E6F-1868ACA15891}" presName="vert1" presStyleCnt="0"/>
       <dgm:spPr/>
     </dgm:pt>
-    <dgm:pt modelId="{9896BA50-2A78-714C-91C8-760D9183AB4A}" type="pres">
-      <dgm:prSet presAssocID="{D3F7FD14-7DA7-48C2-BFAA-8AACD98BD748}" presName="node" presStyleLbl="node1" presStyleIdx="2" presStyleCnt="10">
-        <dgm:presLayoutVars>
-          <dgm:bulletEnabled val="1"/>
-        </dgm:presLayoutVars>
-      </dgm:prSet>
+    <dgm:pt modelId="{E204EFD1-CE1D-6944-A02C-3C09E1F41F42}" type="pres">
+      <dgm:prSet presAssocID="{B13E3C94-95C6-41A9-8BD4-B9400395086E}" presName="thickLine" presStyleLbl="alignNode1" presStyleIdx="1" presStyleCnt="10"/>
       <dgm:spPr/>
     </dgm:pt>
-    <dgm:pt modelId="{4E425D5A-B116-9440-9F76-95B44A8C601E}" type="pres">
-      <dgm:prSet presAssocID="{AF33D169-76E5-455E-9C62-A8F30810C8B3}" presName="sibTrans" presStyleCnt="0"/>
+    <dgm:pt modelId="{B341923E-C000-F74C-9DAC-F2BBED5C8AA4}" type="pres">
+      <dgm:prSet presAssocID="{B13E3C94-95C6-41A9-8BD4-B9400395086E}" presName="horz1" presStyleCnt="0"/>
       <dgm:spPr/>
     </dgm:pt>
-    <dgm:pt modelId="{7C42CC6B-DC82-1846-8549-8E8C45EBBC76}" type="pres">
-      <dgm:prSet presAssocID="{D0F41813-A34F-491B-8E12-4F1915E09B0A}" presName="node" presStyleLbl="node1" presStyleIdx="3" presStyleCnt="10">
-        <dgm:presLayoutVars>
-          <dgm:bulletEnabled val="1"/>
-        </dgm:presLayoutVars>
-      </dgm:prSet>
+    <dgm:pt modelId="{E4FC5FBF-184D-7C48-8A28-00329F7ED4F1}" type="pres">
+      <dgm:prSet presAssocID="{B13E3C94-95C6-41A9-8BD4-B9400395086E}" presName="tx1" presStyleLbl="revTx" presStyleIdx="1" presStyleCnt="10"/>
       <dgm:spPr/>
     </dgm:pt>
-    <dgm:pt modelId="{F1CE1738-9B32-D94C-BDF6-A9629B42349B}" type="pres">
-      <dgm:prSet presAssocID="{FF749CB2-EDC8-4ABE-A235-580563225B1F}" presName="sibTrans" presStyleCnt="0"/>
+    <dgm:pt modelId="{10257C1E-B207-CB47-81DD-3DAA654AA92B}" type="pres">
+      <dgm:prSet presAssocID="{B13E3C94-95C6-41A9-8BD4-B9400395086E}" presName="vert1" presStyleCnt="0"/>
       <dgm:spPr/>
     </dgm:pt>
-    <dgm:pt modelId="{707DC925-0883-7D42-81D5-337492041626}" type="pres">
-      <dgm:prSet presAssocID="{24DDCC8B-89C5-46BF-8F52-FB67F01668D1}" presName="node" presStyleLbl="node1" presStyleIdx="4" presStyleCnt="10">
-        <dgm:presLayoutVars>
-          <dgm:bulletEnabled val="1"/>
-        </dgm:presLayoutVars>
-      </dgm:prSet>
+    <dgm:pt modelId="{F48B4CF5-B6D4-EF46-89D3-E9BB1BA7C78B}" type="pres">
+      <dgm:prSet presAssocID="{D3F7FD14-7DA7-48C2-BFAA-8AACD98BD748}" presName="thickLine" presStyleLbl="alignNode1" presStyleIdx="2" presStyleCnt="10"/>
       <dgm:spPr/>
     </dgm:pt>
-    <dgm:pt modelId="{4A1D76D4-770F-2944-9B5A-D2BAF7741338}" type="pres">
-      <dgm:prSet presAssocID="{0351C228-0B07-4791-A60C-7A8B5A7FFC8A}" presName="sibTrans" presStyleCnt="0"/>
+    <dgm:pt modelId="{00ACE228-B4E0-D349-A775-3DACCF007CD9}" type="pres">
+      <dgm:prSet presAssocID="{D3F7FD14-7DA7-48C2-BFAA-8AACD98BD748}" presName="horz1" presStyleCnt="0"/>
       <dgm:spPr/>
     </dgm:pt>
-    <dgm:pt modelId="{39E79416-5A91-D74D-AA3E-BE6DDCDCF91E}" type="pres">
-      <dgm:prSet presAssocID="{8560CF3B-E13B-4A44-A13F-A85D55C72E65}" presName="node" presStyleLbl="node1" presStyleIdx="5" presStyleCnt="10">
-        <dgm:presLayoutVars>
-          <dgm:bulletEnabled val="1"/>
-        </dgm:presLayoutVars>
-      </dgm:prSet>
+    <dgm:pt modelId="{5F3F92BB-DB08-0143-A5F4-DA831A0AC493}" type="pres">
+      <dgm:prSet presAssocID="{D3F7FD14-7DA7-48C2-BFAA-8AACD98BD748}" presName="tx1" presStyleLbl="revTx" presStyleIdx="2" presStyleCnt="10"/>
       <dgm:spPr/>
     </dgm:pt>
-    <dgm:pt modelId="{1543CD19-EA7C-2C4D-8755-175C28E6AAD2}" type="pres">
-      <dgm:prSet presAssocID="{D1C1E419-C3A7-427C-95BD-828E65435A11}" presName="sibTrans" presStyleCnt="0"/>
+    <dgm:pt modelId="{FC96EC0A-4CEE-EC44-8B3B-6FDCD82F8590}" type="pres">
+      <dgm:prSet presAssocID="{D3F7FD14-7DA7-48C2-BFAA-8AACD98BD748}" presName="vert1" presStyleCnt="0"/>
       <dgm:spPr/>
     </dgm:pt>
-    <dgm:pt modelId="{52035D16-E2E2-F24F-B167-8076EAF722CB}" type="pres">
-      <dgm:prSet presAssocID="{76FFEC7F-CF62-4CCB-883E-6F6FCA6A64B0}" presName="node" presStyleLbl="node1" presStyleIdx="6" presStyleCnt="10">
-        <dgm:presLayoutVars>
-          <dgm:bulletEnabled val="1"/>
-        </dgm:presLayoutVars>
-      </dgm:prSet>
+    <dgm:pt modelId="{CCB9F252-199A-2D45-BAD4-F1710B65D923}" type="pres">
+      <dgm:prSet presAssocID="{D0F41813-A34F-491B-8E12-4F1915E09B0A}" presName="thickLine" presStyleLbl="alignNode1" presStyleIdx="3" presStyleCnt="10"/>
       <dgm:spPr/>
     </dgm:pt>
-    <dgm:pt modelId="{439DB273-AC8F-354F-B02F-EF4A5CB20809}" type="pres">
-      <dgm:prSet presAssocID="{AB258805-BF24-49E0-9EF5-72E1BA5874DD}" presName="sibTrans" presStyleCnt="0"/>
+    <dgm:pt modelId="{290249F8-E9A0-0B44-8C34-A419D6D27B97}" type="pres">
+      <dgm:prSet presAssocID="{D0F41813-A34F-491B-8E12-4F1915E09B0A}" presName="horz1" presStyleCnt="0"/>
       <dgm:spPr/>
     </dgm:pt>
-    <dgm:pt modelId="{76256357-65E2-6745-A153-62DB4334C656}" type="pres">
-      <dgm:prSet presAssocID="{16678B6D-CE21-42FF-A256-DBD5C39088E6}" presName="node" presStyleLbl="node1" presStyleIdx="7" presStyleCnt="10">
-        <dgm:presLayoutVars>
-          <dgm:bulletEnabled val="1"/>
-        </dgm:presLayoutVars>
-      </dgm:prSet>
+    <dgm:pt modelId="{C8AE33E6-DC94-1741-A664-A849F08A743F}" type="pres">
+      <dgm:prSet presAssocID="{D0F41813-A34F-491B-8E12-4F1915E09B0A}" presName="tx1" presStyleLbl="revTx" presStyleIdx="3" presStyleCnt="10"/>
       <dgm:spPr/>
     </dgm:pt>
-    <dgm:pt modelId="{3BCCB9EA-82D5-FF43-9DCC-A4850C4E3219}" type="pres">
-      <dgm:prSet presAssocID="{539B2F60-5EB1-46B0-98A4-1D5555B032E8}" presName="sibTrans" presStyleCnt="0"/>
+    <dgm:pt modelId="{A1613360-2CA4-B245-889E-4CA9EB0F140A}" type="pres">
+      <dgm:prSet presAssocID="{D0F41813-A34F-491B-8E12-4F1915E09B0A}" presName="vert1" presStyleCnt="0"/>
       <dgm:spPr/>
     </dgm:pt>
-    <dgm:pt modelId="{F8B0A9D3-899A-7D45-816F-019B2F07CCD9}" type="pres">
-      <dgm:prSet presAssocID="{FE6FC1C6-AE61-4999-90AC-26B7DF02932A}" presName="node" presStyleLbl="node1" presStyleIdx="8" presStyleCnt="10">
-        <dgm:presLayoutVars>
-          <dgm:bulletEnabled val="1"/>
-        </dgm:presLayoutVars>
-      </dgm:prSet>
+    <dgm:pt modelId="{A18E567E-509C-E841-B7CC-4C63823579F5}" type="pres">
+      <dgm:prSet presAssocID="{24DDCC8B-89C5-46BF-8F52-FB67F01668D1}" presName="thickLine" presStyleLbl="alignNode1" presStyleIdx="4" presStyleCnt="10"/>
       <dgm:spPr/>
     </dgm:pt>
-    <dgm:pt modelId="{6F18EFFA-889C-6A4C-8EA0-B20F97A94238}" type="pres">
-      <dgm:prSet presAssocID="{D50B51DC-C93E-4C6E-8C61-1A0A264239E3}" presName="sibTrans" presStyleCnt="0"/>
+    <dgm:pt modelId="{A78D0AA1-AABD-AC4D-9D43-0CD012E5D065}" type="pres">
+      <dgm:prSet presAssocID="{24DDCC8B-89C5-46BF-8F52-FB67F01668D1}" presName="horz1" presStyleCnt="0"/>
       <dgm:spPr/>
     </dgm:pt>
-    <dgm:pt modelId="{2ECC531A-6A07-B945-B8D5-CD6159A4215E}" type="pres">
-      <dgm:prSet presAssocID="{29B38C4C-E097-471B-A232-6B11A1E19812}" presName="node" presStyleLbl="node1" presStyleIdx="9" presStyleCnt="10">
-        <dgm:presLayoutVars>
-          <dgm:bulletEnabled val="1"/>
-        </dgm:presLayoutVars>
-      </dgm:prSet>
+    <dgm:pt modelId="{720E5FC4-9338-4148-8970-5AA588A4CE7A}" type="pres">
+      <dgm:prSet presAssocID="{24DDCC8B-89C5-46BF-8F52-FB67F01668D1}" presName="tx1" presStyleLbl="revTx" presStyleIdx="4" presStyleCnt="10"/>
+      <dgm:spPr/>
+    </dgm:pt>
+    <dgm:pt modelId="{EAA07B26-7747-8545-9AAB-B3F59FD0585A}" type="pres">
+      <dgm:prSet presAssocID="{24DDCC8B-89C5-46BF-8F52-FB67F01668D1}" presName="vert1" presStyleCnt="0"/>
+      <dgm:spPr/>
+    </dgm:pt>
+    <dgm:pt modelId="{7909B848-6260-3D43-A2DE-DD7136EBB12B}" type="pres">
+      <dgm:prSet presAssocID="{8560CF3B-E13B-4A44-A13F-A85D55C72E65}" presName="thickLine" presStyleLbl="alignNode1" presStyleIdx="5" presStyleCnt="10"/>
+      <dgm:spPr/>
+    </dgm:pt>
+    <dgm:pt modelId="{A8EECAA2-7011-CB49-A4D1-85F3C569A456}" type="pres">
+      <dgm:prSet presAssocID="{8560CF3B-E13B-4A44-A13F-A85D55C72E65}" presName="horz1" presStyleCnt="0"/>
+      <dgm:spPr/>
+    </dgm:pt>
+    <dgm:pt modelId="{FCE13139-D455-8A49-A468-1DBF805AA82D}" type="pres">
+      <dgm:prSet presAssocID="{8560CF3B-E13B-4A44-A13F-A85D55C72E65}" presName="tx1" presStyleLbl="revTx" presStyleIdx="5" presStyleCnt="10"/>
+      <dgm:spPr/>
+    </dgm:pt>
+    <dgm:pt modelId="{E91335BD-2C97-DB4D-B82D-89E674FD1C56}" type="pres">
+      <dgm:prSet presAssocID="{8560CF3B-E13B-4A44-A13F-A85D55C72E65}" presName="vert1" presStyleCnt="0"/>
+      <dgm:spPr/>
+    </dgm:pt>
+    <dgm:pt modelId="{D37EDF8E-CA39-4543-A93A-4EFF6BABC934}" type="pres">
+      <dgm:prSet presAssocID="{66CFE45E-98AA-4044-9F6A-735FC61FD1B6}" presName="thickLine" presStyleLbl="alignNode1" presStyleIdx="6" presStyleCnt="10"/>
+      <dgm:spPr/>
+    </dgm:pt>
+    <dgm:pt modelId="{36CD2A31-A63E-5349-A576-0F3131BD49EB}" type="pres">
+      <dgm:prSet presAssocID="{66CFE45E-98AA-4044-9F6A-735FC61FD1B6}" presName="horz1" presStyleCnt="0"/>
+      <dgm:spPr/>
+    </dgm:pt>
+    <dgm:pt modelId="{AC28B0C7-94B1-0243-90C9-9C0BA4679DAE}" type="pres">
+      <dgm:prSet presAssocID="{66CFE45E-98AA-4044-9F6A-735FC61FD1B6}" presName="tx1" presStyleLbl="revTx" presStyleIdx="6" presStyleCnt="10"/>
+      <dgm:spPr/>
+    </dgm:pt>
+    <dgm:pt modelId="{CB2D0CE2-EBEA-3542-B8F8-79100159EB9C}" type="pres">
+      <dgm:prSet presAssocID="{66CFE45E-98AA-4044-9F6A-735FC61FD1B6}" presName="vert1" presStyleCnt="0"/>
+      <dgm:spPr/>
+    </dgm:pt>
+    <dgm:pt modelId="{8AD1048F-AC91-174F-878E-EC51AB37E21B}" type="pres">
+      <dgm:prSet presAssocID="{16678B6D-CE21-42FF-A256-DBD5C39088E6}" presName="thickLine" presStyleLbl="alignNode1" presStyleIdx="7" presStyleCnt="10"/>
+      <dgm:spPr/>
+    </dgm:pt>
+    <dgm:pt modelId="{19ABA4EE-F005-844C-8B7E-5DCAE1A13E74}" type="pres">
+      <dgm:prSet presAssocID="{16678B6D-CE21-42FF-A256-DBD5C39088E6}" presName="horz1" presStyleCnt="0"/>
+      <dgm:spPr/>
+    </dgm:pt>
+    <dgm:pt modelId="{809CBEC3-7139-4940-9B55-3533D2EA9703}" type="pres">
+      <dgm:prSet presAssocID="{16678B6D-CE21-42FF-A256-DBD5C39088E6}" presName="tx1" presStyleLbl="revTx" presStyleIdx="7" presStyleCnt="10"/>
+      <dgm:spPr/>
+    </dgm:pt>
+    <dgm:pt modelId="{7A7E250C-86A9-E549-954B-25D856F14664}" type="pres">
+      <dgm:prSet presAssocID="{16678B6D-CE21-42FF-A256-DBD5C39088E6}" presName="vert1" presStyleCnt="0"/>
+      <dgm:spPr/>
+    </dgm:pt>
+    <dgm:pt modelId="{15C29424-DD92-B14C-B12B-6DAEE39B657B}" type="pres">
+      <dgm:prSet presAssocID="{FE6FC1C6-AE61-4999-90AC-26B7DF02932A}" presName="thickLine" presStyleLbl="alignNode1" presStyleIdx="8" presStyleCnt="10"/>
+      <dgm:spPr/>
+    </dgm:pt>
+    <dgm:pt modelId="{A57689F1-0C95-6A4C-AD17-63922DD96391}" type="pres">
+      <dgm:prSet presAssocID="{FE6FC1C6-AE61-4999-90AC-26B7DF02932A}" presName="horz1" presStyleCnt="0"/>
+      <dgm:spPr/>
+    </dgm:pt>
+    <dgm:pt modelId="{C0C02C4F-0729-4C45-8101-31B0C7B8453C}" type="pres">
+      <dgm:prSet presAssocID="{FE6FC1C6-AE61-4999-90AC-26B7DF02932A}" presName="tx1" presStyleLbl="revTx" presStyleIdx="8" presStyleCnt="10"/>
+      <dgm:spPr/>
+    </dgm:pt>
+    <dgm:pt modelId="{E5A0CD7E-2A2C-4848-B35E-8ED52DC44F59}" type="pres">
+      <dgm:prSet presAssocID="{FE6FC1C6-AE61-4999-90AC-26B7DF02932A}" presName="vert1" presStyleCnt="0"/>
+      <dgm:spPr/>
+    </dgm:pt>
+    <dgm:pt modelId="{63D00284-22DF-EE4B-9A00-A80F0743E9A6}" type="pres">
+      <dgm:prSet presAssocID="{29B38C4C-E097-471B-A232-6B11A1E19812}" presName="thickLine" presStyleLbl="alignNode1" presStyleIdx="9" presStyleCnt="10"/>
+      <dgm:spPr/>
+    </dgm:pt>
+    <dgm:pt modelId="{05AF6251-5D3E-9742-A4D6-ADEDF45BD094}" type="pres">
+      <dgm:prSet presAssocID="{29B38C4C-E097-471B-A232-6B11A1E19812}" presName="horz1" presStyleCnt="0"/>
+      <dgm:spPr/>
+    </dgm:pt>
+    <dgm:pt modelId="{3914183A-5C99-7C4F-9A92-215AF4AC4301}" type="pres">
+      <dgm:prSet presAssocID="{29B38C4C-E097-471B-A232-6B11A1E19812}" presName="tx1" presStyleLbl="revTx" presStyleIdx="9" presStyleCnt="10"/>
+      <dgm:spPr/>
+    </dgm:pt>
+    <dgm:pt modelId="{E2C40FEB-810B-2748-AE23-538D4C9C3113}" type="pres">
+      <dgm:prSet presAssocID="{29B38C4C-E097-471B-A232-6B11A1E19812}" presName="vert1" presStyleCnt="0"/>
       <dgm:spPr/>
     </dgm:pt>
   </dgm:ptLst>
   <dgm:cxnLst>
+    <dgm:cxn modelId="{63819505-E38D-D14E-994D-1F45C93D13D9}" type="presOf" srcId="{66CFE45E-98AA-4044-9F6A-735FC61FD1B6}" destId="{AC28B0C7-94B1-0243-90C9-9C0BA4679DAE}" srcOrd="0" destOrd="0" presId="urn:microsoft.com/office/officeart/2008/layout/LinedList"/>
+    <dgm:cxn modelId="{2F6BF809-E58E-4A4A-A214-C2D17BF3C4EE}" type="presOf" srcId="{D3F7FD14-7DA7-48C2-BFAA-8AACD98BD748}" destId="{5F3F92BB-DB08-0143-A5F4-DA831A0AC493}" srcOrd="0" destOrd="0" presId="urn:microsoft.com/office/officeart/2008/layout/LinedList"/>
     <dgm:cxn modelId="{26DFA410-08C3-4633-B341-08D9ECC9DA2F}" srcId="{FAAD0627-AEC8-452E-ACD4-4AC25F698FFD}" destId="{1F2EA9CB-399A-44EB-8E6F-1868ACA15891}" srcOrd="0" destOrd="0" parTransId="{5C83EAAF-D061-4511-B5C8-6DF26843CBA9}" sibTransId="{4A794126-4771-4111-ACBD-A78684FFF437}"/>
-    <dgm:cxn modelId="{68DC2A13-F45A-9D40-AB62-E686E6BBEAD5}" type="presOf" srcId="{FE6FC1C6-AE61-4999-90AC-26B7DF02932A}" destId="{F8B0A9D3-899A-7D45-816F-019B2F07CCD9}" srcOrd="0" destOrd="0" presId="urn:microsoft.com/office/officeart/2005/8/layout/default"/>
-    <dgm:cxn modelId="{21335E1F-8079-6A4F-8D47-F59B15278B32}" type="presOf" srcId="{8560CF3B-E13B-4A44-A13F-A85D55C72E65}" destId="{39E79416-5A91-D74D-AA3E-BE6DDCDCF91E}" srcOrd="0" destOrd="0" presId="urn:microsoft.com/office/officeart/2005/8/layout/default"/>
+    <dgm:cxn modelId="{4A6F2311-0FD5-3144-BD97-4E18BAA629B7}" type="presOf" srcId="{1F2EA9CB-399A-44EB-8E6F-1868ACA15891}" destId="{6F406DF4-E28B-6A42-90BF-89AD9BDDD394}" srcOrd="0" destOrd="0" presId="urn:microsoft.com/office/officeart/2008/layout/LinedList"/>
+    <dgm:cxn modelId="{FDD1F217-E3E7-C144-AA9B-27A4E48DA266}" type="presOf" srcId="{FE6FC1C6-AE61-4999-90AC-26B7DF02932A}" destId="{C0C02C4F-0729-4C45-8101-31B0C7B8453C}" srcOrd="0" destOrd="0" presId="urn:microsoft.com/office/officeart/2008/layout/LinedList"/>
     <dgm:cxn modelId="{1E904F29-514A-4545-953C-FDD4493D100E}" srcId="{FAAD0627-AEC8-452E-ACD4-4AC25F698FFD}" destId="{D0F41813-A34F-491B-8E12-4F1915E09B0A}" srcOrd="3" destOrd="0" parTransId="{92F7C868-DC44-4D3D-A092-017F4D6D002E}" sibTransId="{FF749CB2-EDC8-4ABE-A235-580563225B1F}"/>
     <dgm:cxn modelId="{1836502E-09B1-4004-97F7-C00DEA8EB4C4}" srcId="{FAAD0627-AEC8-452E-ACD4-4AC25F698FFD}" destId="{8560CF3B-E13B-4A44-A13F-A85D55C72E65}" srcOrd="5" destOrd="0" parTransId="{7AE9D5F6-64B3-456A-A120-EADC66952023}" sibTransId="{D1C1E419-C3A7-427C-95BD-828E65435A11}"/>
-    <dgm:cxn modelId="{29E9CB32-F6D9-2249-944C-172389586FB9}" type="presOf" srcId="{D0F41813-A34F-491B-8E12-4F1915E09B0A}" destId="{7C42CC6B-DC82-1846-8549-8E8C45EBBC76}" srcOrd="0" destOrd="0" presId="urn:microsoft.com/office/officeart/2005/8/layout/default"/>
+    <dgm:cxn modelId="{4AC5712E-FBA6-EB43-822B-FF3F747237EA}" type="presOf" srcId="{8560CF3B-E13B-4A44-A13F-A85D55C72E65}" destId="{FCE13139-D455-8A49-A468-1DBF805AA82D}" srcOrd="0" destOrd="0" presId="urn:microsoft.com/office/officeart/2008/layout/LinedList"/>
+    <dgm:cxn modelId="{D5D3842F-EE35-9644-ABC2-B92FA799BA7F}" type="presOf" srcId="{16678B6D-CE21-42FF-A256-DBD5C39088E6}" destId="{809CBEC3-7139-4940-9B55-3533D2EA9703}" srcOrd="0" destOrd="0" presId="urn:microsoft.com/office/officeart/2008/layout/LinedList"/>
     <dgm:cxn modelId="{4E2CC937-4F24-4283-A8F4-159EF56F9BD3}" srcId="{FAAD0627-AEC8-452E-ACD4-4AC25F698FFD}" destId="{D3F7FD14-7DA7-48C2-BFAA-8AACD98BD748}" srcOrd="2" destOrd="0" parTransId="{A1055B12-C653-4FF2-B08D-F329498D9791}" sibTransId="{AF33D169-76E5-455E-9C62-A8F30810C8B3}"/>
-    <dgm:cxn modelId="{C8A9E63B-8382-0F4A-A5F8-2C0858DE08D5}" type="presOf" srcId="{24DDCC8B-89C5-46BF-8F52-FB67F01668D1}" destId="{707DC925-0883-7D42-81D5-337492041626}" srcOrd="0" destOrd="0" presId="urn:microsoft.com/office/officeart/2005/8/layout/default"/>
-    <dgm:cxn modelId="{0C83C74B-A4CF-E24C-83AC-EDC157DCF59F}" type="presOf" srcId="{76FFEC7F-CF62-4CCB-883E-6F6FCA6A64B0}" destId="{52035D16-E2E2-F24F-B167-8076EAF722CB}" srcOrd="0" destOrd="0" presId="urn:microsoft.com/office/officeart/2005/8/layout/default"/>
     <dgm:cxn modelId="{AA59354C-E052-4B19-90BE-61FD843C080E}" srcId="{FAAD0627-AEC8-452E-ACD4-4AC25F698FFD}" destId="{16678B6D-CE21-42FF-A256-DBD5C39088E6}" srcOrd="7" destOrd="0" parTransId="{6B5A4138-354A-40FF-A210-8069DE494F93}" sibTransId="{539B2F60-5EB1-46B0-98A4-1D5555B032E8}"/>
-    <dgm:cxn modelId="{D7CA446B-5F2B-9F4C-96E2-1A92056D6985}" type="presOf" srcId="{FAAD0627-AEC8-452E-ACD4-4AC25F698FFD}" destId="{18D961E9-B7DA-6549-A9BF-8DB93AF59990}" srcOrd="0" destOrd="0" presId="urn:microsoft.com/office/officeart/2005/8/layout/default"/>
     <dgm:cxn modelId="{9D18DA7D-24DE-4723-837A-2A3BCA8C5D3C}" srcId="{FAAD0627-AEC8-452E-ACD4-4AC25F698FFD}" destId="{24DDCC8B-89C5-46BF-8F52-FB67F01668D1}" srcOrd="4" destOrd="0" parTransId="{6DC33518-7EC5-4F18-9EF7-43F817AFB738}" sibTransId="{0351C228-0B07-4791-A60C-7A8B5A7FFC8A}"/>
+    <dgm:cxn modelId="{8D3E4382-08A7-8A4B-A1E6-148DE96ACA40}" type="presOf" srcId="{D0F41813-A34F-491B-8E12-4F1915E09B0A}" destId="{C8AE33E6-DC94-1741-A664-A849F08A743F}" srcOrd="0" destOrd="0" presId="urn:microsoft.com/office/officeart/2008/layout/LinedList"/>
     <dgm:cxn modelId="{CF910C8A-5AB5-4CB2-A09D-4B6D1A1F86AD}" srcId="{FAAD0627-AEC8-452E-ACD4-4AC25F698FFD}" destId="{FE6FC1C6-AE61-4999-90AC-26B7DF02932A}" srcOrd="8" destOrd="0" parTransId="{745D7616-4BA5-4C03-823D-FFF25244EDFA}" sibTransId="{D50B51DC-C93E-4C6E-8C61-1A0A264239E3}"/>
-    <dgm:cxn modelId="{2073658B-21E0-A246-AAB6-03C9D94387B3}" type="presOf" srcId="{1F2EA9CB-399A-44EB-8E6F-1868ACA15891}" destId="{8A8530EE-01F8-0A44-9B91-EEB99F7BC27B}" srcOrd="0" destOrd="0" presId="urn:microsoft.com/office/officeart/2005/8/layout/default"/>
-    <dgm:cxn modelId="{2F67628D-53D7-2240-AA09-752827A45925}" type="presOf" srcId="{D3F7FD14-7DA7-48C2-BFAA-8AACD98BD748}" destId="{9896BA50-2A78-714C-91C8-760D9183AB4A}" srcOrd="0" destOrd="0" presId="urn:microsoft.com/office/officeart/2005/8/layout/default"/>
-    <dgm:cxn modelId="{DCC0A38F-73DD-4E37-A6CE-85DBD6400E82}" srcId="{FAAD0627-AEC8-452E-ACD4-4AC25F698FFD}" destId="{76FFEC7F-CF62-4CCB-883E-6F6FCA6A64B0}" srcOrd="6" destOrd="0" parTransId="{1593485A-A6E2-4B44-A863-A186F7F857F5}" sibTransId="{AB258805-BF24-49E0-9EF5-72E1BA5874DD}"/>
-    <dgm:cxn modelId="{1F7BFF90-F7BB-824C-8792-F79952E651B4}" type="presOf" srcId="{B13E3C94-95C6-41A9-8BD4-B9400395086E}" destId="{5A129108-391A-5548-81B4-75D4BD6CB294}" srcOrd="0" destOrd="0" presId="urn:microsoft.com/office/officeart/2005/8/layout/default"/>
-    <dgm:cxn modelId="{E30213A5-0050-7F4F-99CA-163E2ED6C00C}" type="presOf" srcId="{29B38C4C-E097-471B-A232-6B11A1E19812}" destId="{2ECC531A-6A07-B945-B8D5-CD6159A4215E}" srcOrd="0" destOrd="0" presId="urn:microsoft.com/office/officeart/2005/8/layout/default"/>
-    <dgm:cxn modelId="{C53BBAAC-554E-0F46-BEE9-A465A534704D}" type="presOf" srcId="{16678B6D-CE21-42FF-A256-DBD5C39088E6}" destId="{76256357-65E2-6745-A153-62DB4334C656}" srcOrd="0" destOrd="0" presId="urn:microsoft.com/office/officeart/2005/8/layout/default"/>
+    <dgm:cxn modelId="{FAC3738B-5292-114C-A654-0F7164EB058E}" type="presOf" srcId="{24DDCC8B-89C5-46BF-8F52-FB67F01668D1}" destId="{720E5FC4-9338-4148-8970-5AA588A4CE7A}" srcOrd="0" destOrd="0" presId="urn:microsoft.com/office/officeart/2008/layout/LinedList"/>
     <dgm:cxn modelId="{EC6983C8-8433-490E-85CA-EFD4A4F5EFF3}" srcId="{FAAD0627-AEC8-452E-ACD4-4AC25F698FFD}" destId="{29B38C4C-E097-471B-A232-6B11A1E19812}" srcOrd="9" destOrd="0" parTransId="{BAE4F3FE-BEF7-4EC8-B203-EEFA144D8A0E}" sibTransId="{A0EE8350-A5E0-4E82-AE74-C33D95037F65}"/>
     <dgm:cxn modelId="{918CE8CD-2FCF-4069-9250-3509182350BA}" srcId="{FAAD0627-AEC8-452E-ACD4-4AC25F698FFD}" destId="{B13E3C94-95C6-41A9-8BD4-B9400395086E}" srcOrd="1" destOrd="0" parTransId="{3B5BBF0D-6FEA-456B-93A6-58E5CE287CFE}" sibTransId="{4D402860-9C98-431D-87AC-F3EC7756EFF4}"/>
-    <dgm:cxn modelId="{CA71E56E-7A1E-9741-B11A-2AD331D3CB20}" type="presParOf" srcId="{18D961E9-B7DA-6549-A9BF-8DB93AF59990}" destId="{8A8530EE-01F8-0A44-9B91-EEB99F7BC27B}" srcOrd="0" destOrd="0" presId="urn:microsoft.com/office/officeart/2005/8/layout/default"/>
-    <dgm:cxn modelId="{B9A3D822-3D98-9B46-B9E5-BA15BF82448D}" type="presParOf" srcId="{18D961E9-B7DA-6549-A9BF-8DB93AF59990}" destId="{ED35C57C-EDDF-1D4A-AE08-BAB3B6DA274A}" srcOrd="1" destOrd="0" presId="urn:microsoft.com/office/officeart/2005/8/layout/default"/>
-    <dgm:cxn modelId="{BCA649F7-E0CB-5C46-8381-39C578ECA798}" type="presParOf" srcId="{18D961E9-B7DA-6549-A9BF-8DB93AF59990}" destId="{5A129108-391A-5548-81B4-75D4BD6CB294}" srcOrd="2" destOrd="0" presId="urn:microsoft.com/office/officeart/2005/8/layout/default"/>
-    <dgm:cxn modelId="{FFBA3E9A-E1AF-D241-ABE4-E2DA5B6BC245}" type="presParOf" srcId="{18D961E9-B7DA-6549-A9BF-8DB93AF59990}" destId="{DEDBD725-F3F6-624A-8EB4-BBE9B48B9370}" srcOrd="3" destOrd="0" presId="urn:microsoft.com/office/officeart/2005/8/layout/default"/>
-    <dgm:cxn modelId="{8D9E8735-7197-684B-B359-F6D811B44A12}" type="presParOf" srcId="{18D961E9-B7DA-6549-A9BF-8DB93AF59990}" destId="{9896BA50-2A78-714C-91C8-760D9183AB4A}" srcOrd="4" destOrd="0" presId="urn:microsoft.com/office/officeart/2005/8/layout/default"/>
-    <dgm:cxn modelId="{A8D2C0B8-C2CF-7D44-A39D-18D1EA40278C}" type="presParOf" srcId="{18D961E9-B7DA-6549-A9BF-8DB93AF59990}" destId="{4E425D5A-B116-9440-9F76-95B44A8C601E}" srcOrd="5" destOrd="0" presId="urn:microsoft.com/office/officeart/2005/8/layout/default"/>
-    <dgm:cxn modelId="{E3FDBEDF-09E3-6A44-8C4C-53C25D40F1DB}" type="presParOf" srcId="{18D961E9-B7DA-6549-A9BF-8DB93AF59990}" destId="{7C42CC6B-DC82-1846-8549-8E8C45EBBC76}" srcOrd="6" destOrd="0" presId="urn:microsoft.com/office/officeart/2005/8/layout/default"/>
-    <dgm:cxn modelId="{99C7F401-A18B-9C4E-9E30-628E929838E5}" type="presParOf" srcId="{18D961E9-B7DA-6549-A9BF-8DB93AF59990}" destId="{F1CE1738-9B32-D94C-BDF6-A9629B42349B}" srcOrd="7" destOrd="0" presId="urn:microsoft.com/office/officeart/2005/8/layout/default"/>
-    <dgm:cxn modelId="{1380C16E-F786-F942-AF0F-6BC2206353A5}" type="presParOf" srcId="{18D961E9-B7DA-6549-A9BF-8DB93AF59990}" destId="{707DC925-0883-7D42-81D5-337492041626}" srcOrd="8" destOrd="0" presId="urn:microsoft.com/office/officeart/2005/8/layout/default"/>
-    <dgm:cxn modelId="{41D997CA-C802-2A42-8741-920356032888}" type="presParOf" srcId="{18D961E9-B7DA-6549-A9BF-8DB93AF59990}" destId="{4A1D76D4-770F-2944-9B5A-D2BAF7741338}" srcOrd="9" destOrd="0" presId="urn:microsoft.com/office/officeart/2005/8/layout/default"/>
-    <dgm:cxn modelId="{33EE5355-86A6-6F44-A62D-D03C80311A94}" type="presParOf" srcId="{18D961E9-B7DA-6549-A9BF-8DB93AF59990}" destId="{39E79416-5A91-D74D-AA3E-BE6DDCDCF91E}" srcOrd="10" destOrd="0" presId="urn:microsoft.com/office/officeart/2005/8/layout/default"/>
-    <dgm:cxn modelId="{9762C982-3458-4347-978D-234B75EB972B}" type="presParOf" srcId="{18D961E9-B7DA-6549-A9BF-8DB93AF59990}" destId="{1543CD19-EA7C-2C4D-8755-175C28E6AAD2}" srcOrd="11" destOrd="0" presId="urn:microsoft.com/office/officeart/2005/8/layout/default"/>
-    <dgm:cxn modelId="{883BA2C4-EB53-7E41-B7F2-841E44FB044F}" type="presParOf" srcId="{18D961E9-B7DA-6549-A9BF-8DB93AF59990}" destId="{52035D16-E2E2-F24F-B167-8076EAF722CB}" srcOrd="12" destOrd="0" presId="urn:microsoft.com/office/officeart/2005/8/layout/default"/>
-    <dgm:cxn modelId="{547AC6DA-3474-7843-8A45-AC7EC975AF5B}" type="presParOf" srcId="{18D961E9-B7DA-6549-A9BF-8DB93AF59990}" destId="{439DB273-AC8F-354F-B02F-EF4A5CB20809}" srcOrd="13" destOrd="0" presId="urn:microsoft.com/office/officeart/2005/8/layout/default"/>
-    <dgm:cxn modelId="{D8BEDF03-ACBA-7545-90A3-8EF1B17E3228}" type="presParOf" srcId="{18D961E9-B7DA-6549-A9BF-8DB93AF59990}" destId="{76256357-65E2-6745-A153-62DB4334C656}" srcOrd="14" destOrd="0" presId="urn:microsoft.com/office/officeart/2005/8/layout/default"/>
-    <dgm:cxn modelId="{76F92BAE-9C79-5247-B098-8470908D2DCE}" type="presParOf" srcId="{18D961E9-B7DA-6549-A9BF-8DB93AF59990}" destId="{3BCCB9EA-82D5-FF43-9DCC-A4850C4E3219}" srcOrd="15" destOrd="0" presId="urn:microsoft.com/office/officeart/2005/8/layout/default"/>
-    <dgm:cxn modelId="{87A61428-C19A-9C4D-9C0E-EF70A3C954D9}" type="presParOf" srcId="{18D961E9-B7DA-6549-A9BF-8DB93AF59990}" destId="{F8B0A9D3-899A-7D45-816F-019B2F07CCD9}" srcOrd="16" destOrd="0" presId="urn:microsoft.com/office/officeart/2005/8/layout/default"/>
-    <dgm:cxn modelId="{6F00A609-FE64-474C-8806-7E0E488D001C}" type="presParOf" srcId="{18D961E9-B7DA-6549-A9BF-8DB93AF59990}" destId="{6F18EFFA-889C-6A4C-8EA0-B20F97A94238}" srcOrd="17" destOrd="0" presId="urn:microsoft.com/office/officeart/2005/8/layout/default"/>
-    <dgm:cxn modelId="{75265578-F094-A243-8960-274D74F59455}" type="presParOf" srcId="{18D961E9-B7DA-6549-A9BF-8DB93AF59990}" destId="{2ECC531A-6A07-B945-B8D5-CD6159A4215E}" srcOrd="18" destOrd="0" presId="urn:microsoft.com/office/officeart/2005/8/layout/default"/>
+    <dgm:cxn modelId="{D0C33CD3-3568-334C-A4E6-F0A136131359}" srcId="{FAAD0627-AEC8-452E-ACD4-4AC25F698FFD}" destId="{66CFE45E-98AA-4044-9F6A-735FC61FD1B6}" srcOrd="6" destOrd="0" parTransId="{3C00983E-81B5-254C-AF8C-7660F7A5D933}" sibTransId="{36FE1252-C24C-4644-9382-B48ACEAA1034}"/>
+    <dgm:cxn modelId="{E45745D6-9275-B94F-9517-E8E0D4251B43}" type="presOf" srcId="{29B38C4C-E097-471B-A232-6B11A1E19812}" destId="{3914183A-5C99-7C4F-9A92-215AF4AC4301}" srcOrd="0" destOrd="0" presId="urn:microsoft.com/office/officeart/2008/layout/LinedList"/>
+    <dgm:cxn modelId="{C29B7FF7-858B-9642-8430-ED1942D1C354}" type="presOf" srcId="{B13E3C94-95C6-41A9-8BD4-B9400395086E}" destId="{E4FC5FBF-184D-7C48-8A28-00329F7ED4F1}" srcOrd="0" destOrd="0" presId="urn:microsoft.com/office/officeart/2008/layout/LinedList"/>
+    <dgm:cxn modelId="{E09BC3FE-A3B9-B84D-B782-75AAB9830C71}" type="presOf" srcId="{FAAD0627-AEC8-452E-ACD4-4AC25F698FFD}" destId="{4225D961-A3D8-5440-A8C0-B340BEB63C6A}" srcOrd="0" destOrd="0" presId="urn:microsoft.com/office/officeart/2008/layout/LinedList"/>
+    <dgm:cxn modelId="{D7211633-D285-C047-9B6A-514C1DD2466E}" type="presParOf" srcId="{4225D961-A3D8-5440-A8C0-B340BEB63C6A}" destId="{F213A161-6AE6-664A-AB45-83A99E0A5259}" srcOrd="0" destOrd="0" presId="urn:microsoft.com/office/officeart/2008/layout/LinedList"/>
+    <dgm:cxn modelId="{FF921189-058C-E540-83CE-E61590B2BA85}" type="presParOf" srcId="{4225D961-A3D8-5440-A8C0-B340BEB63C6A}" destId="{D8E10D12-9AEA-1241-956C-E748615EF2A8}" srcOrd="1" destOrd="0" presId="urn:microsoft.com/office/officeart/2008/layout/LinedList"/>
+    <dgm:cxn modelId="{DCF06BAC-EC5E-DB49-BB40-F7E839D6271B}" type="presParOf" srcId="{D8E10D12-9AEA-1241-956C-E748615EF2A8}" destId="{6F406DF4-E28B-6A42-90BF-89AD9BDDD394}" srcOrd="0" destOrd="0" presId="urn:microsoft.com/office/officeart/2008/layout/LinedList"/>
+    <dgm:cxn modelId="{D29543B4-BD98-AE45-B77C-F37BEB78AF3E}" type="presParOf" srcId="{D8E10D12-9AEA-1241-956C-E748615EF2A8}" destId="{8B71A61B-3BE6-F44C-B15F-24AC90DA7A18}" srcOrd="1" destOrd="0" presId="urn:microsoft.com/office/officeart/2008/layout/LinedList"/>
+    <dgm:cxn modelId="{C76B70B8-E4EE-C745-AC0B-34825B096EB3}" type="presParOf" srcId="{4225D961-A3D8-5440-A8C0-B340BEB63C6A}" destId="{E204EFD1-CE1D-6944-A02C-3C09E1F41F42}" srcOrd="2" destOrd="0" presId="urn:microsoft.com/office/officeart/2008/layout/LinedList"/>
+    <dgm:cxn modelId="{840E1625-02EA-1244-840C-C2584B102A1C}" type="presParOf" srcId="{4225D961-A3D8-5440-A8C0-B340BEB63C6A}" destId="{B341923E-C000-F74C-9DAC-F2BBED5C8AA4}" srcOrd="3" destOrd="0" presId="urn:microsoft.com/office/officeart/2008/layout/LinedList"/>
+    <dgm:cxn modelId="{AA2047F7-B516-8C45-ADA4-8E41235EC101}" type="presParOf" srcId="{B341923E-C000-F74C-9DAC-F2BBED5C8AA4}" destId="{E4FC5FBF-184D-7C48-8A28-00329F7ED4F1}" srcOrd="0" destOrd="0" presId="urn:microsoft.com/office/officeart/2008/layout/LinedList"/>
+    <dgm:cxn modelId="{82A01024-15D9-A545-A2CC-4657E4B2233A}" type="presParOf" srcId="{B341923E-C000-F74C-9DAC-F2BBED5C8AA4}" destId="{10257C1E-B207-CB47-81DD-3DAA654AA92B}" srcOrd="1" destOrd="0" presId="urn:microsoft.com/office/officeart/2008/layout/LinedList"/>
+    <dgm:cxn modelId="{565FB041-621A-1A49-873A-C3AC0EB920F9}" type="presParOf" srcId="{4225D961-A3D8-5440-A8C0-B340BEB63C6A}" destId="{F48B4CF5-B6D4-EF46-89D3-E9BB1BA7C78B}" srcOrd="4" destOrd="0" presId="urn:microsoft.com/office/officeart/2008/layout/LinedList"/>
+    <dgm:cxn modelId="{9BCB7897-0F59-864D-A6C9-8AEDF3D44FC9}" type="presParOf" srcId="{4225D961-A3D8-5440-A8C0-B340BEB63C6A}" destId="{00ACE228-B4E0-D349-A775-3DACCF007CD9}" srcOrd="5" destOrd="0" presId="urn:microsoft.com/office/officeart/2008/layout/LinedList"/>
+    <dgm:cxn modelId="{FC6F06B2-CC68-0E46-A3CC-E20012B4E00F}" type="presParOf" srcId="{00ACE228-B4E0-D349-A775-3DACCF007CD9}" destId="{5F3F92BB-DB08-0143-A5F4-DA831A0AC493}" srcOrd="0" destOrd="0" presId="urn:microsoft.com/office/officeart/2008/layout/LinedList"/>
+    <dgm:cxn modelId="{41A6986C-DD27-014E-9ACD-E6AD515971BA}" type="presParOf" srcId="{00ACE228-B4E0-D349-A775-3DACCF007CD9}" destId="{FC96EC0A-4CEE-EC44-8B3B-6FDCD82F8590}" srcOrd="1" destOrd="0" presId="urn:microsoft.com/office/officeart/2008/layout/LinedList"/>
+    <dgm:cxn modelId="{518490AD-6FFC-0B43-9775-1B90D388BDAD}" type="presParOf" srcId="{4225D961-A3D8-5440-A8C0-B340BEB63C6A}" destId="{CCB9F252-199A-2D45-BAD4-F1710B65D923}" srcOrd="6" destOrd="0" presId="urn:microsoft.com/office/officeart/2008/layout/LinedList"/>
+    <dgm:cxn modelId="{F8425EAA-4768-C344-B78A-29275F0348B2}" type="presParOf" srcId="{4225D961-A3D8-5440-A8C0-B340BEB63C6A}" destId="{290249F8-E9A0-0B44-8C34-A419D6D27B97}" srcOrd="7" destOrd="0" presId="urn:microsoft.com/office/officeart/2008/layout/LinedList"/>
+    <dgm:cxn modelId="{BB3F08FC-3869-1048-8491-E728CB9B7322}" type="presParOf" srcId="{290249F8-E9A0-0B44-8C34-A419D6D27B97}" destId="{C8AE33E6-DC94-1741-A664-A849F08A743F}" srcOrd="0" destOrd="0" presId="urn:microsoft.com/office/officeart/2008/layout/LinedList"/>
+    <dgm:cxn modelId="{8AB7AF7A-B6CD-5843-98F3-6F8837D3112E}" type="presParOf" srcId="{290249F8-E9A0-0B44-8C34-A419D6D27B97}" destId="{A1613360-2CA4-B245-889E-4CA9EB0F140A}" srcOrd="1" destOrd="0" presId="urn:microsoft.com/office/officeart/2008/layout/LinedList"/>
+    <dgm:cxn modelId="{9C7F0855-6918-204E-86B1-5DC29AC8BEB8}" type="presParOf" srcId="{4225D961-A3D8-5440-A8C0-B340BEB63C6A}" destId="{A18E567E-509C-E841-B7CC-4C63823579F5}" srcOrd="8" destOrd="0" presId="urn:microsoft.com/office/officeart/2008/layout/LinedList"/>
+    <dgm:cxn modelId="{0AEC721F-92CE-344C-B084-228312EACA58}" type="presParOf" srcId="{4225D961-A3D8-5440-A8C0-B340BEB63C6A}" destId="{A78D0AA1-AABD-AC4D-9D43-0CD012E5D065}" srcOrd="9" destOrd="0" presId="urn:microsoft.com/office/officeart/2008/layout/LinedList"/>
+    <dgm:cxn modelId="{4E2D2216-C7CC-2C40-A3FE-38B3918CE4B1}" type="presParOf" srcId="{A78D0AA1-AABD-AC4D-9D43-0CD012E5D065}" destId="{720E5FC4-9338-4148-8970-5AA588A4CE7A}" srcOrd="0" destOrd="0" presId="urn:microsoft.com/office/officeart/2008/layout/LinedList"/>
+    <dgm:cxn modelId="{8FF1C641-F50B-EE41-905E-00BAF1981A2A}" type="presParOf" srcId="{A78D0AA1-AABD-AC4D-9D43-0CD012E5D065}" destId="{EAA07B26-7747-8545-9AAB-B3F59FD0585A}" srcOrd="1" destOrd="0" presId="urn:microsoft.com/office/officeart/2008/layout/LinedList"/>
+    <dgm:cxn modelId="{0A88E0FD-882F-0846-ACB3-5DE2CB076783}" type="presParOf" srcId="{4225D961-A3D8-5440-A8C0-B340BEB63C6A}" destId="{7909B848-6260-3D43-A2DE-DD7136EBB12B}" srcOrd="10" destOrd="0" presId="urn:microsoft.com/office/officeart/2008/layout/LinedList"/>
+    <dgm:cxn modelId="{FA4F0C84-9DB8-C048-98A8-0319F80F64B9}" type="presParOf" srcId="{4225D961-A3D8-5440-A8C0-B340BEB63C6A}" destId="{A8EECAA2-7011-CB49-A4D1-85F3C569A456}" srcOrd="11" destOrd="0" presId="urn:microsoft.com/office/officeart/2008/layout/LinedList"/>
+    <dgm:cxn modelId="{A7E6CB28-C51E-D240-A88A-2102D293D0BD}" type="presParOf" srcId="{A8EECAA2-7011-CB49-A4D1-85F3C569A456}" destId="{FCE13139-D455-8A49-A468-1DBF805AA82D}" srcOrd="0" destOrd="0" presId="urn:microsoft.com/office/officeart/2008/layout/LinedList"/>
+    <dgm:cxn modelId="{7B9145D0-5BB2-FE4F-948A-78F224D0BF75}" type="presParOf" srcId="{A8EECAA2-7011-CB49-A4D1-85F3C569A456}" destId="{E91335BD-2C97-DB4D-B82D-89E674FD1C56}" srcOrd="1" destOrd="0" presId="urn:microsoft.com/office/officeart/2008/layout/LinedList"/>
+    <dgm:cxn modelId="{5DCD79E3-6E7D-554B-91C4-79922FEE8977}" type="presParOf" srcId="{4225D961-A3D8-5440-A8C0-B340BEB63C6A}" destId="{D37EDF8E-CA39-4543-A93A-4EFF6BABC934}" srcOrd="12" destOrd="0" presId="urn:microsoft.com/office/officeart/2008/layout/LinedList"/>
+    <dgm:cxn modelId="{68EA46F3-5FEA-BA43-8375-D935087A00D7}" type="presParOf" srcId="{4225D961-A3D8-5440-A8C0-B340BEB63C6A}" destId="{36CD2A31-A63E-5349-A576-0F3131BD49EB}" srcOrd="13" destOrd="0" presId="urn:microsoft.com/office/officeart/2008/layout/LinedList"/>
+    <dgm:cxn modelId="{6D87F245-B781-5643-ADD6-1E01B6857838}" type="presParOf" srcId="{36CD2A31-A63E-5349-A576-0F3131BD49EB}" destId="{AC28B0C7-94B1-0243-90C9-9C0BA4679DAE}" srcOrd="0" destOrd="0" presId="urn:microsoft.com/office/officeart/2008/layout/LinedList"/>
+    <dgm:cxn modelId="{54082957-B8AD-B24D-9D47-C9CA02678C1A}" type="presParOf" srcId="{36CD2A31-A63E-5349-A576-0F3131BD49EB}" destId="{CB2D0CE2-EBEA-3542-B8F8-79100159EB9C}" srcOrd="1" destOrd="0" presId="urn:microsoft.com/office/officeart/2008/layout/LinedList"/>
+    <dgm:cxn modelId="{4CA17EB5-924F-524F-9C29-683DF4F42228}" type="presParOf" srcId="{4225D961-A3D8-5440-A8C0-B340BEB63C6A}" destId="{8AD1048F-AC91-174F-878E-EC51AB37E21B}" srcOrd="14" destOrd="0" presId="urn:microsoft.com/office/officeart/2008/layout/LinedList"/>
+    <dgm:cxn modelId="{085E366F-369D-274E-8283-C4389FCB518E}" type="presParOf" srcId="{4225D961-A3D8-5440-A8C0-B340BEB63C6A}" destId="{19ABA4EE-F005-844C-8B7E-5DCAE1A13E74}" srcOrd="15" destOrd="0" presId="urn:microsoft.com/office/officeart/2008/layout/LinedList"/>
+    <dgm:cxn modelId="{789AE282-7C1F-2F4F-A64E-51C16C6F438F}" type="presParOf" srcId="{19ABA4EE-F005-844C-8B7E-5DCAE1A13E74}" destId="{809CBEC3-7139-4940-9B55-3533D2EA9703}" srcOrd="0" destOrd="0" presId="urn:microsoft.com/office/officeart/2008/layout/LinedList"/>
+    <dgm:cxn modelId="{42996750-AFEC-5742-824D-A6EFEA0F28E1}" type="presParOf" srcId="{19ABA4EE-F005-844C-8B7E-5DCAE1A13E74}" destId="{7A7E250C-86A9-E549-954B-25D856F14664}" srcOrd="1" destOrd="0" presId="urn:microsoft.com/office/officeart/2008/layout/LinedList"/>
+    <dgm:cxn modelId="{E63DF73D-6CE9-F24C-96AB-E1CF7D0F2366}" type="presParOf" srcId="{4225D961-A3D8-5440-A8C0-B340BEB63C6A}" destId="{15C29424-DD92-B14C-B12B-6DAEE39B657B}" srcOrd="16" destOrd="0" presId="urn:microsoft.com/office/officeart/2008/layout/LinedList"/>
+    <dgm:cxn modelId="{BF8FC455-6221-E64B-9835-E86D5F0D75A1}" type="presParOf" srcId="{4225D961-A3D8-5440-A8C0-B340BEB63C6A}" destId="{A57689F1-0C95-6A4C-AD17-63922DD96391}" srcOrd="17" destOrd="0" presId="urn:microsoft.com/office/officeart/2008/layout/LinedList"/>
+    <dgm:cxn modelId="{9931ADB8-E394-AC4D-B9C5-20C1B1C5442E}" type="presParOf" srcId="{A57689F1-0C95-6A4C-AD17-63922DD96391}" destId="{C0C02C4F-0729-4C45-8101-31B0C7B8453C}" srcOrd="0" destOrd="0" presId="urn:microsoft.com/office/officeart/2008/layout/LinedList"/>
+    <dgm:cxn modelId="{58D96ECD-4A57-8340-9657-CA1D94606B83}" type="presParOf" srcId="{A57689F1-0C95-6A4C-AD17-63922DD96391}" destId="{E5A0CD7E-2A2C-4848-B35E-8ED52DC44F59}" srcOrd="1" destOrd="0" presId="urn:microsoft.com/office/officeart/2008/layout/LinedList"/>
+    <dgm:cxn modelId="{C4984DBC-1672-594A-91D8-B3DD273D41D7}" type="presParOf" srcId="{4225D961-A3D8-5440-A8C0-B340BEB63C6A}" destId="{63D00284-22DF-EE4B-9A00-A80F0743E9A6}" srcOrd="18" destOrd="0" presId="urn:microsoft.com/office/officeart/2008/layout/LinedList"/>
+    <dgm:cxn modelId="{640F9A91-64C2-4648-B07C-A794B59847AE}" type="presParOf" srcId="{4225D961-A3D8-5440-A8C0-B340BEB63C6A}" destId="{05AF6251-5D3E-9742-A4D6-ADEDF45BD094}" srcOrd="19" destOrd="0" presId="urn:microsoft.com/office/officeart/2008/layout/LinedList"/>
+    <dgm:cxn modelId="{EDA321BF-A1E7-6841-9460-80B904B38877}" type="presParOf" srcId="{05AF6251-5D3E-9742-A4D6-ADEDF45BD094}" destId="{3914183A-5C99-7C4F-9A92-215AF4AC4301}" srcOrd="0" destOrd="0" presId="urn:microsoft.com/office/officeart/2008/layout/LinedList"/>
+    <dgm:cxn modelId="{5857F5B2-8CFC-FF45-A0E4-ED8A0FBAD3F3}" type="presParOf" srcId="{05AF6251-5D3E-9742-A4D6-ADEDF45BD094}" destId="{E2C40FEB-810B-2748-AE23-538D4C9C3113}" srcOrd="1" destOrd="0" presId="urn:microsoft.com/office/officeart/2008/layout/LinedList"/>
   </dgm:cxnLst>
   <dgm:bg/>
   <dgm:whole/>
@@ -1446,17 +2579,17 @@
       <dsp:cNvGrpSpPr/>
     </dsp:nvGrpSpPr>
     <dsp:grpSpPr/>
-    <dsp:sp modelId="{8A8530EE-01F8-0A44-9B91-EEB99F7BC27B}">
+    <dsp:sp modelId="{28FF7F30-9715-9540-A1B6-8A72D52136B1}">
       <dsp:nvSpPr>
         <dsp:cNvPr id="0" name=""/>
         <dsp:cNvSpPr/>
       </dsp:nvSpPr>
       <dsp:spPr>
         <a:xfrm>
-          <a:off x="0" y="384083"/>
-          <a:ext cx="1497168" cy="898301"/>
+          <a:off x="0" y="353193"/>
+          <a:ext cx="3646835" cy="914940"/>
         </a:xfrm>
-        <a:prstGeom prst="rect">
+        <a:prstGeom prst="roundRect">
           <a:avLst/>
         </a:prstGeom>
         <a:solidFill>
@@ -1495,12 +2628,12 @@
         </a:fontRef>
       </dsp:style>
       <dsp:txBody>
-        <a:bodyPr spcFirstLastPara="0" vert="horz" wrap="square" lIns="41910" tIns="41910" rIns="41910" bIns="41910" numCol="1" spcCol="1270" anchor="ctr" anchorCtr="0">
+        <a:bodyPr spcFirstLastPara="0" vert="horz" wrap="square" lIns="87630" tIns="87630" rIns="87630" bIns="87630" numCol="1" spcCol="1270" anchor="ctr" anchorCtr="0">
           <a:noAutofit/>
         </a:bodyPr>
         <a:lstStyle/>
         <a:p>
-          <a:pPr marL="0" lvl="0" indent="0" algn="ctr" defTabSz="488950">
+          <a:pPr marL="0" lvl="0" indent="0" algn="l" defTabSz="1022350">
             <a:lnSpc>
               <a:spcPct val="90000"/>
             </a:lnSpc>
@@ -1513,27 +2646,32 @@
             <a:buNone/>
           </a:pPr>
           <a:r>
-            <a:rPr lang="en-US" sz="1100" kern="1200" dirty="0"/>
-            <a:t> Single dataset</a:t>
+            <a:rPr lang="en-US" sz="2300" b="0" i="0" kern="1200" baseline="0"/>
+            <a:t>Cleaned cohort size: </a:t>
           </a:r>
+          <a:r>
+            <a:rPr lang="en-US" sz="2300" b="1" i="0" kern="1200" baseline="0"/>
+            <a:t>51 ICU stays</a:t>
+          </a:r>
+          <a:endParaRPr lang="en-US" sz="2300" kern="1200"/>
         </a:p>
       </dsp:txBody>
       <dsp:txXfrm>
-        <a:off x="0" y="384083"/>
-        <a:ext cx="1497168" cy="898301"/>
+        <a:off x="44664" y="397857"/>
+        <a:ext cx="3557507" cy="825612"/>
       </dsp:txXfrm>
     </dsp:sp>
-    <dsp:sp modelId="{5A129108-391A-5548-81B4-75D4BD6CB294}">
+    <dsp:sp modelId="{82181342-ACC1-1148-886F-8EC5D3B61634}">
       <dsp:nvSpPr>
         <dsp:cNvPr id="0" name=""/>
         <dsp:cNvSpPr/>
       </dsp:nvSpPr>
       <dsp:spPr>
         <a:xfrm>
-          <a:off x="1646885" y="384083"/>
-          <a:ext cx="1497168" cy="898301"/>
+          <a:off x="0" y="1334373"/>
+          <a:ext cx="3646835" cy="914940"/>
         </a:xfrm>
-        <a:prstGeom prst="rect">
+        <a:prstGeom prst="roundRect">
           <a:avLst/>
         </a:prstGeom>
         <a:solidFill>
@@ -1572,12 +2710,12 @@
         </a:fontRef>
       </dsp:style>
       <dsp:txBody>
-        <a:bodyPr spcFirstLastPara="0" vert="horz" wrap="square" lIns="41910" tIns="41910" rIns="41910" bIns="41910" numCol="1" spcCol="1270" anchor="ctr" anchorCtr="0">
+        <a:bodyPr spcFirstLastPara="0" vert="horz" wrap="square" lIns="87630" tIns="87630" rIns="87630" bIns="87630" numCol="1" spcCol="1270" anchor="ctr" anchorCtr="0">
           <a:noAutofit/>
         </a:bodyPr>
         <a:lstStyle/>
         <a:p>
-          <a:pPr marL="0" lvl="0" indent="0" algn="ctr" defTabSz="488950">
+          <a:pPr marL="0" lvl="0" indent="0" algn="l" defTabSz="1022350">
             <a:lnSpc>
               <a:spcPct val="90000"/>
             </a:lnSpc>
@@ -1590,27 +2728,32 @@
             <a:buNone/>
           </a:pPr>
           <a:r>
-            <a:rPr lang="en-US" sz="1100" kern="1200" dirty="0"/>
-            <a:t> Diabetes defined by diagnosis codes</a:t>
+            <a:rPr lang="en-US" sz="2300" b="0" i="0" kern="1200" baseline="0"/>
+            <a:t>Short stay: </a:t>
           </a:r>
+          <a:r>
+            <a:rPr lang="en-US" sz="2300" b="1" i="0" kern="1200" baseline="0"/>
+            <a:t>24</a:t>
+          </a:r>
+          <a:endParaRPr lang="en-US" sz="2300" kern="1200"/>
         </a:p>
       </dsp:txBody>
       <dsp:txXfrm>
-        <a:off x="1646885" y="384083"/>
-        <a:ext cx="1497168" cy="898301"/>
+        <a:off x="44664" y="1379037"/>
+        <a:ext cx="3557507" cy="825612"/>
       </dsp:txXfrm>
     </dsp:sp>
-    <dsp:sp modelId="{9896BA50-2A78-714C-91C8-760D9183AB4A}">
+    <dsp:sp modelId="{28E454F2-8EE1-0044-AC05-055F575BD45A}">
       <dsp:nvSpPr>
         <dsp:cNvPr id="0" name=""/>
         <dsp:cNvSpPr/>
       </dsp:nvSpPr>
       <dsp:spPr>
         <a:xfrm>
-          <a:off x="3293771" y="384083"/>
-          <a:ext cx="1497168" cy="898301"/>
+          <a:off x="0" y="2315553"/>
+          <a:ext cx="3646835" cy="914940"/>
         </a:xfrm>
-        <a:prstGeom prst="rect">
+        <a:prstGeom prst="roundRect">
           <a:avLst/>
         </a:prstGeom>
         <a:solidFill>
@@ -1649,12 +2792,12 @@
         </a:fontRef>
       </dsp:style>
       <dsp:txBody>
-        <a:bodyPr spcFirstLastPara="0" vert="horz" wrap="square" lIns="41910" tIns="41910" rIns="41910" bIns="41910" numCol="1" spcCol="1270" anchor="ctr" anchorCtr="0">
+        <a:bodyPr spcFirstLastPara="0" vert="horz" wrap="square" lIns="87630" tIns="87630" rIns="87630" bIns="87630" numCol="1" spcCol="1270" anchor="ctr" anchorCtr="0">
           <a:noAutofit/>
         </a:bodyPr>
         <a:lstStyle/>
         <a:p>
-          <a:pPr marL="0" lvl="0" indent="0" algn="ctr" defTabSz="488950">
+          <a:pPr marL="0" lvl="0" indent="0" algn="l" defTabSz="1022350">
             <a:lnSpc>
               <a:spcPct val="90000"/>
             </a:lnSpc>
@@ -1667,27 +2810,32 @@
             <a:buNone/>
           </a:pPr>
           <a:r>
-            <a:rPr lang="en-US" sz="1100" kern="1200" dirty="0"/>
-            <a:t> Simple feature set</a:t>
+            <a:rPr lang="en-US" sz="2300" b="0" i="0" kern="1200" baseline="0"/>
+            <a:t>Medium stay: </a:t>
           </a:r>
+          <a:r>
+            <a:rPr lang="en-US" sz="2300" b="1" i="0" kern="1200" baseline="0"/>
+            <a:t>16</a:t>
+          </a:r>
+          <a:endParaRPr lang="en-US" sz="2300" kern="1200"/>
         </a:p>
       </dsp:txBody>
       <dsp:txXfrm>
-        <a:off x="3293771" y="384083"/>
-        <a:ext cx="1497168" cy="898301"/>
+        <a:off x="44664" y="2360217"/>
+        <a:ext cx="3557507" cy="825612"/>
       </dsp:txXfrm>
     </dsp:sp>
-    <dsp:sp modelId="{7C42CC6B-DC82-1846-8549-8E8C45EBBC76}">
+    <dsp:sp modelId="{945B97B2-AEC3-144A-A652-FB3F79AEE832}">
       <dsp:nvSpPr>
         <dsp:cNvPr id="0" name=""/>
         <dsp:cNvSpPr/>
       </dsp:nvSpPr>
       <dsp:spPr>
         <a:xfrm>
-          <a:off x="0" y="1432101"/>
-          <a:ext cx="1497168" cy="898301"/>
+          <a:off x="0" y="3296733"/>
+          <a:ext cx="3646835" cy="914940"/>
         </a:xfrm>
-        <a:prstGeom prst="rect">
+        <a:prstGeom prst="roundRect">
           <a:avLst/>
         </a:prstGeom>
         <a:solidFill>
@@ -1726,12 +2874,12 @@
         </a:fontRef>
       </dsp:style>
       <dsp:txBody>
-        <a:bodyPr spcFirstLastPara="0" vert="horz" wrap="square" lIns="41910" tIns="41910" rIns="41910" bIns="41910" numCol="1" spcCol="1270" anchor="ctr" anchorCtr="0">
+        <a:bodyPr spcFirstLastPara="0" vert="horz" wrap="square" lIns="87630" tIns="87630" rIns="87630" bIns="87630" numCol="1" spcCol="1270" anchor="ctr" anchorCtr="0">
           <a:noAutofit/>
         </a:bodyPr>
         <a:lstStyle/>
         <a:p>
-          <a:pPr marL="0" lvl="0" indent="0" algn="ctr" defTabSz="488950">
+          <a:pPr marL="0" lvl="0" indent="0" algn="l" defTabSz="1022350">
             <a:lnSpc>
               <a:spcPct val="90000"/>
             </a:lnSpc>
@@ -1744,27 +2892,32 @@
             <a:buNone/>
           </a:pPr>
           <a:r>
-            <a:rPr lang="en-US" sz="1100" kern="1200" dirty="0"/>
-            <a:t> Educational use only</a:t>
+            <a:rPr lang="en-US" sz="2300" b="0" i="0" kern="1200" baseline="0"/>
+            <a:t>Long stay: </a:t>
           </a:r>
+          <a:r>
+            <a:rPr lang="en-US" sz="2300" b="1" i="0" kern="1200" baseline="0"/>
+            <a:t>11</a:t>
+          </a:r>
+          <a:endParaRPr lang="en-US" sz="2300" kern="1200"/>
         </a:p>
       </dsp:txBody>
       <dsp:txXfrm>
-        <a:off x="0" y="1432101"/>
-        <a:ext cx="1497168" cy="898301"/>
+        <a:off x="44664" y="3341397"/>
+        <a:ext cx="3557507" cy="825612"/>
       </dsp:txXfrm>
     </dsp:sp>
-    <dsp:sp modelId="{707DC925-0883-7D42-81D5-337492041626}">
+    <dsp:sp modelId="{52F077D6-C56D-E44E-9468-D88D11484A59}">
       <dsp:nvSpPr>
         <dsp:cNvPr id="0" name=""/>
         <dsp:cNvSpPr/>
       </dsp:nvSpPr>
       <dsp:spPr>
         <a:xfrm>
-          <a:off x="1646885" y="1432101"/>
-          <a:ext cx="1497168" cy="898301"/>
+          <a:off x="0" y="4277913"/>
+          <a:ext cx="3646835" cy="914940"/>
         </a:xfrm>
-        <a:prstGeom prst="rect">
+        <a:prstGeom prst="roundRect">
           <a:avLst/>
         </a:prstGeom>
         <a:solidFill>
@@ -1803,12 +2956,12 @@
         </a:fontRef>
       </dsp:style>
       <dsp:txBody>
-        <a:bodyPr spcFirstLastPara="0" vert="horz" wrap="square" lIns="41910" tIns="41910" rIns="41910" bIns="41910" numCol="1" spcCol="1270" anchor="ctr" anchorCtr="0">
+        <a:bodyPr spcFirstLastPara="0" vert="horz" wrap="square" lIns="87630" tIns="87630" rIns="87630" bIns="87630" numCol="1" spcCol="1270" anchor="ctr" anchorCtr="0">
           <a:noAutofit/>
         </a:bodyPr>
         <a:lstStyle/>
         <a:p>
-          <a:pPr marL="0" lvl="0" indent="0" algn="ctr" defTabSz="488950">
+          <a:pPr marL="0" lvl="0" indent="0" algn="l" defTabSz="1022350">
             <a:lnSpc>
               <a:spcPct val="90000"/>
             </a:lnSpc>
@@ -1821,27 +2974,40 @@
             <a:buNone/>
           </a:pPr>
           <a:r>
-            <a:rPr lang="en-US" sz="1100" kern="1200" dirty="0"/>
-            <a:t>Replication:</a:t>
+            <a:rPr lang="en-US" sz="2300" b="0" i="0" kern="1200" baseline="0"/>
+            <a:t>Random Forest performed best on the held-out test set</a:t>
           </a:r>
+          <a:endParaRPr lang="en-US" sz="2300" kern="1200"/>
         </a:p>
       </dsp:txBody>
       <dsp:txXfrm>
-        <a:off x="1646885" y="1432101"/>
-        <a:ext cx="1497168" cy="898301"/>
+        <a:off x="44664" y="4322577"/>
+        <a:ext cx="3557507" cy="825612"/>
       </dsp:txXfrm>
     </dsp:sp>
-    <dsp:sp modelId="{39E79416-5A91-D74D-AA3E-BE6DDCDCF91E}">
+  </dsp:spTree>
+</dsp:drawing>
+</file>
+
+<file path=ppt/diagrams/drawing2.xml><?xml version="1.0" encoding="utf-8"?>
+<dsp:drawing xmlns:dgm="http://schemas.openxmlformats.org/drawingml/2006/diagram" xmlns:dsp="http://schemas.microsoft.com/office/drawing/2008/diagram" xmlns:a="http://schemas.openxmlformats.org/drawingml/2006/main">
+  <dsp:spTree>
+    <dsp:nvGrpSpPr>
+      <dsp:cNvPr id="0" name=""/>
+      <dsp:cNvGrpSpPr/>
+    </dsp:nvGrpSpPr>
+    <dsp:grpSpPr/>
+    <dsp:sp modelId="{F213A161-6AE6-664A-AB45-83A99E0A5259}">
       <dsp:nvSpPr>
         <dsp:cNvPr id="0" name=""/>
         <dsp:cNvSpPr/>
       </dsp:nvSpPr>
       <dsp:spPr>
         <a:xfrm>
-          <a:off x="3293771" y="1432101"/>
-          <a:ext cx="1497168" cy="898301"/>
+          <a:off x="0" y="587"/>
+          <a:ext cx="4790940" cy="0"/>
         </a:xfrm>
-        <a:prstGeom prst="rect">
+        <a:prstGeom prst="line">
           <a:avLst/>
         </a:prstGeom>
         <a:solidFill>
@@ -1854,7 +3020,7 @@
         </a:solidFill>
         <a:ln w="25400" cap="flat" cmpd="sng" algn="ctr">
           <a:solidFill>
-            <a:schemeClr val="lt1">
+            <a:schemeClr val="accent1">
               <a:hueOff val="0"/>
               <a:satOff val="0"/>
               <a:lumOff val="0"/>
@@ -1879,13 +3045,45 @@
           <a:schemeClr val="lt1"/>
         </a:fontRef>
       </dsp:style>
+    </dsp:sp>
+    <dsp:sp modelId="{6F406DF4-E28B-6A42-90BF-89AD9BDDD394}">
+      <dsp:nvSpPr>
+        <dsp:cNvPr id="0" name=""/>
+        <dsp:cNvSpPr/>
+      </dsp:nvSpPr>
+      <dsp:spPr>
+        <a:xfrm>
+          <a:off x="0" y="587"/>
+          <a:ext cx="4790940" cy="480934"/>
+        </a:xfrm>
+        <a:prstGeom prst="rect">
+          <a:avLst/>
+        </a:prstGeom>
+        <a:noFill/>
+        <a:ln>
+          <a:noFill/>
+        </a:ln>
+        <a:effectLst/>
+      </dsp:spPr>
+      <dsp:style>
+        <a:lnRef idx="0">
+          <a:scrgbClr r="0" g="0" b="0"/>
+        </a:lnRef>
+        <a:fillRef idx="0">
+          <a:scrgbClr r="0" g="0" b="0"/>
+        </a:fillRef>
+        <a:effectRef idx="0">
+          <a:scrgbClr r="0" g="0" b="0"/>
+        </a:effectRef>
+        <a:fontRef idx="minor"/>
+      </dsp:style>
       <dsp:txBody>
-        <a:bodyPr spcFirstLastPara="0" vert="horz" wrap="square" lIns="41910" tIns="41910" rIns="41910" bIns="41910" numCol="1" spcCol="1270" anchor="ctr" anchorCtr="0">
+        <a:bodyPr spcFirstLastPara="0" vert="horz" wrap="square" lIns="49530" tIns="49530" rIns="49530" bIns="49530" numCol="1" spcCol="1270" anchor="t" anchorCtr="0">
           <a:noAutofit/>
         </a:bodyPr>
         <a:lstStyle/>
         <a:p>
-          <a:pPr marL="0" lvl="0" indent="0" algn="ctr" defTabSz="488950">
+          <a:pPr marL="0" lvl="0" indent="0" algn="l" defTabSz="577850">
             <a:lnSpc>
               <a:spcPct val="90000"/>
             </a:lnSpc>
@@ -1898,27 +3096,27 @@
             <a:buNone/>
           </a:pPr>
           <a:r>
-            <a:rPr lang="en-US" sz="1100" kern="1200" dirty="0"/>
-            <a:t> Load cohort file</a:t>
+            <a:rPr lang="en-US" sz="1300" kern="1200" dirty="0"/>
+            <a:t> Single dataset</a:t>
           </a:r>
         </a:p>
       </dsp:txBody>
       <dsp:txXfrm>
-        <a:off x="3293771" y="1432101"/>
-        <a:ext cx="1497168" cy="898301"/>
+        <a:off x="0" y="587"/>
+        <a:ext cx="4790940" cy="480934"/>
       </dsp:txXfrm>
     </dsp:sp>
-    <dsp:sp modelId="{52035D16-E2E2-F24F-B167-8076EAF722CB}">
+    <dsp:sp modelId="{E204EFD1-CE1D-6944-A02C-3C09E1F41F42}">
       <dsp:nvSpPr>
         <dsp:cNvPr id="0" name=""/>
         <dsp:cNvSpPr/>
       </dsp:nvSpPr>
       <dsp:spPr>
         <a:xfrm>
-          <a:off x="0" y="2480119"/>
-          <a:ext cx="1497168" cy="898301"/>
+          <a:off x="0" y="481522"/>
+          <a:ext cx="4790940" cy="0"/>
         </a:xfrm>
-        <a:prstGeom prst="rect">
+        <a:prstGeom prst="line">
           <a:avLst/>
         </a:prstGeom>
         <a:solidFill>
@@ -1931,7 +3129,7 @@
         </a:solidFill>
         <a:ln w="25400" cap="flat" cmpd="sng" algn="ctr">
           <a:solidFill>
-            <a:schemeClr val="lt1">
+            <a:schemeClr val="accent1">
               <a:hueOff val="0"/>
               <a:satOff val="0"/>
               <a:lumOff val="0"/>
@@ -1956,13 +3154,45 @@
           <a:schemeClr val="lt1"/>
         </a:fontRef>
       </dsp:style>
+    </dsp:sp>
+    <dsp:sp modelId="{E4FC5FBF-184D-7C48-8A28-00329F7ED4F1}">
+      <dsp:nvSpPr>
+        <dsp:cNvPr id="0" name=""/>
+        <dsp:cNvSpPr/>
+      </dsp:nvSpPr>
+      <dsp:spPr>
+        <a:xfrm>
+          <a:off x="0" y="481522"/>
+          <a:ext cx="4790940" cy="480934"/>
+        </a:xfrm>
+        <a:prstGeom prst="rect">
+          <a:avLst/>
+        </a:prstGeom>
+        <a:noFill/>
+        <a:ln>
+          <a:noFill/>
+        </a:ln>
+        <a:effectLst/>
+      </dsp:spPr>
+      <dsp:style>
+        <a:lnRef idx="0">
+          <a:scrgbClr r="0" g="0" b="0"/>
+        </a:lnRef>
+        <a:fillRef idx="0">
+          <a:scrgbClr r="0" g="0" b="0"/>
+        </a:fillRef>
+        <a:effectRef idx="0">
+          <a:scrgbClr r="0" g="0" b="0"/>
+        </a:effectRef>
+        <a:fontRef idx="minor"/>
+      </dsp:style>
       <dsp:txBody>
-        <a:bodyPr spcFirstLastPara="0" vert="horz" wrap="square" lIns="41910" tIns="41910" rIns="41910" bIns="41910" numCol="1" spcCol="1270" anchor="ctr" anchorCtr="0">
+        <a:bodyPr spcFirstLastPara="0" vert="horz" wrap="square" lIns="49530" tIns="49530" rIns="49530" bIns="49530" numCol="1" spcCol="1270" anchor="t" anchorCtr="0">
           <a:noAutofit/>
         </a:bodyPr>
         <a:lstStyle/>
         <a:p>
-          <a:pPr marL="0" lvl="0" indent="0" algn="ctr" defTabSz="488950">
+          <a:pPr marL="0" lvl="0" indent="0" algn="l" defTabSz="577850">
             <a:lnSpc>
               <a:spcPct val="90000"/>
             </a:lnSpc>
@@ -1975,27 +3205,27 @@
             <a:buNone/>
           </a:pPr>
           <a:r>
-            <a:rPr lang="en-US" sz="1100" kern="1200" dirty="0"/>
-            <a:t> Run notebook in order</a:t>
+            <a:rPr lang="en-US" sz="1300" kern="1200" dirty="0"/>
+            <a:t> Diabetes defined by diagnosis codes</a:t>
           </a:r>
         </a:p>
       </dsp:txBody>
       <dsp:txXfrm>
-        <a:off x="0" y="2480119"/>
-        <a:ext cx="1497168" cy="898301"/>
+        <a:off x="0" y="481522"/>
+        <a:ext cx="4790940" cy="480934"/>
       </dsp:txXfrm>
     </dsp:sp>
-    <dsp:sp modelId="{76256357-65E2-6745-A153-62DB4334C656}">
+    <dsp:sp modelId="{F48B4CF5-B6D4-EF46-89D3-E9BB1BA7C78B}">
       <dsp:nvSpPr>
         <dsp:cNvPr id="0" name=""/>
         <dsp:cNvSpPr/>
       </dsp:nvSpPr>
       <dsp:spPr>
         <a:xfrm>
-          <a:off x="1646885" y="2480119"/>
-          <a:ext cx="1497168" cy="898301"/>
+          <a:off x="0" y="962456"/>
+          <a:ext cx="4790940" cy="0"/>
         </a:xfrm>
-        <a:prstGeom prst="rect">
+        <a:prstGeom prst="line">
           <a:avLst/>
         </a:prstGeom>
         <a:solidFill>
@@ -2008,7 +3238,7 @@
         </a:solidFill>
         <a:ln w="25400" cap="flat" cmpd="sng" algn="ctr">
           <a:solidFill>
-            <a:schemeClr val="lt1">
+            <a:schemeClr val="accent1">
               <a:hueOff val="0"/>
               <a:satOff val="0"/>
               <a:lumOff val="0"/>
@@ -2033,13 +3263,45 @@
           <a:schemeClr val="lt1"/>
         </a:fontRef>
       </dsp:style>
+    </dsp:sp>
+    <dsp:sp modelId="{5F3F92BB-DB08-0143-A5F4-DA831A0AC493}">
+      <dsp:nvSpPr>
+        <dsp:cNvPr id="0" name=""/>
+        <dsp:cNvSpPr/>
+      </dsp:nvSpPr>
+      <dsp:spPr>
+        <a:xfrm>
+          <a:off x="0" y="962456"/>
+          <a:ext cx="4790940" cy="480934"/>
+        </a:xfrm>
+        <a:prstGeom prst="rect">
+          <a:avLst/>
+        </a:prstGeom>
+        <a:noFill/>
+        <a:ln>
+          <a:noFill/>
+        </a:ln>
+        <a:effectLst/>
+      </dsp:spPr>
+      <dsp:style>
+        <a:lnRef idx="0">
+          <a:scrgbClr r="0" g="0" b="0"/>
+        </a:lnRef>
+        <a:fillRef idx="0">
+          <a:scrgbClr r="0" g="0" b="0"/>
+        </a:fillRef>
+        <a:effectRef idx="0">
+          <a:scrgbClr r="0" g="0" b="0"/>
+        </a:effectRef>
+        <a:fontRef idx="minor"/>
+      </dsp:style>
       <dsp:txBody>
-        <a:bodyPr spcFirstLastPara="0" vert="horz" wrap="square" lIns="41910" tIns="41910" rIns="41910" bIns="41910" numCol="1" spcCol="1270" anchor="ctr" anchorCtr="0">
+        <a:bodyPr spcFirstLastPara="0" vert="horz" wrap="square" lIns="49530" tIns="49530" rIns="49530" bIns="49530" numCol="1" spcCol="1270" anchor="t" anchorCtr="0">
           <a:noAutofit/>
         </a:bodyPr>
         <a:lstStyle/>
         <a:p>
-          <a:pPr marL="0" lvl="0" indent="0" algn="ctr" defTabSz="488950">
+          <a:pPr marL="0" lvl="0" indent="0" algn="l" defTabSz="577850">
             <a:lnSpc>
               <a:spcPct val="90000"/>
             </a:lnSpc>
@@ -2052,27 +3314,27 @@
             <a:buNone/>
           </a:pPr>
           <a:r>
-            <a:rPr lang="en-US" sz="1100" kern="1200" dirty="0"/>
-            <a:t> Reproduce charts and metrics</a:t>
+            <a:rPr lang="en-US" sz="1300" kern="1200" dirty="0"/>
+            <a:t> Simple feature set</a:t>
           </a:r>
         </a:p>
       </dsp:txBody>
       <dsp:txXfrm>
-        <a:off x="1646885" y="2480119"/>
-        <a:ext cx="1497168" cy="898301"/>
+        <a:off x="0" y="962456"/>
+        <a:ext cx="4790940" cy="480934"/>
       </dsp:txXfrm>
     </dsp:sp>
-    <dsp:sp modelId="{F8B0A9D3-899A-7D45-816F-019B2F07CCD9}">
+    <dsp:sp modelId="{CCB9F252-199A-2D45-BAD4-F1710B65D923}">
       <dsp:nvSpPr>
         <dsp:cNvPr id="0" name=""/>
         <dsp:cNvSpPr/>
       </dsp:nvSpPr>
       <dsp:spPr>
         <a:xfrm>
-          <a:off x="3293771" y="2480119"/>
-          <a:ext cx="1497168" cy="898301"/>
+          <a:off x="0" y="1443391"/>
+          <a:ext cx="4790940" cy="0"/>
         </a:xfrm>
-        <a:prstGeom prst="rect">
+        <a:prstGeom prst="line">
           <a:avLst/>
         </a:prstGeom>
         <a:solidFill>
@@ -2085,7 +3347,7 @@
         </a:solidFill>
         <a:ln w="25400" cap="flat" cmpd="sng" algn="ctr">
           <a:solidFill>
-            <a:schemeClr val="lt1">
+            <a:schemeClr val="accent1">
               <a:hueOff val="0"/>
               <a:satOff val="0"/>
               <a:lumOff val="0"/>
@@ -2110,13 +3372,45 @@
           <a:schemeClr val="lt1"/>
         </a:fontRef>
       </dsp:style>
+    </dsp:sp>
+    <dsp:sp modelId="{C8AE33E6-DC94-1741-A664-A849F08A743F}">
+      <dsp:nvSpPr>
+        <dsp:cNvPr id="0" name=""/>
+        <dsp:cNvSpPr/>
+      </dsp:nvSpPr>
+      <dsp:spPr>
+        <a:xfrm>
+          <a:off x="0" y="1443391"/>
+          <a:ext cx="4790940" cy="480934"/>
+        </a:xfrm>
+        <a:prstGeom prst="rect">
+          <a:avLst/>
+        </a:prstGeom>
+        <a:noFill/>
+        <a:ln>
+          <a:noFill/>
+        </a:ln>
+        <a:effectLst/>
+      </dsp:spPr>
+      <dsp:style>
+        <a:lnRef idx="0">
+          <a:scrgbClr r="0" g="0" b="0"/>
+        </a:lnRef>
+        <a:fillRef idx="0">
+          <a:scrgbClr r="0" g="0" b="0"/>
+        </a:fillRef>
+        <a:effectRef idx="0">
+          <a:scrgbClr r="0" g="0" b="0"/>
+        </a:effectRef>
+        <a:fontRef idx="minor"/>
+      </dsp:style>
       <dsp:txBody>
-        <a:bodyPr spcFirstLastPara="0" vert="horz" wrap="square" lIns="41910" tIns="41910" rIns="41910" bIns="41910" numCol="1" spcCol="1270" anchor="ctr" anchorCtr="0">
+        <a:bodyPr spcFirstLastPara="0" vert="horz" wrap="square" lIns="49530" tIns="49530" rIns="49530" bIns="49530" numCol="1" spcCol="1270" anchor="t" anchorCtr="0">
           <a:noAutofit/>
         </a:bodyPr>
         <a:lstStyle/>
         <a:p>
-          <a:pPr marL="0" lvl="0" indent="0" algn="ctr" defTabSz="488950">
+          <a:pPr marL="0" lvl="0" indent="0" algn="l" defTabSz="577850">
             <a:lnSpc>
               <a:spcPct val="90000"/>
             </a:lnSpc>
@@ -2129,27 +3423,27 @@
             <a:buNone/>
           </a:pPr>
           <a:r>
-            <a:rPr lang="en-US" sz="1100" kern="1200" dirty="0"/>
-            <a:t>Speaker notes:</a:t>
+            <a:rPr lang="en-US" sz="1300" kern="1200" dirty="0"/>
+            <a:t> Educational use only</a:t>
           </a:r>
         </a:p>
       </dsp:txBody>
       <dsp:txXfrm>
-        <a:off x="3293771" y="2480119"/>
-        <a:ext cx="1497168" cy="898301"/>
+        <a:off x="0" y="1443391"/>
+        <a:ext cx="4790940" cy="480934"/>
       </dsp:txXfrm>
     </dsp:sp>
-    <dsp:sp modelId="{2ECC531A-6A07-B945-B8D5-CD6159A4215E}">
+    <dsp:sp modelId="{A18E567E-509C-E841-B7CC-4C63823579F5}">
       <dsp:nvSpPr>
         <dsp:cNvPr id="0" name=""/>
         <dsp:cNvSpPr/>
       </dsp:nvSpPr>
       <dsp:spPr>
         <a:xfrm>
-          <a:off x="1646885" y="3528138"/>
-          <a:ext cx="1497168" cy="898301"/>
+          <a:off x="0" y="1924326"/>
+          <a:ext cx="4790940" cy="0"/>
         </a:xfrm>
-        <a:prstGeom prst="rect">
+        <a:prstGeom prst="line">
           <a:avLst/>
         </a:prstGeom>
         <a:solidFill>
@@ -2162,7 +3456,7 @@
         </a:solidFill>
         <a:ln w="25400" cap="flat" cmpd="sng" algn="ctr">
           <a:solidFill>
-            <a:schemeClr val="lt1">
+            <a:schemeClr val="accent1">
               <a:hueOff val="0"/>
               <a:satOff val="0"/>
               <a:lumOff val="0"/>
@@ -2187,13 +3481,45 @@
           <a:schemeClr val="lt1"/>
         </a:fontRef>
       </dsp:style>
+    </dsp:sp>
+    <dsp:sp modelId="{720E5FC4-9338-4148-8970-5AA588A4CE7A}">
+      <dsp:nvSpPr>
+        <dsp:cNvPr id="0" name=""/>
+        <dsp:cNvSpPr/>
+      </dsp:nvSpPr>
+      <dsp:spPr>
+        <a:xfrm>
+          <a:off x="0" y="1924326"/>
+          <a:ext cx="4790940" cy="480934"/>
+        </a:xfrm>
+        <a:prstGeom prst="rect">
+          <a:avLst/>
+        </a:prstGeom>
+        <a:noFill/>
+        <a:ln>
+          <a:noFill/>
+        </a:ln>
+        <a:effectLst/>
+      </dsp:spPr>
+      <dsp:style>
+        <a:lnRef idx="0">
+          <a:scrgbClr r="0" g="0" b="0"/>
+        </a:lnRef>
+        <a:fillRef idx="0">
+          <a:scrgbClr r="0" g="0" b="0"/>
+        </a:fillRef>
+        <a:effectRef idx="0">
+          <a:scrgbClr r="0" g="0" b="0"/>
+        </a:effectRef>
+        <a:fontRef idx="minor"/>
+      </dsp:style>
       <dsp:txBody>
-        <a:bodyPr spcFirstLastPara="0" vert="horz" wrap="square" lIns="41910" tIns="41910" rIns="41910" bIns="41910" numCol="1" spcCol="1270" anchor="ctr" anchorCtr="0">
+        <a:bodyPr spcFirstLastPara="0" vert="horz" wrap="square" lIns="49530" tIns="49530" rIns="49530" bIns="49530" numCol="1" spcCol="1270" anchor="t" anchorCtr="0">
           <a:noAutofit/>
         </a:bodyPr>
         <a:lstStyle/>
         <a:p>
-          <a:pPr marL="0" lvl="0" indent="0" algn="ctr" defTabSz="488950">
+          <a:pPr marL="0" lvl="0" indent="0" algn="l" defTabSz="577850">
             <a:lnSpc>
               <a:spcPct val="90000"/>
             </a:lnSpc>
@@ -2206,14 +3532,559 @@
             <a:buNone/>
           </a:pPr>
           <a:r>
-            <a:rPr lang="en-US" sz="1100" kern="1200"/>
+            <a:rPr lang="en-US" sz="1300" kern="1200" dirty="0"/>
+            <a:t>Replication:</a:t>
+          </a:r>
+        </a:p>
+      </dsp:txBody>
+      <dsp:txXfrm>
+        <a:off x="0" y="1924326"/>
+        <a:ext cx="4790940" cy="480934"/>
+      </dsp:txXfrm>
+    </dsp:sp>
+    <dsp:sp modelId="{7909B848-6260-3D43-A2DE-DD7136EBB12B}">
+      <dsp:nvSpPr>
+        <dsp:cNvPr id="0" name=""/>
+        <dsp:cNvSpPr/>
+      </dsp:nvSpPr>
+      <dsp:spPr>
+        <a:xfrm>
+          <a:off x="0" y="2405261"/>
+          <a:ext cx="4790940" cy="0"/>
+        </a:xfrm>
+        <a:prstGeom prst="line">
+          <a:avLst/>
+        </a:prstGeom>
+        <a:solidFill>
+          <a:schemeClr val="accent1">
+            <a:hueOff val="0"/>
+            <a:satOff val="0"/>
+            <a:lumOff val="0"/>
+            <a:alphaOff val="0"/>
+          </a:schemeClr>
+        </a:solidFill>
+        <a:ln w="25400" cap="flat" cmpd="sng" algn="ctr">
+          <a:solidFill>
+            <a:schemeClr val="accent1">
+              <a:hueOff val="0"/>
+              <a:satOff val="0"/>
+              <a:lumOff val="0"/>
+              <a:alphaOff val="0"/>
+            </a:schemeClr>
+          </a:solidFill>
+          <a:prstDash val="solid"/>
+        </a:ln>
+        <a:effectLst/>
+      </dsp:spPr>
+      <dsp:style>
+        <a:lnRef idx="2">
+          <a:scrgbClr r="0" g="0" b="0"/>
+        </a:lnRef>
+        <a:fillRef idx="1">
+          <a:scrgbClr r="0" g="0" b="0"/>
+        </a:fillRef>
+        <a:effectRef idx="0">
+          <a:scrgbClr r="0" g="0" b="0"/>
+        </a:effectRef>
+        <a:fontRef idx="minor">
+          <a:schemeClr val="lt1"/>
+        </a:fontRef>
+      </dsp:style>
+    </dsp:sp>
+    <dsp:sp modelId="{FCE13139-D455-8A49-A468-1DBF805AA82D}">
+      <dsp:nvSpPr>
+        <dsp:cNvPr id="0" name=""/>
+        <dsp:cNvSpPr/>
+      </dsp:nvSpPr>
+      <dsp:spPr>
+        <a:xfrm>
+          <a:off x="0" y="2405261"/>
+          <a:ext cx="4790940" cy="480934"/>
+        </a:xfrm>
+        <a:prstGeom prst="rect">
+          <a:avLst/>
+        </a:prstGeom>
+        <a:noFill/>
+        <a:ln>
+          <a:noFill/>
+        </a:ln>
+        <a:effectLst/>
+      </dsp:spPr>
+      <dsp:style>
+        <a:lnRef idx="0">
+          <a:scrgbClr r="0" g="0" b="0"/>
+        </a:lnRef>
+        <a:fillRef idx="0">
+          <a:scrgbClr r="0" g="0" b="0"/>
+        </a:fillRef>
+        <a:effectRef idx="0">
+          <a:scrgbClr r="0" g="0" b="0"/>
+        </a:effectRef>
+        <a:fontRef idx="minor"/>
+      </dsp:style>
+      <dsp:txBody>
+        <a:bodyPr spcFirstLastPara="0" vert="horz" wrap="square" lIns="49530" tIns="49530" rIns="49530" bIns="49530" numCol="1" spcCol="1270" anchor="t" anchorCtr="0">
+          <a:noAutofit/>
+        </a:bodyPr>
+        <a:lstStyle/>
+        <a:p>
+          <a:pPr marL="0" lvl="0" indent="0" algn="l" defTabSz="577850">
+            <a:lnSpc>
+              <a:spcPct val="90000"/>
+            </a:lnSpc>
+            <a:spcBef>
+              <a:spcPct val="0"/>
+            </a:spcBef>
+            <a:spcAft>
+              <a:spcPct val="35000"/>
+            </a:spcAft>
+            <a:buNone/>
+          </a:pPr>
+          <a:r>
+            <a:rPr lang="en-US" sz="1300" kern="1200" dirty="0"/>
+            <a:t> Place CSV files or prebuilt cohort in data folder</a:t>
+          </a:r>
+        </a:p>
+      </dsp:txBody>
+      <dsp:txXfrm>
+        <a:off x="0" y="2405261"/>
+        <a:ext cx="4790940" cy="480934"/>
+      </dsp:txXfrm>
+    </dsp:sp>
+    <dsp:sp modelId="{D37EDF8E-CA39-4543-A93A-4EFF6BABC934}">
+      <dsp:nvSpPr>
+        <dsp:cNvPr id="0" name=""/>
+        <dsp:cNvSpPr/>
+      </dsp:nvSpPr>
+      <dsp:spPr>
+        <a:xfrm>
+          <a:off x="0" y="2886196"/>
+          <a:ext cx="4790940" cy="0"/>
+        </a:xfrm>
+        <a:prstGeom prst="line">
+          <a:avLst/>
+        </a:prstGeom>
+        <a:solidFill>
+          <a:schemeClr val="accent1">
+            <a:hueOff val="0"/>
+            <a:satOff val="0"/>
+            <a:lumOff val="0"/>
+            <a:alphaOff val="0"/>
+          </a:schemeClr>
+        </a:solidFill>
+        <a:ln w="25400" cap="flat" cmpd="sng" algn="ctr">
+          <a:solidFill>
+            <a:schemeClr val="accent1">
+              <a:hueOff val="0"/>
+              <a:satOff val="0"/>
+              <a:lumOff val="0"/>
+              <a:alphaOff val="0"/>
+            </a:schemeClr>
+          </a:solidFill>
+          <a:prstDash val="solid"/>
+        </a:ln>
+        <a:effectLst/>
+      </dsp:spPr>
+      <dsp:style>
+        <a:lnRef idx="2">
+          <a:scrgbClr r="0" g="0" b="0"/>
+        </a:lnRef>
+        <a:fillRef idx="1">
+          <a:scrgbClr r="0" g="0" b="0"/>
+        </a:fillRef>
+        <a:effectRef idx="0">
+          <a:scrgbClr r="0" g="0" b="0"/>
+        </a:effectRef>
+        <a:fontRef idx="minor">
+          <a:schemeClr val="lt1"/>
+        </a:fontRef>
+      </dsp:style>
+    </dsp:sp>
+    <dsp:sp modelId="{AC28B0C7-94B1-0243-90C9-9C0BA4679DAE}">
+      <dsp:nvSpPr>
+        <dsp:cNvPr id="0" name=""/>
+        <dsp:cNvSpPr/>
+      </dsp:nvSpPr>
+      <dsp:spPr>
+        <a:xfrm>
+          <a:off x="0" y="2886196"/>
+          <a:ext cx="4790940" cy="480934"/>
+        </a:xfrm>
+        <a:prstGeom prst="rect">
+          <a:avLst/>
+        </a:prstGeom>
+        <a:noFill/>
+        <a:ln>
+          <a:noFill/>
+        </a:ln>
+        <a:effectLst/>
+      </dsp:spPr>
+      <dsp:style>
+        <a:lnRef idx="0">
+          <a:scrgbClr r="0" g="0" b="0"/>
+        </a:lnRef>
+        <a:fillRef idx="0">
+          <a:scrgbClr r="0" g="0" b="0"/>
+        </a:fillRef>
+        <a:effectRef idx="0">
+          <a:scrgbClr r="0" g="0" b="0"/>
+        </a:effectRef>
+        <a:fontRef idx="minor"/>
+      </dsp:style>
+      <dsp:txBody>
+        <a:bodyPr spcFirstLastPara="0" vert="horz" wrap="square" lIns="49530" tIns="49530" rIns="49530" bIns="49530" numCol="1" spcCol="1270" anchor="t" anchorCtr="0">
+          <a:noAutofit/>
+        </a:bodyPr>
+        <a:lstStyle/>
+        <a:p>
+          <a:pPr marL="0" lvl="0" indent="0" algn="l" defTabSz="577850">
+            <a:lnSpc>
+              <a:spcPct val="90000"/>
+            </a:lnSpc>
+            <a:spcBef>
+              <a:spcPct val="0"/>
+            </a:spcBef>
+            <a:spcAft>
+              <a:spcPct val="35000"/>
+            </a:spcAft>
+            <a:buNone/>
+          </a:pPr>
+          <a:r>
+            <a:rPr lang="en-US" sz="1300" kern="1200" dirty="0"/>
+            <a:t> Run cohort-building cell if needed</a:t>
+          </a:r>
+        </a:p>
+      </dsp:txBody>
+      <dsp:txXfrm>
+        <a:off x="0" y="2886196"/>
+        <a:ext cx="4790940" cy="480934"/>
+      </dsp:txXfrm>
+    </dsp:sp>
+    <dsp:sp modelId="{8AD1048F-AC91-174F-878E-EC51AB37E21B}">
+      <dsp:nvSpPr>
+        <dsp:cNvPr id="0" name=""/>
+        <dsp:cNvSpPr/>
+      </dsp:nvSpPr>
+      <dsp:spPr>
+        <a:xfrm>
+          <a:off x="0" y="3367131"/>
+          <a:ext cx="4790940" cy="0"/>
+        </a:xfrm>
+        <a:prstGeom prst="line">
+          <a:avLst/>
+        </a:prstGeom>
+        <a:solidFill>
+          <a:schemeClr val="accent1">
+            <a:hueOff val="0"/>
+            <a:satOff val="0"/>
+            <a:lumOff val="0"/>
+            <a:alphaOff val="0"/>
+          </a:schemeClr>
+        </a:solidFill>
+        <a:ln w="25400" cap="flat" cmpd="sng" algn="ctr">
+          <a:solidFill>
+            <a:schemeClr val="accent1">
+              <a:hueOff val="0"/>
+              <a:satOff val="0"/>
+              <a:lumOff val="0"/>
+              <a:alphaOff val="0"/>
+            </a:schemeClr>
+          </a:solidFill>
+          <a:prstDash val="solid"/>
+        </a:ln>
+        <a:effectLst/>
+      </dsp:spPr>
+      <dsp:style>
+        <a:lnRef idx="2">
+          <a:scrgbClr r="0" g="0" b="0"/>
+        </a:lnRef>
+        <a:fillRef idx="1">
+          <a:scrgbClr r="0" g="0" b="0"/>
+        </a:fillRef>
+        <a:effectRef idx="0">
+          <a:scrgbClr r="0" g="0" b="0"/>
+        </a:effectRef>
+        <a:fontRef idx="minor">
+          <a:schemeClr val="lt1"/>
+        </a:fontRef>
+      </dsp:style>
+    </dsp:sp>
+    <dsp:sp modelId="{809CBEC3-7139-4940-9B55-3533D2EA9703}">
+      <dsp:nvSpPr>
+        <dsp:cNvPr id="0" name=""/>
+        <dsp:cNvSpPr/>
+      </dsp:nvSpPr>
+      <dsp:spPr>
+        <a:xfrm>
+          <a:off x="0" y="3367131"/>
+          <a:ext cx="4790940" cy="480934"/>
+        </a:xfrm>
+        <a:prstGeom prst="rect">
+          <a:avLst/>
+        </a:prstGeom>
+        <a:noFill/>
+        <a:ln>
+          <a:noFill/>
+        </a:ln>
+        <a:effectLst/>
+      </dsp:spPr>
+      <dsp:style>
+        <a:lnRef idx="0">
+          <a:scrgbClr r="0" g="0" b="0"/>
+        </a:lnRef>
+        <a:fillRef idx="0">
+          <a:scrgbClr r="0" g="0" b="0"/>
+        </a:fillRef>
+        <a:effectRef idx="0">
+          <a:scrgbClr r="0" g="0" b="0"/>
+        </a:effectRef>
+        <a:fontRef idx="minor"/>
+      </dsp:style>
+      <dsp:txBody>
+        <a:bodyPr spcFirstLastPara="0" vert="horz" wrap="square" lIns="49530" tIns="49530" rIns="49530" bIns="49530" numCol="1" spcCol="1270" anchor="t" anchorCtr="0">
+          <a:noAutofit/>
+        </a:bodyPr>
+        <a:lstStyle/>
+        <a:p>
+          <a:pPr marL="0" lvl="0" indent="0" algn="l" defTabSz="577850">
+            <a:lnSpc>
+              <a:spcPct val="90000"/>
+            </a:lnSpc>
+            <a:spcBef>
+              <a:spcPct val="0"/>
+            </a:spcBef>
+            <a:spcAft>
+              <a:spcPct val="35000"/>
+            </a:spcAft>
+            <a:buNone/>
+          </a:pPr>
+          <a:r>
+            <a:rPr lang="en-US" sz="1300" kern="1200" dirty="0"/>
+            <a:t> Run notebook cells in order</a:t>
+          </a:r>
+        </a:p>
+      </dsp:txBody>
+      <dsp:txXfrm>
+        <a:off x="0" y="3367131"/>
+        <a:ext cx="4790940" cy="480934"/>
+      </dsp:txXfrm>
+    </dsp:sp>
+    <dsp:sp modelId="{15C29424-DD92-B14C-B12B-6DAEE39B657B}">
+      <dsp:nvSpPr>
+        <dsp:cNvPr id="0" name=""/>
+        <dsp:cNvSpPr/>
+      </dsp:nvSpPr>
+      <dsp:spPr>
+        <a:xfrm>
+          <a:off x="0" y="3848066"/>
+          <a:ext cx="4790940" cy="0"/>
+        </a:xfrm>
+        <a:prstGeom prst="line">
+          <a:avLst/>
+        </a:prstGeom>
+        <a:solidFill>
+          <a:schemeClr val="accent1">
+            <a:hueOff val="0"/>
+            <a:satOff val="0"/>
+            <a:lumOff val="0"/>
+            <a:alphaOff val="0"/>
+          </a:schemeClr>
+        </a:solidFill>
+        <a:ln w="25400" cap="flat" cmpd="sng" algn="ctr">
+          <a:solidFill>
+            <a:schemeClr val="accent1">
+              <a:hueOff val="0"/>
+              <a:satOff val="0"/>
+              <a:lumOff val="0"/>
+              <a:alphaOff val="0"/>
+            </a:schemeClr>
+          </a:solidFill>
+          <a:prstDash val="solid"/>
+        </a:ln>
+        <a:effectLst/>
+      </dsp:spPr>
+      <dsp:style>
+        <a:lnRef idx="2">
+          <a:scrgbClr r="0" g="0" b="0"/>
+        </a:lnRef>
+        <a:fillRef idx="1">
+          <a:scrgbClr r="0" g="0" b="0"/>
+        </a:fillRef>
+        <a:effectRef idx="0">
+          <a:scrgbClr r="0" g="0" b="0"/>
+        </a:effectRef>
+        <a:fontRef idx="minor">
+          <a:schemeClr val="lt1"/>
+        </a:fontRef>
+      </dsp:style>
+    </dsp:sp>
+    <dsp:sp modelId="{C0C02C4F-0729-4C45-8101-31B0C7B8453C}">
+      <dsp:nvSpPr>
+        <dsp:cNvPr id="0" name=""/>
+        <dsp:cNvSpPr/>
+      </dsp:nvSpPr>
+      <dsp:spPr>
+        <a:xfrm>
+          <a:off x="0" y="3848066"/>
+          <a:ext cx="4790940" cy="480934"/>
+        </a:xfrm>
+        <a:prstGeom prst="rect">
+          <a:avLst/>
+        </a:prstGeom>
+        <a:noFill/>
+        <a:ln>
+          <a:noFill/>
+        </a:ln>
+        <a:effectLst/>
+      </dsp:spPr>
+      <dsp:style>
+        <a:lnRef idx="0">
+          <a:scrgbClr r="0" g="0" b="0"/>
+        </a:lnRef>
+        <a:fillRef idx="0">
+          <a:scrgbClr r="0" g="0" b="0"/>
+        </a:fillRef>
+        <a:effectRef idx="0">
+          <a:scrgbClr r="0" g="0" b="0"/>
+        </a:effectRef>
+        <a:fontRef idx="minor"/>
+      </dsp:style>
+      <dsp:txBody>
+        <a:bodyPr spcFirstLastPara="0" vert="horz" wrap="square" lIns="49530" tIns="49530" rIns="49530" bIns="49530" numCol="1" spcCol="1270" anchor="t" anchorCtr="0">
+          <a:noAutofit/>
+        </a:bodyPr>
+        <a:lstStyle/>
+        <a:p>
+          <a:pPr marL="0" lvl="0" indent="0" algn="l" defTabSz="577850">
+            <a:lnSpc>
+              <a:spcPct val="90000"/>
+            </a:lnSpc>
+            <a:spcBef>
+              <a:spcPct val="0"/>
+            </a:spcBef>
+            <a:spcAft>
+              <a:spcPct val="35000"/>
+            </a:spcAft>
+            <a:buNone/>
+          </a:pPr>
+          <a:r>
+            <a:rPr lang="en-US" sz="1300" kern="1200" dirty="0"/>
+            <a:t>Speaker notes:</a:t>
+          </a:r>
+        </a:p>
+      </dsp:txBody>
+      <dsp:txXfrm>
+        <a:off x="0" y="3848066"/>
+        <a:ext cx="4790940" cy="480934"/>
+      </dsp:txXfrm>
+    </dsp:sp>
+    <dsp:sp modelId="{63D00284-22DF-EE4B-9A00-A80F0743E9A6}">
+      <dsp:nvSpPr>
+        <dsp:cNvPr id="0" name=""/>
+        <dsp:cNvSpPr/>
+      </dsp:nvSpPr>
+      <dsp:spPr>
+        <a:xfrm>
+          <a:off x="0" y="4329000"/>
+          <a:ext cx="4790940" cy="0"/>
+        </a:xfrm>
+        <a:prstGeom prst="line">
+          <a:avLst/>
+        </a:prstGeom>
+        <a:solidFill>
+          <a:schemeClr val="accent1">
+            <a:hueOff val="0"/>
+            <a:satOff val="0"/>
+            <a:lumOff val="0"/>
+            <a:alphaOff val="0"/>
+          </a:schemeClr>
+        </a:solidFill>
+        <a:ln w="25400" cap="flat" cmpd="sng" algn="ctr">
+          <a:solidFill>
+            <a:schemeClr val="accent1">
+              <a:hueOff val="0"/>
+              <a:satOff val="0"/>
+              <a:lumOff val="0"/>
+              <a:alphaOff val="0"/>
+            </a:schemeClr>
+          </a:solidFill>
+          <a:prstDash val="solid"/>
+        </a:ln>
+        <a:effectLst/>
+      </dsp:spPr>
+      <dsp:style>
+        <a:lnRef idx="2">
+          <a:scrgbClr r="0" g="0" b="0"/>
+        </a:lnRef>
+        <a:fillRef idx="1">
+          <a:scrgbClr r="0" g="0" b="0"/>
+        </a:fillRef>
+        <a:effectRef idx="0">
+          <a:scrgbClr r="0" g="0" b="0"/>
+        </a:effectRef>
+        <a:fontRef idx="minor">
+          <a:schemeClr val="lt1"/>
+        </a:fontRef>
+      </dsp:style>
+    </dsp:sp>
+    <dsp:sp modelId="{3914183A-5C99-7C4F-9A92-215AF4AC4301}">
+      <dsp:nvSpPr>
+        <dsp:cNvPr id="0" name=""/>
+        <dsp:cNvSpPr/>
+      </dsp:nvSpPr>
+      <dsp:spPr>
+        <a:xfrm>
+          <a:off x="0" y="4329000"/>
+          <a:ext cx="4790940" cy="480934"/>
+        </a:xfrm>
+        <a:prstGeom prst="rect">
+          <a:avLst/>
+        </a:prstGeom>
+        <a:noFill/>
+        <a:ln>
+          <a:noFill/>
+        </a:ln>
+        <a:effectLst/>
+      </dsp:spPr>
+      <dsp:style>
+        <a:lnRef idx="0">
+          <a:scrgbClr r="0" g="0" b="0"/>
+        </a:lnRef>
+        <a:fillRef idx="0">
+          <a:scrgbClr r="0" g="0" b="0"/>
+        </a:fillRef>
+        <a:effectRef idx="0">
+          <a:scrgbClr r="0" g="0" b="0"/>
+        </a:effectRef>
+        <a:fontRef idx="minor"/>
+      </dsp:style>
+      <dsp:txBody>
+        <a:bodyPr spcFirstLastPara="0" vert="horz" wrap="square" lIns="49530" tIns="49530" rIns="49530" bIns="49530" numCol="1" spcCol="1270" anchor="t" anchorCtr="0">
+          <a:noAutofit/>
+        </a:bodyPr>
+        <a:lstStyle/>
+        <a:p>
+          <a:pPr marL="0" lvl="0" indent="0" algn="l" defTabSz="577850">
+            <a:lnSpc>
+              <a:spcPct val="90000"/>
+            </a:lnSpc>
+            <a:spcBef>
+              <a:spcPct val="0"/>
+            </a:spcBef>
+            <a:spcAft>
+              <a:spcPct val="35000"/>
+            </a:spcAft>
+            <a:buNone/>
+          </a:pPr>
+          <a:r>
+            <a:rPr lang="en-US" sz="1300" kern="1200"/>
             <a:t>This project is designed for reproducibility and teaching, not clinical deployment.</a:t>
           </a:r>
         </a:p>
       </dsp:txBody>
       <dsp:txXfrm>
-        <a:off x="1646885" y="3528138"/>
-        <a:ext cx="1497168" cy="898301"/>
+        <a:off x="0" y="4329000"/>
+        <a:ext cx="4790940" cy="480934"/>
       </dsp:txXfrm>
     </dsp:sp>
   </dsp:spTree>
@@ -2221,11 +4092,12 @@
 </file>
 
 <file path=ppt/diagrams/layout1.xml><?xml version="1.0" encoding="utf-8"?>
-<dgm:layoutDef xmlns:dgm="http://schemas.openxmlformats.org/drawingml/2006/diagram" xmlns:a="http://schemas.openxmlformats.org/drawingml/2006/main" uniqueId="urn:microsoft.com/office/officeart/2005/8/layout/default">
+<dgm:layoutDef xmlns:dgm="http://schemas.openxmlformats.org/drawingml/2006/diagram" xmlns:a="http://schemas.openxmlformats.org/drawingml/2006/main" uniqueId="urn:microsoft.com/office/officeart/2005/8/layout/vList2">
   <dgm:title val=""/>
   <dgm:desc val=""/>
   <dgm:catLst>
-    <dgm:cat type="list" pri="400"/>
+    <dgm:cat type="list" pri="3000"/>
+    <dgm:cat type="convert" pri="1000"/>
   </dgm:catLst>
   <dgm:sampData>
     <dgm:dataModel>
@@ -2234,25 +4106,21 @@
         <dgm:pt modelId="1">
           <dgm:prSet phldr="1"/>
         </dgm:pt>
+        <dgm:pt modelId="11">
+          <dgm:prSet phldr="1"/>
+        </dgm:pt>
         <dgm:pt modelId="2">
           <dgm:prSet phldr="1"/>
         </dgm:pt>
-        <dgm:pt modelId="3">
-          <dgm:prSet phldr="1"/>
-        </dgm:pt>
-        <dgm:pt modelId="4">
-          <dgm:prSet phldr="1"/>
-        </dgm:pt>
-        <dgm:pt modelId="5">
+        <dgm:pt modelId="21">
           <dgm:prSet phldr="1"/>
         </dgm:pt>
       </dgm:ptLst>
       <dgm:cxnLst>
-        <dgm:cxn modelId="6" srcId="0" destId="1" srcOrd="0" destOrd="0"/>
-        <dgm:cxn modelId="7" srcId="0" destId="2" srcOrd="1" destOrd="0"/>
-        <dgm:cxn modelId="8" srcId="0" destId="3" srcOrd="2" destOrd="0"/>
-        <dgm:cxn modelId="9" srcId="0" destId="4" srcOrd="3" destOrd="0"/>
-        <dgm:cxn modelId="10" srcId="0" destId="5" srcOrd="4" destOrd="0"/>
+        <dgm:cxn modelId="4" srcId="0" destId="1" srcOrd="0" destOrd="0"/>
+        <dgm:cxn modelId="5" srcId="0" destId="2" srcOrd="1" destOrd="0"/>
+        <dgm:cxn modelId="12" srcId="1" destId="11" srcOrd="0" destOrd="0"/>
+        <dgm:cxn modelId="23" srcId="2" destId="21" srcOrd="0" destOrd="0"/>
       </dgm:cxnLst>
       <dgm:bg/>
       <dgm:whole/>
@@ -2281,41 +4149,213 @@
         <dgm:pt modelId="2"/>
         <dgm:pt modelId="3"/>
         <dgm:pt modelId="4"/>
-        <dgm:pt modelId="5"/>
-        <dgm:pt modelId="6"/>
       </dgm:ptLst>
       <dgm:cxnLst>
-        <dgm:cxn modelId="7" srcId="0" destId="1" srcOrd="0" destOrd="0"/>
-        <dgm:cxn modelId="8" srcId="0" destId="2" srcOrd="1" destOrd="0"/>
-        <dgm:cxn modelId="9" srcId="0" destId="3" srcOrd="2" destOrd="0"/>
-        <dgm:cxn modelId="10" srcId="0" destId="4" srcOrd="3" destOrd="0"/>
-        <dgm:cxn modelId="11" srcId="0" destId="5" srcOrd="4" destOrd="0"/>
-        <dgm:cxn modelId="12" srcId="0" destId="6" srcOrd="5" destOrd="0"/>
+        <dgm:cxn modelId="5" srcId="0" destId="1" srcOrd="0" destOrd="0"/>
+        <dgm:cxn modelId="6" srcId="0" destId="2" srcOrd="1" destOrd="0"/>
+        <dgm:cxn modelId="7" srcId="0" destId="3" srcOrd="2" destOrd="0"/>
+        <dgm:cxn modelId="8" srcId="0" destId="4" srcOrd="3" destOrd="0"/>
       </dgm:cxnLst>
       <dgm:bg/>
       <dgm:whole/>
     </dgm:dataModel>
   </dgm:clrData>
-  <dgm:layoutNode name="diagram">
+  <dgm:layoutNode name="linear">
+    <dgm:varLst>
+      <dgm:animLvl val="lvl"/>
+      <dgm:resizeHandles val="exact"/>
+    </dgm:varLst>
+    <dgm:alg type="lin">
+      <dgm:param type="linDir" val="fromT"/>
+      <dgm:param type="vertAlign" val="mid"/>
+    </dgm:alg>
+    <dgm:shape xmlns:r="http://schemas.openxmlformats.org/officeDocument/2006/relationships" r:blip="">
+      <dgm:adjLst/>
+    </dgm:shape>
+    <dgm:presOf/>
+    <dgm:constrLst>
+      <dgm:constr type="w" for="ch" forName="parentText" refType="w"/>
+      <dgm:constr type="h" for="ch" forName="parentText" refType="primFontSz" refFor="ch" refForName="parentText" fact="0.52"/>
+      <dgm:constr type="w" for="ch" forName="childText" refType="w"/>
+      <dgm:constr type="h" for="ch" forName="childText" refType="primFontSz" refFor="ch" refForName="parentText" fact="0.46"/>
+      <dgm:constr type="h" for="ch" forName="parentText" op="equ"/>
+      <dgm:constr type="primFontSz" for="ch" forName="parentText" op="equ" val="65"/>
+      <dgm:constr type="primFontSz" for="ch" forName="childText" refType="primFontSz" refFor="ch" refForName="parentText" op="equ"/>
+      <dgm:constr type="h" for="ch" forName="spacer" refType="primFontSz" refFor="ch" refForName="parentText" fact="0.08"/>
+    </dgm:constrLst>
+    <dgm:ruleLst>
+      <dgm:rule type="primFontSz" for="ch" forName="parentText" val="5" fact="NaN" max="NaN"/>
+    </dgm:ruleLst>
+    <dgm:forEach name="Name0" axis="ch" ptType="node">
+      <dgm:layoutNode name="parentText" styleLbl="node1">
+        <dgm:varLst>
+          <dgm:chMax val="0"/>
+          <dgm:bulletEnabled val="1"/>
+        </dgm:varLst>
+        <dgm:alg type="tx">
+          <dgm:param type="parTxLTRAlign" val="l"/>
+          <dgm:param type="parTxRTLAlign" val="r"/>
+        </dgm:alg>
+        <dgm:shape xmlns:r="http://schemas.openxmlformats.org/officeDocument/2006/relationships" type="roundRect" r:blip="">
+          <dgm:adjLst/>
+        </dgm:shape>
+        <dgm:presOf axis="self"/>
+        <dgm:constrLst>
+          <dgm:constr type="tMarg" refType="primFontSz" fact="0.3"/>
+          <dgm:constr type="bMarg" refType="primFontSz" fact="0.3"/>
+          <dgm:constr type="lMarg" refType="primFontSz" fact="0.3"/>
+          <dgm:constr type="rMarg" refType="primFontSz" fact="0.3"/>
+        </dgm:constrLst>
+        <dgm:ruleLst>
+          <dgm:rule type="h" val="INF" fact="NaN" max="NaN"/>
+        </dgm:ruleLst>
+      </dgm:layoutNode>
+      <dgm:choose name="Name1">
+        <dgm:if name="Name2" axis="ch" ptType="node" func="cnt" op="gte" val="1">
+          <dgm:layoutNode name="childText" styleLbl="revTx">
+            <dgm:varLst>
+              <dgm:bulletEnabled val="1"/>
+            </dgm:varLst>
+            <dgm:alg type="tx">
+              <dgm:param type="stBulletLvl" val="1"/>
+              <dgm:param type="lnSpAfChP" val="20"/>
+            </dgm:alg>
+            <dgm:shape xmlns:r="http://schemas.openxmlformats.org/officeDocument/2006/relationships" type="rect" r:blip="">
+              <dgm:adjLst/>
+            </dgm:shape>
+            <dgm:presOf axis="des" ptType="node"/>
+            <dgm:constrLst>
+              <dgm:constr type="tMarg" refType="primFontSz" fact="0.1"/>
+              <dgm:constr type="bMarg" refType="primFontSz" fact="0.1"/>
+              <dgm:constr type="lMarg" refType="w" fact="0.09"/>
+            </dgm:constrLst>
+            <dgm:ruleLst>
+              <dgm:rule type="h" val="INF" fact="NaN" max="NaN"/>
+            </dgm:ruleLst>
+          </dgm:layoutNode>
+        </dgm:if>
+        <dgm:else name="Name3">
+          <dgm:choose name="Name4">
+            <dgm:if name="Name5" axis="par ch" ptType="doc node" func="cnt" op="gte" val="2">
+              <dgm:forEach name="Name6" axis="followSib" ptType="sibTrans" cnt="1">
+                <dgm:layoutNode name="spacer">
+                  <dgm:alg type="sp"/>
+                  <dgm:shape xmlns:r="http://schemas.openxmlformats.org/officeDocument/2006/relationships" r:blip="">
+                    <dgm:adjLst/>
+                  </dgm:shape>
+                  <dgm:presOf/>
+                  <dgm:constrLst/>
+                  <dgm:ruleLst/>
+                </dgm:layoutNode>
+              </dgm:forEach>
+            </dgm:if>
+            <dgm:else name="Name7"/>
+          </dgm:choose>
+        </dgm:else>
+      </dgm:choose>
+    </dgm:forEach>
+  </dgm:layoutNode>
+</dgm:layoutDef>
+</file>
+
+<file path=ppt/diagrams/layout2.xml><?xml version="1.0" encoding="utf-8"?>
+<dgm:layoutDef xmlns:dgm="http://schemas.openxmlformats.org/drawingml/2006/diagram" xmlns:a="http://schemas.openxmlformats.org/drawingml/2006/main" uniqueId="urn:microsoft.com/office/officeart/2008/layout/LinedList">
+  <dgm:title val=""/>
+  <dgm:desc val=""/>
+  <dgm:catLst>
+    <dgm:cat type="hierarchy" pri="8000"/>
+    <dgm:cat type="list" pri="2500"/>
+  </dgm:catLst>
+  <dgm:sampData>
+    <dgm:dataModel>
+      <dgm:ptLst>
+        <dgm:pt modelId="0" type="doc"/>
+        <dgm:pt modelId="1">
+          <dgm:prSet phldr="1"/>
+        </dgm:pt>
+        <dgm:pt modelId="11">
+          <dgm:prSet phldr="1"/>
+        </dgm:pt>
+        <dgm:pt modelId="12">
+          <dgm:prSet phldr="1"/>
+        </dgm:pt>
+        <dgm:pt modelId="13">
+          <dgm:prSet phldr="1"/>
+        </dgm:pt>
+      </dgm:ptLst>
+      <dgm:cxnLst>
+        <dgm:cxn modelId="2" srcId="0" destId="1" srcOrd="0" destOrd="0"/>
+        <dgm:cxn modelId="3" srcId="1" destId="11" srcOrd="0" destOrd="0"/>
+        <dgm:cxn modelId="4" srcId="1" destId="12" srcOrd="1" destOrd="0"/>
+        <dgm:cxn modelId="5" srcId="1" destId="13" srcOrd="2" destOrd="0"/>
+      </dgm:cxnLst>
+      <dgm:bg/>
+      <dgm:whole/>
+    </dgm:dataModel>
+  </dgm:sampData>
+  <dgm:styleData>
+    <dgm:dataModel>
+      <dgm:ptLst>
+        <dgm:pt modelId="0" type="doc"/>
+        <dgm:pt modelId="1">
+          <dgm:prSet phldr="1"/>
+        </dgm:pt>
+        <dgm:pt modelId="11">
+          <dgm:prSet phldr="1"/>
+        </dgm:pt>
+        <dgm:pt modelId="12">
+          <dgm:prSet phldr="1"/>
+        </dgm:pt>
+      </dgm:ptLst>
+      <dgm:cxnLst>
+        <dgm:cxn modelId="2" srcId="0" destId="1" srcOrd="0" destOrd="0"/>
+        <dgm:cxn modelId="3" srcId="1" destId="11" srcOrd="0" destOrd="0"/>
+        <dgm:cxn modelId="4" srcId="1" destId="12" srcOrd="1" destOrd="0"/>
+      </dgm:cxnLst>
+      <dgm:bg/>
+      <dgm:whole/>
+    </dgm:dataModel>
+  </dgm:styleData>
+  <dgm:clrData>
+    <dgm:dataModel>
+      <dgm:ptLst>
+        <dgm:pt modelId="0" type="doc"/>
+        <dgm:pt modelId="1">
+          <dgm:prSet phldr="1"/>
+        </dgm:pt>
+        <dgm:pt modelId="11">
+          <dgm:prSet phldr="1"/>
+        </dgm:pt>
+        <dgm:pt modelId="12">
+          <dgm:prSet phldr="1"/>
+        </dgm:pt>
+      </dgm:ptLst>
+      <dgm:cxnLst>
+        <dgm:cxn modelId="2" srcId="0" destId="1" srcOrd="0" destOrd="0"/>
+        <dgm:cxn modelId="3" srcId="1" destId="11" srcOrd="0" destOrd="0"/>
+        <dgm:cxn modelId="4" srcId="1" destId="12" srcOrd="1" destOrd="0"/>
+      </dgm:cxnLst>
+      <dgm:bg/>
+      <dgm:whole/>
+    </dgm:dataModel>
+  </dgm:clrData>
+  <dgm:layoutNode name="vert0">
     <dgm:varLst>
       <dgm:dir/>
-      <dgm:resizeHandles val="exact"/>
+      <dgm:animOne val="branch"/>
+      <dgm:animLvl val="lvl"/>
     </dgm:varLst>
     <dgm:choose name="Name0">
       <dgm:if name="Name1" func="var" arg="dir" op="equ" val="norm">
-        <dgm:alg type="snake">
-          <dgm:param type="grDir" val="tL"/>
-          <dgm:param type="flowDir" val="row"/>
-          <dgm:param type="contDir" val="sameDir"/>
-          <dgm:param type="off" val="ctr"/>
+        <dgm:alg type="lin">
+          <dgm:param type="linDir" val="fromT"/>
+          <dgm:param type="nodeHorzAlign" val="l"/>
         </dgm:alg>
       </dgm:if>
       <dgm:else name="Name2">
-        <dgm:alg type="snake">
-          <dgm:param type="grDir" val="tR"/>
-          <dgm:param type="flowDir" val="row"/>
-          <dgm:param type="contDir" val="sameDir"/>
-          <dgm:param type="off" val="ctr"/>
+        <dgm:alg type="lin">
+          <dgm:param type="linDir" val="fromT"/>
+          <dgm:param type="nodeHorzAlign" val="r"/>
         </dgm:alg>
       </dgm:else>
     </dgm:choose>
@@ -2324,50 +4364,1401 @@
     </dgm:shape>
     <dgm:presOf/>
     <dgm:constrLst>
-      <dgm:constr type="w" for="ch" forName="node" refType="w"/>
-      <dgm:constr type="h" for="ch" forName="node" refType="w" refFor="ch" refForName="node" fact="0.6"/>
-      <dgm:constr type="w" for="ch" forName="sibTrans" refType="w" refFor="ch" refForName="node" fact="0.1"/>
-      <dgm:constr type="sp" refType="w" refFor="ch" refForName="sibTrans"/>
-      <dgm:constr type="primFontSz" for="ch" forName="node" op="equ" val="65"/>
+      <dgm:constr type="w" for="ch" forName="horz1" refType="w"/>
+      <dgm:constr type="h" for="ch" forName="horz1" refType="h"/>
+      <dgm:constr type="h" for="des" forName="vert1" refType="h"/>
+      <dgm:constr type="h" for="des" forName="tx1" refType="h"/>
+      <dgm:constr type="h" for="des" forName="horz2" refType="h"/>
+      <dgm:constr type="h" for="des" forName="vert2" refType="h"/>
+      <dgm:constr type="h" for="des" forName="horz3" refType="h"/>
+      <dgm:constr type="h" for="des" forName="vert3" refType="h"/>
+      <dgm:constr type="h" for="des" forName="horz4" refType="h"/>
+      <dgm:constr type="h" for="des" ptType="node" refType="h"/>
+      <dgm:constr type="primFontSz" for="des" forName="tx1" op="equ" val="65"/>
+      <dgm:constr type="primFontSz" for="des" forName="tx2" op="equ" val="65"/>
+      <dgm:constr type="primFontSz" for="des" forName="tx3" op="equ" val="65"/>
+      <dgm:constr type="primFontSz" for="des" forName="tx4" op="equ" val="65"/>
+      <dgm:constr type="w" for="des" forName="thickLine" refType="w"/>
+      <dgm:constr type="h" for="des" forName="thickLine"/>
+      <dgm:constr type="h" for="des" forName="thinLine1"/>
+      <dgm:constr type="h" for="des" forName="thinLine2b"/>
+      <dgm:constr type="h" for="des" forName="thinLine3"/>
+      <dgm:constr type="h" for="des" forName="vertSpace2a" refType="h" fact="0.05"/>
+      <dgm:constr type="h" for="des" forName="vertSpace2b" refType="h" refFor="des" refForName="vertSpace2a"/>
     </dgm:constrLst>
-    <dgm:ruleLst/>
     <dgm:forEach name="Name3" axis="ch" ptType="node">
-      <dgm:layoutNode name="node">
-        <dgm:varLst>
-          <dgm:bulletEnabled val="1"/>
-        </dgm:varLst>
-        <dgm:alg type="tx"/>
-        <dgm:shape xmlns:r="http://schemas.openxmlformats.org/officeDocument/2006/relationships" type="rect" r:blip="">
+      <dgm:layoutNode name="thickLine" styleLbl="alignNode1">
+        <dgm:alg type="sp"/>
+        <dgm:shape xmlns:r="http://schemas.openxmlformats.org/officeDocument/2006/relationships" type="line" r:blip="">
           <dgm:adjLst/>
         </dgm:shape>
-        <dgm:presOf axis="desOrSelf" ptType="node"/>
-        <dgm:constrLst>
-          <dgm:constr type="lMarg" refType="primFontSz" fact="0.3"/>
-          <dgm:constr type="rMarg" refType="primFontSz" fact="0.3"/>
-          <dgm:constr type="tMarg" refType="primFontSz" fact="0.3"/>
-          <dgm:constr type="bMarg" refType="primFontSz" fact="0.3"/>
-        </dgm:constrLst>
-        <dgm:ruleLst>
-          <dgm:rule type="primFontSz" val="5" fact="NaN" max="NaN"/>
-        </dgm:ruleLst>
+        <dgm:presOf/>
       </dgm:layoutNode>
-      <dgm:forEach name="Name4" axis="followSib" ptType="sibTrans" cnt="1">
-        <dgm:layoutNode name="sibTrans">
-          <dgm:alg type="sp"/>
+      <dgm:layoutNode name="horz1">
+        <dgm:choose name="Name4">
+          <dgm:if name="Name5" func="var" arg="dir" op="equ" val="norm">
+            <dgm:alg type="lin">
+              <dgm:param type="linDir" val="fromL"/>
+              <dgm:param type="nodeVertAlign" val="t"/>
+            </dgm:alg>
+          </dgm:if>
+          <dgm:else name="Name6">
+            <dgm:alg type="lin">
+              <dgm:param type="linDir" val="fromR"/>
+              <dgm:param type="nodeVertAlign" val="t"/>
+            </dgm:alg>
+          </dgm:else>
+        </dgm:choose>
+        <dgm:shape xmlns:r="http://schemas.openxmlformats.org/officeDocument/2006/relationships" r:blip="">
+          <dgm:adjLst/>
+        </dgm:shape>
+        <dgm:presOf/>
+        <dgm:choose name="Name7">
+          <dgm:if name="Name8" axis="root des" func="maxDepth" op="equ" val="1">
+            <dgm:constrLst>
+              <dgm:constr type="w" for="ch" forName="tx1" refType="w"/>
+            </dgm:constrLst>
+          </dgm:if>
+          <dgm:if name="Name9" axis="root des" func="maxDepth" op="equ" val="2">
+            <dgm:constrLst>
+              <dgm:constr type="w" for="ch" forName="tx1" refType="w" fact="0.2"/>
+              <dgm:constr type="w" for="des" forName="tx2" refType="w" fact="0.785"/>
+              <dgm:constr type="w" for="des" forName="horzSpace2" refType="w" fact="0.015"/>
+              <dgm:constr type="w" for="des" forName="thinLine2b" refType="w" fact="0.8"/>
+            </dgm:constrLst>
+          </dgm:if>
+          <dgm:if name="Name10" axis="root des" func="maxDepth" op="equ" val="3">
+            <dgm:constrLst>
+              <dgm:constr type="w" for="ch" forName="tx1" refType="w" fact="0.2"/>
+              <dgm:constr type="w" for="des" forName="tx2" refType="w" fact="0.385"/>
+              <dgm:constr type="w" for="des" forName="tx3" refType="w" fact="0.385"/>
+              <dgm:constr type="w" for="des" forName="horzSpace2" refType="w" fact="0.015"/>
+              <dgm:constr type="w" for="des" forName="horzSpace3" refType="w" fact="0.015"/>
+              <dgm:constr type="w" for="des" forName="thinLine2b" refType="w" fact="0.8"/>
+              <dgm:constr type="w" for="des" forName="thinLine3" refType="w" fact="0.385"/>
+            </dgm:constrLst>
+          </dgm:if>
+          <dgm:if name="Name11" axis="root des" func="maxDepth" op="gte" val="4">
+            <dgm:constrLst>
+              <dgm:constr type="w" for="ch" forName="tx1" refType="w" fact="0.2"/>
+              <dgm:constr type="w" for="des" forName="tx2" refType="w" fact="0.2516"/>
+              <dgm:constr type="w" for="des" forName="tx3" refType="w" fact="0.2516"/>
+              <dgm:constr type="w" for="des" forName="tx4" refType="w" fact="0.2516"/>
+              <dgm:constr type="w" for="des" forName="horzSpace2" refType="w" fact="0.015"/>
+              <dgm:constr type="w" for="des" forName="horzSpace3" refType="w" fact="0.015"/>
+              <dgm:constr type="w" for="des" forName="horzSpace4" refType="w" fact="0.015"/>
+              <dgm:constr type="w" for="des" forName="thinLine2b" refType="w" fact="0.8"/>
+              <dgm:constr type="w" for="des" forName="thinLine3" refType="w" fact="0.5332"/>
+            </dgm:constrLst>
+          </dgm:if>
+          <dgm:else name="Name12"/>
+        </dgm:choose>
+        <dgm:layoutNode name="tx1" styleLbl="revTx">
+          <dgm:alg type="tx">
+            <dgm:param type="parTxLTRAlign" val="l"/>
+            <dgm:param type="parTxRTLAlign" val="r"/>
+            <dgm:param type="txAnchorVert" val="t"/>
+          </dgm:alg>
+          <dgm:shape xmlns:r="http://schemas.openxmlformats.org/officeDocument/2006/relationships" type="rect" r:blip="">
+            <dgm:adjLst/>
+          </dgm:shape>
+          <dgm:presOf axis="self"/>
+          <dgm:constrLst>
+            <dgm:constr type="tMarg" refType="primFontSz" fact="0.3"/>
+            <dgm:constr type="bMarg" refType="primFontSz" fact="0.3"/>
+            <dgm:constr type="lMarg" refType="primFontSz" fact="0.3"/>
+            <dgm:constr type="rMarg" refType="primFontSz" fact="0.3"/>
+          </dgm:constrLst>
+          <dgm:ruleLst>
+            <dgm:rule type="primFontSz" val="5" fact="NaN" max="NaN"/>
+          </dgm:ruleLst>
+        </dgm:layoutNode>
+        <dgm:layoutNode name="vert1">
+          <dgm:choose name="Name13">
+            <dgm:if name="Name14" func="var" arg="dir" op="equ" val="norm">
+              <dgm:alg type="lin">
+                <dgm:param type="linDir" val="fromT"/>
+                <dgm:param type="nodeHorzAlign" val="l"/>
+              </dgm:alg>
+            </dgm:if>
+            <dgm:else name="Name15">
+              <dgm:alg type="lin">
+                <dgm:param type="linDir" val="fromT"/>
+                <dgm:param type="nodeHorzAlign" val="r"/>
+              </dgm:alg>
+            </dgm:else>
+          </dgm:choose>
           <dgm:shape xmlns:r="http://schemas.openxmlformats.org/officeDocument/2006/relationships" r:blip="">
             <dgm:adjLst/>
           </dgm:shape>
           <dgm:presOf/>
-          <dgm:constrLst/>
-          <dgm:ruleLst/>
+          <dgm:forEach name="Name16" axis="ch" ptType="node">
+            <dgm:choose name="Name17">
+              <dgm:if name="Name18" axis="self" ptType="node" func="pos" op="equ" val="1">
+                <dgm:layoutNode name="vertSpace2a">
+                  <dgm:alg type="sp"/>
+                  <dgm:shape xmlns:r="http://schemas.openxmlformats.org/officeDocument/2006/relationships" r:blip="">
+                    <dgm:adjLst/>
+                  </dgm:shape>
+                  <dgm:presOf/>
+                </dgm:layoutNode>
+              </dgm:if>
+              <dgm:else name="Name19"/>
+            </dgm:choose>
+            <dgm:layoutNode name="horz2">
+              <dgm:choose name="Name20">
+                <dgm:if name="Name21" func="var" arg="dir" op="equ" val="norm">
+                  <dgm:alg type="lin">
+                    <dgm:param type="linDir" val="fromL"/>
+                    <dgm:param type="nodeVertAlign" val="t"/>
+                  </dgm:alg>
+                </dgm:if>
+                <dgm:else name="Name22">
+                  <dgm:alg type="lin">
+                    <dgm:param type="linDir" val="fromR"/>
+                    <dgm:param type="nodeVertAlign" val="t"/>
+                  </dgm:alg>
+                </dgm:else>
+              </dgm:choose>
+              <dgm:shape xmlns:r="http://schemas.openxmlformats.org/officeDocument/2006/relationships" r:blip="">
+                <dgm:adjLst/>
+              </dgm:shape>
+              <dgm:presOf/>
+              <dgm:layoutNode name="horzSpace2">
+                <dgm:alg type="sp"/>
+                <dgm:shape xmlns:r="http://schemas.openxmlformats.org/officeDocument/2006/relationships" r:blip="">
+                  <dgm:adjLst/>
+                </dgm:shape>
+                <dgm:presOf/>
+              </dgm:layoutNode>
+              <dgm:layoutNode name="tx2" styleLbl="revTx">
+                <dgm:alg type="tx">
+                  <dgm:param type="parTxLTRAlign" val="l"/>
+                  <dgm:param type="parTxRTLAlign" val="r"/>
+                  <dgm:param type="txAnchorVert" val="t"/>
+                </dgm:alg>
+                <dgm:shape xmlns:r="http://schemas.openxmlformats.org/officeDocument/2006/relationships" type="rect" r:blip="">
+                  <dgm:adjLst/>
+                </dgm:shape>
+                <dgm:presOf axis="self"/>
+                <dgm:constrLst>
+                  <dgm:constr type="tMarg" refType="primFontSz" fact="0.3"/>
+                  <dgm:constr type="bMarg" refType="primFontSz" fact="0.3"/>
+                  <dgm:constr type="lMarg" refType="primFontSz" fact="0.3"/>
+                  <dgm:constr type="rMarg" refType="primFontSz" fact="0.3"/>
+                </dgm:constrLst>
+                <dgm:ruleLst>
+                  <dgm:rule type="primFontSz" val="5" fact="NaN" max="NaN"/>
+                </dgm:ruleLst>
+              </dgm:layoutNode>
+              <dgm:layoutNode name="vert2">
+                <dgm:choose name="Name23">
+                  <dgm:if name="Name24" func="var" arg="dir" op="equ" val="norm">
+                    <dgm:alg type="lin">
+                      <dgm:param type="linDir" val="fromT"/>
+                      <dgm:param type="nodeHorzAlign" val="l"/>
+                    </dgm:alg>
+                  </dgm:if>
+                  <dgm:else name="Name25">
+                    <dgm:alg type="lin">
+                      <dgm:param type="linDir" val="fromT"/>
+                      <dgm:param type="nodeHorzAlign" val="r"/>
+                    </dgm:alg>
+                  </dgm:else>
+                </dgm:choose>
+                <dgm:shape xmlns:r="http://schemas.openxmlformats.org/officeDocument/2006/relationships" r:blip="">
+                  <dgm:adjLst/>
+                </dgm:shape>
+                <dgm:presOf/>
+                <dgm:forEach name="Name26" axis="ch" ptType="node">
+                  <dgm:layoutNode name="horz3">
+                    <dgm:choose name="Name27">
+                      <dgm:if name="Name28" func="var" arg="dir" op="equ" val="norm">
+                        <dgm:alg type="lin">
+                          <dgm:param type="linDir" val="fromL"/>
+                          <dgm:param type="nodeVertAlign" val="t"/>
+                        </dgm:alg>
+                      </dgm:if>
+                      <dgm:else name="Name29">
+                        <dgm:alg type="lin">
+                          <dgm:param type="linDir" val="fromR"/>
+                          <dgm:param type="nodeVertAlign" val="t"/>
+                        </dgm:alg>
+                      </dgm:else>
+                    </dgm:choose>
+                    <dgm:shape xmlns:r="http://schemas.openxmlformats.org/officeDocument/2006/relationships" r:blip="">
+                      <dgm:adjLst/>
+                    </dgm:shape>
+                    <dgm:presOf/>
+                    <dgm:layoutNode name="horzSpace3">
+                      <dgm:alg type="sp"/>
+                      <dgm:shape xmlns:r="http://schemas.openxmlformats.org/officeDocument/2006/relationships" r:blip="">
+                        <dgm:adjLst/>
+                      </dgm:shape>
+                      <dgm:presOf/>
+                    </dgm:layoutNode>
+                    <dgm:layoutNode name="tx3" styleLbl="revTx">
+                      <dgm:alg type="tx">
+                        <dgm:param type="parTxLTRAlign" val="l"/>
+                        <dgm:param type="parTxRTLAlign" val="r"/>
+                        <dgm:param type="txAnchorVert" val="t"/>
+                      </dgm:alg>
+                      <dgm:shape xmlns:r="http://schemas.openxmlformats.org/officeDocument/2006/relationships" type="rect" r:blip="">
+                        <dgm:adjLst/>
+                      </dgm:shape>
+                      <dgm:presOf axis="self"/>
+                      <dgm:constrLst>
+                        <dgm:constr type="tMarg" refType="primFontSz" fact="0.3"/>
+                        <dgm:constr type="bMarg" refType="primFontSz" fact="0.3"/>
+                        <dgm:constr type="lMarg" refType="primFontSz" fact="0.3"/>
+                        <dgm:constr type="rMarg" refType="primFontSz" fact="0.3"/>
+                      </dgm:constrLst>
+                      <dgm:ruleLst>
+                        <dgm:rule type="primFontSz" val="5" fact="NaN" max="NaN"/>
+                      </dgm:ruleLst>
+                    </dgm:layoutNode>
+                    <dgm:layoutNode name="vert3">
+                      <dgm:choose name="Name30">
+                        <dgm:if name="Name31" func="var" arg="dir" op="equ" val="norm">
+                          <dgm:alg type="lin">
+                            <dgm:param type="linDir" val="fromT"/>
+                            <dgm:param type="nodeHorzAlign" val="l"/>
+                          </dgm:alg>
+                        </dgm:if>
+                        <dgm:else name="Name32">
+                          <dgm:alg type="lin">
+                            <dgm:param type="linDir" val="fromT"/>
+                            <dgm:param type="nodeHorzAlign" val="r"/>
+                          </dgm:alg>
+                        </dgm:else>
+                      </dgm:choose>
+                      <dgm:shape xmlns:r="http://schemas.openxmlformats.org/officeDocument/2006/relationships" r:blip="">
+                        <dgm:adjLst/>
+                      </dgm:shape>
+                      <dgm:presOf/>
+                      <dgm:forEach name="Name33" axis="ch" ptType="node">
+                        <dgm:layoutNode name="horz4">
+                          <dgm:choose name="Name34">
+                            <dgm:if name="Name35" func="var" arg="dir" op="equ" val="norm">
+                              <dgm:alg type="lin">
+                                <dgm:param type="linDir" val="fromL"/>
+                                <dgm:param type="nodeVertAlign" val="t"/>
+                              </dgm:alg>
+                            </dgm:if>
+                            <dgm:else name="Name36">
+                              <dgm:alg type="lin">
+                                <dgm:param type="linDir" val="fromR"/>
+                                <dgm:param type="nodeVertAlign" val="t"/>
+                              </dgm:alg>
+                            </dgm:else>
+                          </dgm:choose>
+                          <dgm:shape xmlns:r="http://schemas.openxmlformats.org/officeDocument/2006/relationships" r:blip="">
+                            <dgm:adjLst/>
+                          </dgm:shape>
+                          <dgm:presOf/>
+                          <dgm:layoutNode name="horzSpace4">
+                            <dgm:alg type="sp"/>
+                            <dgm:shape xmlns:r="http://schemas.openxmlformats.org/officeDocument/2006/relationships" r:blip="">
+                              <dgm:adjLst/>
+                            </dgm:shape>
+                            <dgm:presOf/>
+                          </dgm:layoutNode>
+                          <dgm:layoutNode name="tx4" styleLbl="revTx">
+                            <dgm:varLst>
+                              <dgm:bulletEnabled val="1"/>
+                            </dgm:varLst>
+                            <dgm:alg type="tx">
+                              <dgm:param type="parTxLTRAlign" val="l"/>
+                              <dgm:param type="parTxRTLAlign" val="r"/>
+                              <dgm:param type="txAnchorVert" val="t"/>
+                            </dgm:alg>
+                            <dgm:shape xmlns:r="http://schemas.openxmlformats.org/officeDocument/2006/relationships" type="rect" r:blip="">
+                              <dgm:adjLst/>
+                            </dgm:shape>
+                            <dgm:presOf axis="desOrSelf" ptType="node"/>
+                            <dgm:constrLst>
+                              <dgm:constr type="tMarg" refType="primFontSz" fact="0.3"/>
+                              <dgm:constr type="bMarg" refType="primFontSz" fact="0.3"/>
+                              <dgm:constr type="lMarg" refType="primFontSz" fact="0.3"/>
+                              <dgm:constr type="rMarg" refType="primFontSz" fact="0.3"/>
+                            </dgm:constrLst>
+                            <dgm:ruleLst>
+                              <dgm:rule type="primFontSz" val="5" fact="NaN" max="NaN"/>
+                            </dgm:ruleLst>
+                          </dgm:layoutNode>
+                        </dgm:layoutNode>
+                      </dgm:forEach>
+                    </dgm:layoutNode>
+                  </dgm:layoutNode>
+                  <dgm:forEach name="Name37" axis="followSib" ptType="sibTrans" cnt="1">
+                    <dgm:layoutNode name="thinLine3" styleLbl="callout">
+                      <dgm:alg type="sp"/>
+                      <dgm:shape xmlns:r="http://schemas.openxmlformats.org/officeDocument/2006/relationships" type="line" r:blip="">
+                        <dgm:adjLst/>
+                      </dgm:shape>
+                      <dgm:presOf/>
+                    </dgm:layoutNode>
+                  </dgm:forEach>
+                </dgm:forEach>
+              </dgm:layoutNode>
+            </dgm:layoutNode>
+            <dgm:layoutNode name="thinLine2b" styleLbl="callout">
+              <dgm:alg type="sp"/>
+              <dgm:shape xmlns:r="http://schemas.openxmlformats.org/officeDocument/2006/relationships" type="line" r:blip="">
+                <dgm:adjLst/>
+              </dgm:shape>
+              <dgm:presOf/>
+            </dgm:layoutNode>
+            <dgm:layoutNode name="vertSpace2b">
+              <dgm:alg type="sp"/>
+              <dgm:shape xmlns:r="http://schemas.openxmlformats.org/officeDocument/2006/relationships" r:blip="">
+                <dgm:adjLst/>
+              </dgm:shape>
+              <dgm:presOf/>
+            </dgm:layoutNode>
+          </dgm:forEach>
         </dgm:layoutNode>
-      </dgm:forEach>
+      </dgm:layoutNode>
     </dgm:forEach>
   </dgm:layoutNode>
 </dgm:layoutDef>
 </file>
 
 <file path=ppt/diagrams/quickStyle1.xml><?xml version="1.0" encoding="utf-8"?>
+<dgm:styleDef xmlns:dgm="http://schemas.openxmlformats.org/drawingml/2006/diagram" xmlns:a="http://schemas.openxmlformats.org/drawingml/2006/main" uniqueId="urn:microsoft.com/office/officeart/2005/8/quickstyle/simple1">
+  <dgm:title val=""/>
+  <dgm:desc val=""/>
+  <dgm:catLst>
+    <dgm:cat type="simple" pri="10100"/>
+  </dgm:catLst>
+  <dgm:scene3d>
+    <a:camera prst="orthographicFront"/>
+    <a:lightRig rig="threePt" dir="t"/>
+  </dgm:scene3d>
+  <dgm:styleLbl name="node0">
+    <dgm:scene3d>
+      <a:camera prst="orthographicFront"/>
+      <a:lightRig rig="threePt" dir="t"/>
+    </dgm:scene3d>
+    <dgm:sp3d/>
+    <dgm:txPr/>
+    <dgm:style>
+      <a:lnRef idx="2">
+        <a:scrgbClr r="0" g="0" b="0"/>
+      </a:lnRef>
+      <a:fillRef idx="1">
+        <a:scrgbClr r="0" g="0" b="0"/>
+      </a:fillRef>
+      <a:effectRef idx="0">
+        <a:scrgbClr r="0" g="0" b="0"/>
+      </a:effectRef>
+      <a:fontRef idx="minor">
+        <a:schemeClr val="lt1"/>
+      </a:fontRef>
+    </dgm:style>
+  </dgm:styleLbl>
+  <dgm:styleLbl name="lnNode1">
+    <dgm:scene3d>
+      <a:camera prst="orthographicFront"/>
+      <a:lightRig rig="threePt" dir="t"/>
+    </dgm:scene3d>
+    <dgm:sp3d/>
+    <dgm:txPr/>
+    <dgm:style>
+      <a:lnRef idx="2">
+        <a:scrgbClr r="0" g="0" b="0"/>
+      </a:lnRef>
+      <a:fillRef idx="1">
+        <a:scrgbClr r="0" g="0" b="0"/>
+      </a:fillRef>
+      <a:effectRef idx="0">
+        <a:scrgbClr r="0" g="0" b="0"/>
+      </a:effectRef>
+      <a:fontRef idx="minor">
+        <a:schemeClr val="lt1"/>
+      </a:fontRef>
+    </dgm:style>
+  </dgm:styleLbl>
+  <dgm:styleLbl name="vennNode1">
+    <dgm:scene3d>
+      <a:camera prst="orthographicFront"/>
+      <a:lightRig rig="threePt" dir="t"/>
+    </dgm:scene3d>
+    <dgm:sp3d/>
+    <dgm:txPr/>
+    <dgm:style>
+      <a:lnRef idx="2">
+        <a:scrgbClr r="0" g="0" b="0"/>
+      </a:lnRef>
+      <a:fillRef idx="1">
+        <a:scrgbClr r="0" g="0" b="0"/>
+      </a:fillRef>
+      <a:effectRef idx="0">
+        <a:scrgbClr r="0" g="0" b="0"/>
+      </a:effectRef>
+      <a:fontRef idx="minor">
+        <a:schemeClr val="tx1"/>
+      </a:fontRef>
+    </dgm:style>
+  </dgm:styleLbl>
+  <dgm:styleLbl name="alignNode1">
+    <dgm:scene3d>
+      <a:camera prst="orthographicFront"/>
+      <a:lightRig rig="threePt" dir="t"/>
+    </dgm:scene3d>
+    <dgm:sp3d/>
+    <dgm:txPr/>
+    <dgm:style>
+      <a:lnRef idx="2">
+        <a:scrgbClr r="0" g="0" b="0"/>
+      </a:lnRef>
+      <a:fillRef idx="1">
+        <a:scrgbClr r="0" g="0" b="0"/>
+      </a:fillRef>
+      <a:effectRef idx="0">
+        <a:scrgbClr r="0" g="0" b="0"/>
+      </a:effectRef>
+      <a:fontRef idx="minor">
+        <a:schemeClr val="lt1"/>
+      </a:fontRef>
+    </dgm:style>
+  </dgm:styleLbl>
+  <dgm:styleLbl name="node1">
+    <dgm:scene3d>
+      <a:camera prst="orthographicFront"/>
+      <a:lightRig rig="threePt" dir="t"/>
+    </dgm:scene3d>
+    <dgm:sp3d/>
+    <dgm:txPr/>
+    <dgm:style>
+      <a:lnRef idx="2">
+        <a:scrgbClr r="0" g="0" b="0"/>
+      </a:lnRef>
+      <a:fillRef idx="1">
+        <a:scrgbClr r="0" g="0" b="0"/>
+      </a:fillRef>
+      <a:effectRef idx="0">
+        <a:scrgbClr r="0" g="0" b="0"/>
+      </a:effectRef>
+      <a:fontRef idx="minor">
+        <a:schemeClr val="lt1"/>
+      </a:fontRef>
+    </dgm:style>
+  </dgm:styleLbl>
+  <dgm:styleLbl name="node2">
+    <dgm:scene3d>
+      <a:camera prst="orthographicFront"/>
+      <a:lightRig rig="threePt" dir="t"/>
+    </dgm:scene3d>
+    <dgm:sp3d/>
+    <dgm:txPr/>
+    <dgm:style>
+      <a:lnRef idx="2">
+        <a:scrgbClr r="0" g="0" b="0"/>
+      </a:lnRef>
+      <a:fillRef idx="1">
+        <a:scrgbClr r="0" g="0" b="0"/>
+      </a:fillRef>
+      <a:effectRef idx="0">
+        <a:scrgbClr r="0" g="0" b="0"/>
+      </a:effectRef>
+      <a:fontRef idx="minor">
+        <a:schemeClr val="lt1"/>
+      </a:fontRef>
+    </dgm:style>
+  </dgm:styleLbl>
+  <dgm:styleLbl name="node3">
+    <dgm:scene3d>
+      <a:camera prst="orthographicFront"/>
+      <a:lightRig rig="threePt" dir="t"/>
+    </dgm:scene3d>
+    <dgm:sp3d/>
+    <dgm:txPr/>
+    <dgm:style>
+      <a:lnRef idx="2">
+        <a:scrgbClr r="0" g="0" b="0"/>
+      </a:lnRef>
+      <a:fillRef idx="1">
+        <a:scrgbClr r="0" g="0" b="0"/>
+      </a:fillRef>
+      <a:effectRef idx="0">
+        <a:scrgbClr r="0" g="0" b="0"/>
+      </a:effectRef>
+      <a:fontRef idx="minor">
+        <a:schemeClr val="lt1"/>
+      </a:fontRef>
+    </dgm:style>
+  </dgm:styleLbl>
+  <dgm:styleLbl name="node4">
+    <dgm:scene3d>
+      <a:camera prst="orthographicFront"/>
+      <a:lightRig rig="threePt" dir="t"/>
+    </dgm:scene3d>
+    <dgm:sp3d/>
+    <dgm:txPr/>
+    <dgm:style>
+      <a:lnRef idx="2">
+        <a:scrgbClr r="0" g="0" b="0"/>
+      </a:lnRef>
+      <a:fillRef idx="1">
+        <a:scrgbClr r="0" g="0" b="0"/>
+      </a:fillRef>
+      <a:effectRef idx="0">
+        <a:scrgbClr r="0" g="0" b="0"/>
+      </a:effectRef>
+      <a:fontRef idx="minor">
+        <a:schemeClr val="lt1"/>
+      </a:fontRef>
+    </dgm:style>
+  </dgm:styleLbl>
+  <dgm:styleLbl name="fgImgPlace1">
+    <dgm:scene3d>
+      <a:camera prst="orthographicFront"/>
+      <a:lightRig rig="threePt" dir="t"/>
+    </dgm:scene3d>
+    <dgm:sp3d/>
+    <dgm:txPr/>
+    <dgm:style>
+      <a:lnRef idx="2">
+        <a:scrgbClr r="0" g="0" b="0"/>
+      </a:lnRef>
+      <a:fillRef idx="1">
+        <a:scrgbClr r="0" g="0" b="0"/>
+      </a:fillRef>
+      <a:effectRef idx="0">
+        <a:scrgbClr r="0" g="0" b="0"/>
+      </a:effectRef>
+      <a:fontRef idx="minor"/>
+    </dgm:style>
+  </dgm:styleLbl>
+  <dgm:styleLbl name="alignImgPlace1">
+    <dgm:scene3d>
+      <a:camera prst="orthographicFront"/>
+      <a:lightRig rig="threePt" dir="t"/>
+    </dgm:scene3d>
+    <dgm:sp3d/>
+    <dgm:txPr/>
+    <dgm:style>
+      <a:lnRef idx="2">
+        <a:scrgbClr r="0" g="0" b="0"/>
+      </a:lnRef>
+      <a:fillRef idx="1">
+        <a:scrgbClr r="0" g="0" b="0"/>
+      </a:fillRef>
+      <a:effectRef idx="0">
+        <a:scrgbClr r="0" g="0" b="0"/>
+      </a:effectRef>
+      <a:fontRef idx="minor"/>
+    </dgm:style>
+  </dgm:styleLbl>
+  <dgm:styleLbl name="bgImgPlace1">
+    <dgm:scene3d>
+      <a:camera prst="orthographicFront"/>
+      <a:lightRig rig="threePt" dir="t"/>
+    </dgm:scene3d>
+    <dgm:sp3d/>
+    <dgm:txPr/>
+    <dgm:style>
+      <a:lnRef idx="2">
+        <a:scrgbClr r="0" g="0" b="0"/>
+      </a:lnRef>
+      <a:fillRef idx="1">
+        <a:scrgbClr r="0" g="0" b="0"/>
+      </a:fillRef>
+      <a:effectRef idx="0">
+        <a:scrgbClr r="0" g="0" b="0"/>
+      </a:effectRef>
+      <a:fontRef idx="minor"/>
+    </dgm:style>
+  </dgm:styleLbl>
+  <dgm:styleLbl name="sibTrans2D1">
+    <dgm:scene3d>
+      <a:camera prst="orthographicFront"/>
+      <a:lightRig rig="threePt" dir="t"/>
+    </dgm:scene3d>
+    <dgm:sp3d/>
+    <dgm:txPr/>
+    <dgm:style>
+      <a:lnRef idx="0">
+        <a:scrgbClr r="0" g="0" b="0"/>
+      </a:lnRef>
+      <a:fillRef idx="1">
+        <a:scrgbClr r="0" g="0" b="0"/>
+      </a:fillRef>
+      <a:effectRef idx="0">
+        <a:scrgbClr r="0" g="0" b="0"/>
+      </a:effectRef>
+      <a:fontRef idx="minor">
+        <a:schemeClr val="lt1"/>
+      </a:fontRef>
+    </dgm:style>
+  </dgm:styleLbl>
+  <dgm:styleLbl name="fgSibTrans2D1">
+    <dgm:scene3d>
+      <a:camera prst="orthographicFront"/>
+      <a:lightRig rig="threePt" dir="t"/>
+    </dgm:scene3d>
+    <dgm:sp3d/>
+    <dgm:txPr/>
+    <dgm:style>
+      <a:lnRef idx="0">
+        <a:scrgbClr r="0" g="0" b="0"/>
+      </a:lnRef>
+      <a:fillRef idx="1">
+        <a:scrgbClr r="0" g="0" b="0"/>
+      </a:fillRef>
+      <a:effectRef idx="0">
+        <a:scrgbClr r="0" g="0" b="0"/>
+      </a:effectRef>
+      <a:fontRef idx="minor">
+        <a:schemeClr val="lt1"/>
+      </a:fontRef>
+    </dgm:style>
+  </dgm:styleLbl>
+  <dgm:styleLbl name="bgSibTrans2D1">
+    <dgm:scene3d>
+      <a:camera prst="orthographicFront"/>
+      <a:lightRig rig="threePt" dir="t"/>
+    </dgm:scene3d>
+    <dgm:sp3d/>
+    <dgm:txPr/>
+    <dgm:style>
+      <a:lnRef idx="0">
+        <a:scrgbClr r="0" g="0" b="0"/>
+      </a:lnRef>
+      <a:fillRef idx="1">
+        <a:scrgbClr r="0" g="0" b="0"/>
+      </a:fillRef>
+      <a:effectRef idx="0">
+        <a:scrgbClr r="0" g="0" b="0"/>
+      </a:effectRef>
+      <a:fontRef idx="minor">
+        <a:schemeClr val="lt1"/>
+      </a:fontRef>
+    </dgm:style>
+  </dgm:styleLbl>
+  <dgm:styleLbl name="sibTrans1D1">
+    <dgm:scene3d>
+      <a:camera prst="orthographicFront"/>
+      <a:lightRig rig="threePt" dir="t"/>
+    </dgm:scene3d>
+    <dgm:sp3d/>
+    <dgm:txPr/>
+    <dgm:style>
+      <a:lnRef idx="1">
+        <a:scrgbClr r="0" g="0" b="0"/>
+      </a:lnRef>
+      <a:fillRef idx="0">
+        <a:scrgbClr r="0" g="0" b="0"/>
+      </a:fillRef>
+      <a:effectRef idx="0">
+        <a:scrgbClr r="0" g="0" b="0"/>
+      </a:effectRef>
+      <a:fontRef idx="minor"/>
+    </dgm:style>
+  </dgm:styleLbl>
+  <dgm:styleLbl name="callout">
+    <dgm:scene3d>
+      <a:camera prst="orthographicFront"/>
+      <a:lightRig rig="threePt" dir="t"/>
+    </dgm:scene3d>
+    <dgm:sp3d/>
+    <dgm:txPr/>
+    <dgm:style>
+      <a:lnRef idx="2">
+        <a:scrgbClr r="0" g="0" b="0"/>
+      </a:lnRef>
+      <a:fillRef idx="1">
+        <a:scrgbClr r="0" g="0" b="0"/>
+      </a:fillRef>
+      <a:effectRef idx="0">
+        <a:scrgbClr r="0" g="0" b="0"/>
+      </a:effectRef>
+      <a:fontRef idx="minor"/>
+    </dgm:style>
+  </dgm:styleLbl>
+  <dgm:styleLbl name="asst0">
+    <dgm:scene3d>
+      <a:camera prst="orthographicFront"/>
+      <a:lightRig rig="threePt" dir="t"/>
+    </dgm:scene3d>
+    <dgm:sp3d/>
+    <dgm:txPr/>
+    <dgm:style>
+      <a:lnRef idx="2">
+        <a:scrgbClr r="0" g="0" b="0"/>
+      </a:lnRef>
+      <a:fillRef idx="1">
+        <a:scrgbClr r="0" g="0" b="0"/>
+      </a:fillRef>
+      <a:effectRef idx="0">
+        <a:scrgbClr r="0" g="0" b="0"/>
+      </a:effectRef>
+      <a:fontRef idx="minor">
+        <a:schemeClr val="lt1"/>
+      </a:fontRef>
+    </dgm:style>
+  </dgm:styleLbl>
+  <dgm:styleLbl name="asst1">
+    <dgm:scene3d>
+      <a:camera prst="orthographicFront"/>
+      <a:lightRig rig="threePt" dir="t"/>
+    </dgm:scene3d>
+    <dgm:sp3d/>
+    <dgm:txPr/>
+    <dgm:style>
+      <a:lnRef idx="2">
+        <a:scrgbClr r="0" g="0" b="0"/>
+      </a:lnRef>
+      <a:fillRef idx="1">
+        <a:scrgbClr r="0" g="0" b="0"/>
+      </a:fillRef>
+      <a:effectRef idx="0">
+        <a:scrgbClr r="0" g="0" b="0"/>
+      </a:effectRef>
+      <a:fontRef idx="minor">
+        <a:schemeClr val="lt1"/>
+      </a:fontRef>
+    </dgm:style>
+  </dgm:styleLbl>
+  <dgm:styleLbl name="asst2">
+    <dgm:scene3d>
+      <a:camera prst="orthographicFront"/>
+      <a:lightRig rig="threePt" dir="t"/>
+    </dgm:scene3d>
+    <dgm:sp3d/>
+    <dgm:txPr/>
+    <dgm:style>
+      <a:lnRef idx="2">
+        <a:scrgbClr r="0" g="0" b="0"/>
+      </a:lnRef>
+      <a:fillRef idx="1">
+        <a:scrgbClr r="0" g="0" b="0"/>
+      </a:fillRef>
+      <a:effectRef idx="0">
+        <a:scrgbClr r="0" g="0" b="0"/>
+      </a:effectRef>
+      <a:fontRef idx="minor">
+        <a:schemeClr val="lt1"/>
+      </a:fontRef>
+    </dgm:style>
+  </dgm:styleLbl>
+  <dgm:styleLbl name="asst3">
+    <dgm:scene3d>
+      <a:camera prst="orthographicFront"/>
+      <a:lightRig rig="threePt" dir="t"/>
+    </dgm:scene3d>
+    <dgm:sp3d/>
+    <dgm:txPr/>
+    <dgm:style>
+      <a:lnRef idx="2">
+        <a:scrgbClr r="0" g="0" b="0"/>
+      </a:lnRef>
+      <a:fillRef idx="1">
+        <a:scrgbClr r="0" g="0" b="0"/>
+      </a:fillRef>
+      <a:effectRef idx="0">
+        <a:scrgbClr r="0" g="0" b="0"/>
+      </a:effectRef>
+      <a:fontRef idx="minor">
+        <a:schemeClr val="lt1"/>
+      </a:fontRef>
+    </dgm:style>
+  </dgm:styleLbl>
+  <dgm:styleLbl name="asst4">
+    <dgm:scene3d>
+      <a:camera prst="orthographicFront"/>
+      <a:lightRig rig="threePt" dir="t"/>
+    </dgm:scene3d>
+    <dgm:sp3d/>
+    <dgm:txPr/>
+    <dgm:style>
+      <a:lnRef idx="2">
+        <a:scrgbClr r="0" g="0" b="0"/>
+      </a:lnRef>
+      <a:fillRef idx="1">
+        <a:scrgbClr r="0" g="0" b="0"/>
+      </a:fillRef>
+      <a:effectRef idx="0">
+        <a:scrgbClr r="0" g="0" b="0"/>
+      </a:effectRef>
+      <a:fontRef idx="minor">
+        <a:schemeClr val="lt1"/>
+      </a:fontRef>
+    </dgm:style>
+  </dgm:styleLbl>
+  <dgm:styleLbl name="parChTrans2D1">
+    <dgm:scene3d>
+      <a:camera prst="orthographicFront"/>
+      <a:lightRig rig="threePt" dir="t"/>
+    </dgm:scene3d>
+    <dgm:sp3d/>
+    <dgm:txPr/>
+    <dgm:style>
+      <a:lnRef idx="2">
+        <a:scrgbClr r="0" g="0" b="0"/>
+      </a:lnRef>
+      <a:fillRef idx="1">
+        <a:scrgbClr r="0" g="0" b="0"/>
+      </a:fillRef>
+      <a:effectRef idx="0">
+        <a:scrgbClr r="0" g="0" b="0"/>
+      </a:effectRef>
+      <a:fontRef idx="minor">
+        <a:schemeClr val="lt1"/>
+      </a:fontRef>
+    </dgm:style>
+  </dgm:styleLbl>
+  <dgm:styleLbl name="parChTrans2D2">
+    <dgm:scene3d>
+      <a:camera prst="orthographicFront"/>
+      <a:lightRig rig="threePt" dir="t"/>
+    </dgm:scene3d>
+    <dgm:sp3d/>
+    <dgm:txPr/>
+    <dgm:style>
+      <a:lnRef idx="2">
+        <a:scrgbClr r="0" g="0" b="0"/>
+      </a:lnRef>
+      <a:fillRef idx="1">
+        <a:scrgbClr r="0" g="0" b="0"/>
+      </a:fillRef>
+      <a:effectRef idx="0">
+        <a:scrgbClr r="0" g="0" b="0"/>
+      </a:effectRef>
+      <a:fontRef idx="minor">
+        <a:schemeClr val="lt1"/>
+      </a:fontRef>
+    </dgm:style>
+  </dgm:styleLbl>
+  <dgm:styleLbl name="parChTrans2D3">
+    <dgm:scene3d>
+      <a:camera prst="orthographicFront"/>
+      <a:lightRig rig="threePt" dir="t"/>
+    </dgm:scene3d>
+    <dgm:sp3d/>
+    <dgm:txPr/>
+    <dgm:style>
+      <a:lnRef idx="2">
+        <a:scrgbClr r="0" g="0" b="0"/>
+      </a:lnRef>
+      <a:fillRef idx="1">
+        <a:scrgbClr r="0" g="0" b="0"/>
+      </a:fillRef>
+      <a:effectRef idx="0">
+        <a:scrgbClr r="0" g="0" b="0"/>
+      </a:effectRef>
+      <a:fontRef idx="minor">
+        <a:schemeClr val="lt1"/>
+      </a:fontRef>
+    </dgm:style>
+  </dgm:styleLbl>
+  <dgm:styleLbl name="parChTrans2D4">
+    <dgm:scene3d>
+      <a:camera prst="orthographicFront"/>
+      <a:lightRig rig="threePt" dir="t"/>
+    </dgm:scene3d>
+    <dgm:sp3d/>
+    <dgm:txPr/>
+    <dgm:style>
+      <a:lnRef idx="2">
+        <a:scrgbClr r="0" g="0" b="0"/>
+      </a:lnRef>
+      <a:fillRef idx="1">
+        <a:scrgbClr r="0" g="0" b="0"/>
+      </a:fillRef>
+      <a:effectRef idx="0">
+        <a:scrgbClr r="0" g="0" b="0"/>
+      </a:effectRef>
+      <a:fontRef idx="minor">
+        <a:schemeClr val="lt1"/>
+      </a:fontRef>
+    </dgm:style>
+  </dgm:styleLbl>
+  <dgm:styleLbl name="parChTrans1D1">
+    <dgm:scene3d>
+      <a:camera prst="orthographicFront"/>
+      <a:lightRig rig="threePt" dir="t"/>
+    </dgm:scene3d>
+    <dgm:sp3d/>
+    <dgm:txPr/>
+    <dgm:style>
+      <a:lnRef idx="2">
+        <a:scrgbClr r="0" g="0" b="0"/>
+      </a:lnRef>
+      <a:fillRef idx="0">
+        <a:scrgbClr r="0" g="0" b="0"/>
+      </a:fillRef>
+      <a:effectRef idx="0">
+        <a:scrgbClr r="0" g="0" b="0"/>
+      </a:effectRef>
+      <a:fontRef idx="minor"/>
+    </dgm:style>
+  </dgm:styleLbl>
+  <dgm:styleLbl name="parChTrans1D2">
+    <dgm:scene3d>
+      <a:camera prst="orthographicFront"/>
+      <a:lightRig rig="threePt" dir="t"/>
+    </dgm:scene3d>
+    <dgm:sp3d/>
+    <dgm:txPr/>
+    <dgm:style>
+      <a:lnRef idx="2">
+        <a:scrgbClr r="0" g="0" b="0"/>
+      </a:lnRef>
+      <a:fillRef idx="0">
+        <a:scrgbClr r="0" g="0" b="0"/>
+      </a:fillRef>
+      <a:effectRef idx="0">
+        <a:scrgbClr r="0" g="0" b="0"/>
+      </a:effectRef>
+      <a:fontRef idx="minor"/>
+    </dgm:style>
+  </dgm:styleLbl>
+  <dgm:styleLbl name="parChTrans1D3">
+    <dgm:scene3d>
+      <a:camera prst="orthographicFront"/>
+      <a:lightRig rig="threePt" dir="t"/>
+    </dgm:scene3d>
+    <dgm:sp3d/>
+    <dgm:txPr/>
+    <dgm:style>
+      <a:lnRef idx="2">
+        <a:scrgbClr r="0" g="0" b="0"/>
+      </a:lnRef>
+      <a:fillRef idx="0">
+        <a:scrgbClr r="0" g="0" b="0"/>
+      </a:fillRef>
+      <a:effectRef idx="0">
+        <a:scrgbClr r="0" g="0" b="0"/>
+      </a:effectRef>
+      <a:fontRef idx="minor"/>
+    </dgm:style>
+  </dgm:styleLbl>
+  <dgm:styleLbl name="parChTrans1D4">
+    <dgm:scene3d>
+      <a:camera prst="orthographicFront"/>
+      <a:lightRig rig="threePt" dir="t"/>
+    </dgm:scene3d>
+    <dgm:sp3d/>
+    <dgm:txPr/>
+    <dgm:style>
+      <a:lnRef idx="2">
+        <a:scrgbClr r="0" g="0" b="0"/>
+      </a:lnRef>
+      <a:fillRef idx="0">
+        <a:scrgbClr r="0" g="0" b="0"/>
+      </a:fillRef>
+      <a:effectRef idx="0">
+        <a:scrgbClr r="0" g="0" b="0"/>
+      </a:effectRef>
+      <a:fontRef idx="minor"/>
+    </dgm:style>
+  </dgm:styleLbl>
+  <dgm:styleLbl name="fgAcc1">
+    <dgm:scene3d>
+      <a:camera prst="orthographicFront"/>
+      <a:lightRig rig="threePt" dir="t"/>
+    </dgm:scene3d>
+    <dgm:sp3d/>
+    <dgm:txPr/>
+    <dgm:style>
+      <a:lnRef idx="2">
+        <a:scrgbClr r="0" g="0" b="0"/>
+      </a:lnRef>
+      <a:fillRef idx="1">
+        <a:scrgbClr r="0" g="0" b="0"/>
+      </a:fillRef>
+      <a:effectRef idx="0">
+        <a:scrgbClr r="0" g="0" b="0"/>
+      </a:effectRef>
+      <a:fontRef idx="minor"/>
+    </dgm:style>
+  </dgm:styleLbl>
+  <dgm:styleLbl name="conFgAcc1">
+    <dgm:scene3d>
+      <a:camera prst="orthographicFront"/>
+      <a:lightRig rig="threePt" dir="t"/>
+    </dgm:scene3d>
+    <dgm:sp3d/>
+    <dgm:txPr/>
+    <dgm:style>
+      <a:lnRef idx="2">
+        <a:scrgbClr r="0" g="0" b="0"/>
+      </a:lnRef>
+      <a:fillRef idx="1">
+        <a:scrgbClr r="0" g="0" b="0"/>
+      </a:fillRef>
+      <a:effectRef idx="0">
+        <a:scrgbClr r="0" g="0" b="0"/>
+      </a:effectRef>
+      <a:fontRef idx="minor"/>
+    </dgm:style>
+  </dgm:styleLbl>
+  <dgm:styleLbl name="alignAcc1">
+    <dgm:scene3d>
+      <a:camera prst="orthographicFront"/>
+      <a:lightRig rig="threePt" dir="t"/>
+    </dgm:scene3d>
+    <dgm:sp3d/>
+    <dgm:txPr/>
+    <dgm:style>
+      <a:lnRef idx="2">
+        <a:scrgbClr r="0" g="0" b="0"/>
+      </a:lnRef>
+      <a:fillRef idx="1">
+        <a:scrgbClr r="0" g="0" b="0"/>
+      </a:fillRef>
+      <a:effectRef idx="0">
+        <a:scrgbClr r="0" g="0" b="0"/>
+      </a:effectRef>
+      <a:fontRef idx="minor"/>
+    </dgm:style>
+  </dgm:styleLbl>
+  <dgm:styleLbl name="trAlignAcc1">
+    <dgm:scene3d>
+      <a:camera prst="orthographicFront"/>
+      <a:lightRig rig="threePt" dir="t"/>
+    </dgm:scene3d>
+    <dgm:sp3d/>
+    <dgm:txPr/>
+    <dgm:style>
+      <a:lnRef idx="1">
+        <a:scrgbClr r="0" g="0" b="0"/>
+      </a:lnRef>
+      <a:fillRef idx="1">
+        <a:scrgbClr r="0" g="0" b="0"/>
+      </a:fillRef>
+      <a:effectRef idx="0">
+        <a:scrgbClr r="0" g="0" b="0"/>
+      </a:effectRef>
+      <a:fontRef idx="minor"/>
+    </dgm:style>
+  </dgm:styleLbl>
+  <dgm:styleLbl name="bgAcc1">
+    <dgm:scene3d>
+      <a:camera prst="orthographicFront"/>
+      <a:lightRig rig="threePt" dir="t"/>
+    </dgm:scene3d>
+    <dgm:sp3d/>
+    <dgm:txPr/>
+    <dgm:style>
+      <a:lnRef idx="2">
+        <a:scrgbClr r="0" g="0" b="0"/>
+      </a:lnRef>
+      <a:fillRef idx="1">
+        <a:scrgbClr r="0" g="0" b="0"/>
+      </a:fillRef>
+      <a:effectRef idx="0">
+        <a:scrgbClr r="0" g="0" b="0"/>
+      </a:effectRef>
+      <a:fontRef idx="minor"/>
+    </dgm:style>
+  </dgm:styleLbl>
+  <dgm:styleLbl name="solidFgAcc1">
+    <dgm:scene3d>
+      <a:camera prst="orthographicFront"/>
+      <a:lightRig rig="threePt" dir="t"/>
+    </dgm:scene3d>
+    <dgm:sp3d/>
+    <dgm:txPr/>
+    <dgm:style>
+      <a:lnRef idx="2">
+        <a:scrgbClr r="0" g="0" b="0"/>
+      </a:lnRef>
+      <a:fillRef idx="1">
+        <a:scrgbClr r="0" g="0" b="0"/>
+      </a:fillRef>
+      <a:effectRef idx="0">
+        <a:scrgbClr r="0" g="0" b="0"/>
+      </a:effectRef>
+      <a:fontRef idx="minor"/>
+    </dgm:style>
+  </dgm:styleLbl>
+  <dgm:styleLbl name="solidAlignAcc1">
+    <dgm:scene3d>
+      <a:camera prst="orthographicFront"/>
+      <a:lightRig rig="threePt" dir="t"/>
+    </dgm:scene3d>
+    <dgm:sp3d/>
+    <dgm:txPr/>
+    <dgm:style>
+      <a:lnRef idx="2">
+        <a:scrgbClr r="0" g="0" b="0"/>
+      </a:lnRef>
+      <a:fillRef idx="1">
+        <a:scrgbClr r="0" g="0" b="0"/>
+      </a:fillRef>
+      <a:effectRef idx="0">
+        <a:scrgbClr r="0" g="0" b="0"/>
+      </a:effectRef>
+      <a:fontRef idx="minor"/>
+    </dgm:style>
+  </dgm:styleLbl>
+  <dgm:styleLbl name="solidBgAcc1">
+    <dgm:scene3d>
+      <a:camera prst="orthographicFront"/>
+      <a:lightRig rig="threePt" dir="t"/>
+    </dgm:scene3d>
+    <dgm:sp3d/>
+    <dgm:txPr/>
+    <dgm:style>
+      <a:lnRef idx="2">
+        <a:scrgbClr r="0" g="0" b="0"/>
+      </a:lnRef>
+      <a:fillRef idx="1">
+        <a:scrgbClr r="0" g="0" b="0"/>
+      </a:fillRef>
+      <a:effectRef idx="0">
+        <a:scrgbClr r="0" g="0" b="0"/>
+      </a:effectRef>
+      <a:fontRef idx="minor"/>
+    </dgm:style>
+  </dgm:styleLbl>
+  <dgm:styleLbl name="fgAccFollowNode1">
+    <dgm:scene3d>
+      <a:camera prst="orthographicFront"/>
+      <a:lightRig rig="threePt" dir="t"/>
+    </dgm:scene3d>
+    <dgm:sp3d/>
+    <dgm:txPr/>
+    <dgm:style>
+      <a:lnRef idx="2">
+        <a:scrgbClr r="0" g="0" b="0"/>
+      </a:lnRef>
+      <a:fillRef idx="1">
+        <a:scrgbClr r="0" g="0" b="0"/>
+      </a:fillRef>
+      <a:effectRef idx="0">
+        <a:scrgbClr r="0" g="0" b="0"/>
+      </a:effectRef>
+      <a:fontRef idx="minor"/>
+    </dgm:style>
+  </dgm:styleLbl>
+  <dgm:styleLbl name="alignAccFollowNode1">
+    <dgm:scene3d>
+      <a:camera prst="orthographicFront"/>
+      <a:lightRig rig="threePt" dir="t"/>
+    </dgm:scene3d>
+    <dgm:sp3d/>
+    <dgm:txPr/>
+    <dgm:style>
+      <a:lnRef idx="2">
+        <a:scrgbClr r="0" g="0" b="0"/>
+      </a:lnRef>
+      <a:fillRef idx="1">
+        <a:scrgbClr r="0" g="0" b="0"/>
+      </a:fillRef>
+      <a:effectRef idx="0">
+        <a:scrgbClr r="0" g="0" b="0"/>
+      </a:effectRef>
+      <a:fontRef idx="minor"/>
+    </dgm:style>
+  </dgm:styleLbl>
+  <dgm:styleLbl name="bgAccFollowNode1">
+    <dgm:scene3d>
+      <a:camera prst="orthographicFront"/>
+      <a:lightRig rig="threePt" dir="t"/>
+    </dgm:scene3d>
+    <dgm:sp3d/>
+    <dgm:txPr/>
+    <dgm:style>
+      <a:lnRef idx="2">
+        <a:scrgbClr r="0" g="0" b="0"/>
+      </a:lnRef>
+      <a:fillRef idx="1">
+        <a:scrgbClr r="0" g="0" b="0"/>
+      </a:fillRef>
+      <a:effectRef idx="0">
+        <a:scrgbClr r="0" g="0" b="0"/>
+      </a:effectRef>
+      <a:fontRef idx="minor"/>
+    </dgm:style>
+  </dgm:styleLbl>
+  <dgm:styleLbl name="fgAcc0">
+    <dgm:scene3d>
+      <a:camera prst="orthographicFront"/>
+      <a:lightRig rig="threePt" dir="t"/>
+    </dgm:scene3d>
+    <dgm:sp3d/>
+    <dgm:txPr/>
+    <dgm:style>
+      <a:lnRef idx="2">
+        <a:scrgbClr r="0" g="0" b="0"/>
+      </a:lnRef>
+      <a:fillRef idx="1">
+        <a:scrgbClr r="0" g="0" b="0"/>
+      </a:fillRef>
+      <a:effectRef idx="0">
+        <a:scrgbClr r="0" g="0" b="0"/>
+      </a:effectRef>
+      <a:fontRef idx="minor"/>
+    </dgm:style>
+  </dgm:styleLbl>
+  <dgm:styleLbl name="fgAcc2">
+    <dgm:scene3d>
+      <a:camera prst="orthographicFront"/>
+      <a:lightRig rig="threePt" dir="t"/>
+    </dgm:scene3d>
+    <dgm:sp3d/>
+    <dgm:txPr/>
+    <dgm:style>
+      <a:lnRef idx="2">
+        <a:scrgbClr r="0" g="0" b="0"/>
+      </a:lnRef>
+      <a:fillRef idx="1">
+        <a:scrgbClr r="0" g="0" b="0"/>
+      </a:fillRef>
+      <a:effectRef idx="0">
+        <a:scrgbClr r="0" g="0" b="0"/>
+      </a:effectRef>
+      <a:fontRef idx="minor"/>
+    </dgm:style>
+  </dgm:styleLbl>
+  <dgm:styleLbl name="fgAcc3">
+    <dgm:scene3d>
+      <a:camera prst="orthographicFront"/>
+      <a:lightRig rig="threePt" dir="t"/>
+    </dgm:scene3d>
+    <dgm:sp3d/>
+    <dgm:txPr/>
+    <dgm:style>
+      <a:lnRef idx="2">
+        <a:scrgbClr r="0" g="0" b="0"/>
+      </a:lnRef>
+      <a:fillRef idx="1">
+        <a:scrgbClr r="0" g="0" b="0"/>
+      </a:fillRef>
+      <a:effectRef idx="0">
+        <a:scrgbClr r="0" g="0" b="0"/>
+      </a:effectRef>
+      <a:fontRef idx="minor"/>
+    </dgm:style>
+  </dgm:styleLbl>
+  <dgm:styleLbl name="fgAcc4">
+    <dgm:scene3d>
+      <a:camera prst="orthographicFront"/>
+      <a:lightRig rig="threePt" dir="t"/>
+    </dgm:scene3d>
+    <dgm:sp3d/>
+    <dgm:txPr/>
+    <dgm:style>
+      <a:lnRef idx="2">
+        <a:scrgbClr r="0" g="0" b="0"/>
+      </a:lnRef>
+      <a:fillRef idx="1">
+        <a:scrgbClr r="0" g="0" b="0"/>
+      </a:fillRef>
+      <a:effectRef idx="0">
+        <a:scrgbClr r="0" g="0" b="0"/>
+      </a:effectRef>
+      <a:fontRef idx="minor"/>
+    </dgm:style>
+  </dgm:styleLbl>
+  <dgm:styleLbl name="bgShp">
+    <dgm:scene3d>
+      <a:camera prst="orthographicFront"/>
+      <a:lightRig rig="threePt" dir="t"/>
+    </dgm:scene3d>
+    <dgm:sp3d/>
+    <dgm:txPr/>
+    <dgm:style>
+      <a:lnRef idx="0">
+        <a:scrgbClr r="0" g="0" b="0"/>
+      </a:lnRef>
+      <a:fillRef idx="1">
+        <a:scrgbClr r="0" g="0" b="0"/>
+      </a:fillRef>
+      <a:effectRef idx="0">
+        <a:scrgbClr r="0" g="0" b="0"/>
+      </a:effectRef>
+      <a:fontRef idx="minor"/>
+    </dgm:style>
+  </dgm:styleLbl>
+  <dgm:styleLbl name="dkBgShp">
+    <dgm:scene3d>
+      <a:camera prst="orthographicFront"/>
+      <a:lightRig rig="threePt" dir="t"/>
+    </dgm:scene3d>
+    <dgm:sp3d/>
+    <dgm:txPr/>
+    <dgm:style>
+      <a:lnRef idx="0">
+        <a:scrgbClr r="0" g="0" b="0"/>
+      </a:lnRef>
+      <a:fillRef idx="1">
+        <a:scrgbClr r="0" g="0" b="0"/>
+      </a:fillRef>
+      <a:effectRef idx="0">
+        <a:scrgbClr r="0" g="0" b="0"/>
+      </a:effectRef>
+      <a:fontRef idx="minor"/>
+    </dgm:style>
+  </dgm:styleLbl>
+  <dgm:styleLbl name="trBgShp">
+    <dgm:scene3d>
+      <a:camera prst="orthographicFront"/>
+      <a:lightRig rig="threePt" dir="t"/>
+    </dgm:scene3d>
+    <dgm:sp3d/>
+    <dgm:txPr/>
+    <dgm:style>
+      <a:lnRef idx="0">
+        <a:scrgbClr r="0" g="0" b="0"/>
+      </a:lnRef>
+      <a:fillRef idx="1">
+        <a:scrgbClr r="0" g="0" b="0"/>
+      </a:fillRef>
+      <a:effectRef idx="0">
+        <a:scrgbClr r="0" g="0" b="0"/>
+      </a:effectRef>
+      <a:fontRef idx="minor"/>
+    </dgm:style>
+  </dgm:styleLbl>
+  <dgm:styleLbl name="fgShp">
+    <dgm:scene3d>
+      <a:camera prst="orthographicFront"/>
+      <a:lightRig rig="threePt" dir="t"/>
+    </dgm:scene3d>
+    <dgm:sp3d/>
+    <dgm:txPr/>
+    <dgm:style>
+      <a:lnRef idx="2">
+        <a:scrgbClr r="0" g="0" b="0"/>
+      </a:lnRef>
+      <a:fillRef idx="1">
+        <a:scrgbClr r="0" g="0" b="0"/>
+      </a:fillRef>
+      <a:effectRef idx="0">
+        <a:scrgbClr r="0" g="0" b="0"/>
+      </a:effectRef>
+      <a:fontRef idx="minor"/>
+    </dgm:style>
+  </dgm:styleLbl>
+  <dgm:styleLbl name="revTx">
+    <dgm:scene3d>
+      <a:camera prst="orthographicFront"/>
+      <a:lightRig rig="threePt" dir="t"/>
+    </dgm:scene3d>
+    <dgm:sp3d/>
+    <dgm:txPr/>
+    <dgm:style>
+      <a:lnRef idx="0">
+        <a:scrgbClr r="0" g="0" b="0"/>
+      </a:lnRef>
+      <a:fillRef idx="0">
+        <a:scrgbClr r="0" g="0" b="0"/>
+      </a:fillRef>
+      <a:effectRef idx="0">
+        <a:scrgbClr r="0" g="0" b="0"/>
+      </a:effectRef>
+      <a:fontRef idx="minor"/>
+    </dgm:style>
+  </dgm:styleLbl>
+</dgm:styleDef>
+</file>
+
+<file path=ppt/diagrams/quickStyle2.xml><?xml version="1.0" encoding="utf-8"?>
 <dgm:styleDef xmlns:dgm="http://schemas.openxmlformats.org/drawingml/2006/diagram" xmlns:a="http://schemas.openxmlformats.org/drawingml/2006/main" uniqueId="urn:microsoft.com/office/officeart/2005/8/quickstyle/simple1">
   <dgm:title val=""/>
   <dgm:desc val=""/>
@@ -3794,76 +7185,40 @@
           <a:bodyPr/>
           <a:lstStyle/>
           <a:p>
-            <a:pPr>
-              <a:spcBef>
-                <a:spcPct val="0"/>
-              </a:spcBef>
-              <a:spcAft>
-                <a:spcPts val="600"/>
-              </a:spcAft>
-              <a:buFont typeface="Wingdings" pitchFamily="2" charset="2"/>
-              <a:buChar char="v"/>
-            </a:pPr>
-            <a:r>
-              <a:rPr lang="en-US" sz="1200" dirty="0"/>
-              <a:t>Speaker notes:</a:t>
-            </a:r>
-          </a:p>
-          <a:p>
-            <a:pPr>
-              <a:spcBef>
-                <a:spcPct val="0"/>
-              </a:spcBef>
-              <a:spcAft>
-                <a:spcPts val="600"/>
-              </a:spcAft>
-              <a:buFont typeface="Wingdings" pitchFamily="2" charset="2"/>
-              <a:buChar char="v"/>
-            </a:pPr>
-            <a:endParaRPr lang="en-US" sz="1200" dirty="0"/>
-          </a:p>
-          <a:p>
-            <a:pPr>
-              <a:spcBef>
-                <a:spcPct val="0"/>
-              </a:spcBef>
-              <a:spcAft>
-                <a:spcPts val="600"/>
-              </a:spcAft>
-              <a:buFont typeface="Wingdings" pitchFamily="2" charset="2"/>
-              <a:buChar char="v"/>
-            </a:pPr>
             <a:r>
               <a:rPr lang="en-US" dirty="0"/>
-              <a:t>Diabetes is a major contributor to hospitalization and critical care needs in many healthcare settings.</a:t>
+              <a:t>GitHub:       https://</a:t>
+            </a:r>
+            <a:r>
+              <a:rPr lang="en-US" dirty="0" err="1"/>
+              <a:t>github.com</a:t>
+            </a:r>
+            <a:r>
+              <a:rPr lang="en-US" dirty="0"/>
+              <a:t>/abhishekraman2001/AI-Health/blob/main/</a:t>
+            </a:r>
+            <a:r>
+              <a:rPr lang="en-US" dirty="0" err="1"/>
+              <a:t>Diabetes_MIMIC_Tutorial_Formatted.pdf</a:t>
             </a:r>
             <a:br>
               <a:rPr lang="en-US" dirty="0"/>
             </a:br>
             <a:r>
-              <a:rPr lang="en-US" dirty="0"/>
-              <a:t>Patients with diabetes in the ICU often require more complex management because of complications and comorbidities.</a:t>
+              <a:rPr lang="en-US" dirty="0" err="1"/>
+              <a:t>Colab</a:t>
             </a:r>
-            <a:br>
-              <a:rPr lang="en-US" dirty="0"/>
-            </a:br>
             <a:r>
               <a:rPr lang="en-US" dirty="0"/>
-              <a:t>This added complexity can influence treatment decisions, monitoring needs, and overall recovery time.</a:t>
+              <a:t>:        https://</a:t>
             </a:r>
-            <a:br>
-              <a:rPr lang="en-US" dirty="0"/>
-            </a:br>
+            <a:r>
+              <a:rPr lang="en-US" dirty="0" err="1"/>
+              <a:t>colab.research.google.com</a:t>
+            </a:r>
             <a:r>
               <a:rPr lang="en-US" dirty="0"/>
-              <a:t>Predicting length of stay is important because it can help hospitals improve staffing and bed planning.</a:t>
-            </a:r>
-            <a:br>
-              <a:rPr lang="en-US" dirty="0"/>
-            </a:br>
-            <a:r>
-              <a:rPr lang="en-US" dirty="0"/>
-              <a:t>It can also support better resource allocation and care planning for diabetic ICU patients.</a:t>
+              <a:t>/drive/1TBd0XnNTQiQdc6XcNJNCgO26btWYuwpY#scrollTo=1ZZ6xjj_yzil</a:t>
             </a:r>
           </a:p>
         </p:txBody>
@@ -3885,7 +7240,7 @@
           <a:p>
             <a:fld id="{BCD9374F-9954-F24E-8880-8CA162CE8CFB}" type="slidenum">
               <a:rPr lang="en-US" smtClean="0"/>
-              <a:t>3</a:t>
+              <a:t>1</a:t>
             </a:fld>
             <a:endParaRPr lang="en-US"/>
           </a:p>
@@ -3894,7 +7249,7 @@
     </p:spTree>
     <p:extLst>
       <p:ext uri="{BB962C8B-B14F-4D97-AF65-F5344CB8AC3E}">
-        <p14:creationId xmlns:p14="http://schemas.microsoft.com/office/powerpoint/2010/main" val="3564164512"/>
+        <p14:creationId xmlns:p14="http://schemas.microsoft.com/office/powerpoint/2010/main" val="3904216027"/>
       </p:ext>
     </p:extLst>
   </p:cSld>
@@ -3948,6 +7303,21 @@
           <a:bodyPr/>
           <a:lstStyle/>
           <a:p>
+            <a:pPr marL="457200" lvl="1" indent="0">
+              <a:buNone/>
+            </a:pPr>
+            <a:r>
+              <a:rPr lang="en-US" sz="1600" dirty="0"/>
+              <a:t>Speaker notes:</a:t>
+            </a:r>
+          </a:p>
+          <a:p>
+            <a:pPr marL="457200" lvl="1" indent="0">
+              <a:buNone/>
+            </a:pPr>
+            <a:endParaRPr lang="en-US" sz="1600" dirty="0"/>
+          </a:p>
+          <a:p>
             <a:r>
               <a:rPr lang="en-US" sz="1200" kern="1200" dirty="0">
                 <a:solidFill>
@@ -3958,7 +7328,7 @@
                 <a:ea typeface="+mn-ea"/>
                 <a:cs typeface="+mn-cs"/>
               </a:rPr>
-              <a:t>This slide explains why the confusion matrix is an important evaluation tool in this project.</a:t>
+              <a:t>This slide shows the evaluation results for the Random Forest model, which is the tree-based approach used in this project. Accuracy measures the overall percentage of correct predictions across the ICU length-of-stay categories. Precision, recall, and F1-score provide a more complete view of how well the model performs for each class. The confusion matrix helps visualize where the Random Forest model predicts correctly and where misclassifications occur.</a:t>
             </a:r>
           </a:p>
           <a:p>
@@ -3972,52 +7342,13 @@
                 <a:ea typeface="+mn-ea"/>
                 <a:cs typeface="+mn-cs"/>
               </a:rPr>
-              <a:t>It shows which ICU length-of-stay categories are predicted correctly by the model.</a:t>
+              <a:t>Comparing these results with Logistic Regression helps determine whether the tree-based model performs better on this task.</a:t>
             </a:r>
           </a:p>
           <a:p>
-            <a:r>
-              <a:rPr lang="en-US" sz="1200" kern="1200" dirty="0">
-                <a:solidFill>
-                  <a:schemeClr val="tx1"/>
-                </a:solidFill>
-                <a:effectLst/>
-                <a:latin typeface="+mn-lt"/>
-                <a:ea typeface="+mn-ea"/>
-                <a:cs typeface="+mn-cs"/>
-              </a:rPr>
-              <a:t>It also highlights which classes are commonly confused with one another during prediction.</a:t>
-            </a:r>
-          </a:p>
-          <a:p>
-            <a:r>
-              <a:rPr lang="en-US" sz="1200" kern="1200" dirty="0">
-                <a:solidFill>
-                  <a:schemeClr val="tx1"/>
-                </a:solidFill>
-                <a:effectLst/>
-                <a:latin typeface="+mn-lt"/>
-                <a:ea typeface="+mn-ea"/>
-                <a:cs typeface="+mn-cs"/>
-              </a:rPr>
-              <a:t>In this task, the model may struggle more when distinguishing medium stays from long stays.</a:t>
-            </a:r>
-          </a:p>
-          <a:p>
-            <a:r>
-              <a:rPr lang="en-US" sz="1200" kern="1200" dirty="0">
-                <a:solidFill>
-                  <a:schemeClr val="tx1"/>
-                </a:solidFill>
-                <a:effectLst/>
-                <a:latin typeface="+mn-lt"/>
-                <a:ea typeface="+mn-ea"/>
-                <a:cs typeface="+mn-cs"/>
-              </a:rPr>
-              <a:t>This makes the confusion matrix useful for understanding model strengths and weaknesses beyond overall accuracy.</a:t>
-            </a:r>
-          </a:p>
-          <a:p>
+            <a:pPr marL="457200" lvl="1" indent="0">
+              <a:buNone/>
+            </a:pPr>
             <a:endParaRPr lang="en-US" dirty="0"/>
           </a:p>
         </p:txBody>
@@ -4048,7 +7379,7 @@
     </p:spTree>
     <p:extLst>
       <p:ext uri="{BB962C8B-B14F-4D97-AF65-F5344CB8AC3E}">
-        <p14:creationId xmlns:p14="http://schemas.microsoft.com/office/powerpoint/2010/main" val="689158731"/>
+        <p14:creationId xmlns:p14="http://schemas.microsoft.com/office/powerpoint/2010/main" val="2303810035"/>
       </p:ext>
     </p:extLst>
   </p:cSld>
@@ -4102,38 +7433,6 @@
           <a:bodyPr/>
           <a:lstStyle/>
           <a:p>
-            <a:pPr marL="457200" lvl="1" indent="0">
-              <a:lnSpc>
-                <a:spcPct val="90000"/>
-              </a:lnSpc>
-              <a:buNone/>
-            </a:pPr>
-            <a:endParaRPr lang="en-US" sz="1400" dirty="0"/>
-          </a:p>
-          <a:p>
-            <a:pPr lvl="1">
-              <a:lnSpc>
-                <a:spcPct val="90000"/>
-              </a:lnSpc>
-              <a:buFont typeface="Wingdings" pitchFamily="2" charset="2"/>
-              <a:buChar char="v"/>
-            </a:pPr>
-            <a:r>
-              <a:rPr lang="en-US" sz="1400" dirty="0"/>
-              <a:t>Speaker notes:</a:t>
-            </a:r>
-          </a:p>
-          <a:p>
-            <a:pPr lvl="1">
-              <a:lnSpc>
-                <a:spcPct val="90000"/>
-              </a:lnSpc>
-              <a:buFont typeface="Wingdings" pitchFamily="2" charset="2"/>
-              <a:buChar char="v"/>
-            </a:pPr>
-            <a:endParaRPr lang="en-US" sz="1400" dirty="0"/>
-          </a:p>
-          <a:p>
             <a:r>
               <a:rPr lang="en-US" sz="1200" kern="1200" dirty="0">
                 <a:solidFill>
@@ -4144,7 +7443,7 @@
                 <a:ea typeface="+mn-ea"/>
                 <a:cs typeface="+mn-cs"/>
               </a:rPr>
-              <a:t>This slide summarizes the main findings from the modeling process. The results from Logistic Regression and Random Forest are compared to identify the best-performing model.</a:t>
+              <a:t>This slide explains why the confusion matrix is an important evaluation tool in this project.</a:t>
             </a:r>
           </a:p>
           <a:p>
@@ -4158,17 +7457,52 @@
                 <a:ea typeface="+mn-ea"/>
                 <a:cs typeface="+mn-cs"/>
               </a:rPr>
-              <a:t>It also highlights which structured features appear to be the most useful predictors of ICU length of stay. These findings help interpret how patient and admission characteristics relate to short, medium, or long stays. Overall, the results show that structured EHR data can be used to support healthcare prediction tasks.</a:t>
+              <a:t>It shows which ICU length-of-stay categories are predicted correctly by the model.</a:t>
             </a:r>
           </a:p>
           <a:p>
-            <a:pPr lvl="1">
-              <a:lnSpc>
-                <a:spcPct val="90000"/>
-              </a:lnSpc>
-              <a:buFont typeface="Wingdings" pitchFamily="2" charset="2"/>
-              <a:buChar char="v"/>
-            </a:pPr>
+            <a:r>
+              <a:rPr lang="en-US" sz="1200" kern="1200" dirty="0">
+                <a:solidFill>
+                  <a:schemeClr val="tx1"/>
+                </a:solidFill>
+                <a:effectLst/>
+                <a:latin typeface="+mn-lt"/>
+                <a:ea typeface="+mn-ea"/>
+                <a:cs typeface="+mn-cs"/>
+              </a:rPr>
+              <a:t>It also highlights which classes are commonly confused with one another during prediction.</a:t>
+            </a:r>
+          </a:p>
+          <a:p>
+            <a:r>
+              <a:rPr lang="en-US" sz="1200" kern="1200" dirty="0">
+                <a:solidFill>
+                  <a:schemeClr val="tx1"/>
+                </a:solidFill>
+                <a:effectLst/>
+                <a:latin typeface="+mn-lt"/>
+                <a:ea typeface="+mn-ea"/>
+                <a:cs typeface="+mn-cs"/>
+              </a:rPr>
+              <a:t>In this task, the model may struggle more when distinguishing medium stays from long stays.</a:t>
+            </a:r>
+          </a:p>
+          <a:p>
+            <a:r>
+              <a:rPr lang="en-US" sz="1200" kern="1200" dirty="0">
+                <a:solidFill>
+                  <a:schemeClr val="tx1"/>
+                </a:solidFill>
+                <a:effectLst/>
+                <a:latin typeface="+mn-lt"/>
+                <a:ea typeface="+mn-ea"/>
+                <a:cs typeface="+mn-cs"/>
+              </a:rPr>
+              <a:t>This makes the confusion matrix useful for understanding model strengths and weaknesses beyond overall accuracy.</a:t>
+            </a:r>
+          </a:p>
+          <a:p>
             <a:endParaRPr lang="en-US" dirty="0"/>
           </a:p>
         </p:txBody>
@@ -4199,7 +7533,7 @@
     </p:spTree>
     <p:extLst>
       <p:ext uri="{BB962C8B-B14F-4D97-AF65-F5344CB8AC3E}">
-        <p14:creationId xmlns:p14="http://schemas.microsoft.com/office/powerpoint/2010/main" val="888484719"/>
+        <p14:creationId xmlns:p14="http://schemas.microsoft.com/office/powerpoint/2010/main" val="689158731"/>
       </p:ext>
     </p:extLst>
   </p:cSld>
@@ -4253,6 +7587,38 @@
           <a:bodyPr/>
           <a:lstStyle/>
           <a:p>
+            <a:pPr marL="457200" lvl="1" indent="0">
+              <a:lnSpc>
+                <a:spcPct val="90000"/>
+              </a:lnSpc>
+              <a:buNone/>
+            </a:pPr>
+            <a:endParaRPr lang="en-US" sz="1400" dirty="0"/>
+          </a:p>
+          <a:p>
+            <a:pPr lvl="1">
+              <a:lnSpc>
+                <a:spcPct val="90000"/>
+              </a:lnSpc>
+              <a:buFont typeface="Wingdings" pitchFamily="2" charset="2"/>
+              <a:buChar char="v"/>
+            </a:pPr>
+            <a:r>
+              <a:rPr lang="en-US" sz="1400" dirty="0"/>
+              <a:t>Speaker notes:</a:t>
+            </a:r>
+          </a:p>
+          <a:p>
+            <a:pPr lvl="1">
+              <a:lnSpc>
+                <a:spcPct val="90000"/>
+              </a:lnSpc>
+              <a:buFont typeface="Wingdings" pitchFamily="2" charset="2"/>
+              <a:buChar char="v"/>
+            </a:pPr>
+            <a:endParaRPr lang="en-US" sz="1400" dirty="0"/>
+          </a:p>
+          <a:p>
             <a:r>
               <a:rPr lang="en-US" sz="1200" kern="1200" dirty="0">
                 <a:solidFill>
@@ -4263,7 +7629,7 @@
                 <a:ea typeface="+mn-ea"/>
                 <a:cs typeface="+mn-cs"/>
               </a:rPr>
-              <a:t> </a:t>
+              <a:t>This slide summarizes the main findings from the modeling process. The results from Logistic Regression and Random Forest are compared to identify the best-performing model.</a:t>
             </a:r>
           </a:p>
           <a:p>
@@ -4277,24 +7643,17 @@
                 <a:ea typeface="+mn-ea"/>
                 <a:cs typeface="+mn-cs"/>
               </a:rPr>
-              <a:t>This slide explains both the limitations of the project and how another learner can reproduce it.</a:t>
+              <a:t>It also highlights which structured features appear to be the most useful predictors of ICU length of stay. These findings help interpret how patient and admission characteristics relate to short, medium, or long stays. Overall, the results show that structured EHR data can be used to support healthcare prediction tasks.</a:t>
             </a:r>
           </a:p>
           <a:p>
-            <a:r>
-              <a:rPr lang="en-US" sz="1200" kern="1200" dirty="0">
-                <a:solidFill>
-                  <a:schemeClr val="tx1"/>
-                </a:solidFill>
-                <a:effectLst/>
-                <a:latin typeface="+mn-lt"/>
-                <a:ea typeface="+mn-ea"/>
-                <a:cs typeface="+mn-cs"/>
-              </a:rPr>
-              <a:t>The main limitations are that the analysis uses a single dataset, defines diabetes using diagnosis codes, and relies on a simple structured feature set. Because of these design choices, the project is intended for educational use and not for real clinical deployment. To replicate the work, a learner should first load the cohort file and then run the notebook cells in order. Following the notebook step by step should reproduce the same preprocessing, charts, metrics, and overall results.</a:t>
-            </a:r>
-          </a:p>
-          <a:p>
+            <a:pPr lvl="1">
+              <a:lnSpc>
+                <a:spcPct val="90000"/>
+              </a:lnSpc>
+              <a:buFont typeface="Wingdings" pitchFamily="2" charset="2"/>
+              <a:buChar char="v"/>
+            </a:pPr>
             <a:endParaRPr lang="en-US" dirty="0"/>
           </a:p>
         </p:txBody>
@@ -4317,6 +7676,247 @@
             <a:fld id="{BCD9374F-9954-F24E-8880-8CA162CE8CFB}" type="slidenum">
               <a:rPr lang="en-US" smtClean="0"/>
               <a:t>14</a:t>
+            </a:fld>
+            <a:endParaRPr lang="en-US"/>
+          </a:p>
+        </p:txBody>
+      </p:sp>
+    </p:spTree>
+    <p:extLst>
+      <p:ext uri="{BB962C8B-B14F-4D97-AF65-F5344CB8AC3E}">
+        <p14:creationId xmlns:p14="http://schemas.microsoft.com/office/powerpoint/2010/main" val="888484719"/>
+      </p:ext>
+    </p:extLst>
+  </p:cSld>
+  <p:clrMapOvr>
+    <a:masterClrMapping/>
+  </p:clrMapOvr>
+</p:notes>
+</file>
+
+<file path=ppt/notesSlides/notesSlide13.xml><?xml version="1.0" encoding="utf-8"?>
+<p:notes xmlns:a="http://schemas.openxmlformats.org/drawingml/2006/main" xmlns:r="http://schemas.openxmlformats.org/officeDocument/2006/relationships" xmlns:p="http://schemas.openxmlformats.org/presentationml/2006/main">
+  <p:cSld>
+    <p:spTree>
+      <p:nvGrpSpPr>
+        <p:cNvPr id="1" name="">
+          <a:extLst>
+            <a:ext uri="{FF2B5EF4-FFF2-40B4-BE49-F238E27FC236}">
+              <a16:creationId xmlns:a16="http://schemas.microsoft.com/office/drawing/2014/main" id="{FE7ECF79-FA1B-B856-7A14-78B4887C857A}"/>
+            </a:ext>
+          </a:extLst>
+        </p:cNvPr>
+        <p:cNvGrpSpPr/>
+        <p:nvPr/>
+      </p:nvGrpSpPr>
+      <p:grpSpPr>
+        <a:xfrm>
+          <a:off x="0" y="0"/>
+          <a:ext cx="0" cy="0"/>
+          <a:chOff x="0" y="0"/>
+          <a:chExt cx="0" cy="0"/>
+        </a:xfrm>
+      </p:grpSpPr>
+      <p:sp>
+        <p:nvSpPr>
+          <p:cNvPr id="2" name="Slide Image Placeholder 1">
+            <a:extLst>
+              <a:ext uri="{FF2B5EF4-FFF2-40B4-BE49-F238E27FC236}">
+                <a16:creationId xmlns:a16="http://schemas.microsoft.com/office/drawing/2014/main" id="{FE64DF1A-5832-6B03-B2D0-405FB62CF3AD}"/>
+              </a:ext>
+            </a:extLst>
+          </p:cNvPr>
+          <p:cNvSpPr>
+            <a:spLocks noGrp="1" noRot="1" noChangeAspect="1"/>
+          </p:cNvSpPr>
+          <p:nvPr>
+            <p:ph type="sldImg"/>
+          </p:nvPr>
+        </p:nvSpPr>
+        <p:spPr/>
+      </p:sp>
+      <p:sp>
+        <p:nvSpPr>
+          <p:cNvPr id="3" name="Notes Placeholder 2">
+            <a:extLst>
+              <a:ext uri="{FF2B5EF4-FFF2-40B4-BE49-F238E27FC236}">
+                <a16:creationId xmlns:a16="http://schemas.microsoft.com/office/drawing/2014/main" id="{47072FC8-5F38-88FF-9936-B4B8192D1D27}"/>
+              </a:ext>
+            </a:extLst>
+          </p:cNvPr>
+          <p:cNvSpPr>
+            <a:spLocks noGrp="1"/>
+          </p:cNvSpPr>
+          <p:nvPr>
+            <p:ph type="body" idx="1"/>
+          </p:nvPr>
+        </p:nvSpPr>
+        <p:spPr/>
+        <p:txBody>
+          <a:bodyPr/>
+          <a:lstStyle/>
+          <a:p>
+            <a:pPr lvl="1">
+              <a:lnSpc>
+                <a:spcPct val="90000"/>
+              </a:lnSpc>
+              <a:buFont typeface="Wingdings" pitchFamily="2" charset="2"/>
+              <a:buChar char="v"/>
+            </a:pPr>
+            <a:endParaRPr lang="en-US" dirty="0"/>
+          </a:p>
+        </p:txBody>
+      </p:sp>
+      <p:sp>
+        <p:nvSpPr>
+          <p:cNvPr id="4" name="Slide Number Placeholder 3">
+            <a:extLst>
+              <a:ext uri="{FF2B5EF4-FFF2-40B4-BE49-F238E27FC236}">
+                <a16:creationId xmlns:a16="http://schemas.microsoft.com/office/drawing/2014/main" id="{2C134F03-994C-DDEB-62D2-A92408974E7E}"/>
+              </a:ext>
+            </a:extLst>
+          </p:cNvPr>
+          <p:cNvSpPr>
+            <a:spLocks noGrp="1"/>
+          </p:cNvSpPr>
+          <p:nvPr>
+            <p:ph type="sldNum" sz="quarter" idx="5"/>
+          </p:nvPr>
+        </p:nvSpPr>
+        <p:spPr/>
+        <p:txBody>
+          <a:bodyPr/>
+          <a:lstStyle/>
+          <a:p>
+            <a:fld id="{BCD9374F-9954-F24E-8880-8CA162CE8CFB}" type="slidenum">
+              <a:rPr lang="en-US" smtClean="0"/>
+              <a:t>15</a:t>
+            </a:fld>
+            <a:endParaRPr lang="en-US"/>
+          </a:p>
+        </p:txBody>
+      </p:sp>
+    </p:spTree>
+    <p:extLst>
+      <p:ext uri="{BB962C8B-B14F-4D97-AF65-F5344CB8AC3E}">
+        <p14:creationId xmlns:p14="http://schemas.microsoft.com/office/powerpoint/2010/main" val="747372220"/>
+      </p:ext>
+    </p:extLst>
+  </p:cSld>
+  <p:clrMapOvr>
+    <a:masterClrMapping/>
+  </p:clrMapOvr>
+</p:notes>
+</file>
+
+<file path=ppt/notesSlides/notesSlide14.xml><?xml version="1.0" encoding="utf-8"?>
+<p:notes xmlns:a="http://schemas.openxmlformats.org/drawingml/2006/main" xmlns:r="http://schemas.openxmlformats.org/officeDocument/2006/relationships" xmlns:p="http://schemas.openxmlformats.org/presentationml/2006/main">
+  <p:cSld>
+    <p:spTree>
+      <p:nvGrpSpPr>
+        <p:cNvPr id="1" name=""/>
+        <p:cNvGrpSpPr/>
+        <p:nvPr/>
+      </p:nvGrpSpPr>
+      <p:grpSpPr>
+        <a:xfrm>
+          <a:off x="0" y="0"/>
+          <a:ext cx="0" cy="0"/>
+          <a:chOff x="0" y="0"/>
+          <a:chExt cx="0" cy="0"/>
+        </a:xfrm>
+      </p:grpSpPr>
+      <p:sp>
+        <p:nvSpPr>
+          <p:cNvPr id="2" name="Slide Image Placeholder 1"/>
+          <p:cNvSpPr>
+            <a:spLocks noGrp="1" noRot="1" noChangeAspect="1"/>
+          </p:cNvSpPr>
+          <p:nvPr>
+            <p:ph type="sldImg"/>
+          </p:nvPr>
+        </p:nvSpPr>
+        <p:spPr/>
+      </p:sp>
+      <p:sp>
+        <p:nvSpPr>
+          <p:cNvPr id="3" name="Notes Placeholder 2"/>
+          <p:cNvSpPr>
+            <a:spLocks noGrp="1"/>
+          </p:cNvSpPr>
+          <p:nvPr>
+            <p:ph type="body" idx="1"/>
+          </p:nvPr>
+        </p:nvSpPr>
+        <p:spPr/>
+        <p:txBody>
+          <a:bodyPr/>
+          <a:lstStyle/>
+          <a:p>
+            <a:r>
+              <a:rPr lang="en-US" sz="1200" kern="1200" dirty="0">
+                <a:solidFill>
+                  <a:schemeClr val="tx1"/>
+                </a:solidFill>
+                <a:effectLst/>
+                <a:latin typeface="+mn-lt"/>
+                <a:ea typeface="+mn-ea"/>
+                <a:cs typeface="+mn-cs"/>
+              </a:rPr>
+              <a:t> </a:t>
+            </a:r>
+          </a:p>
+          <a:p>
+            <a:r>
+              <a:rPr lang="en-US" sz="1200" kern="1200" dirty="0">
+                <a:solidFill>
+                  <a:schemeClr val="tx1"/>
+                </a:solidFill>
+                <a:effectLst/>
+                <a:latin typeface="+mn-lt"/>
+                <a:ea typeface="+mn-ea"/>
+                <a:cs typeface="+mn-cs"/>
+              </a:rPr>
+              <a:t>This slide explains both the limitations of the project and how another learner can reproduce it.</a:t>
+            </a:r>
+          </a:p>
+          <a:p>
+            <a:r>
+              <a:rPr lang="en-US" sz="1200" kern="1200" dirty="0">
+                <a:solidFill>
+                  <a:schemeClr val="tx1"/>
+                </a:solidFill>
+                <a:effectLst/>
+                <a:latin typeface="+mn-lt"/>
+                <a:ea typeface="+mn-ea"/>
+                <a:cs typeface="+mn-cs"/>
+              </a:rPr>
+              <a:t>The main limitations are that the analysis uses a single dataset, defines diabetes using diagnosis codes, and relies on a simple structured feature set. Because of these design choices, the project is intended for educational use and not for real clinical deployment. To replicate the work, a learner should first load the cohort file and then run the notebook cells in order. Following the notebook step by step should reproduce the same preprocessing, charts, metrics, and overall results.</a:t>
+            </a:r>
+          </a:p>
+          <a:p>
+            <a:endParaRPr lang="en-US" dirty="0"/>
+          </a:p>
+        </p:txBody>
+      </p:sp>
+      <p:sp>
+        <p:nvSpPr>
+          <p:cNvPr id="4" name="Slide Number Placeholder 3"/>
+          <p:cNvSpPr>
+            <a:spLocks noGrp="1"/>
+          </p:cNvSpPr>
+          <p:nvPr>
+            <p:ph type="sldNum" sz="quarter" idx="5"/>
+          </p:nvPr>
+        </p:nvSpPr>
+        <p:spPr/>
+        <p:txBody>
+          <a:bodyPr/>
+          <a:lstStyle/>
+          <a:p>
+            <a:fld id="{BCD9374F-9954-F24E-8880-8CA162CE8CFB}" type="slidenum">
+              <a:rPr lang="en-US" smtClean="0"/>
+              <a:t>16</a:t>
             </a:fld>
             <a:endParaRPr lang="en-US"/>
           </a:p>
@@ -4379,41 +7979,77 @@
           <a:bodyPr/>
           <a:lstStyle/>
           <a:p>
-            <a:pPr lvl="1">
-              <a:lnSpc>
-                <a:spcPct val="90000"/>
-              </a:lnSpc>
+            <a:pPr>
+              <a:spcBef>
+                <a:spcPct val="0"/>
+              </a:spcBef>
+              <a:spcAft>
+                <a:spcPts val="600"/>
+              </a:spcAft>
               <a:buFont typeface="Wingdings" pitchFamily="2" charset="2"/>
               <a:buChar char="v"/>
             </a:pPr>
             <a:r>
-              <a:rPr lang="en-US" sz="1800" dirty="0"/>
-              <a:t>Speaker notes: This project begins by identifying diabetic patients who were admitted to the ICU using MIMIC-III data.</a:t>
+              <a:rPr lang="en-US" sz="1200" dirty="0"/>
+              <a:t>Speaker notes:</a:t>
             </a:r>
-            <a:br>
-              <a:rPr lang="en-US" sz="1800" dirty="0"/>
-            </a:br>
-            <a:r>
-              <a:rPr lang="en-US" sz="1800" dirty="0"/>
-              <a:t>After selecting the cohort, the next step is to build structured features from demographic and admission-related variables. These features may include age, gender, admission type, insurance, ethnicity, and diagnosis counts. The goal is to use these structured inputs to train a machine learning model.</a:t>
-            </a:r>
-            <a:br>
-              <a:rPr lang="en-US" sz="1800" dirty="0"/>
-            </a:br>
-            <a:r>
-              <a:rPr lang="en-US" sz="1800" dirty="0"/>
-              <a:t>The final objective is to predict the ICU length-of-stay category for diabetic patients.</a:t>
-            </a:r>
-          </a:p>
-          <a:p>
-            <a:pPr lvl="1">
-              <a:lnSpc>
-                <a:spcPct val="90000"/>
-              </a:lnSpc>
+          </a:p>
+          <a:p>
+            <a:pPr>
+              <a:spcBef>
+                <a:spcPct val="0"/>
+              </a:spcBef>
+              <a:spcAft>
+                <a:spcPts val="600"/>
+              </a:spcAft>
               <a:buFont typeface="Wingdings" pitchFamily="2" charset="2"/>
               <a:buChar char="v"/>
             </a:pPr>
-            <a:endParaRPr lang="en-US" dirty="0"/>
+            <a:endParaRPr lang="en-US" sz="1200" dirty="0"/>
+          </a:p>
+          <a:p>
+            <a:pPr>
+              <a:spcBef>
+                <a:spcPct val="0"/>
+              </a:spcBef>
+              <a:spcAft>
+                <a:spcPts val="600"/>
+              </a:spcAft>
+              <a:buFont typeface="Wingdings" pitchFamily="2" charset="2"/>
+              <a:buChar char="v"/>
+            </a:pPr>
+            <a:r>
+              <a:rPr lang="en-US" dirty="0"/>
+              <a:t>Diabetes is a major contributor to hospitalization and critical care needs in many healthcare settings.</a:t>
+            </a:r>
+            <a:br>
+              <a:rPr lang="en-US" dirty="0"/>
+            </a:br>
+            <a:r>
+              <a:rPr lang="en-US" dirty="0"/>
+              <a:t>Patients with diabetes in the ICU often require more complex management because of complications and comorbidities.</a:t>
+            </a:r>
+            <a:br>
+              <a:rPr lang="en-US" dirty="0"/>
+            </a:br>
+            <a:r>
+              <a:rPr lang="en-US" dirty="0"/>
+              <a:t>This added complexity can influence treatment decisions, monitoring needs, and overall recovery time.</a:t>
+            </a:r>
+            <a:br>
+              <a:rPr lang="en-US" dirty="0"/>
+            </a:br>
+            <a:r>
+              <a:rPr lang="en-US" dirty="0"/>
+              <a:t>Predicting length of stay is important because it can help hospitals improve staffing and bed planning.</a:t>
+            </a:r>
+            <a:br>
+              <a:rPr lang="en-US" dirty="0"/>
+            </a:br>
+            <a:r>
+              <a:rPr lang="en-US" dirty="0"/>
+              <a:t>It can also support better resource allocation and care planning for diabetic ICU patients.</a:t>
+            </a:r>
           </a:p>
         </p:txBody>
       </p:sp>
@@ -4443,7 +8079,7 @@
     </p:spTree>
     <p:extLst>
       <p:ext uri="{BB962C8B-B14F-4D97-AF65-F5344CB8AC3E}">
-        <p14:creationId xmlns:p14="http://schemas.microsoft.com/office/powerpoint/2010/main" val="31195674"/>
+        <p14:creationId xmlns:p14="http://schemas.microsoft.com/office/powerpoint/2010/main" val="3564164512"/>
       </p:ext>
     </p:extLst>
   </p:cSld>
@@ -4498,51 +8134,36 @@
           <a:lstStyle/>
           <a:p>
             <a:pPr lvl="1">
+              <a:lnSpc>
+                <a:spcPct val="90000"/>
+              </a:lnSpc>
               <a:buFont typeface="Wingdings" pitchFamily="2" charset="2"/>
               <a:buChar char="v"/>
             </a:pPr>
             <a:r>
-              <a:rPr lang="en-US" sz="1700" dirty="0"/>
-              <a:t>Speaker notes:</a:t>
+              <a:rPr lang="en-US" sz="1800" dirty="0"/>
+              <a:t>Speaker notes: This project begins by identifying diabetic patients who were admitted to the ICU using MIMIC-III data.</a:t>
             </a:r>
-          </a:p>
-          <a:p>
+            <a:br>
+              <a:rPr lang="en-US" sz="1800" dirty="0"/>
+            </a:br>
             <a:r>
-              <a:rPr lang="en-US" sz="1200" kern="1200" dirty="0">
-                <a:solidFill>
-                  <a:schemeClr val="tx1"/>
-                </a:solidFill>
-                <a:effectLst/>
-                <a:latin typeface="+mn-lt"/>
-                <a:ea typeface="+mn-ea"/>
-                <a:cs typeface="+mn-cs"/>
-              </a:rPr>
-              <a:t>This slide presents the main research question for the project. The goal is to determine whether structured MIMIC-III data can predict ICU length-of-stay category for diabetic patients.</a:t>
+              <a:rPr lang="en-US" sz="1800" dirty="0"/>
+              <a:t>After selecting the cohort, the next step is to build structured features from demographic and admission-related variables. These features may include age, gender, admission type, insurance, ethnicity, and diagnosis counts. The goal is to use these structured inputs to train a machine learning model.</a:t>
             </a:r>
-          </a:p>
-          <a:p>
+            <a:br>
+              <a:rPr lang="en-US" sz="1800" dirty="0"/>
+            </a:br>
             <a:r>
-              <a:rPr lang="en-US" sz="1200" kern="1200" dirty="0">
-                <a:solidFill>
-                  <a:schemeClr val="tx1"/>
-                </a:solidFill>
-                <a:effectLst/>
-                <a:latin typeface="+mn-lt"/>
-                <a:ea typeface="+mn-ea"/>
-                <a:cs typeface="+mn-cs"/>
-              </a:rPr>
-              <a:t>Instead of predicting an exact number of days, the outcome is grouped into short, medium, and long stay categories. This makes the problem a multiclass classification task that is easier to model and explain. It also helps demonstrate how structured hospital data can be used for practical healthcare prediction.</a:t>
+              <a:rPr lang="en-US" sz="1800" dirty="0"/>
+              <a:t>The final objective is to predict the ICU length-of-stay category for diabetic patients.</a:t>
             </a:r>
           </a:p>
           <a:p>
             <a:pPr lvl="1">
-              <a:buFont typeface="Wingdings" pitchFamily="2" charset="2"/>
-              <a:buChar char="v"/>
-            </a:pPr>
-            <a:endParaRPr lang="en-US" sz="1700" dirty="0"/>
-          </a:p>
-          <a:p>
-            <a:pPr lvl="1">
+              <a:lnSpc>
+                <a:spcPct val="90000"/>
+              </a:lnSpc>
               <a:buFont typeface="Wingdings" pitchFamily="2" charset="2"/>
               <a:buChar char="v"/>
             </a:pPr>
@@ -4576,6 +8197,139 @@
     </p:spTree>
     <p:extLst>
       <p:ext uri="{BB962C8B-B14F-4D97-AF65-F5344CB8AC3E}">
+        <p14:creationId xmlns:p14="http://schemas.microsoft.com/office/powerpoint/2010/main" val="31195674"/>
+      </p:ext>
+    </p:extLst>
+  </p:cSld>
+  <p:clrMapOvr>
+    <a:masterClrMapping/>
+  </p:clrMapOvr>
+</p:notes>
+</file>
+
+<file path=ppt/notesSlides/notesSlide4.xml><?xml version="1.0" encoding="utf-8"?>
+<p:notes xmlns:a="http://schemas.openxmlformats.org/drawingml/2006/main" xmlns:r="http://schemas.openxmlformats.org/officeDocument/2006/relationships" xmlns:p="http://schemas.openxmlformats.org/presentationml/2006/main">
+  <p:cSld>
+    <p:spTree>
+      <p:nvGrpSpPr>
+        <p:cNvPr id="1" name=""/>
+        <p:cNvGrpSpPr/>
+        <p:nvPr/>
+      </p:nvGrpSpPr>
+      <p:grpSpPr>
+        <a:xfrm>
+          <a:off x="0" y="0"/>
+          <a:ext cx="0" cy="0"/>
+          <a:chOff x="0" y="0"/>
+          <a:chExt cx="0" cy="0"/>
+        </a:xfrm>
+      </p:grpSpPr>
+      <p:sp>
+        <p:nvSpPr>
+          <p:cNvPr id="2" name="Slide Image Placeholder 1"/>
+          <p:cNvSpPr>
+            <a:spLocks noGrp="1" noRot="1" noChangeAspect="1"/>
+          </p:cNvSpPr>
+          <p:nvPr>
+            <p:ph type="sldImg"/>
+          </p:nvPr>
+        </p:nvSpPr>
+        <p:spPr/>
+      </p:sp>
+      <p:sp>
+        <p:nvSpPr>
+          <p:cNvPr id="3" name="Notes Placeholder 2"/>
+          <p:cNvSpPr>
+            <a:spLocks noGrp="1"/>
+          </p:cNvSpPr>
+          <p:nvPr>
+            <p:ph type="body" idx="1"/>
+          </p:nvPr>
+        </p:nvSpPr>
+        <p:spPr/>
+        <p:txBody>
+          <a:bodyPr/>
+          <a:lstStyle/>
+          <a:p>
+            <a:pPr lvl="1">
+              <a:buFont typeface="Wingdings" pitchFamily="2" charset="2"/>
+              <a:buChar char="v"/>
+            </a:pPr>
+            <a:r>
+              <a:rPr lang="en-US" sz="1700" dirty="0"/>
+              <a:t>Speaker notes:</a:t>
+            </a:r>
+          </a:p>
+          <a:p>
+            <a:r>
+              <a:rPr lang="en-US" sz="1200" kern="1200" dirty="0">
+                <a:solidFill>
+                  <a:schemeClr val="tx1"/>
+                </a:solidFill>
+                <a:effectLst/>
+                <a:latin typeface="+mn-lt"/>
+                <a:ea typeface="+mn-ea"/>
+                <a:cs typeface="+mn-cs"/>
+              </a:rPr>
+              <a:t>This slide presents the main research question for the project. The goal is to determine whether structured MIMIC-III data can predict ICU length-of-stay category for diabetic patients.</a:t>
+            </a:r>
+          </a:p>
+          <a:p>
+            <a:r>
+              <a:rPr lang="en-US" sz="1200" kern="1200" dirty="0">
+                <a:solidFill>
+                  <a:schemeClr val="tx1"/>
+                </a:solidFill>
+                <a:effectLst/>
+                <a:latin typeface="+mn-lt"/>
+                <a:ea typeface="+mn-ea"/>
+                <a:cs typeface="+mn-cs"/>
+              </a:rPr>
+              <a:t>Instead of predicting an exact number of days, the outcome is grouped into short, medium, and long stay categories. This makes the problem a multiclass classification task that is easier to model and explain. It also helps demonstrate how structured hospital data can be used for practical healthcare prediction.</a:t>
+            </a:r>
+          </a:p>
+          <a:p>
+            <a:pPr lvl="1">
+              <a:buFont typeface="Wingdings" pitchFamily="2" charset="2"/>
+              <a:buChar char="v"/>
+            </a:pPr>
+            <a:endParaRPr lang="en-US" sz="1700" dirty="0"/>
+          </a:p>
+          <a:p>
+            <a:pPr lvl="1">
+              <a:buFont typeface="Wingdings" pitchFamily="2" charset="2"/>
+              <a:buChar char="v"/>
+            </a:pPr>
+            <a:endParaRPr lang="en-US" dirty="0"/>
+          </a:p>
+        </p:txBody>
+      </p:sp>
+      <p:sp>
+        <p:nvSpPr>
+          <p:cNvPr id="4" name="Slide Number Placeholder 3"/>
+          <p:cNvSpPr>
+            <a:spLocks noGrp="1"/>
+          </p:cNvSpPr>
+          <p:nvPr>
+            <p:ph type="sldNum" sz="quarter" idx="5"/>
+          </p:nvPr>
+        </p:nvSpPr>
+        <p:spPr/>
+        <p:txBody>
+          <a:bodyPr/>
+          <a:lstStyle/>
+          <a:p>
+            <a:fld id="{BCD9374F-9954-F24E-8880-8CA162CE8CFB}" type="slidenum">
+              <a:rPr lang="en-US" smtClean="0"/>
+              <a:t>6</a:t>
+            </a:fld>
+            <a:endParaRPr lang="en-US"/>
+          </a:p>
+        </p:txBody>
+      </p:sp>
+    </p:spTree>
+    <p:extLst>
+      <p:ext uri="{BB962C8B-B14F-4D97-AF65-F5344CB8AC3E}">
         <p14:creationId xmlns:p14="http://schemas.microsoft.com/office/powerpoint/2010/main" val="4083069444"/>
       </p:ext>
     </p:extLst>
@@ -4586,7 +8340,7 @@
 </p:notes>
 </file>
 
-<file path=ppt/notesSlides/notesSlide4.xml><?xml version="1.0" encoding="utf-8"?>
+<file path=ppt/notesSlides/notesSlide5.xml><?xml version="1.0" encoding="utf-8"?>
 <p:notes xmlns:a="http://schemas.openxmlformats.org/drawingml/2006/main" xmlns:r="http://schemas.openxmlformats.org/officeDocument/2006/relationships" xmlns:p="http://schemas.openxmlformats.org/presentationml/2006/main">
   <p:cSld>
     <p:spTree>
@@ -4745,7 +8499,7 @@
           <a:p>
             <a:fld id="{BCD9374F-9954-F24E-8880-8CA162CE8CFB}" type="slidenum">
               <a:rPr lang="en-US" smtClean="0"/>
-              <a:t>6</a:t>
+              <a:t>7</a:t>
             </a:fld>
             <a:endParaRPr lang="en-US"/>
           </a:p>
@@ -4755,138 +8509,6 @@
     <p:extLst>
       <p:ext uri="{BB962C8B-B14F-4D97-AF65-F5344CB8AC3E}">
         <p14:creationId xmlns:p14="http://schemas.microsoft.com/office/powerpoint/2010/main" val="1950388806"/>
-      </p:ext>
-    </p:extLst>
-  </p:cSld>
-  <p:clrMapOvr>
-    <a:masterClrMapping/>
-  </p:clrMapOvr>
-</p:notes>
-</file>
-
-<file path=ppt/notesSlides/notesSlide5.xml><?xml version="1.0" encoding="utf-8"?>
-<p:notes xmlns:a="http://schemas.openxmlformats.org/drawingml/2006/main" xmlns:r="http://schemas.openxmlformats.org/officeDocument/2006/relationships" xmlns:p="http://schemas.openxmlformats.org/presentationml/2006/main">
-  <p:cSld>
-    <p:spTree>
-      <p:nvGrpSpPr>
-        <p:cNvPr id="1" name=""/>
-        <p:cNvGrpSpPr/>
-        <p:nvPr/>
-      </p:nvGrpSpPr>
-      <p:grpSpPr>
-        <a:xfrm>
-          <a:off x="0" y="0"/>
-          <a:ext cx="0" cy="0"/>
-          <a:chOff x="0" y="0"/>
-          <a:chExt cx="0" cy="0"/>
-        </a:xfrm>
-      </p:grpSpPr>
-      <p:sp>
-        <p:nvSpPr>
-          <p:cNvPr id="2" name="Slide Image Placeholder 1"/>
-          <p:cNvSpPr>
-            <a:spLocks noGrp="1" noRot="1" noChangeAspect="1"/>
-          </p:cNvSpPr>
-          <p:nvPr>
-            <p:ph type="sldImg"/>
-          </p:nvPr>
-        </p:nvSpPr>
-        <p:spPr/>
-      </p:sp>
-      <p:sp>
-        <p:nvSpPr>
-          <p:cNvPr id="3" name="Notes Placeholder 2"/>
-          <p:cNvSpPr>
-            <a:spLocks noGrp="1"/>
-          </p:cNvSpPr>
-          <p:nvPr>
-            <p:ph type="body" idx="1"/>
-          </p:nvPr>
-        </p:nvSpPr>
-        <p:spPr/>
-        <p:txBody>
-          <a:bodyPr/>
-          <a:lstStyle/>
-          <a:p>
-            <a:pPr lvl="1">
-              <a:lnSpc>
-                <a:spcPct val="90000"/>
-              </a:lnSpc>
-              <a:buFont typeface="Wingdings" pitchFamily="2" charset="2"/>
-              <a:buChar char="v"/>
-            </a:pPr>
-            <a:r>
-              <a:rPr lang="en-US" sz="1300" dirty="0"/>
-              <a:t>Speaker notes:</a:t>
-            </a:r>
-          </a:p>
-          <a:p>
-            <a:r>
-              <a:rPr lang="en-US" sz="1200" kern="1200" dirty="0">
-                <a:solidFill>
-                  <a:schemeClr val="tx1"/>
-                </a:solidFill>
-                <a:effectLst/>
-                <a:latin typeface="+mn-lt"/>
-                <a:ea typeface="+mn-ea"/>
-                <a:cs typeface="+mn-cs"/>
-              </a:rPr>
-              <a:t> </a:t>
-            </a:r>
-          </a:p>
-          <a:p>
-            <a:r>
-              <a:rPr lang="en-US" sz="1200" kern="1200" dirty="0">
-                <a:solidFill>
-                  <a:schemeClr val="tx1"/>
-                </a:solidFill>
-                <a:effectLst/>
-                <a:latin typeface="+mn-lt"/>
-                <a:ea typeface="+mn-ea"/>
-                <a:cs typeface="+mn-cs"/>
-              </a:rPr>
-              <a:t>These are the main structured features used in the model. Age at ICU admission captures the patient’s age at the time of critical care. Gender, admission type, insurance, and ethnicity provide demographic and hospital-related context. The number of diagnoses is included as a simple measure of overall illness complexity. Together, these features help the model predict ICU length-of-stay category for diabetic patients.</a:t>
-            </a:r>
-          </a:p>
-          <a:p>
-            <a:pPr lvl="1">
-              <a:lnSpc>
-                <a:spcPct val="90000"/>
-              </a:lnSpc>
-              <a:buFont typeface="Wingdings" pitchFamily="2" charset="2"/>
-              <a:buChar char="v"/>
-            </a:pPr>
-            <a:endParaRPr lang="en-US" dirty="0"/>
-          </a:p>
-        </p:txBody>
-      </p:sp>
-      <p:sp>
-        <p:nvSpPr>
-          <p:cNvPr id="4" name="Slide Number Placeholder 3"/>
-          <p:cNvSpPr>
-            <a:spLocks noGrp="1"/>
-          </p:cNvSpPr>
-          <p:nvPr>
-            <p:ph type="sldNum" sz="quarter" idx="5"/>
-          </p:nvPr>
-        </p:nvSpPr>
-        <p:spPr/>
-        <p:txBody>
-          <a:bodyPr/>
-          <a:lstStyle/>
-          <a:p>
-            <a:fld id="{BCD9374F-9954-F24E-8880-8CA162CE8CFB}" type="slidenum">
-              <a:rPr lang="en-US" smtClean="0"/>
-              <a:t>7</a:t>
-            </a:fld>
-            <a:endParaRPr lang="en-US"/>
-          </a:p>
-        </p:txBody>
-      </p:sp>
-    </p:spTree>
-    <p:extLst>
-      <p:ext uri="{BB962C8B-B14F-4D97-AF65-F5344CB8AC3E}">
-        <p14:creationId xmlns:p14="http://schemas.microsoft.com/office/powerpoint/2010/main" val="3082463949"/>
       </p:ext>
     </p:extLst>
   </p:cSld>
@@ -4940,43 +8562,19 @@
           <a:bodyPr/>
           <a:lstStyle/>
           <a:p>
-            <a:pPr marL="457200" marR="0" lvl="1" indent="0" algn="l" defTabSz="914400" rtl="0" eaLnBrk="1" fontAlgn="auto" latinLnBrk="0" hangingPunct="1">
+            <a:pPr lvl="1">
               <a:lnSpc>
                 <a:spcPct val="90000"/>
               </a:lnSpc>
-              <a:spcBef>
-                <a:spcPts val="0"/>
-              </a:spcBef>
-              <a:spcAft>
-                <a:spcPts val="0"/>
-              </a:spcAft>
-              <a:buClrTx/>
-              <a:buSzTx/>
               <a:buFont typeface="Wingdings" pitchFamily="2" charset="2"/>
               <a:buChar char="v"/>
-              <a:tabLst/>
-              <a:defRPr/>
             </a:pPr>
             <a:r>
-              <a:rPr lang="en-US" sz="1700" dirty="0"/>
-              <a:t>Speaker </a:t>
+              <a:rPr lang="en-US" sz="1300" dirty="0"/>
+              <a:t>Speaker notes:</a:t>
             </a:r>
-            <a:r>
-              <a:rPr lang="en-US" sz="1700" dirty="0" err="1"/>
-              <a:t>notes:</a:t>
-            </a:r>
-            <a:r>
-              <a:rPr lang="en-US" sz="1200" kern="1200" dirty="0" err="1">
-                <a:solidFill>
-                  <a:schemeClr val="tx1"/>
-                </a:solidFill>
-                <a:effectLst/>
-                <a:latin typeface="+mn-lt"/>
-                <a:ea typeface="+mn-ea"/>
-                <a:cs typeface="+mn-cs"/>
-              </a:rPr>
-              <a:t>The</a:t>
-            </a:r>
+          </a:p>
+          <a:p>
             <a:r>
               <a:rPr lang="en-US" sz="1200" kern="1200" dirty="0">
                 <a:solidFill>
@@ -4987,7 +8585,21 @@
                 <a:ea typeface="+mn-ea"/>
                 <a:cs typeface="+mn-cs"/>
               </a:rPr>
-              <a:t> target variable in this project is ICU length of stay. To make the prediction task easier to model, length of stay is divided into three categories. A short stay is defined as less than 2 days, a medium stay is 2 to 7 days, and a long stay is more than 7 days. This converts the problem from predicting an exact number of days into a multiclass classification task. These categories make the results easier to interpret and explain in a tutorial setting.</a:t>
+              <a:t> </a:t>
+            </a:r>
+          </a:p>
+          <a:p>
+            <a:r>
+              <a:rPr lang="en-US" sz="1200" kern="1200" dirty="0">
+                <a:solidFill>
+                  <a:schemeClr val="tx1"/>
+                </a:solidFill>
+                <a:effectLst/>
+                <a:latin typeface="+mn-lt"/>
+                <a:ea typeface="+mn-ea"/>
+                <a:cs typeface="+mn-cs"/>
+              </a:rPr>
+              <a:t>These are the main structured features used in the model. Age at ICU admission captures the patient’s age at the time of critical care. Gender, admission type, insurance, and ethnicity provide demographic and hospital-related context. The number of diagnoses is included as a simple measure of overall illness complexity. Together, these features help the model predict ICU length-of-stay category for diabetic patients.</a:t>
             </a:r>
           </a:p>
           <a:p>
@@ -5028,7 +8640,7 @@
     </p:spTree>
     <p:extLst>
       <p:ext uri="{BB962C8B-B14F-4D97-AF65-F5344CB8AC3E}">
-        <p14:creationId xmlns:p14="http://schemas.microsoft.com/office/powerpoint/2010/main" val="334947105"/>
+        <p14:creationId xmlns:p14="http://schemas.microsoft.com/office/powerpoint/2010/main" val="3082463949"/>
       </p:ext>
     </p:extLst>
   </p:cSld>
@@ -5082,26 +8694,9 @@
           <a:bodyPr/>
           <a:lstStyle/>
           <a:p>
-            <a:pPr lvl="1">
-              <a:buFont typeface="Wingdings" pitchFamily="2" charset="2"/>
-              <a:buChar char="v"/>
-            </a:pPr>
-            <a:r>
-              <a:rPr lang="en-US" sz="1700" dirty="0"/>
-              <a:t>Speaker notes:</a:t>
-            </a:r>
-          </a:p>
-          <a:p>
-            <a:pPr lvl="1">
-              <a:buFont typeface="Wingdings" pitchFamily="2" charset="2"/>
-              <a:buChar char="v"/>
-            </a:pPr>
-            <a:endParaRPr lang="en-US" sz="1700" dirty="0"/>
-          </a:p>
-          <a:p>
             <a:pPr marL="457200" marR="0" lvl="1" indent="0" algn="l" defTabSz="914400" rtl="0" eaLnBrk="1" fontAlgn="auto" latinLnBrk="0" hangingPunct="1">
               <a:lnSpc>
-                <a:spcPct val="100000"/>
+                <a:spcPct val="90000"/>
               </a:lnSpc>
               <a:spcBef>
                 <a:spcPts val="0"/>
@@ -5117,6 +8712,26 @@
               <a:defRPr/>
             </a:pPr>
             <a:r>
+              <a:rPr lang="en-US" sz="1700" dirty="0"/>
+              <a:t>Speaker </a:t>
+            </a:r>
+            <a:r>
+              <a:rPr lang="en-US" sz="1700" dirty="0" err="1"/>
+              <a:t>notes:</a:t>
+            </a:r>
+            <a:r>
+              <a:rPr lang="en-US" sz="1200" kern="1200" dirty="0" err="1">
+                <a:solidFill>
+                  <a:schemeClr val="tx1"/>
+                </a:solidFill>
+                <a:effectLst/>
+                <a:latin typeface="+mn-lt"/>
+                <a:ea typeface="+mn-ea"/>
+                <a:cs typeface="+mn-cs"/>
+              </a:rPr>
+              <a:t>The</a:t>
+            </a:r>
+            <a:r>
               <a:rPr lang="en-US" sz="1200" kern="1200" dirty="0">
                 <a:solidFill>
                   <a:schemeClr val="tx1"/>
@@ -5126,11 +8741,14 @@
                 <a:ea typeface="+mn-ea"/>
                 <a:cs typeface="+mn-cs"/>
               </a:rPr>
-              <a:t>This slide summarizes the main steps in the machine learning pipeline. The dataset is first divided into training and test sets so model performance can be evaluated fairly. Missing values are handled with imputation, categorical variables are transformed using one-hot encoding, and numeric features are scaled when needed. After preprocessing, Logistic Regression is used as a baseline model and Random Forest is used as a more flexible model. Comparing these models helps show how different machine learning methods perform on the same healthcare prediction task.</a:t>
+              <a:t> target variable in this project is ICU length of stay. To make the prediction task easier to model, length of stay is divided into three categories. A short stay is defined as less than 2 days, a medium stay is 2 to 7 days, and a long stay is more than 7 days. This converts the problem from predicting an exact number of days into a multiclass classification task. These categories make the results easier to interpret and explain in a tutorial setting.</a:t>
             </a:r>
           </a:p>
           <a:p>
             <a:pPr lvl="1">
+              <a:lnSpc>
+                <a:spcPct val="90000"/>
+              </a:lnSpc>
               <a:buFont typeface="Wingdings" pitchFamily="2" charset="2"/>
               <a:buChar char="v"/>
             </a:pPr>
@@ -5164,7 +8782,7 @@
     </p:spTree>
     <p:extLst>
       <p:ext uri="{BB962C8B-B14F-4D97-AF65-F5344CB8AC3E}">
-        <p14:creationId xmlns:p14="http://schemas.microsoft.com/office/powerpoint/2010/main" val="514517786"/>
+        <p14:creationId xmlns:p14="http://schemas.microsoft.com/office/powerpoint/2010/main" val="334947105"/>
       </p:ext>
     </p:extLst>
   </p:cSld>
@@ -5223,7 +8841,7 @@
               <a:buChar char="v"/>
             </a:pPr>
             <a:r>
-              <a:rPr lang="en-US" sz="1600" dirty="0"/>
+              <a:rPr lang="en-US" sz="1700" dirty="0"/>
               <a:t>Speaker notes:</a:t>
             </a:r>
           </a:p>
@@ -5232,9 +8850,26 @@
               <a:buFont typeface="Wingdings" pitchFamily="2" charset="2"/>
               <a:buChar char="v"/>
             </a:pPr>
-            <a:endParaRPr lang="en-US" sz="1600" dirty="0"/>
-          </a:p>
-          <a:p>
+            <a:endParaRPr lang="en-US" sz="1700" dirty="0"/>
+          </a:p>
+          <a:p>
+            <a:pPr marL="457200" marR="0" lvl="1" indent="0" algn="l" defTabSz="914400" rtl="0" eaLnBrk="1" fontAlgn="auto" latinLnBrk="0" hangingPunct="1">
+              <a:lnSpc>
+                <a:spcPct val="100000"/>
+              </a:lnSpc>
+              <a:spcBef>
+                <a:spcPts val="0"/>
+              </a:spcBef>
+              <a:spcAft>
+                <a:spcPts val="0"/>
+              </a:spcAft>
+              <a:buClrTx/>
+              <a:buSzTx/>
+              <a:buFont typeface="Wingdings" pitchFamily="2" charset="2"/>
+              <a:buChar char="v"/>
+              <a:tabLst/>
+              <a:defRPr/>
+            </a:pPr>
             <a:r>
               <a:rPr lang="en-US" sz="1200" kern="1200" dirty="0">
                 <a:solidFill>
@@ -5245,35 +8880,7 @@
                 <a:ea typeface="+mn-ea"/>
                 <a:cs typeface="+mn-cs"/>
               </a:rPr>
-              <a:t>This slide presents the performance of the baseline Logistic Regression model. Accuracy shows the overall proportion of correct predictions made by the model. Precision, recall, and F1-score help evaluate how well the model performs across the short, medium, and long stay classes.</a:t>
-            </a:r>
-          </a:p>
-          <a:p>
-            <a:r>
-              <a:rPr lang="en-US" sz="1200" kern="1200" dirty="0">
-                <a:solidFill>
-                  <a:schemeClr val="tx1"/>
-                </a:solidFill>
-                <a:effectLst/>
-                <a:latin typeface="+mn-lt"/>
-                <a:ea typeface="+mn-ea"/>
-                <a:cs typeface="+mn-cs"/>
-              </a:rPr>
-              <a:t>The confusion matrix gives a visual summary of correct classifications and misclassifications.</a:t>
-            </a:r>
-          </a:p>
-          <a:p>
-            <a:r>
-              <a:rPr lang="en-US" sz="1200" kern="1200" dirty="0">
-                <a:solidFill>
-                  <a:schemeClr val="tx1"/>
-                </a:solidFill>
-                <a:effectLst/>
-                <a:latin typeface="+mn-lt"/>
-                <a:ea typeface="+mn-ea"/>
-                <a:cs typeface="+mn-cs"/>
-              </a:rPr>
-              <a:t>These results provide a baseline for comparing Logistic Regression with the Random Forest model.</a:t>
+              <a:t>This slide summarizes the main steps in the machine learning pipeline. The dataset is first divided into training and test sets so model performance can be evaluated fairly. Missing values are handled with imputation, categorical variables are transformed using one-hot encoding, and numeric features are scaled when needed. After preprocessing, Logistic Regression is used as a baseline model and Random Forest is used as a more flexible model. Comparing these models helps show how different machine learning methods perform on the same healthcare prediction task.</a:t>
             </a:r>
           </a:p>
           <a:p>
@@ -5311,7 +8918,7 @@
     </p:spTree>
     <p:extLst>
       <p:ext uri="{BB962C8B-B14F-4D97-AF65-F5344CB8AC3E}">
-        <p14:creationId xmlns:p14="http://schemas.microsoft.com/office/powerpoint/2010/main" val="4282270121"/>
+        <p14:creationId xmlns:p14="http://schemas.microsoft.com/office/powerpoint/2010/main" val="514517786"/>
       </p:ext>
     </p:extLst>
   </p:cSld>
@@ -5365,8 +8972,9 @@
           <a:bodyPr/>
           <a:lstStyle/>
           <a:p>
-            <a:pPr marL="457200" lvl="1" indent="0">
-              <a:buNone/>
+            <a:pPr lvl="1">
+              <a:buFont typeface="Wingdings" pitchFamily="2" charset="2"/>
+              <a:buChar char="v"/>
             </a:pPr>
             <a:r>
               <a:rPr lang="en-US" sz="1600" dirty="0"/>
@@ -5374,44 +8982,21 @@
             </a:r>
           </a:p>
           <a:p>
-            <a:pPr marL="457200" lvl="1" indent="0">
-              <a:buNone/>
+            <a:pPr lvl="1">
+              <a:buFont typeface="Wingdings" pitchFamily="2" charset="2"/>
+              <a:buChar char="v"/>
             </a:pPr>
             <a:endParaRPr lang="en-US" sz="1600" dirty="0"/>
           </a:p>
           <a:p>
+            <a:pPr lvl="1">
+              <a:buFont typeface="Wingdings" pitchFamily="2" charset="2"/>
+              <a:buChar char="v"/>
+            </a:pPr>
             <a:r>
-              <a:rPr lang="en-US" sz="1200" kern="1200" dirty="0">
-                <a:solidFill>
-                  <a:schemeClr val="tx1"/>
-                </a:solidFill>
-                <a:effectLst/>
-                <a:latin typeface="+mn-lt"/>
-                <a:ea typeface="+mn-ea"/>
-                <a:cs typeface="+mn-cs"/>
-              </a:rPr>
-              <a:t>This slide shows the evaluation results for the Random Forest model, which is the tree-based approach used in this project. Accuracy measures the overall percentage of correct predictions across the ICU length-of-stay categories. Precision, recall, and F1-score provide a more complete view of how well the model performs for each class. The confusion matrix helps visualize where the Random Forest model predicts correctly and where misclassifications occur.</a:t>
+              <a:rPr lang="en-US" dirty="0"/>
+              <a:t>Logistic Regression serves as the baseline model. It performs moderately, but struggles more than Random Forest, especially on the harder long-stay cases</a:t>
             </a:r>
-          </a:p>
-          <a:p>
-            <a:r>
-              <a:rPr lang="en-US" sz="1200" kern="1200" dirty="0">
-                <a:solidFill>
-                  <a:schemeClr val="tx1"/>
-                </a:solidFill>
-                <a:effectLst/>
-                <a:latin typeface="+mn-lt"/>
-                <a:ea typeface="+mn-ea"/>
-                <a:cs typeface="+mn-cs"/>
-              </a:rPr>
-              <a:t>Comparing these results with Logistic Regression helps determine whether the tree-based model performs better on this task.</a:t>
-            </a:r>
-          </a:p>
-          <a:p>
-            <a:pPr marL="457200" lvl="1" indent="0">
-              <a:buNone/>
-            </a:pPr>
-            <a:endParaRPr lang="en-US" dirty="0"/>
           </a:p>
         </p:txBody>
       </p:sp>
@@ -5441,7 +9026,7 @@
     </p:spTree>
     <p:extLst>
       <p:ext uri="{BB962C8B-B14F-4D97-AF65-F5344CB8AC3E}">
-        <p14:creationId xmlns:p14="http://schemas.microsoft.com/office/powerpoint/2010/main" val="2303810035"/>
+        <p14:creationId xmlns:p14="http://schemas.microsoft.com/office/powerpoint/2010/main" val="4282270121"/>
       </p:ext>
     </p:extLst>
   </p:cSld>
@@ -8498,13 +12083,13 @@
         </p:nvSpPr>
         <p:spPr>
           <a:xfrm>
-            <a:off x="3973321" y="640080"/>
-            <a:ext cx="4688333" cy="3566160"/>
+            <a:off x="3493009" y="640080"/>
+            <a:ext cx="5650992" cy="3566160"/>
           </a:xfrm>
         </p:spPr>
         <p:txBody>
           <a:bodyPr anchor="b">
-            <a:normAutofit fontScale="90000"/>
+            <a:normAutofit/>
           </a:bodyPr>
           <a:lstStyle/>
           <a:p>
@@ -8514,57 +12099,20 @@
               </a:lnSpc>
             </a:pPr>
             <a:r>
-              <a:rPr lang="en-US" sz="4700" b="1" i="1" dirty="0">
-                <a:latin typeface="Calibri" pitchFamily="34" charset="0"/>
-                <a:cs typeface="Calibri" pitchFamily="34" charset="-120"/>
-              </a:rPr>
-              <a:t>Predicting ICU Length of Stay in Diabetic Patients Using MIMIC-III and Machine Learning</a:t>
+              <a:rPr lang="en-US" sz="4800" dirty="0"/>
+              <a:t>Self-Learning Tutorial for Homework 4</a:t>
             </a:r>
-          </a:p>
-        </p:txBody>
-      </p:sp>
-      <p:sp>
-        <p:nvSpPr>
-          <p:cNvPr id="3" name="Subtitle 2"/>
-          <p:cNvSpPr>
-            <a:spLocks noGrp="1"/>
-          </p:cNvSpPr>
-          <p:nvPr>
-            <p:ph type="subTitle" idx="1"/>
-          </p:nvPr>
-        </p:nvSpPr>
-        <p:spPr>
-          <a:xfrm>
-            <a:off x="3973320" y="4636008"/>
-            <a:ext cx="4688333" cy="1572768"/>
-          </a:xfrm>
-        </p:spPr>
-        <p:txBody>
-          <a:bodyPr>
-            <a:normAutofit/>
-          </a:bodyPr>
-          <a:lstStyle/>
-          <a:p>
-            <a:pPr algn="l">
-              <a:lnSpc>
-                <a:spcPct val="90000"/>
-              </a:lnSpc>
-            </a:pPr>
+            <a:br>
+              <a:rPr lang="en-US" sz="4800" dirty="0"/>
+            </a:br>
             <a:r>
-              <a:rPr lang="en-US" sz="2500" i="1" dirty="0"/>
-              <a:t>Healthcare Research &amp; Quality Improvement Study</a:t>
+              <a:rPr lang="en-US" sz="4800" dirty="0"/>
+              <a:t>Healthcare Machine Learning using MIMIC-III</a:t>
             </a:r>
-          </a:p>
-          <a:p>
-            <a:pPr algn="l">
-              <a:lnSpc>
-                <a:spcPct val="90000"/>
-              </a:lnSpc>
-            </a:pPr>
-            <a:r>
-              <a:rPr lang="en-US" sz="2500" i="1" dirty="0"/>
-              <a:t>Data: Google: MIMIC-III</a:t>
-            </a:r>
+            <a:endParaRPr lang="en-US" sz="4700" b="1" i="1" dirty="0">
+              <a:latin typeface="Calibri" pitchFamily="34" charset="0"/>
+              <a:cs typeface="Calibri" pitchFamily="34" charset="-120"/>
+            </a:endParaRPr>
           </a:p>
         </p:txBody>
       </p:sp>
@@ -8583,7 +12131,7 @@
           <p:nvPr/>
         </p:nvPicPr>
         <p:blipFill>
-          <a:blip r:embed="rId2"/>
+          <a:blip r:embed="rId3"/>
           <a:srcRect l="49741" r="12186" b="-2"/>
           <a:stretch>
             <a:fillRect/>
@@ -9050,116 +12598,6 @@
                                   </p:childTnLst>
                                 </p:cTn>
                               </p:par>
-                              <p:par>
-                                <p:cTn id="8" presetID="10" presetClass="entr" presetSubtype="0" fill="hold" grpId="0" nodeType="withEffect">
-                                  <p:stCondLst>
-                                    <p:cond delay="2000"/>
-                                  </p:stCondLst>
-                                  <p:iterate type="lt">
-                                    <p:tmPct val="10000"/>
-                                  </p:iterate>
-                                  <p:childTnLst>
-                                    <p:set>
-                                      <p:cBhvr>
-                                        <p:cTn id="9" dur="1" fill="hold">
-                                          <p:stCondLst>
-                                            <p:cond delay="0"/>
-                                          </p:stCondLst>
-                                        </p:cTn>
-                                        <p:tgtEl>
-                                          <p:spTgt spid="3">
-                                            <p:txEl>
-                                              <p:pRg st="0" end="0"/>
-                                            </p:txEl>
-                                          </p:spTgt>
-                                        </p:tgtEl>
-                                        <p:attrNameLst>
-                                          <p:attrName>style.visibility</p:attrName>
-                                        </p:attrNameLst>
-                                      </p:cBhvr>
-                                      <p:to>
-                                        <p:strVal val="visible"/>
-                                      </p:to>
-                                    </p:set>
-                                    <p:animEffect transition="in" filter="fade">
-                                      <p:cBhvr>
-                                        <p:cTn id="10" dur="400"/>
-                                        <p:tgtEl>
-                                          <p:spTgt spid="3">
-                                            <p:txEl>
-                                              <p:pRg st="0" end="0"/>
-                                            </p:txEl>
-                                          </p:spTgt>
-                                        </p:tgtEl>
-                                      </p:cBhvr>
-                                    </p:animEffect>
-                                  </p:childTnLst>
-                                </p:cTn>
-                              </p:par>
-                            </p:childTnLst>
-                          </p:cTn>
-                        </p:par>
-                      </p:childTnLst>
-                    </p:cTn>
-                  </p:par>
-                  <p:par>
-                    <p:cTn id="11" fill="hold">
-                      <p:stCondLst>
-                        <p:cond delay="indefinite"/>
-                      </p:stCondLst>
-                      <p:childTnLst>
-                        <p:par>
-                          <p:cTn id="12" fill="hold">
-                            <p:stCondLst>
-                              <p:cond delay="0"/>
-                            </p:stCondLst>
-                            <p:childTnLst>
-                              <p:par>
-                                <p:cTn id="13" presetID="10" presetClass="entr" presetSubtype="0" fill="hold" grpId="0" nodeType="clickEffect">
-                                  <p:stCondLst>
-                                    <p:cond delay="2000"/>
-                                  </p:stCondLst>
-                                  <p:iterate type="lt">
-                                    <p:tmPct val="10000"/>
-                                  </p:iterate>
-                                  <p:childTnLst>
-                                    <p:set>
-                                      <p:cBhvr>
-                                        <p:cTn id="14" dur="1" fill="hold">
-                                          <p:stCondLst>
-                                            <p:cond delay="0"/>
-                                          </p:stCondLst>
-                                        </p:cTn>
-                                        <p:tgtEl>
-                                          <p:spTgt spid="3">
-                                            <p:txEl>
-                                              <p:pRg st="1" end="1"/>
-                                            </p:txEl>
-                                          </p:spTgt>
-                                        </p:tgtEl>
-                                        <p:attrNameLst>
-                                          <p:attrName>style.visibility</p:attrName>
-                                        </p:attrNameLst>
-                                      </p:cBhvr>
-                                      <p:to>
-                                        <p:strVal val="visible"/>
-                                      </p:to>
-                                    </p:set>
-                                    <p:animEffect transition="in" filter="fade">
-                                      <p:cBhvr>
-                                        <p:cTn id="15" dur="400"/>
-                                        <p:tgtEl>
-                                          <p:spTgt spid="3">
-                                            <p:txEl>
-                                              <p:pRg st="1" end="1"/>
-                                            </p:txEl>
-                                          </p:spTgt>
-                                        </p:tgtEl>
-                                      </p:cBhvr>
-                                    </p:animEffect>
-                                  </p:childTnLst>
-                                </p:cTn>
-                              </p:par>
                             </p:childTnLst>
                           </p:cTn>
                         </p:par>
@@ -9189,13 +12627,524 @@
     </p:tnLst>
     <p:bldLst>
       <p:bldP spid="2" grpId="0"/>
-      <p:bldP spid="3" grpId="0" build="p"/>
     </p:bldLst>
   </p:timing>
 </p:sld>
 </file>
 
 <file path=ppt/slides/slide10.xml><?xml version="1.0" encoding="utf-8"?>
+<p:sld xmlns:a="http://schemas.openxmlformats.org/drawingml/2006/main" xmlns:r="http://schemas.openxmlformats.org/officeDocument/2006/relationships" xmlns:p="http://schemas.openxmlformats.org/presentationml/2006/main">
+  <p:cSld>
+    <p:bg>
+      <p:bgPr>
+        <a:solidFill>
+          <a:schemeClr val="bg1"/>
+        </a:solidFill>
+        <a:effectLst/>
+      </p:bgPr>
+    </p:bg>
+    <p:spTree>
+      <p:nvGrpSpPr>
+        <p:cNvPr id="1" name="">
+          <a:extLst>
+            <a:ext uri="{FF2B5EF4-FFF2-40B4-BE49-F238E27FC236}">
+              <a16:creationId xmlns:a16="http://schemas.microsoft.com/office/drawing/2014/main" id="{9EC46298-3485-8E1C-BBE2-E410CD0C9317}"/>
+            </a:ext>
+          </a:extLst>
+        </p:cNvPr>
+        <p:cNvGrpSpPr/>
+        <p:nvPr/>
+      </p:nvGrpSpPr>
+      <p:grpSpPr>
+        <a:xfrm>
+          <a:off x="0" y="0"/>
+          <a:ext cx="0" cy="0"/>
+          <a:chOff x="0" y="0"/>
+          <a:chExt cx="0" cy="0"/>
+        </a:xfrm>
+      </p:grpSpPr>
+      <p:sp useBgFill="1">
+        <p:nvSpPr>
+          <p:cNvPr id="22" name="Rectangle 21">
+            <a:extLst>
+              <a:ext uri="{FF2B5EF4-FFF2-40B4-BE49-F238E27FC236}">
+                <a16:creationId xmlns:a16="http://schemas.microsoft.com/office/drawing/2014/main" id="{AFB5468C-305B-445A-A53B-93DB583365AE}"/>
+              </a:ext>
+              <a:ext uri="{C183D7F6-B498-43B3-948B-1728B52AA6E4}">
+                <adec:decorative xmlns:adec="http://schemas.microsoft.com/office/drawing/2017/decorative" val="1"/>
+              </a:ext>
+            </a:extLst>
+          </p:cNvPr>
+          <p:cNvSpPr>
+            <a:spLocks noGrp="1" noRot="1" noChangeAspect="1" noMove="1" noResize="1" noEditPoints="1" noAdjustHandles="1" noChangeArrowheads="1" noChangeShapeType="1" noTextEdit="1"/>
+          </p:cNvSpPr>
+          <p:nvPr>
+            <p:extLst>
+              <p:ext uri="{386F3935-93C4-4BCD-93E2-E3B085C9AB24}">
+                <p16:designElem xmlns:p16="http://schemas.microsoft.com/office/powerpoint/2015/main" val="1"/>
+              </p:ext>
+            </p:extLst>
+          </p:nvPr>
+        </p:nvSpPr>
+        <p:spPr>
+          <a:xfrm>
+            <a:off x="0" y="0"/>
+            <a:ext cx="9144000" cy="6858000"/>
+          </a:xfrm>
+          <a:prstGeom prst="rect">
+            <a:avLst/>
+          </a:prstGeom>
+          <a:ln>
+            <a:noFill/>
+          </a:ln>
+        </p:spPr>
+        <p:style>
+          <a:lnRef idx="2">
+            <a:schemeClr val="accent1">
+              <a:shade val="50000"/>
+            </a:schemeClr>
+          </a:lnRef>
+          <a:fillRef idx="1">
+            <a:schemeClr val="accent1"/>
+          </a:fillRef>
+          <a:effectRef idx="0">
+            <a:schemeClr val="accent1"/>
+          </a:effectRef>
+          <a:fontRef idx="minor">
+            <a:schemeClr val="lt1"/>
+          </a:fontRef>
+        </p:style>
+        <p:txBody>
+          <a:bodyPr rtlCol="0" anchor="ctr"/>
+          <a:lstStyle/>
+          <a:p>
+            <a:pPr algn="ctr"/>
+            <a:endParaRPr lang="en-US"/>
+          </a:p>
+        </p:txBody>
+      </p:sp>
+      <p:sp>
+        <p:nvSpPr>
+          <p:cNvPr id="2" name="Title 1">
+            <a:extLst>
+              <a:ext uri="{FF2B5EF4-FFF2-40B4-BE49-F238E27FC236}">
+                <a16:creationId xmlns:a16="http://schemas.microsoft.com/office/drawing/2014/main" id="{805D17D9-EA96-39EF-6199-41B3FD08CF48}"/>
+              </a:ext>
+            </a:extLst>
+          </p:cNvPr>
+          <p:cNvSpPr>
+            <a:spLocks noGrp="1"/>
+          </p:cNvSpPr>
+          <p:nvPr>
+            <p:ph type="title"/>
+          </p:nvPr>
+        </p:nvSpPr>
+        <p:spPr>
+          <a:xfrm>
+            <a:off x="399861" y="436360"/>
+            <a:ext cx="2553277" cy="2244634"/>
+          </a:xfrm>
+        </p:spPr>
+        <p:txBody>
+          <a:bodyPr>
+            <a:normAutofit/>
+          </a:bodyPr>
+          <a:lstStyle/>
+          <a:p>
+            <a:r>
+              <a:rPr lang="en-US" sz="2400"/>
+              <a:t>Machine Learning Pipeline</a:t>
+            </a:r>
+            <a:endParaRPr lang="en-US" sz="2400" b="1" i="1">
+              <a:latin typeface="Calibri" pitchFamily="34" charset="0"/>
+              <a:cs typeface="Calibri" pitchFamily="34" charset="-120"/>
+            </a:endParaRPr>
+          </a:p>
+        </p:txBody>
+      </p:sp>
+      <p:pic>
+        <p:nvPicPr>
+          <p:cNvPr id="4" name="Picture 3">
+            <a:extLst>
+              <a:ext uri="{FF2B5EF4-FFF2-40B4-BE49-F238E27FC236}">
+                <a16:creationId xmlns:a16="http://schemas.microsoft.com/office/drawing/2014/main" id="{C2FB34E6-735B-9274-3804-4BC8F100B8DA}"/>
+              </a:ext>
+            </a:extLst>
+          </p:cNvPr>
+          <p:cNvPicPr>
+            <a:picLocks noChangeAspect="1"/>
+          </p:cNvPicPr>
+          <p:nvPr/>
+        </p:nvPicPr>
+        <p:blipFill>
+          <a:blip r:embed="rId3"/>
+          <a:srcRect r="19554" b="-4"/>
+          <a:stretch>
+            <a:fillRect/>
+          </a:stretch>
+        </p:blipFill>
+        <p:spPr>
+          <a:xfrm>
+            <a:off x="20" y="3184849"/>
+            <a:ext cx="3238097" cy="3673153"/>
+          </a:xfrm>
+          <a:prstGeom prst="rect">
+            <a:avLst/>
+          </a:prstGeom>
+        </p:spPr>
+      </p:pic>
+      <p:sp>
+        <p:nvSpPr>
+          <p:cNvPr id="23" name="Rectangle 22">
+            <a:extLst>
+              <a:ext uri="{FF2B5EF4-FFF2-40B4-BE49-F238E27FC236}">
+                <a16:creationId xmlns:a16="http://schemas.microsoft.com/office/drawing/2014/main" id="{A2CDF4EC-7B47-436E-927B-575404258573}"/>
+              </a:ext>
+              <a:ext uri="{C183D7F6-B498-43B3-948B-1728B52AA6E4}">
+                <adec:decorative xmlns:adec="http://schemas.microsoft.com/office/drawing/2017/decorative" val="1"/>
+              </a:ext>
+            </a:extLst>
+          </p:cNvPr>
+          <p:cNvSpPr>
+            <a:spLocks noGrp="1" noRot="1" noChangeAspect="1" noMove="1" noResize="1" noEditPoints="1" noAdjustHandles="1" noChangeArrowheads="1" noChangeShapeType="1" noTextEdit="1"/>
+          </p:cNvSpPr>
+          <p:nvPr>
+            <p:extLst>
+              <p:ext uri="{386F3935-93C4-4BCD-93E2-E3B085C9AB24}">
+                <p16:designElem xmlns:p16="http://schemas.microsoft.com/office/powerpoint/2015/main" val="1"/>
+              </p:ext>
+            </p:extLst>
+          </p:nvPr>
+        </p:nvSpPr>
+        <p:spPr>
+          <a:xfrm>
+            <a:off x="0" y="3152841"/>
+            <a:ext cx="3238117" cy="64008"/>
+          </a:xfrm>
+          <a:prstGeom prst="rect">
+            <a:avLst/>
+          </a:prstGeom>
+          <a:solidFill>
+            <a:schemeClr val="tx2">
+              <a:lumMod val="50000"/>
+            </a:schemeClr>
+          </a:solidFill>
+          <a:ln>
+            <a:noFill/>
+          </a:ln>
+        </p:spPr>
+        <p:style>
+          <a:lnRef idx="2">
+            <a:schemeClr val="accent1">
+              <a:shade val="50000"/>
+            </a:schemeClr>
+          </a:lnRef>
+          <a:fillRef idx="1">
+            <a:schemeClr val="accent1"/>
+          </a:fillRef>
+          <a:effectRef idx="0">
+            <a:schemeClr val="accent1"/>
+          </a:effectRef>
+          <a:fontRef idx="minor">
+            <a:schemeClr val="lt1"/>
+          </a:fontRef>
+        </p:style>
+        <p:txBody>
+          <a:bodyPr rtlCol="0" anchor="ctr"/>
+          <a:lstStyle/>
+          <a:p>
+            <a:pPr algn="ctr"/>
+            <a:endParaRPr lang="en-US"/>
+          </a:p>
+        </p:txBody>
+      </p:sp>
+      <p:sp>
+        <p:nvSpPr>
+          <p:cNvPr id="24" name="Rectangle 23">
+            <a:extLst>
+              <a:ext uri="{FF2B5EF4-FFF2-40B4-BE49-F238E27FC236}">
+                <a16:creationId xmlns:a16="http://schemas.microsoft.com/office/drawing/2014/main" id="{EF273D9E-5BEA-459A-918F-AF5ACA258471}"/>
+              </a:ext>
+              <a:ext uri="{C183D7F6-B498-43B3-948B-1728B52AA6E4}">
+                <adec:decorative xmlns:adec="http://schemas.microsoft.com/office/drawing/2017/decorative" val="1"/>
+              </a:ext>
+            </a:extLst>
+          </p:cNvPr>
+          <p:cNvSpPr>
+            <a:spLocks noGrp="1" noRot="1" noChangeAspect="1" noMove="1" noResize="1" noEditPoints="1" noAdjustHandles="1" noChangeArrowheads="1" noChangeShapeType="1" noTextEdit="1"/>
+          </p:cNvSpPr>
+          <p:nvPr>
+            <p:extLst>
+              <p:ext uri="{386F3935-93C4-4BCD-93E2-E3B085C9AB24}">
+                <p16:designElem xmlns:p16="http://schemas.microsoft.com/office/powerpoint/2015/main" val="1"/>
+              </p:ext>
+            </p:extLst>
+          </p:nvPr>
+        </p:nvSpPr>
+        <p:spPr>
+          <a:xfrm rot="5400000">
+            <a:off x="-166880" y="3404998"/>
+            <a:ext cx="6858002" cy="48006"/>
+          </a:xfrm>
+          <a:prstGeom prst="rect">
+            <a:avLst/>
+          </a:prstGeom>
+          <a:solidFill>
+            <a:schemeClr val="tx2">
+              <a:lumMod val="50000"/>
+            </a:schemeClr>
+          </a:solidFill>
+          <a:ln>
+            <a:noFill/>
+          </a:ln>
+        </p:spPr>
+        <p:style>
+          <a:lnRef idx="2">
+            <a:schemeClr val="accent1">
+              <a:shade val="50000"/>
+            </a:schemeClr>
+          </a:lnRef>
+          <a:fillRef idx="1">
+            <a:schemeClr val="accent1"/>
+          </a:fillRef>
+          <a:effectRef idx="0">
+            <a:schemeClr val="accent1"/>
+          </a:effectRef>
+          <a:fontRef idx="minor">
+            <a:schemeClr val="lt1"/>
+          </a:fontRef>
+        </p:style>
+        <p:txBody>
+          <a:bodyPr rtlCol="0" anchor="ctr"/>
+          <a:lstStyle/>
+          <a:p>
+            <a:pPr algn="ctr"/>
+            <a:endParaRPr lang="en-US"/>
+          </a:p>
+        </p:txBody>
+      </p:sp>
+      <p:sp>
+        <p:nvSpPr>
+          <p:cNvPr id="3" name="Content Placeholder 2">
+            <a:extLst>
+              <a:ext uri="{FF2B5EF4-FFF2-40B4-BE49-F238E27FC236}">
+                <a16:creationId xmlns:a16="http://schemas.microsoft.com/office/drawing/2014/main" id="{FBC8D7AB-F566-626A-A0BF-35906D89C700}"/>
+              </a:ext>
+            </a:extLst>
+          </p:cNvPr>
+          <p:cNvSpPr>
+            <a:spLocks noGrp="1"/>
+          </p:cNvSpPr>
+          <p:nvPr>
+            <p:ph idx="1"/>
+          </p:nvPr>
+        </p:nvSpPr>
+        <p:spPr>
+          <a:xfrm>
+            <a:off x="3281458" y="397565"/>
+            <a:ext cx="3233072" cy="5715383"/>
+          </a:xfrm>
+        </p:spPr>
+        <p:txBody>
+          <a:bodyPr anchor="ctr">
+            <a:normAutofit/>
+          </a:bodyPr>
+          <a:lstStyle/>
+          <a:p>
+            <a:pPr lvl="1">
+              <a:buFont typeface="Wingdings" pitchFamily="2" charset="2"/>
+              <a:buChar char="Ø"/>
+            </a:pPr>
+            <a:r>
+              <a:rPr lang="en-US" sz="1700" dirty="0"/>
+              <a:t>Train/test split Imputation</a:t>
+            </a:r>
+          </a:p>
+          <a:p>
+            <a:pPr lvl="1">
+              <a:buFont typeface="Wingdings" pitchFamily="2" charset="2"/>
+              <a:buChar char="Ø"/>
+            </a:pPr>
+            <a:r>
+              <a:rPr lang="en-US" sz="1700" dirty="0"/>
+              <a:t>One-hot encoding</a:t>
+            </a:r>
+          </a:p>
+          <a:p>
+            <a:pPr lvl="1">
+              <a:buFont typeface="Wingdings" pitchFamily="2" charset="2"/>
+              <a:buChar char="Ø"/>
+            </a:pPr>
+            <a:r>
+              <a:rPr lang="en-US" sz="1700" dirty="0"/>
+              <a:t>Scaling</a:t>
+            </a:r>
+          </a:p>
+          <a:p>
+            <a:pPr lvl="1">
+              <a:buFont typeface="Wingdings" pitchFamily="2" charset="2"/>
+              <a:buChar char="Ø"/>
+            </a:pPr>
+            <a:r>
+              <a:rPr lang="en-US" sz="1700" dirty="0"/>
+              <a:t>Logistic Regression</a:t>
+            </a:r>
+          </a:p>
+          <a:p>
+            <a:pPr lvl="1">
+              <a:buFont typeface="Wingdings" pitchFamily="2" charset="2"/>
+              <a:buChar char="Ø"/>
+            </a:pPr>
+            <a:r>
+              <a:rPr lang="en-US" sz="1700" dirty="0"/>
+              <a:t>Random Forest</a:t>
+            </a:r>
+          </a:p>
+          <a:p>
+            <a:pPr lvl="1">
+              <a:buFont typeface="Wingdings" pitchFamily="2" charset="2"/>
+              <a:buChar char="Ø"/>
+            </a:pPr>
+            <a:r>
+              <a:rPr lang="en-US" sz="1800" dirty="0"/>
+              <a:t>Stratified 80/20 train/test split</a:t>
+            </a:r>
+            <a:endParaRPr lang="en-US" sz="1700" dirty="0"/>
+          </a:p>
+          <a:p>
+            <a:pPr marL="457200" lvl="1" indent="0">
+              <a:buNone/>
+            </a:pPr>
+            <a:endParaRPr lang="en-US" sz="1700" dirty="0"/>
+          </a:p>
+          <a:p>
+            <a:pPr marL="457200" lvl="1" indent="0">
+              <a:buNone/>
+            </a:pPr>
+            <a:endParaRPr lang="en-US" sz="1700" dirty="0"/>
+          </a:p>
+          <a:p>
+            <a:pPr marL="457200" lvl="1" indent="0">
+              <a:buNone/>
+            </a:pPr>
+            <a:endParaRPr lang="en-US" sz="1700" b="1" i="1" dirty="0">
+              <a:latin typeface="Calibri" pitchFamily="34" charset="0"/>
+              <a:ea typeface="+mj-ea"/>
+              <a:cs typeface="Calibri" pitchFamily="34" charset="-120"/>
+            </a:endParaRPr>
+          </a:p>
+        </p:txBody>
+      </p:sp>
+      <p:pic>
+        <p:nvPicPr>
+          <p:cNvPr id="5" name="Picture 4" descr="A stethoscope in white background">
+            <a:extLst>
+              <a:ext uri="{FF2B5EF4-FFF2-40B4-BE49-F238E27FC236}">
+                <a16:creationId xmlns:a16="http://schemas.microsoft.com/office/drawing/2014/main" id="{DA0D1A30-37FC-2ABE-8C95-D46AB258A39C}"/>
+              </a:ext>
+            </a:extLst>
+          </p:cNvPr>
+          <p:cNvPicPr>
+            <a:picLocks noChangeAspect="1"/>
+          </p:cNvPicPr>
+          <p:nvPr/>
+        </p:nvPicPr>
+        <p:blipFill>
+          <a:blip r:embed="rId4"/>
+          <a:srcRect l="54101" r="21195" b="-2"/>
+          <a:stretch>
+            <a:fillRect/>
+          </a:stretch>
+        </p:blipFill>
+        <p:spPr>
+          <a:xfrm>
+            <a:off x="6605878" y="-6"/>
+            <a:ext cx="2538122" cy="6858002"/>
+          </a:xfrm>
+          <a:prstGeom prst="rect">
+            <a:avLst/>
+          </a:prstGeom>
+        </p:spPr>
+      </p:pic>
+      <p:sp>
+        <p:nvSpPr>
+          <p:cNvPr id="25" name="Rectangle 24">
+            <a:extLst>
+              <a:ext uri="{FF2B5EF4-FFF2-40B4-BE49-F238E27FC236}">
+                <a16:creationId xmlns:a16="http://schemas.microsoft.com/office/drawing/2014/main" id="{5DFA5EF5-56B1-49EE-B0BB-69B6399FAD9F}"/>
+              </a:ext>
+              <a:ext uri="{C183D7F6-B498-43B3-948B-1728B52AA6E4}">
+                <adec:decorative xmlns:adec="http://schemas.microsoft.com/office/drawing/2017/decorative" val="1"/>
+              </a:ext>
+            </a:extLst>
+          </p:cNvPr>
+          <p:cNvSpPr>
+            <a:spLocks noGrp="1" noRot="1" noChangeAspect="1" noMove="1" noResize="1" noEditPoints="1" noAdjustHandles="1" noChangeArrowheads="1" noChangeShapeType="1" noTextEdit="1"/>
+          </p:cNvSpPr>
+          <p:nvPr>
+            <p:extLst>
+              <p:ext uri="{386F3935-93C4-4BCD-93E2-E3B085C9AB24}">
+                <p16:designElem xmlns:p16="http://schemas.microsoft.com/office/powerpoint/2015/main" val="1"/>
+              </p:ext>
+            </p:extLst>
+          </p:nvPr>
+        </p:nvSpPr>
+        <p:spPr>
+          <a:xfrm rot="5400000">
+            <a:off x="3157540" y="3404996"/>
+            <a:ext cx="6858002" cy="48006"/>
+          </a:xfrm>
+          <a:prstGeom prst="rect">
+            <a:avLst/>
+          </a:prstGeom>
+          <a:solidFill>
+            <a:schemeClr val="tx2">
+              <a:lumMod val="50000"/>
+            </a:schemeClr>
+          </a:solidFill>
+          <a:ln>
+            <a:noFill/>
+          </a:ln>
+        </p:spPr>
+        <p:style>
+          <a:lnRef idx="2">
+            <a:schemeClr val="accent1">
+              <a:shade val="50000"/>
+            </a:schemeClr>
+          </a:lnRef>
+          <a:fillRef idx="1">
+            <a:schemeClr val="accent1"/>
+          </a:fillRef>
+          <a:effectRef idx="0">
+            <a:schemeClr val="accent1"/>
+          </a:effectRef>
+          <a:fontRef idx="minor">
+            <a:schemeClr val="lt1"/>
+          </a:fontRef>
+        </p:style>
+        <p:txBody>
+          <a:bodyPr rtlCol="0" anchor="ctr"/>
+          <a:lstStyle/>
+          <a:p>
+            <a:pPr algn="ctr"/>
+            <a:endParaRPr lang="en-US"/>
+          </a:p>
+        </p:txBody>
+      </p:sp>
+    </p:spTree>
+    <p:extLst>
+      <p:ext uri="{BB962C8B-B14F-4D97-AF65-F5344CB8AC3E}">
+        <p14:creationId xmlns:p14="http://schemas.microsoft.com/office/powerpoint/2010/main" val="2628676830"/>
+      </p:ext>
+    </p:extLst>
+  </p:cSld>
+  <p:clrMapOvr>
+    <a:masterClrMapping/>
+  </p:clrMapOvr>
+</p:sld>
+</file>
+
+<file path=ppt/slides/slide11.xml><?xml version="1.0" encoding="utf-8"?>
 <p:sld xmlns:a="http://schemas.openxmlformats.org/drawingml/2006/main" xmlns:r="http://schemas.openxmlformats.org/officeDocument/2006/relationships" xmlns:p="http://schemas.openxmlformats.org/presentationml/2006/main">
   <p:cSld>
     <p:bg>
@@ -9366,6 +13315,27 @@
             <a:pPr marL="457200" lvl="1" indent="0">
               <a:buNone/>
             </a:pPr>
+            <a:r>
+              <a:rPr lang="en-US" sz="1600" dirty="0"/>
+              <a:t>Accuracy: </a:t>
+            </a:r>
+            <a:r>
+              <a:rPr lang="en-US" sz="1600" b="1" dirty="0"/>
+              <a:t>0.5455</a:t>
+            </a:r>
+          </a:p>
+          <a:p>
+            <a:pPr marL="457200" lvl="1" indent="0">
+              <a:buNone/>
+            </a:pPr>
+            <a:r>
+              <a:rPr lang="en-US" sz="1600" dirty="0"/>
+              <a:t>Weighted F1: </a:t>
+            </a:r>
+            <a:r>
+              <a:rPr lang="en-US" sz="1600" b="1" dirty="0"/>
+              <a:t>0.4485</a:t>
+            </a:r>
             <a:endParaRPr lang="en-US" sz="1600" b="1" i="1" dirty="0">
               <a:latin typeface="Calibri" pitchFamily="34" charset="0"/>
               <a:ea typeface="+mj-ea"/>
@@ -9595,7 +13565,7 @@
 </p:sld>
 </file>
 
-<file path=ppt/slides/slide11.xml><?xml version="1.0" encoding="utf-8"?>
+<file path=ppt/slides/slide12.xml><?xml version="1.0" encoding="utf-8"?>
 <p:sld xmlns:a="http://schemas.openxmlformats.org/drawingml/2006/main" xmlns:r="http://schemas.openxmlformats.org/officeDocument/2006/relationships" xmlns:p="http://schemas.openxmlformats.org/presentationml/2006/main">
   <p:cSld>
     <p:bg>
@@ -9691,13 +13661,13 @@
         </p:nvSpPr>
         <p:spPr>
           <a:xfrm>
-            <a:off x="657519" y="2533476"/>
-            <a:ext cx="2591866" cy="3447832"/>
+            <a:off x="158262" y="2533476"/>
+            <a:ext cx="3481753" cy="3447832"/>
           </a:xfrm>
         </p:spPr>
         <p:txBody>
           <a:bodyPr anchor="t">
-            <a:normAutofit/>
+            <a:normAutofit lnSpcReduction="10000"/>
           </a:bodyPr>
           <a:lstStyle/>
           <a:p>
@@ -9755,7 +13725,42 @@
             <a:pPr marL="457200" lvl="1" indent="0">
               <a:buNone/>
             </a:pPr>
-            <a:endParaRPr lang="en-US" sz="1600" dirty="0"/>
+            <a:r>
+              <a:rPr lang="en-US" sz="1600" dirty="0"/>
+              <a:t>Accuracy: </a:t>
+            </a:r>
+            <a:r>
+              <a:rPr lang="en-US" sz="1600" b="1" dirty="0"/>
+              <a:t>0.6364</a:t>
+            </a:r>
+          </a:p>
+          <a:p>
+            <a:pPr marL="457200" lvl="1" indent="0">
+              <a:buNone/>
+            </a:pPr>
+            <a:r>
+              <a:rPr lang="en-US" sz="1600" dirty="0"/>
+              <a:t>Weighted F1: </a:t>
+            </a:r>
+            <a:r>
+              <a:rPr lang="en-US" sz="1600" b="1" dirty="0"/>
+              <a:t>0.6033</a:t>
+            </a:r>
+          </a:p>
+          <a:p>
+            <a:pPr marL="457200" lvl="1" indent="0">
+              <a:buNone/>
+            </a:pPr>
+            <a:endParaRPr lang="en-US" sz="1600" b="1" dirty="0"/>
+          </a:p>
+          <a:p>
+            <a:pPr marL="457200" lvl="1" indent="0">
+              <a:buNone/>
+            </a:pPr>
+            <a:r>
+              <a:rPr lang="en-US" sz="1600" dirty="0"/>
+              <a:t>Random Forest outperformed Logistic Regression on both metrics.</a:t>
+            </a:r>
           </a:p>
           <a:p>
             <a:pPr marL="457200" lvl="1" indent="0">
@@ -9990,7 +13995,7 @@
 </p:sld>
 </file>
 
-<file path=ppt/slides/slide12.xml><?xml version="1.0" encoding="utf-8"?>
+<file path=ppt/slides/slide13.xml><?xml version="1.0" encoding="utf-8"?>
 <p:sld xmlns:a="http://schemas.openxmlformats.org/drawingml/2006/main" xmlns:r="http://schemas.openxmlformats.org/officeDocument/2006/relationships" xmlns:p="http://schemas.openxmlformats.org/presentationml/2006/main">
   <p:cSld>
     <p:bg>
@@ -10090,7 +14095,7 @@
         </p:spPr>
         <p:txBody>
           <a:bodyPr anchor="t">
-            <a:normAutofit/>
+            <a:normAutofit lnSpcReduction="10000"/>
           </a:bodyPr>
           <a:lstStyle/>
           <a:p>
@@ -10132,6 +14137,17 @@
               <a:rPr lang="en-US" sz="1700" dirty="0"/>
               <a:t>whether the model struggles more with medium vs long stays.</a:t>
             </a:r>
+          </a:p>
+          <a:p>
+            <a:pPr>
+              <a:buFont typeface="Wingdings" pitchFamily="2" charset="2"/>
+              <a:buChar char="Ø"/>
+            </a:pPr>
+            <a:r>
+              <a:rPr lang="en-US" sz="1800" dirty="0"/>
+              <a:t>Long-stay cases were the hardest to identify correctly.”</a:t>
+            </a:r>
+            <a:endParaRPr lang="en-US" sz="1700" dirty="0"/>
           </a:p>
           <a:p>
             <a:pPr marL="457200" lvl="1" indent="0">
@@ -10372,7 +14388,7 @@
 </p:sld>
 </file>
 
-<file path=ppt/slides/slide13.xml><?xml version="1.0" encoding="utf-8"?>
+<file path=ppt/slides/slide14.xml><?xml version="1.0" encoding="utf-8"?>
 <p:sld xmlns:a="http://schemas.openxmlformats.org/drawingml/2006/main" xmlns:r="http://schemas.openxmlformats.org/officeDocument/2006/relationships" xmlns:p="http://schemas.openxmlformats.org/presentationml/2006/main">
   <p:cSld>
     <p:bg>
@@ -10570,7 +14586,7 @@
             </a:pPr>
             <a:r>
               <a:rPr lang="en-US" sz="1400" dirty="0"/>
-              <a:t>Compare models</a:t>
+              <a:t>Random Forest was the best-performing model</a:t>
             </a:r>
           </a:p>
           <a:p>
@@ -10583,7 +14599,7 @@
             </a:pPr>
             <a:r>
               <a:rPr lang="en-US" sz="1400" dirty="0"/>
-              <a:t>Choose best-performing model</a:t>
+              <a:t>Structured EHR features carried meaningful signal for LOS prediction</a:t>
             </a:r>
           </a:p>
           <a:p>
@@ -10596,7 +14612,7 @@
             </a:pPr>
             <a:r>
               <a:rPr lang="en-US" sz="1400" dirty="0"/>
-              <a:t>Discuss useful predictors</a:t>
+              <a:t>Long-stay cases remained difficult due to small cohort size and class imbalance</a:t>
             </a:r>
           </a:p>
           <a:p>
@@ -10609,7 +14625,7 @@
             </a:pPr>
             <a:r>
               <a:rPr lang="en-US" sz="1400" dirty="0"/>
-              <a:t>Structured EHR data can support prediction</a:t>
+              <a:t>This project demonstrates a reproducible healthcare ML tutorial workflow</a:t>
             </a:r>
           </a:p>
           <a:p>
@@ -10680,7 +14696,583 @@
 </p:sld>
 </file>
 
-<file path=ppt/slides/slide14.xml><?xml version="1.0" encoding="utf-8"?>
+<file path=ppt/slides/slide15.xml><?xml version="1.0" encoding="utf-8"?>
+<p:sld xmlns:a="http://schemas.openxmlformats.org/drawingml/2006/main" xmlns:r="http://schemas.openxmlformats.org/officeDocument/2006/relationships" xmlns:p="http://schemas.openxmlformats.org/presentationml/2006/main">
+  <p:cSld>
+    <p:bg>
+      <p:bgPr>
+        <a:solidFill>
+          <a:schemeClr val="bg1"/>
+        </a:solidFill>
+        <a:effectLst/>
+      </p:bgPr>
+    </p:bg>
+    <p:spTree>
+      <p:nvGrpSpPr>
+        <p:cNvPr id="1" name="">
+          <a:extLst>
+            <a:ext uri="{FF2B5EF4-FFF2-40B4-BE49-F238E27FC236}">
+              <a16:creationId xmlns:a16="http://schemas.microsoft.com/office/drawing/2014/main" id="{FCC4406E-11C1-C383-A325-84D8FE10D0B1}"/>
+            </a:ext>
+          </a:extLst>
+        </p:cNvPr>
+        <p:cNvGrpSpPr/>
+        <p:nvPr/>
+      </p:nvGrpSpPr>
+      <p:grpSpPr>
+        <a:xfrm>
+          <a:off x="0" y="0"/>
+          <a:ext cx="0" cy="0"/>
+          <a:chOff x="0" y="0"/>
+          <a:chExt cx="0" cy="0"/>
+        </a:xfrm>
+      </p:grpSpPr>
+      <p:sp useBgFill="1">
+        <p:nvSpPr>
+          <p:cNvPr id="15" name="Rectangle 14">
+            <a:extLst>
+              <a:ext uri="{FF2B5EF4-FFF2-40B4-BE49-F238E27FC236}">
+                <a16:creationId xmlns:a16="http://schemas.microsoft.com/office/drawing/2014/main" id="{DEE2AD96-B495-4E06-9291-B71706F728CB}"/>
+              </a:ext>
+              <a:ext uri="{C183D7F6-B498-43B3-948B-1728B52AA6E4}">
+                <adec:decorative xmlns:adec="http://schemas.microsoft.com/office/drawing/2017/decorative" val="1"/>
+              </a:ext>
+            </a:extLst>
+          </p:cNvPr>
+          <p:cNvSpPr>
+            <a:spLocks noGrp="1" noRot="1" noChangeAspect="1" noMove="1" noResize="1" noEditPoints="1" noAdjustHandles="1" noChangeArrowheads="1" noChangeShapeType="1" noTextEdit="1"/>
+          </p:cNvSpPr>
+          <p:nvPr>
+            <p:extLst>
+              <p:ext uri="{386F3935-93C4-4BCD-93E2-E3B085C9AB24}">
+                <p16:designElem xmlns:p16="http://schemas.microsoft.com/office/powerpoint/2015/main" val="1"/>
+              </p:ext>
+            </p:extLst>
+          </p:nvPr>
+        </p:nvSpPr>
+        <p:spPr>
+          <a:xfrm>
+            <a:off x="0" y="0"/>
+            <a:ext cx="9144000" cy="6858000"/>
+          </a:xfrm>
+          <a:prstGeom prst="rect">
+            <a:avLst/>
+          </a:prstGeom>
+          <a:ln w="12700" cap="flat" cmpd="sng" algn="ctr">
+            <a:noFill/>
+            <a:prstDash val="solid"/>
+            <a:miter lim="800000"/>
+          </a:ln>
+          <a:effectLst/>
+          <a:extLst>
+            <a:ext uri="{91240B29-F687-4F45-9708-019B960494DF}">
+              <a14:hiddenLine xmlns:a14="http://schemas.microsoft.com/office/drawing/2010/main" w="12700" cap="flat" cmpd="sng" algn="ctr">
+                <a:solidFill>
+                  <a:schemeClr val="accent1">
+                    <a:shade val="50000"/>
+                  </a:schemeClr>
+                </a:solidFill>
+                <a:prstDash val="solid"/>
+                <a:miter lim="800000"/>
+              </a14:hiddenLine>
+            </a:ext>
+          </a:extLst>
+        </p:spPr>
+        <p:style>
+          <a:lnRef idx="2">
+            <a:schemeClr val="accent1">
+              <a:shade val="50000"/>
+            </a:schemeClr>
+          </a:lnRef>
+          <a:fillRef idx="1">
+            <a:schemeClr val="accent1"/>
+          </a:fillRef>
+          <a:effectRef idx="0">
+            <a:schemeClr val="accent1"/>
+          </a:effectRef>
+          <a:fontRef idx="minor">
+            <a:schemeClr val="lt1"/>
+          </a:fontRef>
+        </p:style>
+        <p:txBody>
+          <a:bodyPr rtlCol="0" anchor="ctr"/>
+          <a:lstStyle/>
+          <a:p>
+            <a:pPr algn="ctr"/>
+            <a:endParaRPr lang="en-US"/>
+          </a:p>
+        </p:txBody>
+      </p:sp>
+      <p:sp>
+        <p:nvSpPr>
+          <p:cNvPr id="17" name="Rectangle 16">
+            <a:extLst>
+              <a:ext uri="{FF2B5EF4-FFF2-40B4-BE49-F238E27FC236}">
+                <a16:creationId xmlns:a16="http://schemas.microsoft.com/office/drawing/2014/main" id="{53CF6D67-C5A8-4ADD-9E8E-1E38CA1D3166}"/>
+              </a:ext>
+              <a:ext uri="{C183D7F6-B498-43B3-948B-1728B52AA6E4}">
+                <adec:decorative xmlns:adec="http://schemas.microsoft.com/office/drawing/2017/decorative" val="1"/>
+              </a:ext>
+            </a:extLst>
+          </p:cNvPr>
+          <p:cNvSpPr>
+            <a:spLocks noGrp="1" noRot="1" noChangeAspect="1" noMove="1" noResize="1" noEditPoints="1" noAdjustHandles="1" noChangeArrowheads="1" noChangeShapeType="1" noTextEdit="1"/>
+          </p:cNvSpPr>
+          <p:nvPr>
+            <p:extLst>
+              <p:ext uri="{386F3935-93C4-4BCD-93E2-E3B085C9AB24}">
+                <p16:designElem xmlns:p16="http://schemas.microsoft.com/office/powerpoint/2015/main" val="1"/>
+              </p:ext>
+            </p:extLst>
+          </p:nvPr>
+        </p:nvSpPr>
+        <p:spPr>
+          <a:xfrm rot="5400000" flipH="1">
+            <a:off x="-1336136" y="1336710"/>
+            <a:ext cx="6858000" cy="4184580"/>
+          </a:xfrm>
+          <a:prstGeom prst="rect">
+            <a:avLst/>
+          </a:prstGeom>
+          <a:gradFill>
+            <a:gsLst>
+              <a:gs pos="8000">
+                <a:srgbClr val="000000"/>
+              </a:gs>
+              <a:gs pos="100000">
+                <a:schemeClr val="accent1">
+                  <a:lumMod val="75000"/>
+                </a:schemeClr>
+              </a:gs>
+            </a:gsLst>
+            <a:lin ang="3000000" scaled="0"/>
+          </a:gradFill>
+          <a:ln>
+            <a:noFill/>
+          </a:ln>
+        </p:spPr>
+        <p:style>
+          <a:lnRef idx="2">
+            <a:schemeClr val="accent1">
+              <a:shade val="50000"/>
+            </a:schemeClr>
+          </a:lnRef>
+          <a:fillRef idx="1">
+            <a:schemeClr val="accent1"/>
+          </a:fillRef>
+          <a:effectRef idx="0">
+            <a:schemeClr val="accent1"/>
+          </a:effectRef>
+          <a:fontRef idx="minor">
+            <a:schemeClr val="lt1"/>
+          </a:fontRef>
+        </p:style>
+        <p:txBody>
+          <a:bodyPr rtlCol="0" anchor="ctr"/>
+          <a:lstStyle/>
+          <a:p>
+            <a:pPr algn="ctr"/>
+            <a:endParaRPr lang="en-US"/>
+          </a:p>
+        </p:txBody>
+      </p:sp>
+      <p:sp>
+        <p:nvSpPr>
+          <p:cNvPr id="19" name="Rectangle 18">
+            <a:extLst>
+              <a:ext uri="{FF2B5EF4-FFF2-40B4-BE49-F238E27FC236}">
+                <a16:creationId xmlns:a16="http://schemas.microsoft.com/office/drawing/2014/main" id="{86909FA0-B515-4681-B7A8-FA281D133B94}"/>
+              </a:ext>
+              <a:ext uri="{C183D7F6-B498-43B3-948B-1728B52AA6E4}">
+                <adec:decorative xmlns:adec="http://schemas.microsoft.com/office/drawing/2017/decorative" val="1"/>
+              </a:ext>
+            </a:extLst>
+          </p:cNvPr>
+          <p:cNvSpPr>
+            <a:spLocks noGrp="1" noRot="1" noChangeAspect="1" noMove="1" noResize="1" noEditPoints="1" noAdjustHandles="1" noChangeArrowheads="1" noChangeShapeType="1" noTextEdit="1"/>
+          </p:cNvSpPr>
+          <p:nvPr>
+            <p:extLst>
+              <p:ext uri="{386F3935-93C4-4BCD-93E2-E3B085C9AB24}">
+                <p16:designElem xmlns:p16="http://schemas.microsoft.com/office/powerpoint/2015/main" val="1"/>
+              </p:ext>
+            </p:extLst>
+          </p:nvPr>
+        </p:nvSpPr>
+        <p:spPr>
+          <a:xfrm rot="5400000" flipH="1">
+            <a:off x="-1088181" y="1092216"/>
+            <a:ext cx="6346209" cy="4182060"/>
+          </a:xfrm>
+          <a:prstGeom prst="rect">
+            <a:avLst/>
+          </a:prstGeom>
+          <a:gradFill>
+            <a:gsLst>
+              <a:gs pos="0">
+                <a:srgbClr val="000000">
+                  <a:alpha val="0"/>
+                </a:srgbClr>
+              </a:gs>
+              <a:gs pos="99000">
+                <a:schemeClr val="accent1">
+                  <a:alpha val="0"/>
+                </a:schemeClr>
+              </a:gs>
+            </a:gsLst>
+            <a:lin ang="1800000" scaled="0"/>
+          </a:gradFill>
+          <a:ln>
+            <a:noFill/>
+          </a:ln>
+        </p:spPr>
+        <p:style>
+          <a:lnRef idx="2">
+            <a:schemeClr val="accent1">
+              <a:shade val="50000"/>
+            </a:schemeClr>
+          </a:lnRef>
+          <a:fillRef idx="1">
+            <a:schemeClr val="accent1"/>
+          </a:fillRef>
+          <a:effectRef idx="0">
+            <a:schemeClr val="accent1"/>
+          </a:effectRef>
+          <a:fontRef idx="minor">
+            <a:schemeClr val="lt1"/>
+          </a:fontRef>
+        </p:style>
+        <p:txBody>
+          <a:bodyPr rtlCol="0" anchor="ctr"/>
+          <a:lstStyle/>
+          <a:p>
+            <a:pPr algn="ctr"/>
+            <a:endParaRPr lang="en-US"/>
+          </a:p>
+        </p:txBody>
+      </p:sp>
+      <p:sp>
+        <p:nvSpPr>
+          <p:cNvPr id="21" name="Rectangle 20">
+            <a:extLst>
+              <a:ext uri="{FF2B5EF4-FFF2-40B4-BE49-F238E27FC236}">
+                <a16:creationId xmlns:a16="http://schemas.microsoft.com/office/drawing/2014/main" id="{21C9FE86-FCC3-4A31-AA1C-C882262B7FE7}"/>
+              </a:ext>
+              <a:ext uri="{C183D7F6-B498-43B3-948B-1728B52AA6E4}">
+                <adec:decorative xmlns:adec="http://schemas.microsoft.com/office/drawing/2017/decorative" val="1"/>
+              </a:ext>
+            </a:extLst>
+          </p:cNvPr>
+          <p:cNvSpPr>
+            <a:spLocks noGrp="1" noRot="1" noChangeAspect="1" noMove="1" noResize="1" noEditPoints="1" noAdjustHandles="1" noChangeArrowheads="1" noChangeShapeType="1" noTextEdit="1"/>
+          </p:cNvSpPr>
+          <p:nvPr>
+            <p:extLst>
+              <p:ext uri="{386F3935-93C4-4BCD-93E2-E3B085C9AB24}">
+                <p16:designElem xmlns:p16="http://schemas.microsoft.com/office/powerpoint/2015/main" val="1"/>
+              </p:ext>
+            </p:extLst>
+          </p:nvPr>
+        </p:nvSpPr>
+        <p:spPr>
+          <a:xfrm rot="5400000" flipH="1">
+            <a:off x="833933" y="3515977"/>
+            <a:ext cx="2501979" cy="4182060"/>
+          </a:xfrm>
+          <a:prstGeom prst="rect">
+            <a:avLst/>
+          </a:prstGeom>
+          <a:gradFill>
+            <a:gsLst>
+              <a:gs pos="2000">
+                <a:schemeClr val="accent1">
+                  <a:alpha val="29000"/>
+                </a:schemeClr>
+              </a:gs>
+              <a:gs pos="100000">
+                <a:srgbClr val="000000">
+                  <a:alpha val="30000"/>
+                </a:srgbClr>
+              </a:gs>
+            </a:gsLst>
+            <a:lin ang="7800000" scaled="0"/>
+          </a:gradFill>
+          <a:ln>
+            <a:noFill/>
+          </a:ln>
+        </p:spPr>
+        <p:style>
+          <a:lnRef idx="2">
+            <a:schemeClr val="accent1">
+              <a:shade val="50000"/>
+            </a:schemeClr>
+          </a:lnRef>
+          <a:fillRef idx="1">
+            <a:schemeClr val="accent1"/>
+          </a:fillRef>
+          <a:effectRef idx="0">
+            <a:schemeClr val="accent1"/>
+          </a:effectRef>
+          <a:fontRef idx="minor">
+            <a:schemeClr val="lt1"/>
+          </a:fontRef>
+        </p:style>
+        <p:txBody>
+          <a:bodyPr rtlCol="0" anchor="ctr"/>
+          <a:lstStyle/>
+          <a:p>
+            <a:pPr algn="ctr"/>
+            <a:endParaRPr lang="en-US" dirty="0"/>
+          </a:p>
+        </p:txBody>
+      </p:sp>
+      <p:sp>
+        <p:nvSpPr>
+          <p:cNvPr id="23" name="Rectangle 22">
+            <a:extLst>
+              <a:ext uri="{FF2B5EF4-FFF2-40B4-BE49-F238E27FC236}">
+                <a16:creationId xmlns:a16="http://schemas.microsoft.com/office/drawing/2014/main" id="{7D96243B-ECED-4B71-8E06-AE9A285EAD20}"/>
+              </a:ext>
+              <a:ext uri="{C183D7F6-B498-43B3-948B-1728B52AA6E4}">
+                <adec:decorative xmlns:adec="http://schemas.microsoft.com/office/drawing/2017/decorative" val="1"/>
+              </a:ext>
+            </a:extLst>
+          </p:cNvPr>
+          <p:cNvSpPr>
+            <a:spLocks noGrp="1" noRot="1" noChangeAspect="1" noMove="1" noResize="1" noEditPoints="1" noAdjustHandles="1" noChangeArrowheads="1" noChangeShapeType="1" noTextEdit="1"/>
+          </p:cNvSpPr>
+          <p:nvPr>
+            <p:extLst>
+              <p:ext uri="{386F3935-93C4-4BCD-93E2-E3B085C9AB24}">
+                <p16:designElem xmlns:p16="http://schemas.microsoft.com/office/powerpoint/2015/main" val="1"/>
+              </p:ext>
+            </p:extLst>
+          </p:nvPr>
+        </p:nvSpPr>
+        <p:spPr>
+          <a:xfrm rot="5400000" flipH="1">
+            <a:off x="-1176002" y="1496845"/>
+            <a:ext cx="6858001" cy="3864309"/>
+          </a:xfrm>
+          <a:prstGeom prst="rect">
+            <a:avLst/>
+          </a:prstGeom>
+          <a:gradFill>
+            <a:gsLst>
+              <a:gs pos="0">
+                <a:srgbClr val="000000">
+                  <a:alpha val="0"/>
+                </a:srgbClr>
+              </a:gs>
+              <a:gs pos="99000">
+                <a:schemeClr val="accent1">
+                  <a:alpha val="11000"/>
+                </a:schemeClr>
+              </a:gs>
+            </a:gsLst>
+            <a:lin ang="7800000" scaled="0"/>
+          </a:gradFill>
+          <a:ln>
+            <a:noFill/>
+          </a:ln>
+        </p:spPr>
+        <p:style>
+          <a:lnRef idx="2">
+            <a:schemeClr val="accent1">
+              <a:shade val="50000"/>
+            </a:schemeClr>
+          </a:lnRef>
+          <a:fillRef idx="1">
+            <a:schemeClr val="accent1"/>
+          </a:fillRef>
+          <a:effectRef idx="0">
+            <a:schemeClr val="accent1"/>
+          </a:effectRef>
+          <a:fontRef idx="minor">
+            <a:schemeClr val="lt1"/>
+          </a:fontRef>
+        </p:style>
+        <p:txBody>
+          <a:bodyPr rtlCol="0" anchor="ctr"/>
+          <a:lstStyle/>
+          <a:p>
+            <a:pPr algn="ctr"/>
+            <a:endParaRPr lang="en-US"/>
+          </a:p>
+        </p:txBody>
+      </p:sp>
+      <p:sp>
+        <p:nvSpPr>
+          <p:cNvPr id="25" name="Oval 24">
+            <a:extLst>
+              <a:ext uri="{FF2B5EF4-FFF2-40B4-BE49-F238E27FC236}">
+                <a16:creationId xmlns:a16="http://schemas.microsoft.com/office/drawing/2014/main" id="{A09989E4-EFDC-4A90-A633-E0525FB4139E}"/>
+              </a:ext>
+              <a:ext uri="{C183D7F6-B498-43B3-948B-1728B52AA6E4}">
+                <adec:decorative xmlns:adec="http://schemas.microsoft.com/office/drawing/2017/decorative" val="1"/>
+              </a:ext>
+            </a:extLst>
+          </p:cNvPr>
+          <p:cNvSpPr>
+            <a:spLocks noGrp="1" noRot="1" noChangeAspect="1" noMove="1" noResize="1" noEditPoints="1" noAdjustHandles="1" noChangeArrowheads="1" noChangeShapeType="1" noTextEdit="1"/>
+          </p:cNvSpPr>
+          <p:nvPr>
+            <p:extLst>
+              <p:ext uri="{386F3935-93C4-4BCD-93E2-E3B085C9AB24}">
+                <p16:designElem xmlns:p16="http://schemas.microsoft.com/office/powerpoint/2015/main" val="1"/>
+              </p:ext>
+            </p:extLst>
+          </p:nvPr>
+        </p:nvSpPr>
+        <p:spPr>
+          <a:xfrm rot="6097846">
+            <a:off x="74277" y="1668285"/>
+            <a:ext cx="4318303" cy="3238727"/>
+          </a:xfrm>
+          <a:prstGeom prst="ellipse">
+            <a:avLst/>
+          </a:prstGeom>
+          <a:gradFill>
+            <a:gsLst>
+              <a:gs pos="39000">
+                <a:schemeClr val="accent1">
+                  <a:alpha val="0"/>
+                </a:schemeClr>
+              </a:gs>
+              <a:gs pos="100000">
+                <a:schemeClr val="accent1">
+                  <a:lumMod val="60000"/>
+                  <a:lumOff val="40000"/>
+                  <a:alpha val="15000"/>
+                </a:schemeClr>
+              </a:gs>
+            </a:gsLst>
+            <a:lin ang="17400000" scaled="0"/>
+          </a:gradFill>
+          <a:ln>
+            <a:noFill/>
+          </a:ln>
+        </p:spPr>
+        <p:style>
+          <a:lnRef idx="2">
+            <a:schemeClr val="accent1">
+              <a:shade val="50000"/>
+            </a:schemeClr>
+          </a:lnRef>
+          <a:fillRef idx="1">
+            <a:schemeClr val="accent1"/>
+          </a:fillRef>
+          <a:effectRef idx="0">
+            <a:schemeClr val="accent1"/>
+          </a:effectRef>
+          <a:fontRef idx="minor">
+            <a:schemeClr val="lt1"/>
+          </a:fontRef>
+        </p:style>
+        <p:txBody>
+          <a:bodyPr rtlCol="0" anchor="ctr"/>
+          <a:lstStyle/>
+          <a:p>
+            <a:pPr algn="ctr"/>
+            <a:endParaRPr lang="en-US" dirty="0"/>
+          </a:p>
+        </p:txBody>
+      </p:sp>
+      <p:sp>
+        <p:nvSpPr>
+          <p:cNvPr id="2" name="Title 1">
+            <a:extLst>
+              <a:ext uri="{FF2B5EF4-FFF2-40B4-BE49-F238E27FC236}">
+                <a16:creationId xmlns:a16="http://schemas.microsoft.com/office/drawing/2014/main" id="{C54912C1-0F92-C57B-D7FB-477F514FBEBA}"/>
+              </a:ext>
+            </a:extLst>
+          </p:cNvPr>
+          <p:cNvSpPr>
+            <a:spLocks noGrp="1"/>
+          </p:cNvSpPr>
+          <p:nvPr>
+            <p:ph type="title"/>
+          </p:nvPr>
+        </p:nvSpPr>
+        <p:spPr>
+          <a:xfrm>
+            <a:off x="619797" y="586855"/>
+            <a:ext cx="3172575" cy="3387497"/>
+          </a:xfrm>
+        </p:spPr>
+        <p:txBody>
+          <a:bodyPr vert="horz" lIns="91440" tIns="45720" rIns="91440" bIns="45720" rtlCol="0" anchor="b">
+            <a:normAutofit/>
+          </a:bodyPr>
+          <a:lstStyle/>
+          <a:p>
+            <a:pPr algn="r" defTabSz="914400">
+              <a:lnSpc>
+                <a:spcPct val="90000"/>
+              </a:lnSpc>
+            </a:pPr>
+            <a:r>
+              <a:rPr lang="en-US" sz="3500" kern="1200">
+                <a:solidFill>
+                  <a:srgbClr val="FFFFFF"/>
+                </a:solidFill>
+                <a:latin typeface="+mj-lt"/>
+                <a:ea typeface="+mj-ea"/>
+                <a:cs typeface="+mj-cs"/>
+              </a:rPr>
+              <a:t>Cohort Summary / Key Results</a:t>
+            </a:r>
+            <a:endParaRPr lang="en-US" sz="3500" b="1" i="1" kern="1200">
+              <a:solidFill>
+                <a:srgbClr val="FFFFFF"/>
+              </a:solidFill>
+              <a:latin typeface="+mj-lt"/>
+              <a:ea typeface="+mj-ea"/>
+              <a:cs typeface="+mj-cs"/>
+            </a:endParaRPr>
+          </a:p>
+        </p:txBody>
+      </p:sp>
+      <p:graphicFrame>
+        <p:nvGraphicFramePr>
+          <p:cNvPr id="29" name="Content Placeholder 9">
+            <a:extLst>
+              <a:ext uri="{FF2B5EF4-FFF2-40B4-BE49-F238E27FC236}">
+                <a16:creationId xmlns:a16="http://schemas.microsoft.com/office/drawing/2014/main" id="{8595C0BD-8DD4-2A43-3438-004A0AA2A8A4}"/>
+              </a:ext>
+            </a:extLst>
+          </p:cNvPr>
+          <p:cNvGraphicFramePr>
+            <a:graphicFrameLocks noGrp="1"/>
+          </p:cNvGraphicFramePr>
+          <p:nvPr>
+            <p:ph idx="1"/>
+          </p:nvPr>
+        </p:nvGraphicFramePr>
+        <p:xfrm>
+          <a:off x="4877368" y="649480"/>
+          <a:ext cx="3646835" cy="5546047"/>
+        </p:xfrm>
+        <a:graphic>
+          <a:graphicData uri="http://schemas.openxmlformats.org/drawingml/2006/diagram">
+            <dgm:relIds xmlns:dgm="http://schemas.openxmlformats.org/drawingml/2006/diagram" xmlns:r="http://schemas.openxmlformats.org/officeDocument/2006/relationships" r:dm="rId3" r:lo="rId4" r:qs="rId5" r:cs="rId6"/>
+          </a:graphicData>
+        </a:graphic>
+      </p:graphicFrame>
+    </p:spTree>
+    <p:extLst>
+      <p:ext uri="{BB962C8B-B14F-4D97-AF65-F5344CB8AC3E}">
+        <p14:creationId xmlns:p14="http://schemas.microsoft.com/office/powerpoint/2010/main" val="766807218"/>
+      </p:ext>
+    </p:extLst>
+  </p:cSld>
+  <p:clrMapOvr>
+    <a:masterClrMapping/>
+  </p:clrMapOvr>
+</p:sld>
+</file>
+
+<file path=ppt/slides/slide16.xml><?xml version="1.0" encoding="utf-8"?>
 <p:sld xmlns:a="http://schemas.openxmlformats.org/drawingml/2006/main" xmlns:r="http://schemas.openxmlformats.org/officeDocument/2006/relationships" xmlns:p="http://schemas.openxmlformats.org/presentationml/2006/main">
   <p:cSld>
     <p:spTree>
@@ -10763,11 +15355,11 @@
           <a:lstStyle/>
           <a:p>
             <a:r>
-              <a:rPr lang="en-US" sz="3600"/>
+              <a:rPr lang="en-US" sz="3600" dirty="0"/>
               <a:t>Limitations and Replication</a:t>
             </a:r>
             <a:br>
-              <a:rPr lang="en-US" sz="3600"/>
+              <a:rPr lang="en-US" sz="3600" dirty="0"/>
             </a:br>
             <a:endParaRPr lang="en-US" sz="3500" b="1" i="1" dirty="0">
               <a:latin typeface="Calibri" pitchFamily="34" charset="0"/>
@@ -10792,7 +15384,7 @@
             <p:ph idx="1"/>
             <p:extLst>
               <p:ext uri="{D42A27DB-BD31-4B8C-83A1-F6EECF244321}">
-                <p14:modId xmlns:p14="http://schemas.microsoft.com/office/powerpoint/2010/main" val="3021982316"/>
+                <p14:modId xmlns:p14="http://schemas.microsoft.com/office/powerpoint/2010/main" val="2613688762"/>
               </p:ext>
             </p:extLst>
           </p:nvPr>
@@ -11588,8 +16180,8 @@
               <a:buChar char="Ø"/>
             </a:pPr>
             <a:r>
-              <a:rPr lang="en-US" sz="1700" dirty="0"/>
-              <a:t>Engineer simple clinical and demographic features</a:t>
+              <a:rPr lang="en-US" sz="1800" dirty="0"/>
+              <a:t>Build structured demographic and admission features</a:t>
             </a:r>
           </a:p>
           <a:p>
@@ -11600,73 +16192,6 @@
             <a:r>
               <a:rPr lang="en-US" sz="1700" dirty="0"/>
               <a:t>Predict ICU length-of-stay category using machine learning</a:t>
-            </a:r>
-          </a:p>
-          <a:p>
-            <a:pPr marL="0" indent="0">
-              <a:buNone/>
-            </a:pPr>
-            <a:endParaRPr lang="en-US" sz="1700" dirty="0"/>
-          </a:p>
-          <a:p>
-            <a:pPr>
-              <a:buFont typeface="Wingdings" pitchFamily="2" charset="2"/>
-              <a:buChar char="v"/>
-            </a:pPr>
-            <a:r>
-              <a:rPr lang="en-US" sz="1700" b="1" dirty="0"/>
-              <a:t>Problem Statement</a:t>
-            </a:r>
-          </a:p>
-          <a:p>
-            <a:pPr marL="0" indent="0">
-              <a:buNone/>
-            </a:pPr>
-            <a:r>
-              <a:rPr lang="en-US" sz="1700" dirty="0"/>
-              <a:t>	Diabetes is a common chronic 	disease that can 	complicate hospitalization and ICU care. This tutorial 	demonstrates how structured EHR data can be used to 	classify ICU stay into:</a:t>
-            </a:r>
-          </a:p>
-          <a:p>
-            <a:pPr>
-              <a:buFont typeface="Wingdings" pitchFamily="2" charset="2"/>
-              <a:buChar char="Ø"/>
-            </a:pPr>
-            <a:r>
-              <a:rPr lang="en-US" sz="1700" b="1" dirty="0"/>
-              <a:t>Short stay</a:t>
-            </a:r>
-            <a:r>
-              <a:rPr lang="en-US" sz="1700" dirty="0"/>
-              <a:t>: less than 2 days</a:t>
-            </a:r>
-          </a:p>
-          <a:p>
-            <a:pPr>
-              <a:buFont typeface="Wingdings" pitchFamily="2" charset="2"/>
-              <a:buChar char="Ø"/>
-            </a:pPr>
-            <a:r>
-              <a:rPr lang="en-US" sz="1700" b="1" dirty="0"/>
-              <a:t>Medium stay</a:t>
-            </a:r>
-            <a:r>
-              <a:rPr lang="en-US" sz="1700" dirty="0"/>
-              <a:t>: 2 to 7 days</a:t>
-            </a:r>
-          </a:p>
-          <a:p>
-            <a:pPr>
-              <a:buFont typeface="Wingdings" pitchFamily="2" charset="2"/>
-              <a:buChar char="Ø"/>
-            </a:pPr>
-            <a:r>
-              <a:rPr lang="en-US" sz="1700" b="1" dirty="0"/>
-              <a:t>Long stay</a:t>
-            </a:r>
-            <a:r>
-              <a:rPr lang="en-US" sz="1700" dirty="0"/>
-              <a:t>: more than 7 days</a:t>
             </a:r>
           </a:p>
           <a:p>
@@ -11691,6 +16216,840 @@
 </file>
 
 <file path=ppt/slides/slide3.xml><?xml version="1.0" encoding="utf-8"?>
+<p:sld xmlns:a="http://schemas.openxmlformats.org/drawingml/2006/main" xmlns:r="http://schemas.openxmlformats.org/officeDocument/2006/relationships" xmlns:p="http://schemas.openxmlformats.org/presentationml/2006/main">
+  <p:cSld>
+    <p:bg>
+      <p:bgPr>
+        <a:solidFill>
+          <a:schemeClr val="bg1"/>
+        </a:solidFill>
+        <a:effectLst/>
+      </p:bgPr>
+    </p:bg>
+    <p:spTree>
+      <p:nvGrpSpPr>
+        <p:cNvPr id="1" name="">
+          <a:extLst>
+            <a:ext uri="{FF2B5EF4-FFF2-40B4-BE49-F238E27FC236}">
+              <a16:creationId xmlns:a16="http://schemas.microsoft.com/office/drawing/2014/main" id="{E89ADE7B-69D0-0CFA-023C-AE2A4F010DA2}"/>
+            </a:ext>
+          </a:extLst>
+        </p:cNvPr>
+        <p:cNvGrpSpPr/>
+        <p:nvPr/>
+      </p:nvGrpSpPr>
+      <p:grpSpPr>
+        <a:xfrm>
+          <a:off x="0" y="0"/>
+          <a:ext cx="0" cy="0"/>
+          <a:chOff x="0" y="0"/>
+          <a:chExt cx="0" cy="0"/>
+        </a:xfrm>
+      </p:grpSpPr>
+      <p:sp useBgFill="1">
+        <p:nvSpPr>
+          <p:cNvPr id="8" name="Rectangle 7">
+            <a:extLst>
+              <a:ext uri="{FF2B5EF4-FFF2-40B4-BE49-F238E27FC236}">
+                <a16:creationId xmlns:a16="http://schemas.microsoft.com/office/drawing/2014/main" id="{09588DA8-065E-4F6F-8EFD-43104AB2E0CF}"/>
+              </a:ext>
+              <a:ext uri="{C183D7F6-B498-43B3-948B-1728B52AA6E4}">
+                <adec:decorative xmlns:adec="http://schemas.microsoft.com/office/drawing/2017/decorative" val="1"/>
+              </a:ext>
+            </a:extLst>
+          </p:cNvPr>
+          <p:cNvSpPr>
+            <a:spLocks noGrp="1" noRot="1" noChangeAspect="1" noMove="1" noResize="1" noEditPoints="1" noAdjustHandles="1" noChangeArrowheads="1" noChangeShapeType="1" noTextEdit="1"/>
+          </p:cNvSpPr>
+          <p:nvPr>
+            <p:extLst>
+              <p:ext uri="{386F3935-93C4-4BCD-93E2-E3B085C9AB24}">
+                <p16:designElem xmlns:p16="http://schemas.microsoft.com/office/powerpoint/2015/main" val="1"/>
+              </p:ext>
+            </p:extLst>
+          </p:nvPr>
+        </p:nvSpPr>
+        <p:spPr>
+          <a:xfrm>
+            <a:off x="0" y="0"/>
+            <a:ext cx="9144000" cy="6858000"/>
+          </a:xfrm>
+          <a:prstGeom prst="rect">
+            <a:avLst/>
+          </a:prstGeom>
+          <a:ln w="12700" cap="flat" cmpd="sng" algn="ctr">
+            <a:noFill/>
+            <a:prstDash val="solid"/>
+            <a:miter lim="800000"/>
+          </a:ln>
+          <a:effectLst/>
+          <a:extLst>
+            <a:ext uri="{91240B29-F687-4F45-9708-019B960494DF}">
+              <a14:hiddenLine xmlns:a14="http://schemas.microsoft.com/office/drawing/2010/main" w="12700" cap="flat" cmpd="sng" algn="ctr">
+                <a:solidFill>
+                  <a:schemeClr val="accent1">
+                    <a:shade val="50000"/>
+                  </a:schemeClr>
+                </a:solidFill>
+                <a:prstDash val="solid"/>
+                <a:miter lim="800000"/>
+              </a14:hiddenLine>
+            </a:ext>
+          </a:extLst>
+        </p:spPr>
+        <p:style>
+          <a:lnRef idx="2">
+            <a:schemeClr val="accent1">
+              <a:shade val="50000"/>
+            </a:schemeClr>
+          </a:lnRef>
+          <a:fillRef idx="1">
+            <a:schemeClr val="accent1"/>
+          </a:fillRef>
+          <a:effectRef idx="0">
+            <a:schemeClr val="accent1"/>
+          </a:effectRef>
+          <a:fontRef idx="minor">
+            <a:schemeClr val="lt1"/>
+          </a:fontRef>
+        </p:style>
+        <p:txBody>
+          <a:bodyPr rtlCol="0" anchor="ctr"/>
+          <a:lstStyle/>
+          <a:p>
+            <a:pPr algn="ctr"/>
+            <a:endParaRPr lang="en-US"/>
+          </a:p>
+        </p:txBody>
+      </p:sp>
+      <p:sp useBgFill="1">
+        <p:nvSpPr>
+          <p:cNvPr id="10" name="Rectangle 9">
+            <a:extLst>
+              <a:ext uri="{FF2B5EF4-FFF2-40B4-BE49-F238E27FC236}">
+                <a16:creationId xmlns:a16="http://schemas.microsoft.com/office/drawing/2014/main" id="{C4285719-470E-454C-AF62-8323075F1F5B}"/>
+              </a:ext>
+              <a:ext uri="{C183D7F6-B498-43B3-948B-1728B52AA6E4}">
+                <adec:decorative xmlns:adec="http://schemas.microsoft.com/office/drawing/2017/decorative" val="1"/>
+              </a:ext>
+            </a:extLst>
+          </p:cNvPr>
+          <p:cNvSpPr>
+            <a:spLocks noGrp="1" noRot="1" noChangeAspect="1" noMove="1" noResize="1" noEditPoints="1" noAdjustHandles="1" noChangeArrowheads="1" noChangeShapeType="1" noTextEdit="1"/>
+          </p:cNvSpPr>
+          <p:nvPr>
+            <p:extLst>
+              <p:ext uri="{386F3935-93C4-4BCD-93E2-E3B085C9AB24}">
+                <p16:designElem xmlns:p16="http://schemas.microsoft.com/office/powerpoint/2015/main" val="1"/>
+              </p:ext>
+            </p:extLst>
+          </p:nvPr>
+        </p:nvSpPr>
+        <p:spPr>
+          <a:xfrm>
+            <a:off x="0" y="0"/>
+            <a:ext cx="9141714" cy="6858000"/>
+          </a:xfrm>
+          <a:prstGeom prst="rect">
+            <a:avLst/>
+          </a:prstGeom>
+          <a:ln w="12700" cap="flat" cmpd="sng" algn="ctr">
+            <a:noFill/>
+            <a:prstDash val="solid"/>
+            <a:miter lim="800000"/>
+          </a:ln>
+          <a:effectLst/>
+          <a:extLst>
+            <a:ext uri="{91240B29-F687-4F45-9708-019B960494DF}">
+              <a14:hiddenLine xmlns:a14="http://schemas.microsoft.com/office/drawing/2010/main" w="12700" cap="flat" cmpd="sng" algn="ctr">
+                <a:solidFill>
+                  <a:schemeClr val="accent1">
+                    <a:shade val="50000"/>
+                  </a:schemeClr>
+                </a:solidFill>
+                <a:prstDash val="solid"/>
+                <a:miter lim="800000"/>
+              </a14:hiddenLine>
+            </a:ext>
+          </a:extLst>
+        </p:spPr>
+        <p:style>
+          <a:lnRef idx="2">
+            <a:schemeClr val="accent1">
+              <a:shade val="50000"/>
+            </a:schemeClr>
+          </a:lnRef>
+          <a:fillRef idx="1">
+            <a:schemeClr val="accent1"/>
+          </a:fillRef>
+          <a:effectRef idx="0">
+            <a:schemeClr val="accent1"/>
+          </a:effectRef>
+          <a:fontRef idx="minor">
+            <a:schemeClr val="lt1"/>
+          </a:fontRef>
+        </p:style>
+        <p:txBody>
+          <a:bodyPr rtlCol="0" anchor="ctr"/>
+          <a:lstStyle/>
+          <a:p>
+            <a:pPr algn="ctr"/>
+            <a:endParaRPr lang="en-US"/>
+          </a:p>
+        </p:txBody>
+      </p:sp>
+      <p:sp>
+        <p:nvSpPr>
+          <p:cNvPr id="12" name="Rectangle 11">
+            <a:extLst>
+              <a:ext uri="{FF2B5EF4-FFF2-40B4-BE49-F238E27FC236}">
+                <a16:creationId xmlns:a16="http://schemas.microsoft.com/office/drawing/2014/main" id="{CD9FE4EF-C4D8-49A0-B2FF-81D8DB7D8A24}"/>
+              </a:ext>
+              <a:ext uri="{C183D7F6-B498-43B3-948B-1728B52AA6E4}">
+                <adec:decorative xmlns:adec="http://schemas.microsoft.com/office/drawing/2017/decorative" val="1"/>
+              </a:ext>
+            </a:extLst>
+          </p:cNvPr>
+          <p:cNvSpPr>
+            <a:spLocks noGrp="1" noRot="1" noChangeAspect="1" noMove="1" noResize="1" noEditPoints="1" noAdjustHandles="1" noChangeArrowheads="1" noChangeShapeType="1" noTextEdit="1"/>
+          </p:cNvSpPr>
+          <p:nvPr>
+            <p:extLst>
+              <p:ext uri="{386F3935-93C4-4BCD-93E2-E3B085C9AB24}">
+                <p16:designElem xmlns:p16="http://schemas.microsoft.com/office/powerpoint/2015/main" val="1"/>
+              </p:ext>
+            </p:extLst>
+          </p:nvPr>
+        </p:nvSpPr>
+        <p:spPr>
+          <a:xfrm rot="5400000" flipH="1">
+            <a:off x="-1914813" y="1914812"/>
+            <a:ext cx="6858000" cy="3028377"/>
+          </a:xfrm>
+          <a:prstGeom prst="rect">
+            <a:avLst/>
+          </a:prstGeom>
+          <a:gradFill>
+            <a:gsLst>
+              <a:gs pos="8000">
+                <a:srgbClr val="000000"/>
+              </a:gs>
+              <a:gs pos="100000">
+                <a:schemeClr val="accent1">
+                  <a:lumMod val="75000"/>
+                </a:schemeClr>
+              </a:gs>
+            </a:gsLst>
+            <a:lin ang="3000000" scaled="0"/>
+          </a:gradFill>
+          <a:ln>
+            <a:noFill/>
+          </a:ln>
+        </p:spPr>
+        <p:style>
+          <a:lnRef idx="2">
+            <a:schemeClr val="accent1">
+              <a:shade val="50000"/>
+            </a:schemeClr>
+          </a:lnRef>
+          <a:fillRef idx="1">
+            <a:schemeClr val="accent1"/>
+          </a:fillRef>
+          <a:effectRef idx="0">
+            <a:schemeClr val="accent1"/>
+          </a:effectRef>
+          <a:fontRef idx="minor">
+            <a:schemeClr val="lt1"/>
+          </a:fontRef>
+        </p:style>
+        <p:txBody>
+          <a:bodyPr rtlCol="0" anchor="ctr"/>
+          <a:lstStyle/>
+          <a:p>
+            <a:pPr algn="ctr"/>
+            <a:endParaRPr lang="en-US"/>
+          </a:p>
+        </p:txBody>
+      </p:sp>
+      <p:sp>
+        <p:nvSpPr>
+          <p:cNvPr id="14" name="Rectangle 13">
+            <a:extLst>
+              <a:ext uri="{FF2B5EF4-FFF2-40B4-BE49-F238E27FC236}">
+                <a16:creationId xmlns:a16="http://schemas.microsoft.com/office/drawing/2014/main" id="{4300840D-0A0B-4512-BACA-B439D5B9C57C}"/>
+              </a:ext>
+              <a:ext uri="{C183D7F6-B498-43B3-948B-1728B52AA6E4}">
+                <adec:decorative xmlns:adec="http://schemas.microsoft.com/office/drawing/2017/decorative" val="1"/>
+              </a:ext>
+            </a:extLst>
+          </p:cNvPr>
+          <p:cNvSpPr>
+            <a:spLocks noGrp="1" noRot="1" noChangeAspect="1" noMove="1" noResize="1" noEditPoints="1" noAdjustHandles="1" noChangeArrowheads="1" noChangeShapeType="1" noTextEdit="1"/>
+          </p:cNvSpPr>
+          <p:nvPr>
+            <p:extLst>
+              <p:ext uri="{386F3935-93C4-4BCD-93E2-E3B085C9AB24}">
+                <p16:designElem xmlns:p16="http://schemas.microsoft.com/office/powerpoint/2015/main" val="1"/>
+              </p:ext>
+            </p:extLst>
+          </p:nvPr>
+        </p:nvSpPr>
+        <p:spPr>
+          <a:xfrm rot="5400000" flipH="1">
+            <a:off x="-1914814" y="1924949"/>
+            <a:ext cx="6857999" cy="3028379"/>
+          </a:xfrm>
+          <a:prstGeom prst="rect">
+            <a:avLst/>
+          </a:prstGeom>
+          <a:gradFill>
+            <a:gsLst>
+              <a:gs pos="0">
+                <a:srgbClr val="000000">
+                  <a:alpha val="0"/>
+                </a:srgbClr>
+              </a:gs>
+              <a:gs pos="99000">
+                <a:schemeClr val="accent1">
+                  <a:alpha val="46000"/>
+                </a:schemeClr>
+              </a:gs>
+            </a:gsLst>
+            <a:lin ang="1800000" scaled="0"/>
+          </a:gradFill>
+          <a:ln>
+            <a:noFill/>
+          </a:ln>
+        </p:spPr>
+        <p:style>
+          <a:lnRef idx="2">
+            <a:schemeClr val="accent1">
+              <a:shade val="50000"/>
+            </a:schemeClr>
+          </a:lnRef>
+          <a:fillRef idx="1">
+            <a:schemeClr val="accent1"/>
+          </a:fillRef>
+          <a:effectRef idx="0">
+            <a:schemeClr val="accent1"/>
+          </a:effectRef>
+          <a:fontRef idx="minor">
+            <a:schemeClr val="lt1"/>
+          </a:fontRef>
+        </p:style>
+        <p:txBody>
+          <a:bodyPr rtlCol="0" anchor="ctr"/>
+          <a:lstStyle/>
+          <a:p>
+            <a:pPr algn="ctr"/>
+            <a:endParaRPr lang="en-US"/>
+          </a:p>
+        </p:txBody>
+      </p:sp>
+      <p:sp>
+        <p:nvSpPr>
+          <p:cNvPr id="16" name="Rectangle 15">
+            <a:extLst>
+              <a:ext uri="{FF2B5EF4-FFF2-40B4-BE49-F238E27FC236}">
+                <a16:creationId xmlns:a16="http://schemas.microsoft.com/office/drawing/2014/main" id="{D2B78728-A580-49A7-84F9-6EF6F583ADE0}"/>
+              </a:ext>
+              <a:ext uri="{C183D7F6-B498-43B3-948B-1728B52AA6E4}">
+                <adec:decorative xmlns:adec="http://schemas.microsoft.com/office/drawing/2017/decorative" val="1"/>
+              </a:ext>
+            </a:extLst>
+          </p:cNvPr>
+          <p:cNvSpPr>
+            <a:spLocks noGrp="1" noRot="1" noChangeAspect="1" noMove="1" noResize="1" noEditPoints="1" noAdjustHandles="1" noChangeArrowheads="1" noChangeShapeType="1" noTextEdit="1"/>
+          </p:cNvSpPr>
+          <p:nvPr>
+            <p:extLst>
+              <p:ext uri="{386F3935-93C4-4BCD-93E2-E3B085C9AB24}">
+                <p16:designElem xmlns:p16="http://schemas.microsoft.com/office/powerpoint/2015/main" val="1"/>
+              </p:ext>
+            </p:extLst>
+          </p:nvPr>
+        </p:nvSpPr>
+        <p:spPr>
+          <a:xfrm rot="5400000" flipH="1">
+            <a:off x="263195" y="4092815"/>
+            <a:ext cx="2501979" cy="3028381"/>
+          </a:xfrm>
+          <a:prstGeom prst="rect">
+            <a:avLst/>
+          </a:prstGeom>
+          <a:gradFill>
+            <a:gsLst>
+              <a:gs pos="2000">
+                <a:schemeClr val="accent1">
+                  <a:alpha val="29000"/>
+                </a:schemeClr>
+              </a:gs>
+              <a:gs pos="100000">
+                <a:srgbClr val="000000">
+                  <a:alpha val="30000"/>
+                </a:srgbClr>
+              </a:gs>
+            </a:gsLst>
+            <a:lin ang="7800000" scaled="0"/>
+          </a:gradFill>
+          <a:ln>
+            <a:noFill/>
+          </a:ln>
+        </p:spPr>
+        <p:style>
+          <a:lnRef idx="2">
+            <a:schemeClr val="accent1">
+              <a:shade val="50000"/>
+            </a:schemeClr>
+          </a:lnRef>
+          <a:fillRef idx="1">
+            <a:schemeClr val="accent1"/>
+          </a:fillRef>
+          <a:effectRef idx="0">
+            <a:schemeClr val="accent1"/>
+          </a:effectRef>
+          <a:fontRef idx="minor">
+            <a:schemeClr val="lt1"/>
+          </a:fontRef>
+        </p:style>
+        <p:txBody>
+          <a:bodyPr rtlCol="0" anchor="ctr"/>
+          <a:lstStyle/>
+          <a:p>
+            <a:pPr algn="ctr"/>
+            <a:endParaRPr lang="en-US" dirty="0"/>
+          </a:p>
+        </p:txBody>
+      </p:sp>
+      <p:sp>
+        <p:nvSpPr>
+          <p:cNvPr id="18" name="Freeform: Shape 17">
+            <a:extLst>
+              <a:ext uri="{FF2B5EF4-FFF2-40B4-BE49-F238E27FC236}">
+                <a16:creationId xmlns:a16="http://schemas.microsoft.com/office/drawing/2014/main" id="{38FAA1A1-D861-433F-88FA-1E9D6FD31D11}"/>
+              </a:ext>
+              <a:ext uri="{C183D7F6-B498-43B3-948B-1728B52AA6E4}">
+                <adec:decorative xmlns:adec="http://schemas.microsoft.com/office/drawing/2017/decorative" val="1"/>
+              </a:ext>
+            </a:extLst>
+          </p:cNvPr>
+          <p:cNvSpPr>
+            <a:spLocks noGrp="1" noRot="1" noChangeAspect="1" noMove="1" noResize="1" noEditPoints="1" noAdjustHandles="1" noChangeArrowheads="1" noChangeShapeType="1" noTextEdit="1"/>
+          </p:cNvSpPr>
+          <p:nvPr>
+            <p:extLst>
+              <p:ext uri="{386F3935-93C4-4BCD-93E2-E3B085C9AB24}">
+                <p16:designElem xmlns:p16="http://schemas.microsoft.com/office/powerpoint/2015/main" val="1"/>
+              </p:ext>
+            </p:extLst>
+          </p:nvPr>
+        </p:nvSpPr>
+        <p:spPr>
+          <a:xfrm rot="20635413">
+            <a:off x="-376302" y="969718"/>
+            <a:ext cx="2925267" cy="4178958"/>
+          </a:xfrm>
+          <a:custGeom>
+            <a:avLst/>
+            <a:gdLst>
+              <a:gd name="connsiteX0" fmla="*/ 2432225 w 3900357"/>
+              <a:gd name="connsiteY0" fmla="*/ 93939 h 4178958"/>
+              <a:gd name="connsiteX1" fmla="*/ 3900357 w 3900357"/>
+              <a:gd name="connsiteY1" fmla="*/ 2089479 h 4178958"/>
+              <a:gd name="connsiteX2" fmla="*/ 1810878 w 3900357"/>
+              <a:gd name="connsiteY2" fmla="*/ 4178958 h 4178958"/>
+              <a:gd name="connsiteX3" fmla="*/ 78249 w 3900357"/>
+              <a:gd name="connsiteY3" fmla="*/ 3257727 h 4178958"/>
+              <a:gd name="connsiteX4" fmla="*/ 0 w 3900357"/>
+              <a:gd name="connsiteY4" fmla="*/ 3128923 h 4178958"/>
+              <a:gd name="connsiteX5" fmla="*/ 831324 w 3900357"/>
+              <a:gd name="connsiteY5" fmla="*/ 244281 h 4178958"/>
+              <a:gd name="connsiteX6" fmla="*/ 997559 w 3900357"/>
+              <a:gd name="connsiteY6" fmla="*/ 164202 h 4178958"/>
+              <a:gd name="connsiteX7" fmla="*/ 1810878 w 3900357"/>
+              <a:gd name="connsiteY7" fmla="*/ 0 h 4178958"/>
+              <a:gd name="connsiteX8" fmla="*/ 2432225 w 3900357"/>
+              <a:gd name="connsiteY8" fmla="*/ 93939 h 4178958"/>
+            </a:gdLst>
+            <a:ahLst/>
+            <a:cxnLst>
+              <a:cxn ang="0">
+                <a:pos x="connsiteX0" y="connsiteY0"/>
+              </a:cxn>
+              <a:cxn ang="0">
+                <a:pos x="connsiteX1" y="connsiteY1"/>
+              </a:cxn>
+              <a:cxn ang="0">
+                <a:pos x="connsiteX2" y="connsiteY2"/>
+              </a:cxn>
+              <a:cxn ang="0">
+                <a:pos x="connsiteX3" y="connsiteY3"/>
+              </a:cxn>
+              <a:cxn ang="0">
+                <a:pos x="connsiteX4" y="connsiteY4"/>
+              </a:cxn>
+              <a:cxn ang="0">
+                <a:pos x="connsiteX5" y="connsiteY5"/>
+              </a:cxn>
+              <a:cxn ang="0">
+                <a:pos x="connsiteX6" y="connsiteY6"/>
+              </a:cxn>
+              <a:cxn ang="0">
+                <a:pos x="connsiteX7" y="connsiteY7"/>
+              </a:cxn>
+              <a:cxn ang="0">
+                <a:pos x="connsiteX8" y="connsiteY8"/>
+              </a:cxn>
+            </a:cxnLst>
+            <a:rect l="l" t="t" r="r" b="b"/>
+            <a:pathLst>
+              <a:path w="3900357" h="4178958">
+                <a:moveTo>
+                  <a:pt x="2432225" y="93939"/>
+                </a:moveTo>
+                <a:cubicBezTo>
+                  <a:pt x="3282786" y="358491"/>
+                  <a:pt x="3900357" y="1151865"/>
+                  <a:pt x="3900357" y="2089479"/>
+                </a:cubicBezTo>
+                <a:cubicBezTo>
+                  <a:pt x="3900357" y="3243466"/>
+                  <a:pt x="2964865" y="4178958"/>
+                  <a:pt x="1810878" y="4178958"/>
+                </a:cubicBezTo>
+                <a:cubicBezTo>
+                  <a:pt x="1089636" y="4178958"/>
+                  <a:pt x="453744" y="3813531"/>
+                  <a:pt x="78249" y="3257727"/>
+                </a:cubicBezTo>
+                <a:lnTo>
+                  <a:pt x="0" y="3128923"/>
+                </a:lnTo>
+                <a:lnTo>
+                  <a:pt x="831324" y="244281"/>
+                </a:lnTo>
+                <a:lnTo>
+                  <a:pt x="997559" y="164202"/>
+                </a:lnTo>
+                <a:cubicBezTo>
+                  <a:pt x="1247540" y="58468"/>
+                  <a:pt x="1522381" y="0"/>
+                  <a:pt x="1810878" y="0"/>
+                </a:cubicBezTo>
+                <a:cubicBezTo>
+                  <a:pt x="2027251" y="0"/>
+                  <a:pt x="2235942" y="32888"/>
+                  <a:pt x="2432225" y="93939"/>
+                </a:cubicBezTo>
+                <a:close/>
+              </a:path>
+            </a:pathLst>
+          </a:custGeom>
+          <a:gradFill>
+            <a:gsLst>
+              <a:gs pos="29000">
+                <a:srgbClr val="000000">
+                  <a:alpha val="0"/>
+                </a:srgbClr>
+              </a:gs>
+              <a:gs pos="100000">
+                <a:schemeClr val="accent1">
+                  <a:alpha val="43000"/>
+                </a:schemeClr>
+              </a:gs>
+            </a:gsLst>
+            <a:lin ang="1800000" scaled="0"/>
+          </a:gradFill>
+          <a:ln>
+            <a:noFill/>
+          </a:ln>
+        </p:spPr>
+        <p:style>
+          <a:lnRef idx="2">
+            <a:schemeClr val="accent1">
+              <a:shade val="50000"/>
+            </a:schemeClr>
+          </a:lnRef>
+          <a:fillRef idx="1">
+            <a:schemeClr val="accent1"/>
+          </a:fillRef>
+          <a:effectRef idx="0">
+            <a:schemeClr val="accent1"/>
+          </a:effectRef>
+          <a:fontRef idx="minor">
+            <a:schemeClr val="lt1"/>
+          </a:fontRef>
+        </p:style>
+        <p:txBody>
+          <a:bodyPr wrap="square" rtlCol="0" anchor="ctr">
+            <a:noAutofit/>
+          </a:bodyPr>
+          <a:lstStyle/>
+          <a:p>
+            <a:pPr algn="ctr"/>
+            <a:endParaRPr lang="en-US" dirty="0"/>
+          </a:p>
+        </p:txBody>
+      </p:sp>
+      <p:sp>
+        <p:nvSpPr>
+          <p:cNvPr id="20" name="Rectangle 19">
+            <a:extLst>
+              <a:ext uri="{FF2B5EF4-FFF2-40B4-BE49-F238E27FC236}">
+                <a16:creationId xmlns:a16="http://schemas.microsoft.com/office/drawing/2014/main" id="{8D71EDA1-87BF-4D5D-AB79-F346FD19278A}"/>
+              </a:ext>
+              <a:ext uri="{C183D7F6-B498-43B3-948B-1728B52AA6E4}">
+                <adec:decorative xmlns:adec="http://schemas.microsoft.com/office/drawing/2017/decorative" val="1"/>
+              </a:ext>
+            </a:extLst>
+          </p:cNvPr>
+          <p:cNvSpPr>
+            <a:spLocks noGrp="1" noRot="1" noChangeAspect="1" noMove="1" noResize="1" noEditPoints="1" noAdjustHandles="1" noChangeArrowheads="1" noChangeShapeType="1" noTextEdit="1"/>
+          </p:cNvSpPr>
+          <p:nvPr>
+            <p:extLst>
+              <p:ext uri="{386F3935-93C4-4BCD-93E2-E3B085C9AB24}">
+                <p16:designElem xmlns:p16="http://schemas.microsoft.com/office/powerpoint/2015/main" val="1"/>
+              </p:ext>
+            </p:extLst>
+          </p:nvPr>
+        </p:nvSpPr>
+        <p:spPr>
+          <a:xfrm rot="5400000" flipH="1">
+            <a:off x="-1914820" y="1904672"/>
+            <a:ext cx="6858003" cy="3028376"/>
+          </a:xfrm>
+          <a:prstGeom prst="rect">
+            <a:avLst/>
+          </a:prstGeom>
+          <a:gradFill>
+            <a:gsLst>
+              <a:gs pos="0">
+                <a:srgbClr val="000000">
+                  <a:alpha val="0"/>
+                </a:srgbClr>
+              </a:gs>
+              <a:gs pos="99000">
+                <a:schemeClr val="accent1">
+                  <a:lumMod val="60000"/>
+                  <a:lumOff val="40000"/>
+                  <a:alpha val="11000"/>
+                </a:schemeClr>
+              </a:gs>
+            </a:gsLst>
+            <a:lin ang="7200000" scaled="0"/>
+          </a:gradFill>
+          <a:ln>
+            <a:noFill/>
+          </a:ln>
+        </p:spPr>
+        <p:style>
+          <a:lnRef idx="2">
+            <a:schemeClr val="accent1">
+              <a:shade val="50000"/>
+            </a:schemeClr>
+          </a:lnRef>
+          <a:fillRef idx="1">
+            <a:schemeClr val="accent1"/>
+          </a:fillRef>
+          <a:effectRef idx="0">
+            <a:schemeClr val="accent1"/>
+          </a:effectRef>
+          <a:fontRef idx="minor">
+            <a:schemeClr val="lt1"/>
+          </a:fontRef>
+        </p:style>
+        <p:txBody>
+          <a:bodyPr rtlCol="0" anchor="ctr"/>
+          <a:lstStyle/>
+          <a:p>
+            <a:pPr algn="ctr"/>
+            <a:endParaRPr lang="en-US"/>
+          </a:p>
+        </p:txBody>
+      </p:sp>
+      <p:sp>
+        <p:nvSpPr>
+          <p:cNvPr id="2" name="Title 1">
+            <a:extLst>
+              <a:ext uri="{FF2B5EF4-FFF2-40B4-BE49-F238E27FC236}">
+                <a16:creationId xmlns:a16="http://schemas.microsoft.com/office/drawing/2014/main" id="{ED92FF1F-5E52-D298-7893-8EDA6B15E0CE}"/>
+              </a:ext>
+            </a:extLst>
+          </p:cNvPr>
+          <p:cNvSpPr>
+            <a:spLocks noGrp="1"/>
+          </p:cNvSpPr>
+          <p:nvPr>
+            <p:ph type="title"/>
+          </p:nvPr>
+        </p:nvSpPr>
+        <p:spPr>
+          <a:xfrm>
+            <a:off x="350041" y="586855"/>
+            <a:ext cx="2401025" cy="3387497"/>
+          </a:xfrm>
+        </p:spPr>
+        <p:txBody>
+          <a:bodyPr anchor="b">
+            <a:normAutofit/>
+          </a:bodyPr>
+          <a:lstStyle/>
+          <a:p>
+            <a:pPr algn="r"/>
+            <a:r>
+              <a:rPr lang="en-US" sz="3500" b="1" dirty="0">
+                <a:solidFill>
+                  <a:srgbClr val="FFFFFF"/>
+                </a:solidFill>
+              </a:rPr>
+              <a:t>Problem Statement</a:t>
+            </a:r>
+            <a:br>
+              <a:rPr lang="en-US" sz="3500" b="1" dirty="0">
+                <a:solidFill>
+                  <a:srgbClr val="FFFFFF"/>
+                </a:solidFill>
+              </a:rPr>
+            </a:br>
+            <a:endParaRPr lang="en-US" sz="3500" b="1" i="1" dirty="0">
+              <a:solidFill>
+                <a:srgbClr val="FFFFFF"/>
+              </a:solidFill>
+              <a:latin typeface="Calibri" pitchFamily="34" charset="0"/>
+              <a:cs typeface="Calibri" pitchFamily="34" charset="-120"/>
+            </a:endParaRPr>
+          </a:p>
+        </p:txBody>
+      </p:sp>
+      <p:sp>
+        <p:nvSpPr>
+          <p:cNvPr id="3" name="Content Placeholder 2">
+            <a:extLst>
+              <a:ext uri="{FF2B5EF4-FFF2-40B4-BE49-F238E27FC236}">
+                <a16:creationId xmlns:a16="http://schemas.microsoft.com/office/drawing/2014/main" id="{16F99824-F2EF-4BD0-2309-0B851136E222}"/>
+              </a:ext>
+            </a:extLst>
+          </p:cNvPr>
+          <p:cNvSpPr>
+            <a:spLocks noGrp="1"/>
+          </p:cNvSpPr>
+          <p:nvPr>
+            <p:ph idx="1"/>
+          </p:nvPr>
+        </p:nvSpPr>
+        <p:spPr>
+          <a:xfrm>
+            <a:off x="3607694" y="649480"/>
+            <a:ext cx="5536306" cy="5546047"/>
+          </a:xfrm>
+        </p:spPr>
+        <p:txBody>
+          <a:bodyPr anchor="ctr">
+            <a:normAutofit/>
+          </a:bodyPr>
+          <a:lstStyle/>
+          <a:p>
+            <a:pPr marL="0" indent="0">
+              <a:buNone/>
+            </a:pPr>
+            <a:r>
+              <a:rPr lang="en-US" sz="1800" dirty="0"/>
+              <a:t>Diabetes can complicate hospitalization and ICU care</a:t>
+            </a:r>
+          </a:p>
+          <a:p>
+            <a:pPr marL="0" indent="0">
+              <a:buNone/>
+            </a:pPr>
+            <a:r>
+              <a:rPr lang="en-US" sz="1800" dirty="0"/>
+              <a:t>Goal: classify ICU stay as short, medium, or long</a:t>
+            </a:r>
+            <a:endParaRPr lang="en-US" sz="1700" dirty="0"/>
+          </a:p>
+          <a:p>
+            <a:pPr marL="0" indent="0">
+              <a:buNone/>
+            </a:pPr>
+            <a:r>
+              <a:rPr lang="en-US" sz="1700" dirty="0"/>
+              <a:t>	</a:t>
+            </a:r>
+          </a:p>
+          <a:p>
+            <a:pPr marL="0" indent="0">
+              <a:buNone/>
+            </a:pPr>
+            <a:r>
+              <a:rPr lang="en-US" sz="1700" dirty="0"/>
+              <a:t>classify ICU stay into:</a:t>
+            </a:r>
+          </a:p>
+          <a:p>
+            <a:pPr>
+              <a:buFont typeface="Wingdings" pitchFamily="2" charset="2"/>
+              <a:buChar char="Ø"/>
+            </a:pPr>
+            <a:r>
+              <a:rPr lang="en-US" sz="1700" b="1" dirty="0"/>
+              <a:t>Short stay</a:t>
+            </a:r>
+            <a:r>
+              <a:rPr lang="en-US" sz="1700" dirty="0"/>
+              <a:t>: less than 2 days</a:t>
+            </a:r>
+          </a:p>
+          <a:p>
+            <a:pPr>
+              <a:buFont typeface="Wingdings" pitchFamily="2" charset="2"/>
+              <a:buChar char="Ø"/>
+            </a:pPr>
+            <a:r>
+              <a:rPr lang="en-US" sz="1700" b="1" dirty="0"/>
+              <a:t>Medium stay</a:t>
+            </a:r>
+            <a:r>
+              <a:rPr lang="en-US" sz="1700" dirty="0"/>
+              <a:t>: 2 to 7 days</a:t>
+            </a:r>
+          </a:p>
+          <a:p>
+            <a:pPr>
+              <a:buFont typeface="Wingdings" pitchFamily="2" charset="2"/>
+              <a:buChar char="Ø"/>
+            </a:pPr>
+            <a:r>
+              <a:rPr lang="en-US" sz="1700" b="1" dirty="0"/>
+              <a:t>Long stay</a:t>
+            </a:r>
+            <a:r>
+              <a:rPr lang="en-US" sz="1700" dirty="0"/>
+              <a:t>: more than 7 days</a:t>
+            </a:r>
+          </a:p>
+          <a:p>
+            <a:pPr marL="0" indent="0">
+              <a:buNone/>
+            </a:pPr>
+            <a:endParaRPr lang="en-US" sz="1700" dirty="0"/>
+          </a:p>
+        </p:txBody>
+      </p:sp>
+    </p:spTree>
+    <p:extLst>
+      <p:ext uri="{BB962C8B-B14F-4D97-AF65-F5344CB8AC3E}">
+        <p14:creationId xmlns:p14="http://schemas.microsoft.com/office/powerpoint/2010/main" val="15686145"/>
+      </p:ext>
+    </p:extLst>
+  </p:cSld>
+  <p:clrMapOvr>
+    <a:masterClrMapping/>
+  </p:clrMapOvr>
+</p:sld>
+</file>
+
+<file path=ppt/slides/slide4.xml><?xml version="1.0" encoding="utf-8"?>
 <p:sld xmlns:a="http://schemas.openxmlformats.org/drawingml/2006/main" xmlns:r="http://schemas.openxmlformats.org/officeDocument/2006/relationships" xmlns:p="http://schemas.openxmlformats.org/presentationml/2006/main">
   <p:cSld>
     <p:bg>
@@ -12423,10 +17782,7 @@
               <a:buFont typeface="Wingdings" pitchFamily="2" charset="2"/>
               <a:buChar char="v"/>
             </a:pPr>
-            <a:r>
-              <a:rPr lang="en-US" sz="1700" dirty="0"/>
-              <a:t>	Patients hospitalized due to diabetes</a:t>
-            </a:r>
+            <a:endParaRPr lang="en-US" sz="1700" dirty="0"/>
           </a:p>
           <a:p>
             <a:pPr fontAlgn="ctr">
@@ -12458,38 +17814,6 @@
               <a:t>Predicting length of stay can help improve staffing, bed planning, and resource use</a:t>
             </a:r>
             <a:endParaRPr lang="en-US" dirty="0"/>
-          </a:p>
-          <a:p>
-            <a:pPr>
-              <a:spcBef>
-                <a:spcPct val="0"/>
-              </a:spcBef>
-              <a:spcAft>
-                <a:spcPts val="600"/>
-              </a:spcAft>
-              <a:buFont typeface="Wingdings" pitchFamily="2" charset="2"/>
-              <a:buChar char="Ø"/>
-            </a:pPr>
-            <a:r>
-              <a:rPr lang="en-US" sz="1700" dirty="0"/>
-              <a:t>Diabetic ICU care is often more complex</a:t>
-            </a:r>
-          </a:p>
-          <a:p>
-            <a:pPr>
-              <a:spcBef>
-                <a:spcPct val="0"/>
-              </a:spcBef>
-              <a:spcAft>
-                <a:spcPts val="600"/>
-              </a:spcAft>
-              <a:buFont typeface="Wingdings" pitchFamily="2" charset="2"/>
-              <a:buChar char="Ø"/>
-            </a:pPr>
-            <a:r>
-              <a:rPr lang="en-US" sz="1700" dirty="0"/>
-              <a:t>Predicting LOS can help with planning and resource allocation</a:t>
-            </a:r>
           </a:p>
           <a:p>
             <a:pPr marL="0" indent="0">
@@ -12513,7 +17837,7 @@
 </p:sld>
 </file>
 
-<file path=ppt/slides/slide4.xml><?xml version="1.0" encoding="utf-8"?>
+<file path=ppt/slides/slide5.xml><?xml version="1.0" encoding="utf-8"?>
 <p:sld xmlns:a="http://schemas.openxmlformats.org/drawingml/2006/main" xmlns:r="http://schemas.openxmlformats.org/officeDocument/2006/relationships" xmlns:p="http://schemas.openxmlformats.org/presentationml/2006/main">
   <p:cSld>
     <p:bg>
@@ -13235,19 +18559,6 @@
           </a:bodyPr>
           <a:lstStyle/>
           <a:p>
-            <a:pPr>
-              <a:lnSpc>
-                <a:spcPct val="90000"/>
-              </a:lnSpc>
-              <a:buFont typeface="Wingdings" pitchFamily="2" charset="2"/>
-              <a:buChar char="v"/>
-            </a:pPr>
-            <a:r>
-              <a:rPr lang="en-US" sz="1800" dirty="0"/>
-              <a:t>Identify diabetic ICU patients</a:t>
-            </a:r>
-          </a:p>
-          <a:p>
             <a:pPr marL="0" indent="0">
               <a:lnSpc>
                 <a:spcPct val="90000"/>
@@ -13266,7 +18577,20 @@
             </a:pPr>
             <a:r>
               <a:rPr lang="en-US" sz="1800" dirty="0"/>
-              <a:t>Build structured features</a:t>
+              <a:t>Identify diabetic ICU patients</a:t>
+            </a:r>
+          </a:p>
+          <a:p>
+            <a:pPr lvl="1">
+              <a:lnSpc>
+                <a:spcPct val="90000"/>
+              </a:lnSpc>
+              <a:buFont typeface="Wingdings" pitchFamily="2" charset="2"/>
+              <a:buChar char="Ø"/>
+            </a:pPr>
+            <a:r>
+              <a:rPr lang="en-US" sz="1800" dirty="0"/>
+              <a:t>Build structured features from MIMIC-III</a:t>
             </a:r>
           </a:p>
           <a:p>
@@ -13337,7 +18661,7 @@
 </p:sld>
 </file>
 
-<file path=ppt/slides/slide5.xml><?xml version="1.0" encoding="utf-8"?>
+<file path=ppt/slides/slide6.xml><?xml version="1.0" encoding="utf-8"?>
 <p:sld xmlns:a="http://schemas.openxmlformats.org/drawingml/2006/main" xmlns:r="http://schemas.openxmlformats.org/officeDocument/2006/relationships" xmlns:p="http://schemas.openxmlformats.org/presentationml/2006/main">
   <p:cSld>
     <p:bg>
@@ -14051,7 +19375,7 @@
         <p:spPr>
           <a:xfrm>
             <a:off x="3607694" y="649480"/>
-            <a:ext cx="4916510" cy="5546047"/>
+            <a:ext cx="5534020" cy="5546047"/>
           </a:xfrm>
         </p:spPr>
         <p:txBody>
@@ -14109,12 +19433,10 @@
             <a:pPr marL="457200" lvl="1" indent="0">
               <a:buNone/>
             </a:pPr>
-            <a:endParaRPr lang="en-US" sz="1700" dirty="0"/>
-          </a:p>
-          <a:p>
-            <a:pPr marL="457200" lvl="1" indent="0">
-              <a:buNone/>
-            </a:pPr>
+            <a:r>
+              <a:rPr lang="en-US" sz="1800" dirty="0"/>
+              <a:t>This is framed as a multiclass classification task.</a:t>
+            </a:r>
             <a:endParaRPr lang="en-US" sz="1700" dirty="0"/>
           </a:p>
           <a:p>
@@ -14145,7 +19467,7 @@
 </p:sld>
 </file>
 
-<file path=ppt/slides/slide6.xml><?xml version="1.0" encoding="utf-8"?>
+<file path=ppt/slides/slide7.xml><?xml version="1.0" encoding="utf-8"?>
 <p:sld xmlns:a="http://schemas.openxmlformats.org/drawingml/2006/main" xmlns:r="http://schemas.openxmlformats.org/officeDocument/2006/relationships" xmlns:p="http://schemas.openxmlformats.org/presentationml/2006/main">
   <p:cSld>
     <p:bg>
@@ -14686,6 +20008,29 @@
             </a:r>
           </a:p>
           <a:p>
+            <a:pPr lvl="1">
+              <a:lnSpc>
+                <a:spcPct val="90000"/>
+              </a:lnSpc>
+              <a:buFont typeface="Wingdings" pitchFamily="2" charset="2"/>
+              <a:buChar char="Ø"/>
+            </a:pPr>
+            <a:r>
+              <a:rPr lang="en-US" sz="1500" dirty="0"/>
+              <a:t>Use PATIENTS, ADMISSIONS, ICUSTAYS, and DIAGNOSES_ICD tables</a:t>
+            </a:r>
+          </a:p>
+          <a:p>
+            <a:pPr lvl="1">
+              <a:lnSpc>
+                <a:spcPct val="90000"/>
+              </a:lnSpc>
+              <a:buFont typeface="Wingdings" pitchFamily="2" charset="2"/>
+              <a:buChar char="Ø"/>
+            </a:pPr>
+            <a:endParaRPr lang="en-US" sz="1500" dirty="0"/>
+          </a:p>
+          <a:p>
             <a:pPr marL="457200" lvl="1" indent="0">
               <a:lnSpc>
                 <a:spcPct val="90000"/>
@@ -14693,28 +20038,6 @@
               <a:buNone/>
             </a:pPr>
             <a:endParaRPr lang="en-US" sz="1500" dirty="0"/>
-          </a:p>
-          <a:p>
-            <a:pPr marL="457200" lvl="1" indent="0">
-              <a:lnSpc>
-                <a:spcPct val="90000"/>
-              </a:lnSpc>
-              <a:buNone/>
-            </a:pPr>
-            <a:endParaRPr lang="en-US" sz="1500" dirty="0"/>
-          </a:p>
-          <a:p>
-            <a:pPr marL="457200" lvl="1" indent="0">
-              <a:lnSpc>
-                <a:spcPct val="90000"/>
-              </a:lnSpc>
-              <a:buNone/>
-            </a:pPr>
-            <a:endParaRPr lang="en-US" sz="1500" b="1" i="1" dirty="0">
-              <a:latin typeface="Calibri" pitchFamily="34" charset="0"/>
-              <a:ea typeface="+mj-ea"/>
-              <a:cs typeface="Calibri" pitchFamily="34" charset="-120"/>
-            </a:endParaRPr>
           </a:p>
         </p:txBody>
       </p:sp>
@@ -15026,7 +20349,7 @@
 </p:sld>
 </file>
 
-<file path=ppt/slides/slide7.xml><?xml version="1.0" encoding="utf-8"?>
+<file path=ppt/slides/slide8.xml><?xml version="1.0" encoding="utf-8"?>
 <p:sld xmlns:a="http://schemas.openxmlformats.org/drawingml/2006/main" xmlns:r="http://schemas.openxmlformats.org/officeDocument/2006/relationships" xmlns:p="http://schemas.openxmlformats.org/presentationml/2006/main">
   <p:cSld>
     <p:bg>
@@ -15399,6 +20722,10 @@
               </a:lnSpc>
               <a:buNone/>
             </a:pPr>
+            <a:r>
+              <a:rPr lang="en-US" sz="1400" dirty="0"/>
+              <a:t>Diagnosis count is used as a simple proxy for clinical complexity.</a:t>
+            </a:r>
             <a:endParaRPr lang="en-US" sz="1300" dirty="0"/>
           </a:p>
           <a:p>
@@ -15498,7 +20825,7 @@
 </p:sld>
 </file>
 
-<file path=ppt/slides/slide8.xml><?xml version="1.0" encoding="utf-8"?>
+<file path=ppt/slides/slide9.xml><?xml version="1.0" encoding="utf-8"?>
 <p:sld xmlns:a="http://schemas.openxmlformats.org/drawingml/2006/main" xmlns:r="http://schemas.openxmlformats.org/officeDocument/2006/relationships" xmlns:p="http://schemas.openxmlformats.org/presentationml/2006/main">
   <p:cSld>
     <p:bg>
@@ -15642,6 +20969,18 @@
               <a:buNone/>
             </a:pPr>
             <a:endParaRPr lang="en-US" sz="1700" dirty="0"/>
+          </a:p>
+          <a:p>
+            <a:pPr marL="457200" lvl="1" indent="0">
+              <a:lnSpc>
+                <a:spcPct val="90000"/>
+              </a:lnSpc>
+              <a:buNone/>
+            </a:pPr>
+            <a:r>
+              <a:rPr lang="en-US" sz="1800" dirty="0"/>
+              <a:t>This converts LOS prediction into a three-class classification problem</a:t>
+            </a:r>
           </a:p>
           <a:p>
             <a:pPr marL="457200" lvl="1" indent="0">
@@ -15880,507 +21219,6 @@
     <p:extLst>
       <p:ext uri="{BB962C8B-B14F-4D97-AF65-F5344CB8AC3E}">
         <p14:creationId xmlns:p14="http://schemas.microsoft.com/office/powerpoint/2010/main" val="1629861388"/>
-      </p:ext>
-    </p:extLst>
-  </p:cSld>
-  <p:clrMapOvr>
-    <a:masterClrMapping/>
-  </p:clrMapOvr>
-</p:sld>
-</file>
-
-<file path=ppt/slides/slide9.xml><?xml version="1.0" encoding="utf-8"?>
-<p:sld xmlns:a="http://schemas.openxmlformats.org/drawingml/2006/main" xmlns:r="http://schemas.openxmlformats.org/officeDocument/2006/relationships" xmlns:p="http://schemas.openxmlformats.org/presentationml/2006/main">
-  <p:cSld>
-    <p:bg>
-      <p:bgPr>
-        <a:solidFill>
-          <a:schemeClr val="bg1"/>
-        </a:solidFill>
-        <a:effectLst/>
-      </p:bgPr>
-    </p:bg>
-    <p:spTree>
-      <p:nvGrpSpPr>
-        <p:cNvPr id="1" name="">
-          <a:extLst>
-            <a:ext uri="{FF2B5EF4-FFF2-40B4-BE49-F238E27FC236}">
-              <a16:creationId xmlns:a16="http://schemas.microsoft.com/office/drawing/2014/main" id="{9EC46298-3485-8E1C-BBE2-E410CD0C9317}"/>
-            </a:ext>
-          </a:extLst>
-        </p:cNvPr>
-        <p:cNvGrpSpPr/>
-        <p:nvPr/>
-      </p:nvGrpSpPr>
-      <p:grpSpPr>
-        <a:xfrm>
-          <a:off x="0" y="0"/>
-          <a:ext cx="0" cy="0"/>
-          <a:chOff x="0" y="0"/>
-          <a:chExt cx="0" cy="0"/>
-        </a:xfrm>
-      </p:grpSpPr>
-      <p:sp useBgFill="1">
-        <p:nvSpPr>
-          <p:cNvPr id="22" name="Rectangle 21">
-            <a:extLst>
-              <a:ext uri="{FF2B5EF4-FFF2-40B4-BE49-F238E27FC236}">
-                <a16:creationId xmlns:a16="http://schemas.microsoft.com/office/drawing/2014/main" id="{AFB5468C-305B-445A-A53B-93DB583365AE}"/>
-              </a:ext>
-              <a:ext uri="{C183D7F6-B498-43B3-948B-1728B52AA6E4}">
-                <adec:decorative xmlns:adec="http://schemas.microsoft.com/office/drawing/2017/decorative" val="1"/>
-              </a:ext>
-            </a:extLst>
-          </p:cNvPr>
-          <p:cNvSpPr>
-            <a:spLocks noGrp="1" noRot="1" noChangeAspect="1" noMove="1" noResize="1" noEditPoints="1" noAdjustHandles="1" noChangeArrowheads="1" noChangeShapeType="1" noTextEdit="1"/>
-          </p:cNvSpPr>
-          <p:nvPr>
-            <p:extLst>
-              <p:ext uri="{386F3935-93C4-4BCD-93E2-E3B085C9AB24}">
-                <p16:designElem xmlns:p16="http://schemas.microsoft.com/office/powerpoint/2015/main" val="1"/>
-              </p:ext>
-            </p:extLst>
-          </p:nvPr>
-        </p:nvSpPr>
-        <p:spPr>
-          <a:xfrm>
-            <a:off x="0" y="0"/>
-            <a:ext cx="9144000" cy="6858000"/>
-          </a:xfrm>
-          <a:prstGeom prst="rect">
-            <a:avLst/>
-          </a:prstGeom>
-          <a:ln>
-            <a:noFill/>
-          </a:ln>
-        </p:spPr>
-        <p:style>
-          <a:lnRef idx="2">
-            <a:schemeClr val="accent1">
-              <a:shade val="50000"/>
-            </a:schemeClr>
-          </a:lnRef>
-          <a:fillRef idx="1">
-            <a:schemeClr val="accent1"/>
-          </a:fillRef>
-          <a:effectRef idx="0">
-            <a:schemeClr val="accent1"/>
-          </a:effectRef>
-          <a:fontRef idx="minor">
-            <a:schemeClr val="lt1"/>
-          </a:fontRef>
-        </p:style>
-        <p:txBody>
-          <a:bodyPr rtlCol="0" anchor="ctr"/>
-          <a:lstStyle/>
-          <a:p>
-            <a:pPr algn="ctr"/>
-            <a:endParaRPr lang="en-US"/>
-          </a:p>
-        </p:txBody>
-      </p:sp>
-      <p:sp>
-        <p:nvSpPr>
-          <p:cNvPr id="2" name="Title 1">
-            <a:extLst>
-              <a:ext uri="{FF2B5EF4-FFF2-40B4-BE49-F238E27FC236}">
-                <a16:creationId xmlns:a16="http://schemas.microsoft.com/office/drawing/2014/main" id="{805D17D9-EA96-39EF-6199-41B3FD08CF48}"/>
-              </a:ext>
-            </a:extLst>
-          </p:cNvPr>
-          <p:cNvSpPr>
-            <a:spLocks noGrp="1"/>
-          </p:cNvSpPr>
-          <p:nvPr>
-            <p:ph type="title"/>
-          </p:nvPr>
-        </p:nvSpPr>
-        <p:spPr>
-          <a:xfrm>
-            <a:off x="399861" y="436360"/>
-            <a:ext cx="2553277" cy="2244634"/>
-          </a:xfrm>
-        </p:spPr>
-        <p:txBody>
-          <a:bodyPr>
-            <a:normAutofit/>
-          </a:bodyPr>
-          <a:lstStyle/>
-          <a:p>
-            <a:r>
-              <a:rPr lang="en-US" sz="2400"/>
-              <a:t>Machine Learning Pipeline</a:t>
-            </a:r>
-            <a:endParaRPr lang="en-US" sz="2400" b="1" i="1">
-              <a:latin typeface="Calibri" pitchFamily="34" charset="0"/>
-              <a:cs typeface="Calibri" pitchFamily="34" charset="-120"/>
-            </a:endParaRPr>
-          </a:p>
-        </p:txBody>
-      </p:sp>
-      <p:pic>
-        <p:nvPicPr>
-          <p:cNvPr id="4" name="Picture 3">
-            <a:extLst>
-              <a:ext uri="{FF2B5EF4-FFF2-40B4-BE49-F238E27FC236}">
-                <a16:creationId xmlns:a16="http://schemas.microsoft.com/office/drawing/2014/main" id="{C2FB34E6-735B-9274-3804-4BC8F100B8DA}"/>
-              </a:ext>
-            </a:extLst>
-          </p:cNvPr>
-          <p:cNvPicPr>
-            <a:picLocks noChangeAspect="1"/>
-          </p:cNvPicPr>
-          <p:nvPr/>
-        </p:nvPicPr>
-        <p:blipFill>
-          <a:blip r:embed="rId3"/>
-          <a:srcRect r="19554" b="-4"/>
-          <a:stretch>
-            <a:fillRect/>
-          </a:stretch>
-        </p:blipFill>
-        <p:spPr>
-          <a:xfrm>
-            <a:off x="20" y="3184849"/>
-            <a:ext cx="3238097" cy="3673153"/>
-          </a:xfrm>
-          <a:prstGeom prst="rect">
-            <a:avLst/>
-          </a:prstGeom>
-        </p:spPr>
-      </p:pic>
-      <p:sp>
-        <p:nvSpPr>
-          <p:cNvPr id="23" name="Rectangle 22">
-            <a:extLst>
-              <a:ext uri="{FF2B5EF4-FFF2-40B4-BE49-F238E27FC236}">
-                <a16:creationId xmlns:a16="http://schemas.microsoft.com/office/drawing/2014/main" id="{A2CDF4EC-7B47-436E-927B-575404258573}"/>
-              </a:ext>
-              <a:ext uri="{C183D7F6-B498-43B3-948B-1728B52AA6E4}">
-                <adec:decorative xmlns:adec="http://schemas.microsoft.com/office/drawing/2017/decorative" val="1"/>
-              </a:ext>
-            </a:extLst>
-          </p:cNvPr>
-          <p:cNvSpPr>
-            <a:spLocks noGrp="1" noRot="1" noChangeAspect="1" noMove="1" noResize="1" noEditPoints="1" noAdjustHandles="1" noChangeArrowheads="1" noChangeShapeType="1" noTextEdit="1"/>
-          </p:cNvSpPr>
-          <p:nvPr>
-            <p:extLst>
-              <p:ext uri="{386F3935-93C4-4BCD-93E2-E3B085C9AB24}">
-                <p16:designElem xmlns:p16="http://schemas.microsoft.com/office/powerpoint/2015/main" val="1"/>
-              </p:ext>
-            </p:extLst>
-          </p:nvPr>
-        </p:nvSpPr>
-        <p:spPr>
-          <a:xfrm>
-            <a:off x="0" y="3152841"/>
-            <a:ext cx="3238117" cy="64008"/>
-          </a:xfrm>
-          <a:prstGeom prst="rect">
-            <a:avLst/>
-          </a:prstGeom>
-          <a:solidFill>
-            <a:schemeClr val="tx2">
-              <a:lumMod val="50000"/>
-            </a:schemeClr>
-          </a:solidFill>
-          <a:ln>
-            <a:noFill/>
-          </a:ln>
-        </p:spPr>
-        <p:style>
-          <a:lnRef idx="2">
-            <a:schemeClr val="accent1">
-              <a:shade val="50000"/>
-            </a:schemeClr>
-          </a:lnRef>
-          <a:fillRef idx="1">
-            <a:schemeClr val="accent1"/>
-          </a:fillRef>
-          <a:effectRef idx="0">
-            <a:schemeClr val="accent1"/>
-          </a:effectRef>
-          <a:fontRef idx="minor">
-            <a:schemeClr val="lt1"/>
-          </a:fontRef>
-        </p:style>
-        <p:txBody>
-          <a:bodyPr rtlCol="0" anchor="ctr"/>
-          <a:lstStyle/>
-          <a:p>
-            <a:pPr algn="ctr"/>
-            <a:endParaRPr lang="en-US"/>
-          </a:p>
-        </p:txBody>
-      </p:sp>
-      <p:sp>
-        <p:nvSpPr>
-          <p:cNvPr id="24" name="Rectangle 23">
-            <a:extLst>
-              <a:ext uri="{FF2B5EF4-FFF2-40B4-BE49-F238E27FC236}">
-                <a16:creationId xmlns:a16="http://schemas.microsoft.com/office/drawing/2014/main" id="{EF273D9E-5BEA-459A-918F-AF5ACA258471}"/>
-              </a:ext>
-              <a:ext uri="{C183D7F6-B498-43B3-948B-1728B52AA6E4}">
-                <adec:decorative xmlns:adec="http://schemas.microsoft.com/office/drawing/2017/decorative" val="1"/>
-              </a:ext>
-            </a:extLst>
-          </p:cNvPr>
-          <p:cNvSpPr>
-            <a:spLocks noGrp="1" noRot="1" noChangeAspect="1" noMove="1" noResize="1" noEditPoints="1" noAdjustHandles="1" noChangeArrowheads="1" noChangeShapeType="1" noTextEdit="1"/>
-          </p:cNvSpPr>
-          <p:nvPr>
-            <p:extLst>
-              <p:ext uri="{386F3935-93C4-4BCD-93E2-E3B085C9AB24}">
-                <p16:designElem xmlns:p16="http://schemas.microsoft.com/office/powerpoint/2015/main" val="1"/>
-              </p:ext>
-            </p:extLst>
-          </p:nvPr>
-        </p:nvSpPr>
-        <p:spPr>
-          <a:xfrm rot="5400000">
-            <a:off x="-166880" y="3404998"/>
-            <a:ext cx="6858002" cy="48006"/>
-          </a:xfrm>
-          <a:prstGeom prst="rect">
-            <a:avLst/>
-          </a:prstGeom>
-          <a:solidFill>
-            <a:schemeClr val="tx2">
-              <a:lumMod val="50000"/>
-            </a:schemeClr>
-          </a:solidFill>
-          <a:ln>
-            <a:noFill/>
-          </a:ln>
-        </p:spPr>
-        <p:style>
-          <a:lnRef idx="2">
-            <a:schemeClr val="accent1">
-              <a:shade val="50000"/>
-            </a:schemeClr>
-          </a:lnRef>
-          <a:fillRef idx="1">
-            <a:schemeClr val="accent1"/>
-          </a:fillRef>
-          <a:effectRef idx="0">
-            <a:schemeClr val="accent1"/>
-          </a:effectRef>
-          <a:fontRef idx="minor">
-            <a:schemeClr val="lt1"/>
-          </a:fontRef>
-        </p:style>
-        <p:txBody>
-          <a:bodyPr rtlCol="0" anchor="ctr"/>
-          <a:lstStyle/>
-          <a:p>
-            <a:pPr algn="ctr"/>
-            <a:endParaRPr lang="en-US"/>
-          </a:p>
-        </p:txBody>
-      </p:sp>
-      <p:sp>
-        <p:nvSpPr>
-          <p:cNvPr id="3" name="Content Placeholder 2">
-            <a:extLst>
-              <a:ext uri="{FF2B5EF4-FFF2-40B4-BE49-F238E27FC236}">
-                <a16:creationId xmlns:a16="http://schemas.microsoft.com/office/drawing/2014/main" id="{FBC8D7AB-F566-626A-A0BF-35906D89C700}"/>
-              </a:ext>
-            </a:extLst>
-          </p:cNvPr>
-          <p:cNvSpPr>
-            <a:spLocks noGrp="1"/>
-          </p:cNvSpPr>
-          <p:nvPr>
-            <p:ph idx="1"/>
-          </p:nvPr>
-        </p:nvSpPr>
-        <p:spPr>
-          <a:xfrm>
-            <a:off x="3281458" y="397565"/>
-            <a:ext cx="3233072" cy="5715383"/>
-          </a:xfrm>
-        </p:spPr>
-        <p:txBody>
-          <a:bodyPr anchor="ctr">
-            <a:normAutofit/>
-          </a:bodyPr>
-          <a:lstStyle/>
-          <a:p>
-            <a:pPr lvl="1">
-              <a:buFont typeface="Wingdings" pitchFamily="2" charset="2"/>
-              <a:buChar char="Ø"/>
-            </a:pPr>
-            <a:r>
-              <a:rPr lang="en-US" sz="1700" dirty="0"/>
-              <a:t>Train/test split Imputation</a:t>
-            </a:r>
-          </a:p>
-          <a:p>
-            <a:pPr lvl="1">
-              <a:buFont typeface="Wingdings" pitchFamily="2" charset="2"/>
-              <a:buChar char="Ø"/>
-            </a:pPr>
-            <a:r>
-              <a:rPr lang="en-US" sz="1700" dirty="0"/>
-              <a:t>One-hot encoding</a:t>
-            </a:r>
-          </a:p>
-          <a:p>
-            <a:pPr lvl="1">
-              <a:buFont typeface="Wingdings" pitchFamily="2" charset="2"/>
-              <a:buChar char="Ø"/>
-            </a:pPr>
-            <a:r>
-              <a:rPr lang="en-US" sz="1700" dirty="0"/>
-              <a:t>Scaling</a:t>
-            </a:r>
-          </a:p>
-          <a:p>
-            <a:pPr lvl="1">
-              <a:buFont typeface="Wingdings" pitchFamily="2" charset="2"/>
-              <a:buChar char="Ø"/>
-            </a:pPr>
-            <a:r>
-              <a:rPr lang="en-US" sz="1700" dirty="0"/>
-              <a:t>Logistic Regression</a:t>
-            </a:r>
-          </a:p>
-          <a:p>
-            <a:pPr lvl="1">
-              <a:buFont typeface="Wingdings" pitchFamily="2" charset="2"/>
-              <a:buChar char="Ø"/>
-            </a:pPr>
-            <a:r>
-              <a:rPr lang="en-US" sz="1700" dirty="0"/>
-              <a:t>Random Forest</a:t>
-            </a:r>
-          </a:p>
-          <a:p>
-            <a:pPr marL="457200" lvl="1" indent="0">
-              <a:buNone/>
-            </a:pPr>
-            <a:endParaRPr lang="en-US" sz="1700" dirty="0"/>
-          </a:p>
-          <a:p>
-            <a:pPr marL="457200" lvl="1" indent="0">
-              <a:buNone/>
-            </a:pPr>
-            <a:endParaRPr lang="en-US" sz="1700" dirty="0"/>
-          </a:p>
-          <a:p>
-            <a:pPr marL="457200" lvl="1" indent="0">
-              <a:buNone/>
-            </a:pPr>
-            <a:endParaRPr lang="en-US" sz="1700" b="1" i="1" dirty="0">
-              <a:latin typeface="Calibri" pitchFamily="34" charset="0"/>
-              <a:ea typeface="+mj-ea"/>
-              <a:cs typeface="Calibri" pitchFamily="34" charset="-120"/>
-            </a:endParaRPr>
-          </a:p>
-        </p:txBody>
-      </p:sp>
-      <p:pic>
-        <p:nvPicPr>
-          <p:cNvPr id="5" name="Picture 4" descr="A stethoscope in white background">
-            <a:extLst>
-              <a:ext uri="{FF2B5EF4-FFF2-40B4-BE49-F238E27FC236}">
-                <a16:creationId xmlns:a16="http://schemas.microsoft.com/office/drawing/2014/main" id="{DA0D1A30-37FC-2ABE-8C95-D46AB258A39C}"/>
-              </a:ext>
-            </a:extLst>
-          </p:cNvPr>
-          <p:cNvPicPr>
-            <a:picLocks noChangeAspect="1"/>
-          </p:cNvPicPr>
-          <p:nvPr/>
-        </p:nvPicPr>
-        <p:blipFill>
-          <a:blip r:embed="rId4"/>
-          <a:srcRect l="54101" r="21195" b="-2"/>
-          <a:stretch>
-            <a:fillRect/>
-          </a:stretch>
-        </p:blipFill>
-        <p:spPr>
-          <a:xfrm>
-            <a:off x="6605878" y="-6"/>
-            <a:ext cx="2538122" cy="6858002"/>
-          </a:xfrm>
-          <a:prstGeom prst="rect">
-            <a:avLst/>
-          </a:prstGeom>
-        </p:spPr>
-      </p:pic>
-      <p:sp>
-        <p:nvSpPr>
-          <p:cNvPr id="25" name="Rectangle 24">
-            <a:extLst>
-              <a:ext uri="{FF2B5EF4-FFF2-40B4-BE49-F238E27FC236}">
-                <a16:creationId xmlns:a16="http://schemas.microsoft.com/office/drawing/2014/main" id="{5DFA5EF5-56B1-49EE-B0BB-69B6399FAD9F}"/>
-              </a:ext>
-              <a:ext uri="{C183D7F6-B498-43B3-948B-1728B52AA6E4}">
-                <adec:decorative xmlns:adec="http://schemas.microsoft.com/office/drawing/2017/decorative" val="1"/>
-              </a:ext>
-            </a:extLst>
-          </p:cNvPr>
-          <p:cNvSpPr>
-            <a:spLocks noGrp="1" noRot="1" noChangeAspect="1" noMove="1" noResize="1" noEditPoints="1" noAdjustHandles="1" noChangeArrowheads="1" noChangeShapeType="1" noTextEdit="1"/>
-          </p:cNvSpPr>
-          <p:nvPr>
-            <p:extLst>
-              <p:ext uri="{386F3935-93C4-4BCD-93E2-E3B085C9AB24}">
-                <p16:designElem xmlns:p16="http://schemas.microsoft.com/office/powerpoint/2015/main" val="1"/>
-              </p:ext>
-            </p:extLst>
-          </p:nvPr>
-        </p:nvSpPr>
-        <p:spPr>
-          <a:xfrm rot="5400000">
-            <a:off x="3157540" y="3404996"/>
-            <a:ext cx="6858002" cy="48006"/>
-          </a:xfrm>
-          <a:prstGeom prst="rect">
-            <a:avLst/>
-          </a:prstGeom>
-          <a:solidFill>
-            <a:schemeClr val="tx2">
-              <a:lumMod val="50000"/>
-            </a:schemeClr>
-          </a:solidFill>
-          <a:ln>
-            <a:noFill/>
-          </a:ln>
-        </p:spPr>
-        <p:style>
-          <a:lnRef idx="2">
-            <a:schemeClr val="accent1">
-              <a:shade val="50000"/>
-            </a:schemeClr>
-          </a:lnRef>
-          <a:fillRef idx="1">
-            <a:schemeClr val="accent1"/>
-          </a:fillRef>
-          <a:effectRef idx="0">
-            <a:schemeClr val="accent1"/>
-          </a:effectRef>
-          <a:fontRef idx="minor">
-            <a:schemeClr val="lt1"/>
-          </a:fontRef>
-        </p:style>
-        <p:txBody>
-          <a:bodyPr rtlCol="0" anchor="ctr"/>
-          <a:lstStyle/>
-          <a:p>
-            <a:pPr algn="ctr"/>
-            <a:endParaRPr lang="en-US"/>
-          </a:p>
-        </p:txBody>
-      </p:sp>
-    </p:spTree>
-    <p:extLst>
-      <p:ext uri="{BB962C8B-B14F-4D97-AF65-F5344CB8AC3E}">
-        <p14:creationId xmlns:p14="http://schemas.microsoft.com/office/powerpoint/2010/main" val="2628676830"/>
       </p:ext>
     </p:extLst>
   </p:cSld>
